--- a/output/LINK. kennismaking.pptx
+++ b/output/LINK. kennismaking.pptx
@@ -2519,7 +2519,7 @@
                 <a:ea typeface="Arial" pitchFamily="34" charset="-122"/>
                 <a:cs typeface="Arial" pitchFamily="34" charset="-120"/>
               </a:rPr>
-              <a:t>Wie we zijn, hoe we werken, wat de standaardpilot inhoudt en hoe we daarna samen opschalen.</a:t>
+              <a:t>Wie we zijn, hoe we werken, wat de pilot van twaalf weken inhoudt en hoe we daarna verder bouwen.</a:t>
             </a:r>
             <a:endParaRPr lang="en-US" sz="1400" dirty="0"/>
           </a:p>
@@ -3768,7 +3768,7 @@
                 <a:ea typeface="Arial" pitchFamily="34" charset="-122"/>
                 <a:cs typeface="Arial" pitchFamily="34" charset="-120"/>
               </a:rPr>
-              <a:t>LINK. is een acquisitiebureau voor B2B-bedrijven. Wij bellen en mailen dagelijks namens onze klanten en leveren gekwalificeerde afspraken op. Geen lijstjes met namen, maar gesprekken in jullie agenda met een beslisser die weet waarom hij aan tafel zit.</a:t>
+              <a:t>LINK. is een acquisitiebureau voor B2B-bedrijven. Wij bellen dagelijks namens onze klanten en leveren gekwalificeerde afspraken op. Geen lijstjes met namen, maar gesprekken in jullie agenda met een beslisser die weet waarom hij aan tafel zit.</a:t>
             </a:r>
             <a:endParaRPr lang="en-US" sz="1350" dirty="0"/>
           </a:p>
@@ -4316,7 +4316,7 @@
                 <a:ea typeface="Arial" pitchFamily="34" charset="-122"/>
                 <a:cs typeface="Arial" pitchFamily="34" charset="-120"/>
               </a:rPr>
-              <a:t>Eén team voor bellen, mailen en </a:t>
+              <a:t>Eén team dat belt, opvolgt en </a:t>
             </a:r>
             <a:pPr algn="l" indent="0" marL="0">
               <a:lnSpc>
@@ -4333,7 +4333,7 @@
                 <a:ea typeface="Georgia" pitchFamily="34" charset="-122"/>
                 <a:cs typeface="Georgia" pitchFamily="34" charset="-120"/>
               </a:rPr>
-              <a:t>opvolgen</a:t>
+              <a:t>afspraken levert</a:t>
             </a:r>
             <a:pPr algn="l" indent="0" marL="0">
               <a:lnSpc>
@@ -4612,7 +4612,7 @@
                 <a:ea typeface="Arial" pitchFamily="34" charset="-122"/>
                 <a:cs typeface="Arial" pitchFamily="34" charset="-120"/>
               </a:rPr>
-              <a:t>Cold e-mail</a:t>
+              <a:t>Data en doelgroep</a:t>
             </a:r>
             <a:endParaRPr lang="en-US" sz="1350" dirty="0"/>
           </a:p>
@@ -4654,7 +4654,7 @@
                 <a:ea typeface="Arial" pitchFamily="34" charset="-122"/>
                 <a:cs typeface="Arial" pitchFamily="34" charset="-120"/>
               </a:rPr>
-              <a:t>Korte, persoonlijke mails als opening of als opvolging van een gesprek. Geen massamails, één relevant bericht per bedrijf, in jullie tone of voice.</a:t>
+              <a:t>Wij bouwen de bellijst op basis van jullie ideale klant: branche, grootte, regio en functie. Bestaande relaties en uitsluitingen halen we er vooraf uit.</a:t>
             </a:r>
             <a:endParaRPr lang="en-US" sz="950" dirty="0"/>
           </a:p>
@@ -4764,7 +4764,7 @@
                 <a:ea typeface="Arial" pitchFamily="34" charset="-122"/>
                 <a:cs typeface="Arial" pitchFamily="34" charset="-120"/>
               </a:rPr>
-              <a:t>Data en doelgroep</a:t>
+              <a:t>Opvolging</a:t>
             </a:r>
             <a:endParaRPr lang="en-US" sz="1350" dirty="0"/>
           </a:p>
@@ -4806,7 +4806,7 @@
                 <a:ea typeface="Arial" pitchFamily="34" charset="-122"/>
                 <a:cs typeface="Arial" pitchFamily="34" charset="-120"/>
               </a:rPr>
-              <a:t>Wij bouwen de bellijst op basis van jullie ideale klantprofiel: branche, grootte, regio en functie. Bestaande relaties en uitsluitingen halen we er vooraf uit.</a:t>
+              <a:t>Terugbelafspraken komen echt terug in de bellijst en warme leads dragen we direct aan jullie over, met de reden en de context erbij.</a:t>
             </a:r>
             <a:endParaRPr lang="en-US" sz="950" dirty="0"/>
           </a:p>
@@ -5403,7 +5403,7 @@
                 <a:ea typeface="Arial" pitchFamily="34" charset="-122"/>
                 <a:cs typeface="Arial" pitchFamily="34" charset="-120"/>
               </a:rPr>
-              <a:t>Samen scherp: doelgroep, beslisser, propositie, bezwaren en wat een goede afspraak voor jullie is. Wij schrijven het belscript en de mails, jullie keuren goed.</a:t>
+              <a:t>Samen scherp: doelgroep, beslisser, propositie, bezwaren en wat een goede afspraak voor jullie is. Wij schrijven het belscript, jullie keuren goed.</a:t>
             </a:r>
             <a:endParaRPr lang="en-US" sz="900" dirty="0"/>
           </a:p>
@@ -7389,7 +7389,7 @@
                 <a:ea typeface="Arial" pitchFamily="34" charset="-122"/>
                 <a:cs typeface="Arial" pitchFamily="34" charset="-120"/>
               </a:rPr>
-              <a:t>Propositie en strategie</a:t>
+              <a:t>Kick-off en belscript</a:t>
             </a:r>
             <a:endParaRPr lang="en-US" sz="1150" dirty="0"/>
           </a:p>
@@ -7431,7 +7431,7 @@
                 <a:ea typeface="Arial" pitchFamily="34" charset="-122"/>
                 <a:cs typeface="Arial" pitchFamily="34" charset="-120"/>
               </a:rPr>
-              <a:t>Samen scherp in de kick-off: doelgroep, beslisser, boodschap en bezwaren. Wij schrijven het belscript en de mails, jullie keuren goed.</a:t>
+              <a:t>Samen scherp wat we gaan vertellen en bij wie. Wij schrijven het belscript, jullie keuren het goed.</a:t>
             </a:r>
             <a:endParaRPr lang="en-US" sz="875" dirty="0"/>
           </a:p>
@@ -7603,7 +7603,7 @@
                 <a:ea typeface="Arial" pitchFamily="34" charset="-122"/>
                 <a:cs typeface="Arial" pitchFamily="34" charset="-120"/>
               </a:rPr>
-              <a:t>Wij bouwen de bellijst op jullie ideale klantprofiel: branche, grootte, regio en functie. Bestaande relaties en uitsluitingen halen we er vooraf uit.</a:t>
+              <a:t>Wij bouwen de bellijst op jullie ideale klant: branche, grootte, regio en functie. Bestaande relaties en uitsluitingen gaan er vooraf uit.</a:t>
             </a:r>
             <a:endParaRPr lang="en-US" sz="875" dirty="0"/>
           </a:p>
@@ -7733,7 +7733,7 @@
                 <a:ea typeface="Arial" pitchFamily="34" charset="-122"/>
                 <a:cs typeface="Arial" pitchFamily="34" charset="-120"/>
               </a:rPr>
-              <a:t>Twaalf weken uitvoering</a:t>
+              <a:t>Twaalf weken bellen</a:t>
             </a:r>
             <a:endParaRPr lang="en-US" sz="1150" dirty="0"/>
           </a:p>
@@ -7775,7 +7775,7 @@
                 <a:ea typeface="Arial" pitchFamily="34" charset="-122"/>
                 <a:cs typeface="Arial" pitchFamily="34" charset="-120"/>
               </a:rPr>
-              <a:t>Dagelijks bellen met een regionaal nummer op jullie naam, korte persoonlijke mails als opening en opvolging. Rapportage elke week, evaluatie om de week.</a:t>
+              <a:t>Elke werkdag bellen met een regionaal nummer op jullie naam. Elke week een rapportage en om de week zitten we samen om bij te sturen.</a:t>
             </a:r>
             <a:endParaRPr lang="en-US" sz="875" dirty="0"/>
           </a:p>
@@ -7947,7 +7947,7 @@
                 <a:ea typeface="Arial" pitchFamily="34" charset="-122"/>
                 <a:cs typeface="Arial" pitchFamily="34" charset="-120"/>
               </a:rPr>
-              <a:t>Fit: het bedrijf past bij de criteria uit de kick-off. Interesse: er is een concrete aanleiding of vraag. Beslisser: de afspraak staat met wie over de aankoop gaat.</a:t>
+              <a:t>Elke afspraak voldoet aan drie eisen: het bedrijf past, de interesse is echt en de juiste persoon zit aan tafel.</a:t>
             </a:r>
             <a:endParaRPr lang="en-US" sz="875" dirty="0"/>
           </a:p>
@@ -8174,7 +8174,7 @@
                 <a:ea typeface="Arial" pitchFamily="34" charset="-122"/>
                 <a:cs typeface="Arial" pitchFamily="34" charset="-120"/>
               </a:rPr>
-              <a:t>Propositie, belscript en mails</a:t>
+              <a:t>Kick-off en belscript</a:t>
             </a:r>
             <a:endParaRPr lang="en-US" sz="900" dirty="0"/>
           </a:p>
@@ -8237,7 +8237,7 @@
                 <a:ea typeface="Arial" pitchFamily="34" charset="-122"/>
                 <a:cs typeface="Arial" pitchFamily="34" charset="-120"/>
               </a:rPr>
-              <a:t>Bellijst op jullie ideale klantprofiel</a:t>
+              <a:t>Bellijst op jullie ideale klant</a:t>
             </a:r>
             <a:endParaRPr lang="en-US" sz="900" dirty="0"/>
           </a:p>
@@ -8363,7 +8363,7 @@
                 <a:ea typeface="Arial" pitchFamily="34" charset="-122"/>
                 <a:cs typeface="Arial" pitchFamily="34" charset="-120"/>
               </a:rPr>
-              <a:t>Twaalf weken dagelijks bellen en mailen</a:t>
+              <a:t>Twaalf weken elke werkdag bellen</a:t>
             </a:r>
             <a:endParaRPr lang="en-US" sz="900" dirty="0"/>
           </a:p>
@@ -8733,7 +8733,7 @@
                 <a:ea typeface="Arial" pitchFamily="34" charset="-122"/>
                 <a:cs typeface="Arial" pitchFamily="34" charset="-120"/>
               </a:rPr>
-              <a:t>Van tien afspraken naar een </a:t>
+              <a:t>Daarna weet je precies wat </a:t>
             </a:r>
             <a:pPr algn="l" indent="0" marL="0">
               <a:lnSpc>
@@ -8750,7 +8750,7 @@
                 <a:ea typeface="Georgia" pitchFamily="34" charset="-122"/>
                 <a:cs typeface="Georgia" pitchFamily="34" charset="-120"/>
               </a:rPr>
-              <a:t>groeiplan</a:t>
+              <a:t>werkt</a:t>
             </a:r>
             <a:pPr algn="l" indent="0" marL="0">
               <a:lnSpc>
@@ -8934,7 +8934,7 @@
                 <a:ea typeface="Arial" pitchFamily="34" charset="-122"/>
                 <a:cs typeface="Arial" pitchFamily="34" charset="-120"/>
               </a:rPr>
-              <a:t>Na twaalf weken weten we wat tien gekwalificeerde afspraken opleveren: hoe de gesprekken gingen, hoeveel offertes eruit kwamen en hoeveel klanten jullie eruit halen.</a:t>
+              <a:t>Na de pilot weet je wat tien afspraken opleveren: hoe de gesprekken gingen, wat eruit kwam en hoeveel klanten je eruit haalt.</a:t>
             </a:r>
             <a:endParaRPr lang="en-US" sz="1050" dirty="0"/>
           </a:p>
@@ -9101,7 +9101,7 @@
                 <a:ea typeface="Arial" pitchFamily="34" charset="-122"/>
                 <a:cs typeface="Arial" pitchFamily="34" charset="-120"/>
               </a:rPr>
-              <a:t>Daarmee staat jullie eigen rekensom: zoveel afspraken zijn er nodig voor één nieuwe klant. Geen aannames, maar cijfers uit jullie eigen markt.</a:t>
+              <a:t>Dan weet je ook hoeveel afspraken je nodig hebt voor één nieuwe klant. Niet geschat, maar gewoon geteld.</a:t>
             </a:r>
             <a:endParaRPr lang="en-US" sz="1050" dirty="0"/>
           </a:p>
@@ -9243,7 +9243,7 @@
                 <a:ea typeface="Arial" pitchFamily="34" charset="-122"/>
                 <a:cs typeface="Arial" pitchFamily="34" charset="-120"/>
               </a:rPr>
-              <a:t>Jullie kiezen hoeveel nieuwe klanten je per vier weken wilt. Wij rekenen dat terug naar afspraken en gesprekken en richten de samenwerking daarop in.</a:t>
+              <a:t>Jij zegt hoeveel nieuwe klanten je per vier weken wilt. Wij rekenen terug hoeveel afspraken daarvoor nodig zijn en richten de samenwerking daarop in.</a:t>
             </a:r>
             <a:endParaRPr lang="en-US" sz="1050" dirty="0"/>
           </a:p>
@@ -9302,7 +9302,7 @@
                 <a:ea typeface="Arial" pitchFamily="34" charset="-122"/>
                 <a:cs typeface="Arial" pitchFamily="34" charset="-120"/>
               </a:rPr>
-              <a:t>Zo groeit het vervolg niet op gevoel, maar op jullie eigen cijfers.</a:t>
+              <a:t>Zo beslis je over het vervolg met je eigen cijfers in de hand.</a:t>
             </a:r>
             <a:endParaRPr lang="en-US" sz="1200" dirty="0"/>
           </a:p>
@@ -9985,7 +9985,7 @@
                 <a:ea typeface="Arial" pitchFamily="34" charset="-122"/>
                 <a:cs typeface="Arial" pitchFamily="34" charset="-120"/>
               </a:rPr>
-              <a:t>Goedkeuring script en mails</a:t>
+              <a:t>Goedkeuring belscript</a:t>
             </a:r>
             <a:endParaRPr lang="en-US" sz="1450" dirty="0"/>
           </a:p>

--- a/output/LINK. kennismaking.pptx
+++ b/output/LINK. kennismaking.pptx
@@ -3768,7 +3768,7 @@
                 <a:ea typeface="Arial" pitchFamily="34" charset="-122"/>
                 <a:cs typeface="Arial" pitchFamily="34" charset="-120"/>
               </a:rPr>
-              <a:t>LINK. is een acquisitiebureau voor B2B-bedrijven. Wij bellen dagelijks namens onze klanten en leveren gekwalificeerde afspraken op. Geen lijstjes met namen, maar gesprekken in jullie agenda met een beslisser die weet waarom hij aan tafel zit.</a:t>
+              <a:t>LINK. is de vaste acquisitiepartner van B2B-bedrijven. Wij bellen dagelijks namens onze klanten en leveren gekwalificeerde afspraken op. Geen lijstjes met namen, maar gesprekken in jullie agenda met een beslisser die weet waarom hij aan tafel zit.</a:t>
             </a:r>
             <a:endParaRPr lang="en-US" sz="1350" dirty="0"/>
           </a:p>
@@ -3788,7 +3788,7 @@
                 <a:ea typeface="Arial" pitchFamily="34" charset="-122"/>
                 <a:cs typeface="Arial" pitchFamily="34" charset="-120"/>
               </a:rPr>
-              <a:t>We werken voor bedrijven met een sterke B2B-propositie in uiteenlopende branches: van koffie voor kantoren en videoproductie tot CO2-certificaten, cybersecurity en interieurbeplanting.</a:t>
+              <a:t>We werken voor bedrijven met een sterke B2B-propositie in uiteenlopende branches: van koffie voor kantoren en videoproductie tot CO2-certificaten, cybersecurity en interieurbeplanting. Geen bureau op afstand, maar een partner die elke week met je schakelt.</a:t>
             </a:r>
             <a:endParaRPr lang="en-US" sz="1350" dirty="0"/>
           </a:p>

--- a/output/LINK. kennismaking.pptx
+++ b/output/LINK. kennismaking.pptx
@@ -3788,7 +3788,7 @@
                 <a:ea typeface="Arial" pitchFamily="34" charset="-122"/>
                 <a:cs typeface="Arial" pitchFamily="34" charset="-120"/>
               </a:rPr>
-              <a:t>We werken voor bedrijven met een sterke B2B-propositie in uiteenlopende branches: van koffie voor kantoren en videoproductie tot CO2-certificaten, cybersecurity en interieurbeplanting. Geen bureau op afstand, maar een partner die elke week met je schakelt.</a:t>
+              <a:t>We werken voor bedrijven met een sterke B2B-propositie, in uiteenlopende branches. Geen bureau op afstand, maar een partner die elke week met je schakelt.</a:t>
             </a:r>
             <a:endParaRPr lang="en-US" sz="1350" dirty="0"/>
           </a:p>

--- a/output/LINK. kennismaking.pptx
+++ b/output/LINK. kennismaking.pptx
@@ -7775,7 +7775,7 @@
                 <a:ea typeface="Arial" pitchFamily="34" charset="-122"/>
                 <a:cs typeface="Arial" pitchFamily="34" charset="-120"/>
               </a:rPr>
-              <a:t>Elke werkdag bellen met een regionaal nummer op jullie naam. Elke week een rapportage en om de week zitten we samen om bij te sturen.</a:t>
+              <a:t>Elke werkdag bellen met een regionaal nummer op jullie naam. Elke week een rapportage, om de week evaluatie. Gaat het makkelijker of juist moeizamer, dan zitten we eerder om tafel en schakelen we direct.</a:t>
             </a:r>
             <a:endParaRPr lang="en-US" sz="875" dirty="0"/>
           </a:p>

--- a/output/LINK. kennismaking.pptx
+++ b/output/LINK. kennismaking.pptx
@@ -15,9 +15,10 @@
     <p:sldId id="263" r:id="rId9"/>
     <p:sldId id="264" r:id="rId10"/>
     <p:sldId id="265" r:id="rId11"/>
+    <p:sldId id="266" r:id="rId12"/>
   </p:sldIdLst>
   <p:notesMasterIdLst>
-    <p:notesMasterId r:id="rId12"/>
+    <p:notesMasterId r:id="rId13"/>
   </p:notesMasterIdLst>
   <p:sldSz cx="12191970" cy="6858000"/>
   <p:notesSz cx="6858000" cy="12191970"/>
@@ -623,6 +624,94 @@
             <a:fld id="{F7021451-1387-4CA6-816F-3879F97B5CBC}" type="slidenum">
               <a:rPr lang="en-US"/>
               <a:t>10</a:t>
+            </a:fld>
+            <a:endParaRPr lang="en-US"/>
+          </a:p>
+        </p:txBody>
+      </p:sp>
+    </p:spTree>
+    <p:extLst>
+      <p:ext uri="{BB962C8B-B14F-4D97-AF65-F5344CB8AC3E}">
+        <p14:creationId xmlns:p14="http://schemas.microsoft.com/office/powerpoint/2010/main" val="1024086991"/>
+      </p:ext>
+    </p:extLst>
+  </p:cSld>
+  <p:clrMapOvr>
+    <a:masterClrMapping/>
+  </p:clrMapOvr>
+</p:notes>
+</file>
+
+<file path=ppt/notesSlides/notesSlide11.xml><?xml version="1.0" encoding="utf-8"?>
+<p:notes xmlns:a="http://schemas.openxmlformats.org/drawingml/2006/main" xmlns:r="http://schemas.openxmlformats.org/officeDocument/2006/relationships" xmlns:p="http://schemas.openxmlformats.org/presentationml/2006/main">
+  <p:cSld>
+    <p:spTree>
+      <p:nvGrpSpPr>
+        <p:cNvPr id="1" name=""/>
+        <p:cNvGrpSpPr/>
+        <p:nvPr/>
+      </p:nvGrpSpPr>
+      <p:grpSpPr>
+        <a:xfrm>
+          <a:off x="0" y="0"/>
+          <a:ext cx="0" cy="0"/>
+          <a:chOff x="0" y="0"/>
+          <a:chExt cx="0" cy="0"/>
+        </a:xfrm>
+      </p:grpSpPr>
+      <p:sp>
+        <p:nvSpPr>
+          <p:cNvPr id="2" name="Slide Image Placeholder 1"/>
+          <p:cNvSpPr>
+            <a:spLocks noGrp="1" noRot="1" noChangeAspect="1"/>
+          </p:cNvSpPr>
+          <p:nvPr>
+            <p:ph type="sldImg"/>
+          </p:nvPr>
+        </p:nvSpPr>
+        <p:spPr/>
+      </p:sp>
+      <p:sp>
+        <p:nvSpPr>
+          <p:cNvPr id="3" name="Notes Placeholder 2"/>
+          <p:cNvSpPr>
+            <a:spLocks noGrp="1"/>
+          </p:cNvSpPr>
+          <p:nvPr>
+            <p:ph type="body" idx="1"/>
+          </p:nvPr>
+        </p:nvSpPr>
+        <p:spPr/>
+        <p:txBody>
+          <a:bodyPr/>
+          <a:lstStyle/>
+          <a:p>
+            <a:r>
+              <a:rPr lang="en-US" dirty="0"/>
+              <a:t/>
+            </a:r>
+            <a:endParaRPr lang="en-US" dirty="0"/>
+          </a:p>
+        </p:txBody>
+      </p:sp>
+      <p:sp>
+        <p:nvSpPr>
+          <p:cNvPr id="4" name="Slide Number Placeholder 3"/>
+          <p:cNvSpPr>
+            <a:spLocks noGrp="1"/>
+          </p:cNvSpPr>
+          <p:nvPr>
+            <p:ph type="sldNum" sz="quarter" idx="10"/>
+          </p:nvPr>
+        </p:nvSpPr>
+        <p:spPr/>
+        <p:txBody>
+          <a:bodyPr/>
+          <a:lstStyle/>
+          <a:p>
+            <a:fld id="{F7021451-1387-4CA6-816F-3879F97B5CBC}" type="slidenum">
+              <a:rPr lang="en-US"/>
+              <a:t>11</a:t>
             </a:fld>
             <a:endParaRPr lang="en-US"/>
           </a:p>
@@ -2362,7 +2451,7 @@
                 <a:ea typeface="Arial" pitchFamily="34" charset="-122"/>
                 <a:cs typeface="Arial" pitchFamily="34" charset="-120"/>
               </a:rPr>
-              <a:t>1 / 10</a:t>
+              <a:t>1 / 11</a:t>
             </a:r>
             <a:endParaRPr lang="en-US" sz="750" dirty="0"/>
           </a:p>
@@ -2536,6 +2625,1438 @@
 <file path=ppt/slides/slide10.xml><?xml version="1.0" encoding="utf-8"?>
 <p:sld xmlns:a="http://schemas.openxmlformats.org/drawingml/2006/main" xmlns:r="http://schemas.openxmlformats.org/officeDocument/2006/relationships" xmlns:p="http://schemas.openxmlformats.org/presentationml/2006/main">
   <p:cSld name="Slide 10">
+    <p:bg>
+      <p:bgPr>
+        <a:solidFill>
+          <a:srgbClr val="E9E0CD"/>
+        </a:solidFill>
+      </p:bgPr>
+    </p:bg>
+    <p:spTree>
+      <p:nvGrpSpPr>
+        <p:cNvPr id="1" name=""/>
+        <p:cNvGrpSpPr/>
+        <p:nvPr/>
+      </p:nvGrpSpPr>
+      <p:grpSpPr>
+        <a:xfrm>
+          <a:off x="0" y="0"/>
+          <a:ext cx="0" cy="0"/>
+          <a:chOff x="0" y="0"/>
+          <a:chExt cx="0" cy="0"/>
+        </a:xfrm>
+      </p:grpSpPr>
+      <p:sp>
+        <p:nvSpPr>
+          <p:cNvPr id="2" name="Text 0"/>
+          <p:cNvSpPr txBox="1"/>
+          <p:nvPr/>
+        </p:nvSpPr>
+        <p:spPr>
+          <a:xfrm>
+            <a:off x="596899" y="368299"/>
+            <a:ext cx="1904995" cy="330199"/>
+          </a:xfrm>
+          <a:prstGeom prst="rect">
+            <a:avLst/>
+          </a:prstGeom>
+          <a:noFill/>
+          <a:ln/>
+        </p:spPr>
+        <p:txBody>
+          <a:bodyPr wrap="square" lIns="0" tIns="0" rIns="0" bIns="0" rtlCol="0" anchor="ctr"/>
+          <a:lstStyle/>
+          <a:p>
+            <a:pPr algn="l" indent="0" marL="0">
+              <a:buNone/>
+            </a:pPr>
+            <a:r>
+              <a:rPr lang="en-US" sz="1800" b="1" dirty="0">
+                <a:solidFill>
+                  <a:srgbClr val="1C2230"/>
+                </a:solidFill>
+                <a:latin typeface="Arial" pitchFamily="34" charset="0"/>
+                <a:ea typeface="Arial" pitchFamily="34" charset="-122"/>
+                <a:cs typeface="Arial" pitchFamily="34" charset="-120"/>
+              </a:rPr>
+              <a:t>LINK</a:t>
+            </a:r>
+            <a:pPr algn="l" indent="0" marL="0">
+              <a:buNone/>
+            </a:pPr>
+            <a:r>
+              <a:rPr lang="en-US" sz="1800" b="1" dirty="0">
+                <a:solidFill>
+                  <a:srgbClr val="38B6FF"/>
+                </a:solidFill>
+                <a:latin typeface="Arial" pitchFamily="34" charset="0"/>
+                <a:ea typeface="Arial" pitchFamily="34" charset="-122"/>
+                <a:cs typeface="Arial" pitchFamily="34" charset="-120"/>
+              </a:rPr>
+              <a:t>.</a:t>
+            </a:r>
+            <a:endParaRPr lang="en-US" sz="1800" dirty="0"/>
+          </a:p>
+        </p:txBody>
+      </p:sp>
+      <p:sp>
+        <p:nvSpPr>
+          <p:cNvPr id="3" name="Text 1"/>
+          <p:cNvSpPr txBox="1"/>
+          <p:nvPr/>
+        </p:nvSpPr>
+        <p:spPr>
+          <a:xfrm>
+            <a:off x="609598" y="6381734"/>
+            <a:ext cx="5714986" cy="228599"/>
+          </a:xfrm>
+          <a:prstGeom prst="rect">
+            <a:avLst/>
+          </a:prstGeom>
+          <a:noFill/>
+          <a:ln/>
+        </p:spPr>
+        <p:txBody>
+          <a:bodyPr wrap="square" lIns="0" tIns="0" rIns="0" bIns="0" rtlCol="0" anchor="ctr"/>
+          <a:lstStyle/>
+          <a:p>
+            <a:pPr algn="l" indent="0" marL="0">
+              <a:buNone/>
+            </a:pPr>
+            <a:r>
+              <a:rPr lang="en-US" sz="750" b="1" spc="100" kern="0" dirty="0">
+                <a:solidFill>
+                  <a:srgbClr val="6F6A5C"/>
+                </a:solidFill>
+                <a:latin typeface="Arial" pitchFamily="34" charset="0"/>
+                <a:ea typeface="Arial" pitchFamily="34" charset="-122"/>
+                <a:cs typeface="Arial" pitchFamily="34" charset="-120"/>
+              </a:rPr>
+              <a:t>LINK. · Kennismaking</a:t>
+            </a:r>
+            <a:endParaRPr lang="en-US" sz="750" dirty="0"/>
+          </a:p>
+        </p:txBody>
+      </p:sp>
+      <p:sp>
+        <p:nvSpPr>
+          <p:cNvPr id="4" name="Text 2"/>
+          <p:cNvSpPr txBox="1"/>
+          <p:nvPr/>
+        </p:nvSpPr>
+        <p:spPr>
+          <a:xfrm>
+            <a:off x="9677376" y="6381734"/>
+            <a:ext cx="1904995" cy="228599"/>
+          </a:xfrm>
+          <a:prstGeom prst="rect">
+            <a:avLst/>
+          </a:prstGeom>
+          <a:noFill/>
+          <a:ln/>
+        </p:spPr>
+        <p:txBody>
+          <a:bodyPr wrap="square" lIns="0" tIns="0" rIns="0" bIns="0" rtlCol="0" anchor="ctr"/>
+          <a:lstStyle/>
+          <a:p>
+            <a:pPr algn="r" indent="0" marL="0">
+              <a:buNone/>
+            </a:pPr>
+            <a:r>
+              <a:rPr lang="en-US" sz="750" b="1" spc="100" kern="0" dirty="0">
+                <a:solidFill>
+                  <a:srgbClr val="6F6A5C"/>
+                </a:solidFill>
+                <a:latin typeface="Arial" pitchFamily="34" charset="0"/>
+                <a:ea typeface="Arial" pitchFamily="34" charset="-122"/>
+                <a:cs typeface="Arial" pitchFamily="34" charset="-120"/>
+              </a:rPr>
+              <a:t>10 / 11</a:t>
+            </a:r>
+            <a:endParaRPr lang="en-US" sz="750" dirty="0"/>
+          </a:p>
+        </p:txBody>
+      </p:sp>
+      <p:sp>
+        <p:nvSpPr>
+          <p:cNvPr id="5" name="Text 3"/>
+          <p:cNvSpPr txBox="1"/>
+          <p:nvPr/>
+        </p:nvSpPr>
+        <p:spPr>
+          <a:xfrm>
+            <a:off x="609598" y="1206497"/>
+            <a:ext cx="10159975" cy="215899"/>
+          </a:xfrm>
+          <a:prstGeom prst="rect">
+            <a:avLst/>
+          </a:prstGeom>
+          <a:noFill/>
+          <a:ln/>
+        </p:spPr>
+        <p:txBody>
+          <a:bodyPr wrap="square" lIns="0" tIns="0" rIns="0" bIns="0" rtlCol="0" anchor="ctr"/>
+          <a:lstStyle/>
+          <a:p>
+            <a:pPr algn="l" indent="0" marL="0">
+              <a:buNone/>
+            </a:pPr>
+            <a:r>
+              <a:rPr lang="en-US" sz="950" b="1" spc="400" kern="0" dirty="0">
+                <a:solidFill>
+                  <a:srgbClr val="38B6FF"/>
+                </a:solidFill>
+                <a:latin typeface="Arial" pitchFamily="34" charset="0"/>
+                <a:ea typeface="Arial" pitchFamily="34" charset="-122"/>
+                <a:cs typeface="Arial" pitchFamily="34" charset="-120"/>
+              </a:rPr>
+              <a:t>SPELREGELS</a:t>
+            </a:r>
+            <a:endParaRPr lang="en-US" sz="950" dirty="0"/>
+          </a:p>
+        </p:txBody>
+      </p:sp>
+      <p:sp>
+        <p:nvSpPr>
+          <p:cNvPr id="6" name="Text 4"/>
+          <p:cNvSpPr txBox="1"/>
+          <p:nvPr/>
+        </p:nvSpPr>
+        <p:spPr>
+          <a:xfrm>
+            <a:off x="609598" y="1511296"/>
+            <a:ext cx="10972773" cy="1142997"/>
+          </a:xfrm>
+          <a:prstGeom prst="rect">
+            <a:avLst/>
+          </a:prstGeom>
+          <a:noFill/>
+          <a:ln/>
+        </p:spPr>
+        <p:txBody>
+          <a:bodyPr wrap="square" lIns="0" tIns="0" rIns="0" bIns="0" rtlCol="0" anchor="t"/>
+          <a:lstStyle/>
+          <a:p>
+            <a:pPr algn="l" indent="0" marL="0">
+              <a:lnSpc>
+                <a:spcPct val="108000"/>
+              </a:lnSpc>
+              <a:buNone/>
+            </a:pPr>
+            <a:r>
+              <a:rPr lang="en-US" sz="3200" b="1" dirty="0">
+                <a:solidFill>
+                  <a:srgbClr val="1C2230"/>
+                </a:solidFill>
+                <a:latin typeface="Arial" pitchFamily="34" charset="0"/>
+                <a:ea typeface="Arial" pitchFamily="34" charset="-122"/>
+                <a:cs typeface="Arial" pitchFamily="34" charset="-120"/>
+              </a:rPr>
+              <a:t>Transparant en zonder </a:t>
+            </a:r>
+            <a:pPr algn="l" indent="0" marL="0">
+              <a:lnSpc>
+                <a:spcPct val="108000"/>
+              </a:lnSpc>
+              <a:buNone/>
+            </a:pPr>
+            <a:r>
+              <a:rPr lang="en-US" sz="3000" i="1" dirty="0">
+                <a:solidFill>
+                  <a:srgbClr val="1C2230"/>
+                </a:solidFill>
+                <a:latin typeface="Georgia" pitchFamily="34" charset="0"/>
+                <a:ea typeface="Georgia" pitchFamily="34" charset="-122"/>
+                <a:cs typeface="Georgia" pitchFamily="34" charset="-120"/>
+              </a:rPr>
+              <a:t>kleine lettertjes</a:t>
+            </a:r>
+            <a:pPr algn="l" indent="0" marL="0">
+              <a:lnSpc>
+                <a:spcPct val="108000"/>
+              </a:lnSpc>
+              <a:buNone/>
+            </a:pPr>
+            <a:r>
+              <a:rPr lang="en-US" sz="3200" b="1" dirty="0">
+                <a:solidFill>
+                  <a:srgbClr val="1C2230"/>
+                </a:solidFill>
+                <a:latin typeface="Arial" pitchFamily="34" charset="0"/>
+                <a:ea typeface="Arial" pitchFamily="34" charset="-122"/>
+                <a:cs typeface="Arial" pitchFamily="34" charset="-120"/>
+              </a:rPr>
+              <a:t>.</a:t>
+            </a:r>
+            <a:endParaRPr lang="en-US" sz="3200" dirty="0"/>
+          </a:p>
+        </p:txBody>
+      </p:sp>
+      <p:sp>
+        <p:nvSpPr>
+          <p:cNvPr id="7" name="Shape 5"/>
+          <p:cNvSpPr/>
+          <p:nvPr/>
+        </p:nvSpPr>
+        <p:spPr>
+          <a:xfrm>
+            <a:off x="609598" y="2819393"/>
+            <a:ext cx="253999" cy="253999"/>
+          </a:xfrm>
+          <a:prstGeom prst="roundRect">
+            <a:avLst>
+              <a:gd name="adj" fmla="val 25000"/>
+            </a:avLst>
+          </a:prstGeom>
+          <a:solidFill>
+            <a:srgbClr val="DDEBF3"/>
+          </a:solidFill>
+          <a:ln/>
+        </p:spPr>
+      </p:sp>
+      <p:pic>
+        <p:nvPicPr>
+          <p:cNvPr id="8" name="Image 0" descr="preencoded.png">    </p:cNvPr>
+          <p:cNvPicPr>
+            <a:picLocks noChangeAspect="1"/>
+          </p:cNvPicPr>
+          <p:nvPr/>
+        </p:nvPicPr>
+        <p:blipFill>
+          <a:blip r:embed="rId1"/>
+          <a:stretch>
+            <a:fillRect/>
+          </a:stretch>
+        </p:blipFill>
+        <p:spPr>
+          <a:xfrm>
+            <a:off x="666748" y="2876543"/>
+            <a:ext cx="139700" cy="139700"/>
+          </a:xfrm>
+          <a:prstGeom prst="rect">
+            <a:avLst/>
+          </a:prstGeom>
+        </p:spPr>
+      </p:pic>
+      <p:sp>
+        <p:nvSpPr>
+          <p:cNvPr id="9" name="Text 6"/>
+          <p:cNvSpPr txBox="1"/>
+          <p:nvPr/>
+        </p:nvSpPr>
+        <p:spPr>
+          <a:xfrm>
+            <a:off x="1015997" y="2793993"/>
+            <a:ext cx="4825988" cy="228599"/>
+          </a:xfrm>
+          <a:prstGeom prst="rect">
+            <a:avLst/>
+          </a:prstGeom>
+          <a:noFill/>
+          <a:ln/>
+        </p:spPr>
+        <p:txBody>
+          <a:bodyPr wrap="square" lIns="0" tIns="0" rIns="0" bIns="0" rtlCol="0" anchor="ctr"/>
+          <a:lstStyle/>
+          <a:p>
+            <a:pPr indent="0" marL="0">
+              <a:buNone/>
+            </a:pPr>
+            <a:r>
+              <a:rPr lang="en-US" sz="1200" b="1" dirty="0">
+                <a:solidFill>
+                  <a:srgbClr val="1C2230"/>
+                </a:solidFill>
+                <a:latin typeface="Arial" pitchFamily="34" charset="0"/>
+                <a:ea typeface="Arial" pitchFamily="34" charset="-122"/>
+                <a:cs typeface="Arial" pitchFamily="34" charset="-120"/>
+              </a:rPr>
+              <a:t>Niet-exclusief</a:t>
+            </a:r>
+            <a:endParaRPr lang="en-US" sz="1200" dirty="0"/>
+          </a:p>
+        </p:txBody>
+      </p:sp>
+      <p:sp>
+        <p:nvSpPr>
+          <p:cNvPr id="10" name="Text 7"/>
+          <p:cNvSpPr txBox="1"/>
+          <p:nvPr/>
+        </p:nvSpPr>
+        <p:spPr>
+          <a:xfrm>
+            <a:off x="1015997" y="3035292"/>
+            <a:ext cx="4825988" cy="355599"/>
+          </a:xfrm>
+          <a:prstGeom prst="rect">
+            <a:avLst/>
+          </a:prstGeom>
+          <a:noFill/>
+          <a:ln/>
+        </p:spPr>
+        <p:txBody>
+          <a:bodyPr wrap="square" lIns="0" tIns="0" rIns="0" bIns="0" rtlCol="0" anchor="t"/>
+          <a:lstStyle/>
+          <a:p>
+            <a:pPr indent="0" marL="0">
+              <a:lnSpc>
+                <a:spcPct val="130000"/>
+              </a:lnSpc>
+              <a:buNone/>
+            </a:pPr>
+            <a:r>
+              <a:rPr lang="en-US" sz="950" dirty="0">
+                <a:solidFill>
+                  <a:srgbClr val="6F6A5C"/>
+                </a:solidFill>
+                <a:latin typeface="Arial" pitchFamily="34" charset="0"/>
+                <a:ea typeface="Arial" pitchFamily="34" charset="-122"/>
+                <a:cs typeface="Arial" pitchFamily="34" charset="-120"/>
+              </a:rPr>
+              <a:t>Jullie zitten nergens aan vast en houden alle vrijheid.</a:t>
+            </a:r>
+            <a:endParaRPr lang="en-US" sz="950" dirty="0"/>
+          </a:p>
+        </p:txBody>
+      </p:sp>
+      <p:sp>
+        <p:nvSpPr>
+          <p:cNvPr id="11" name="Shape 8"/>
+          <p:cNvSpPr/>
+          <p:nvPr/>
+        </p:nvSpPr>
+        <p:spPr>
+          <a:xfrm>
+            <a:off x="6349984" y="2819393"/>
+            <a:ext cx="253999" cy="253999"/>
+          </a:xfrm>
+          <a:prstGeom prst="roundRect">
+            <a:avLst>
+              <a:gd name="adj" fmla="val 25000"/>
+            </a:avLst>
+          </a:prstGeom>
+          <a:solidFill>
+            <a:srgbClr val="DDEBF3"/>
+          </a:solidFill>
+          <a:ln/>
+        </p:spPr>
+      </p:sp>
+      <p:pic>
+        <p:nvPicPr>
+          <p:cNvPr id="12" name="Image 1" descr="preencoded.png">    </p:cNvPr>
+          <p:cNvPicPr>
+            <a:picLocks noChangeAspect="1"/>
+          </p:cNvPicPr>
+          <p:nvPr/>
+        </p:nvPicPr>
+        <p:blipFill>
+          <a:blip r:embed="rId2"/>
+          <a:stretch>
+            <a:fillRect/>
+          </a:stretch>
+        </p:blipFill>
+        <p:spPr>
+          <a:xfrm>
+            <a:off x="6407134" y="2876543"/>
+            <a:ext cx="139700" cy="139700"/>
+          </a:xfrm>
+          <a:prstGeom prst="rect">
+            <a:avLst/>
+          </a:prstGeom>
+        </p:spPr>
+      </p:pic>
+      <p:sp>
+        <p:nvSpPr>
+          <p:cNvPr id="13" name="Text 9"/>
+          <p:cNvSpPr txBox="1"/>
+          <p:nvPr/>
+        </p:nvSpPr>
+        <p:spPr>
+          <a:xfrm>
+            <a:off x="6756383" y="2793993"/>
+            <a:ext cx="4825988" cy="228599"/>
+          </a:xfrm>
+          <a:prstGeom prst="rect">
+            <a:avLst/>
+          </a:prstGeom>
+          <a:noFill/>
+          <a:ln/>
+        </p:spPr>
+        <p:txBody>
+          <a:bodyPr wrap="square" lIns="0" tIns="0" rIns="0" bIns="0" rtlCol="0" anchor="ctr"/>
+          <a:lstStyle/>
+          <a:p>
+            <a:pPr indent="0" marL="0">
+              <a:buNone/>
+            </a:pPr>
+            <a:r>
+              <a:rPr lang="en-US" sz="1200" b="1" dirty="0">
+                <a:solidFill>
+                  <a:srgbClr val="1C2230"/>
+                </a:solidFill>
+                <a:latin typeface="Arial" pitchFamily="34" charset="0"/>
+                <a:ea typeface="Arial" pitchFamily="34" charset="-122"/>
+                <a:cs typeface="Arial" pitchFamily="34" charset="-120"/>
+              </a:rPr>
+              <a:t>Bestaande relaties blijven van jullie</a:t>
+            </a:r>
+            <a:endParaRPr lang="en-US" sz="1200" dirty="0"/>
+          </a:p>
+        </p:txBody>
+      </p:sp>
+      <p:sp>
+        <p:nvSpPr>
+          <p:cNvPr id="14" name="Text 10"/>
+          <p:cNvSpPr txBox="1"/>
+          <p:nvPr/>
+        </p:nvSpPr>
+        <p:spPr>
+          <a:xfrm>
+            <a:off x="6756383" y="3035292"/>
+            <a:ext cx="4825988" cy="355599"/>
+          </a:xfrm>
+          <a:prstGeom prst="rect">
+            <a:avLst/>
+          </a:prstGeom>
+          <a:noFill/>
+          <a:ln/>
+        </p:spPr>
+        <p:txBody>
+          <a:bodyPr wrap="square" lIns="0" tIns="0" rIns="0" bIns="0" rtlCol="0" anchor="t"/>
+          <a:lstStyle/>
+          <a:p>
+            <a:pPr indent="0" marL="0">
+              <a:lnSpc>
+                <a:spcPct val="130000"/>
+              </a:lnSpc>
+              <a:buNone/>
+            </a:pPr>
+            <a:r>
+              <a:rPr lang="en-US" sz="950" dirty="0">
+                <a:solidFill>
+                  <a:srgbClr val="6F6A5C"/>
+                </a:solidFill>
+                <a:latin typeface="Arial" pitchFamily="34" charset="0"/>
+                <a:ea typeface="Arial" pitchFamily="34" charset="-122"/>
+                <a:cs typeface="Arial" pitchFamily="34" charset="-120"/>
+              </a:rPr>
+              <a:t>Uitsluitlijst vooraf, die bedrijven benaderen wij niet.</a:t>
+            </a:r>
+            <a:endParaRPr lang="en-US" sz="950" dirty="0"/>
+          </a:p>
+        </p:txBody>
+      </p:sp>
+      <p:sp>
+        <p:nvSpPr>
+          <p:cNvPr id="15" name="Shape 11"/>
+          <p:cNvSpPr/>
+          <p:nvPr/>
+        </p:nvSpPr>
+        <p:spPr>
+          <a:xfrm>
+            <a:off x="609598" y="3428991"/>
+            <a:ext cx="5232387" cy="0"/>
+          </a:xfrm>
+          <a:prstGeom prst="line">
+            <a:avLst/>
+          </a:prstGeom>
+          <a:noFill/>
+          <a:ln w="6350">
+            <a:solidFill>
+              <a:srgbClr val="C9C2B2"/>
+            </a:solidFill>
+            <a:prstDash val="solid"/>
+          </a:ln>
+        </p:spPr>
+      </p:sp>
+      <p:sp>
+        <p:nvSpPr>
+          <p:cNvPr id="16" name="Shape 12"/>
+          <p:cNvSpPr/>
+          <p:nvPr/>
+        </p:nvSpPr>
+        <p:spPr>
+          <a:xfrm>
+            <a:off x="609598" y="3530591"/>
+            <a:ext cx="253999" cy="253999"/>
+          </a:xfrm>
+          <a:prstGeom prst="roundRect">
+            <a:avLst>
+              <a:gd name="adj" fmla="val 25000"/>
+            </a:avLst>
+          </a:prstGeom>
+          <a:solidFill>
+            <a:srgbClr val="DDEBF3"/>
+          </a:solidFill>
+          <a:ln/>
+        </p:spPr>
+      </p:sp>
+      <p:pic>
+        <p:nvPicPr>
+          <p:cNvPr id="17" name="Image 2" descr="preencoded.png">    </p:cNvPr>
+          <p:cNvPicPr>
+            <a:picLocks noChangeAspect="1"/>
+          </p:cNvPicPr>
+          <p:nvPr/>
+        </p:nvPicPr>
+        <p:blipFill>
+          <a:blip r:embed="rId3"/>
+          <a:stretch>
+            <a:fillRect/>
+          </a:stretch>
+        </p:blipFill>
+        <p:spPr>
+          <a:xfrm>
+            <a:off x="666748" y="3587741"/>
+            <a:ext cx="139700" cy="139700"/>
+          </a:xfrm>
+          <a:prstGeom prst="rect">
+            <a:avLst/>
+          </a:prstGeom>
+        </p:spPr>
+      </p:pic>
+      <p:sp>
+        <p:nvSpPr>
+          <p:cNvPr id="18" name="Text 13"/>
+          <p:cNvSpPr txBox="1"/>
+          <p:nvPr/>
+        </p:nvSpPr>
+        <p:spPr>
+          <a:xfrm>
+            <a:off x="1015997" y="3505191"/>
+            <a:ext cx="4825988" cy="228599"/>
+          </a:xfrm>
+          <a:prstGeom prst="rect">
+            <a:avLst/>
+          </a:prstGeom>
+          <a:noFill/>
+          <a:ln/>
+        </p:spPr>
+        <p:txBody>
+          <a:bodyPr wrap="square" lIns="0" tIns="0" rIns="0" bIns="0" rtlCol="0" anchor="ctr"/>
+          <a:lstStyle/>
+          <a:p>
+            <a:pPr indent="0" marL="0">
+              <a:buNone/>
+            </a:pPr>
+            <a:r>
+              <a:rPr lang="en-US" sz="1200" b="1" dirty="0">
+                <a:solidFill>
+                  <a:srgbClr val="1C2230"/>
+                </a:solidFill>
+                <a:latin typeface="Arial" pitchFamily="34" charset="0"/>
+                <a:ea typeface="Arial" pitchFamily="34" charset="-122"/>
+                <a:cs typeface="Arial" pitchFamily="34" charset="-120"/>
+              </a:rPr>
+              <a:t>Werkperiodes van 4 weken</a:t>
+            </a:r>
+            <a:endParaRPr lang="en-US" sz="1200" dirty="0"/>
+          </a:p>
+        </p:txBody>
+      </p:sp>
+      <p:sp>
+        <p:nvSpPr>
+          <p:cNvPr id="19" name="Text 14"/>
+          <p:cNvSpPr txBox="1"/>
+          <p:nvPr/>
+        </p:nvSpPr>
+        <p:spPr>
+          <a:xfrm>
+            <a:off x="1015997" y="3746491"/>
+            <a:ext cx="4825988" cy="355599"/>
+          </a:xfrm>
+          <a:prstGeom prst="rect">
+            <a:avLst/>
+          </a:prstGeom>
+          <a:noFill/>
+          <a:ln/>
+        </p:spPr>
+        <p:txBody>
+          <a:bodyPr wrap="square" lIns="0" tIns="0" rIns="0" bIns="0" rtlCol="0" anchor="t"/>
+          <a:lstStyle/>
+          <a:p>
+            <a:pPr indent="0" marL="0">
+              <a:lnSpc>
+                <a:spcPct val="130000"/>
+              </a:lnSpc>
+              <a:buNone/>
+            </a:pPr>
+            <a:r>
+              <a:rPr lang="en-US" sz="950" dirty="0">
+                <a:solidFill>
+                  <a:srgbClr val="6F6A5C"/>
+                </a:solidFill>
+                <a:latin typeface="Arial" pitchFamily="34" charset="0"/>
+                <a:ea typeface="Arial" pitchFamily="34" charset="-122"/>
+                <a:cs typeface="Arial" pitchFamily="34" charset="-120"/>
+              </a:rPr>
+              <a:t>Vooraf gefactureerd, per werkperiode.</a:t>
+            </a:r>
+            <a:endParaRPr lang="en-US" sz="950" dirty="0"/>
+          </a:p>
+        </p:txBody>
+      </p:sp>
+      <p:sp>
+        <p:nvSpPr>
+          <p:cNvPr id="20" name="Shape 15"/>
+          <p:cNvSpPr/>
+          <p:nvPr/>
+        </p:nvSpPr>
+        <p:spPr>
+          <a:xfrm>
+            <a:off x="6349984" y="3428991"/>
+            <a:ext cx="5232387" cy="0"/>
+          </a:xfrm>
+          <a:prstGeom prst="line">
+            <a:avLst/>
+          </a:prstGeom>
+          <a:noFill/>
+          <a:ln w="6350">
+            <a:solidFill>
+              <a:srgbClr val="C9C2B2"/>
+            </a:solidFill>
+            <a:prstDash val="solid"/>
+          </a:ln>
+        </p:spPr>
+      </p:sp>
+      <p:sp>
+        <p:nvSpPr>
+          <p:cNvPr id="21" name="Shape 16"/>
+          <p:cNvSpPr/>
+          <p:nvPr/>
+        </p:nvSpPr>
+        <p:spPr>
+          <a:xfrm>
+            <a:off x="6349984" y="3530591"/>
+            <a:ext cx="253999" cy="253999"/>
+          </a:xfrm>
+          <a:prstGeom prst="roundRect">
+            <a:avLst>
+              <a:gd name="adj" fmla="val 25000"/>
+            </a:avLst>
+          </a:prstGeom>
+          <a:solidFill>
+            <a:srgbClr val="DDEBF3"/>
+          </a:solidFill>
+          <a:ln/>
+        </p:spPr>
+      </p:sp>
+      <p:pic>
+        <p:nvPicPr>
+          <p:cNvPr id="22" name="Image 3" descr="preencoded.png">    </p:cNvPr>
+          <p:cNvPicPr>
+            <a:picLocks noChangeAspect="1"/>
+          </p:cNvPicPr>
+          <p:nvPr/>
+        </p:nvPicPr>
+        <p:blipFill>
+          <a:blip r:embed="rId4"/>
+          <a:stretch>
+            <a:fillRect/>
+          </a:stretch>
+        </p:blipFill>
+        <p:spPr>
+          <a:xfrm>
+            <a:off x="6407134" y="3587741"/>
+            <a:ext cx="139700" cy="139700"/>
+          </a:xfrm>
+          <a:prstGeom prst="rect">
+            <a:avLst/>
+          </a:prstGeom>
+        </p:spPr>
+      </p:pic>
+      <p:sp>
+        <p:nvSpPr>
+          <p:cNvPr id="23" name="Text 17"/>
+          <p:cNvSpPr txBox="1"/>
+          <p:nvPr/>
+        </p:nvSpPr>
+        <p:spPr>
+          <a:xfrm>
+            <a:off x="6756383" y="3505191"/>
+            <a:ext cx="4825988" cy="228599"/>
+          </a:xfrm>
+          <a:prstGeom prst="rect">
+            <a:avLst/>
+          </a:prstGeom>
+          <a:noFill/>
+          <a:ln/>
+        </p:spPr>
+        <p:txBody>
+          <a:bodyPr wrap="square" lIns="0" tIns="0" rIns="0" bIns="0" rtlCol="0" anchor="ctr"/>
+          <a:lstStyle/>
+          <a:p>
+            <a:pPr indent="0" marL="0">
+              <a:buNone/>
+            </a:pPr>
+            <a:r>
+              <a:rPr lang="en-US" sz="1200" b="1" dirty="0">
+                <a:solidFill>
+                  <a:srgbClr val="1C2230"/>
+                </a:solidFill>
+                <a:latin typeface="Arial" pitchFamily="34" charset="0"/>
+                <a:ea typeface="Arial" pitchFamily="34" charset="-122"/>
+                <a:cs typeface="Arial" pitchFamily="34" charset="-120"/>
+              </a:rPr>
+              <a:t>Wekelijkse rapportage</a:t>
+            </a:r>
+            <a:endParaRPr lang="en-US" sz="1200" dirty="0"/>
+          </a:p>
+        </p:txBody>
+      </p:sp>
+      <p:sp>
+        <p:nvSpPr>
+          <p:cNvPr id="24" name="Text 18"/>
+          <p:cNvSpPr txBox="1"/>
+          <p:nvPr/>
+        </p:nvSpPr>
+        <p:spPr>
+          <a:xfrm>
+            <a:off x="6756383" y="3746491"/>
+            <a:ext cx="4825988" cy="355599"/>
+          </a:xfrm>
+          <a:prstGeom prst="rect">
+            <a:avLst/>
+          </a:prstGeom>
+          <a:noFill/>
+          <a:ln/>
+        </p:spPr>
+        <p:txBody>
+          <a:bodyPr wrap="square" lIns="0" tIns="0" rIns="0" bIns="0" rtlCol="0" anchor="t"/>
+          <a:lstStyle/>
+          <a:p>
+            <a:pPr indent="0" marL="0">
+              <a:lnSpc>
+                <a:spcPct val="130000"/>
+              </a:lnSpc>
+              <a:buNone/>
+            </a:pPr>
+            <a:r>
+              <a:rPr lang="en-US" sz="950" dirty="0">
+                <a:solidFill>
+                  <a:srgbClr val="6F6A5C"/>
+                </a:solidFill>
+                <a:latin typeface="Arial" pitchFamily="34" charset="0"/>
+                <a:ea typeface="Arial" pitchFamily="34" charset="-122"/>
+                <a:cs typeface="Arial" pitchFamily="34" charset="-120"/>
+              </a:rPr>
+              <a:t>Elke week zicht op wat er gebeurd is en wat het opleverde.</a:t>
+            </a:r>
+            <a:endParaRPr lang="en-US" sz="950" dirty="0"/>
+          </a:p>
+        </p:txBody>
+      </p:sp>
+      <p:sp>
+        <p:nvSpPr>
+          <p:cNvPr id="25" name="Shape 19"/>
+          <p:cNvSpPr/>
+          <p:nvPr/>
+        </p:nvSpPr>
+        <p:spPr>
+          <a:xfrm>
+            <a:off x="609598" y="4140190"/>
+            <a:ext cx="5232387" cy="0"/>
+          </a:xfrm>
+          <a:prstGeom prst="line">
+            <a:avLst/>
+          </a:prstGeom>
+          <a:noFill/>
+          <a:ln w="6350">
+            <a:solidFill>
+              <a:srgbClr val="C9C2B2"/>
+            </a:solidFill>
+            <a:prstDash val="solid"/>
+          </a:ln>
+        </p:spPr>
+      </p:sp>
+      <p:sp>
+        <p:nvSpPr>
+          <p:cNvPr id="26" name="Shape 20"/>
+          <p:cNvSpPr/>
+          <p:nvPr/>
+        </p:nvSpPr>
+        <p:spPr>
+          <a:xfrm>
+            <a:off x="609598" y="4241789"/>
+            <a:ext cx="253999" cy="253999"/>
+          </a:xfrm>
+          <a:prstGeom prst="roundRect">
+            <a:avLst>
+              <a:gd name="adj" fmla="val 25000"/>
+            </a:avLst>
+          </a:prstGeom>
+          <a:solidFill>
+            <a:srgbClr val="DDEBF3"/>
+          </a:solidFill>
+          <a:ln/>
+        </p:spPr>
+      </p:sp>
+      <p:pic>
+        <p:nvPicPr>
+          <p:cNvPr id="27" name="Image 4" descr="preencoded.png">    </p:cNvPr>
+          <p:cNvPicPr>
+            <a:picLocks noChangeAspect="1"/>
+          </p:cNvPicPr>
+          <p:nvPr/>
+        </p:nvPicPr>
+        <p:blipFill>
+          <a:blip r:embed="rId5"/>
+          <a:stretch>
+            <a:fillRect/>
+          </a:stretch>
+        </p:blipFill>
+        <p:spPr>
+          <a:xfrm>
+            <a:off x="666748" y="4298939"/>
+            <a:ext cx="139700" cy="139700"/>
+          </a:xfrm>
+          <a:prstGeom prst="rect">
+            <a:avLst/>
+          </a:prstGeom>
+        </p:spPr>
+      </p:pic>
+      <p:sp>
+        <p:nvSpPr>
+          <p:cNvPr id="28" name="Text 21"/>
+          <p:cNvSpPr txBox="1"/>
+          <p:nvPr/>
+        </p:nvSpPr>
+        <p:spPr>
+          <a:xfrm>
+            <a:off x="1015997" y="4216389"/>
+            <a:ext cx="4825988" cy="228599"/>
+          </a:xfrm>
+          <a:prstGeom prst="rect">
+            <a:avLst/>
+          </a:prstGeom>
+          <a:noFill/>
+          <a:ln/>
+        </p:spPr>
+        <p:txBody>
+          <a:bodyPr wrap="square" lIns="0" tIns="0" rIns="0" bIns="0" rtlCol="0" anchor="ctr"/>
+          <a:lstStyle/>
+          <a:p>
+            <a:pPr indent="0" marL="0">
+              <a:buNone/>
+            </a:pPr>
+            <a:r>
+              <a:rPr lang="en-US" sz="1200" b="1" dirty="0">
+                <a:solidFill>
+                  <a:srgbClr val="1C2230"/>
+                </a:solidFill>
+                <a:latin typeface="Arial" pitchFamily="34" charset="0"/>
+                <a:ea typeface="Arial" pitchFamily="34" charset="-122"/>
+                <a:cs typeface="Arial" pitchFamily="34" charset="-120"/>
+              </a:rPr>
+              <a:t>Jullie naam, onze uitvoering</a:t>
+            </a:r>
+            <a:endParaRPr lang="en-US" sz="1200" dirty="0"/>
+          </a:p>
+        </p:txBody>
+      </p:sp>
+      <p:sp>
+        <p:nvSpPr>
+          <p:cNvPr id="29" name="Text 22"/>
+          <p:cNvSpPr txBox="1"/>
+          <p:nvPr/>
+        </p:nvSpPr>
+        <p:spPr>
+          <a:xfrm>
+            <a:off x="1015997" y="4457689"/>
+            <a:ext cx="4825988" cy="355599"/>
+          </a:xfrm>
+          <a:prstGeom prst="rect">
+            <a:avLst/>
+          </a:prstGeom>
+          <a:noFill/>
+          <a:ln/>
+        </p:spPr>
+        <p:txBody>
+          <a:bodyPr wrap="square" lIns="0" tIns="0" rIns="0" bIns="0" rtlCol="0" anchor="t"/>
+          <a:lstStyle/>
+          <a:p>
+            <a:pPr indent="0" marL="0">
+              <a:lnSpc>
+                <a:spcPct val="130000"/>
+              </a:lnSpc>
+              <a:buNone/>
+            </a:pPr>
+            <a:r>
+              <a:rPr lang="en-US" sz="950" dirty="0">
+                <a:solidFill>
+                  <a:srgbClr val="6F6A5C"/>
+                </a:solidFill>
+                <a:latin typeface="Arial" pitchFamily="34" charset="0"/>
+                <a:ea typeface="Arial" pitchFamily="34" charset="-122"/>
+                <a:cs typeface="Arial" pitchFamily="34" charset="-120"/>
+              </a:rPr>
+              <a:t>Regionaal nummer en jullie stijl, wij voeren uit.</a:t>
+            </a:r>
+            <a:endParaRPr lang="en-US" sz="950" dirty="0"/>
+          </a:p>
+        </p:txBody>
+      </p:sp>
+      <p:sp>
+        <p:nvSpPr>
+          <p:cNvPr id="30" name="Shape 23"/>
+          <p:cNvSpPr/>
+          <p:nvPr/>
+        </p:nvSpPr>
+        <p:spPr>
+          <a:xfrm>
+            <a:off x="6349984" y="4140190"/>
+            <a:ext cx="5232387" cy="0"/>
+          </a:xfrm>
+          <a:prstGeom prst="line">
+            <a:avLst/>
+          </a:prstGeom>
+          <a:noFill/>
+          <a:ln w="6350">
+            <a:solidFill>
+              <a:srgbClr val="C9C2B2"/>
+            </a:solidFill>
+            <a:prstDash val="solid"/>
+          </a:ln>
+        </p:spPr>
+      </p:sp>
+      <p:sp>
+        <p:nvSpPr>
+          <p:cNvPr id="31" name="Shape 24"/>
+          <p:cNvSpPr/>
+          <p:nvPr/>
+        </p:nvSpPr>
+        <p:spPr>
+          <a:xfrm>
+            <a:off x="6349984" y="4241789"/>
+            <a:ext cx="253999" cy="253999"/>
+          </a:xfrm>
+          <a:prstGeom prst="roundRect">
+            <a:avLst>
+              <a:gd name="adj" fmla="val 25000"/>
+            </a:avLst>
+          </a:prstGeom>
+          <a:solidFill>
+            <a:srgbClr val="DDEBF3"/>
+          </a:solidFill>
+          <a:ln/>
+        </p:spPr>
+      </p:sp>
+      <p:pic>
+        <p:nvPicPr>
+          <p:cNvPr id="32" name="Image 5" descr="preencoded.png">    </p:cNvPr>
+          <p:cNvPicPr>
+            <a:picLocks noChangeAspect="1"/>
+          </p:cNvPicPr>
+          <p:nvPr/>
+        </p:nvPicPr>
+        <p:blipFill>
+          <a:blip r:embed="rId6"/>
+          <a:stretch>
+            <a:fillRect/>
+          </a:stretch>
+        </p:blipFill>
+        <p:spPr>
+          <a:xfrm>
+            <a:off x="6407134" y="4298939"/>
+            <a:ext cx="139700" cy="139700"/>
+          </a:xfrm>
+          <a:prstGeom prst="rect">
+            <a:avLst/>
+          </a:prstGeom>
+        </p:spPr>
+      </p:pic>
+      <p:sp>
+        <p:nvSpPr>
+          <p:cNvPr id="33" name="Text 25"/>
+          <p:cNvSpPr txBox="1"/>
+          <p:nvPr/>
+        </p:nvSpPr>
+        <p:spPr>
+          <a:xfrm>
+            <a:off x="6756383" y="4216389"/>
+            <a:ext cx="4825988" cy="228599"/>
+          </a:xfrm>
+          <a:prstGeom prst="rect">
+            <a:avLst/>
+          </a:prstGeom>
+          <a:noFill/>
+          <a:ln/>
+        </p:spPr>
+        <p:txBody>
+          <a:bodyPr wrap="square" lIns="0" tIns="0" rIns="0" bIns="0" rtlCol="0" anchor="ctr"/>
+          <a:lstStyle/>
+          <a:p>
+            <a:pPr indent="0" marL="0">
+              <a:buNone/>
+            </a:pPr>
+            <a:r>
+              <a:rPr lang="en-US" sz="1200" b="1" dirty="0">
+                <a:solidFill>
+                  <a:srgbClr val="1C2230"/>
+                </a:solidFill>
+                <a:latin typeface="Arial" pitchFamily="34" charset="0"/>
+                <a:ea typeface="Arial" pitchFamily="34" charset="-122"/>
+                <a:cs typeface="Arial" pitchFamily="34" charset="-120"/>
+              </a:rPr>
+              <a:t>Gegevens veilig</a:t>
+            </a:r>
+            <a:endParaRPr lang="en-US" sz="1200" dirty="0"/>
+          </a:p>
+        </p:txBody>
+      </p:sp>
+      <p:sp>
+        <p:nvSpPr>
+          <p:cNvPr id="34" name="Text 26"/>
+          <p:cNvSpPr txBox="1"/>
+          <p:nvPr/>
+        </p:nvSpPr>
+        <p:spPr>
+          <a:xfrm>
+            <a:off x="6756383" y="4457689"/>
+            <a:ext cx="4825988" cy="355599"/>
+          </a:xfrm>
+          <a:prstGeom prst="rect">
+            <a:avLst/>
+          </a:prstGeom>
+          <a:noFill/>
+          <a:ln/>
+        </p:spPr>
+        <p:txBody>
+          <a:bodyPr wrap="square" lIns="0" tIns="0" rIns="0" bIns="0" rtlCol="0" anchor="t"/>
+          <a:lstStyle/>
+          <a:p>
+            <a:pPr indent="0" marL="0">
+              <a:lnSpc>
+                <a:spcPct val="130000"/>
+              </a:lnSpc>
+              <a:buNone/>
+            </a:pPr>
+            <a:r>
+              <a:rPr lang="en-US" sz="950" dirty="0">
+                <a:solidFill>
+                  <a:srgbClr val="6F6A5C"/>
+                </a:solidFill>
+                <a:latin typeface="Arial" pitchFamily="34" charset="0"/>
+                <a:ea typeface="Arial" pitchFamily="34" charset="-122"/>
+                <a:cs typeface="Arial" pitchFamily="34" charset="-120"/>
+              </a:rPr>
+              <a:t>Vastgelegd in een verwerkersovereenkomst.</a:t>
+            </a:r>
+            <a:endParaRPr lang="en-US" sz="950" dirty="0"/>
+          </a:p>
+        </p:txBody>
+      </p:sp>
+      <p:sp>
+        <p:nvSpPr>
+          <p:cNvPr id="35" name="Shape 27"/>
+          <p:cNvSpPr/>
+          <p:nvPr/>
+        </p:nvSpPr>
+        <p:spPr>
+          <a:xfrm>
+            <a:off x="609598" y="4851388"/>
+            <a:ext cx="5232387" cy="0"/>
+          </a:xfrm>
+          <a:prstGeom prst="line">
+            <a:avLst/>
+          </a:prstGeom>
+          <a:noFill/>
+          <a:ln w="6350">
+            <a:solidFill>
+              <a:srgbClr val="C9C2B2"/>
+            </a:solidFill>
+            <a:prstDash val="solid"/>
+          </a:ln>
+        </p:spPr>
+      </p:sp>
+      <p:sp>
+        <p:nvSpPr>
+          <p:cNvPr id="36" name="Shape 28"/>
+          <p:cNvSpPr/>
+          <p:nvPr/>
+        </p:nvSpPr>
+        <p:spPr>
+          <a:xfrm>
+            <a:off x="609598" y="4952988"/>
+            <a:ext cx="253999" cy="253999"/>
+          </a:xfrm>
+          <a:prstGeom prst="roundRect">
+            <a:avLst>
+              <a:gd name="adj" fmla="val 25000"/>
+            </a:avLst>
+          </a:prstGeom>
+          <a:solidFill>
+            <a:srgbClr val="DDEBF3"/>
+          </a:solidFill>
+          <a:ln/>
+        </p:spPr>
+      </p:sp>
+      <p:pic>
+        <p:nvPicPr>
+          <p:cNvPr id="37" name="Image 6" descr="preencoded.png">    </p:cNvPr>
+          <p:cNvPicPr>
+            <a:picLocks noChangeAspect="1"/>
+          </p:cNvPicPr>
+          <p:nvPr/>
+        </p:nvPicPr>
+        <p:blipFill>
+          <a:blip r:embed="rId7"/>
+          <a:stretch>
+            <a:fillRect/>
+          </a:stretch>
+        </p:blipFill>
+        <p:spPr>
+          <a:xfrm>
+            <a:off x="666748" y="5010137"/>
+            <a:ext cx="139700" cy="139700"/>
+          </a:xfrm>
+          <a:prstGeom prst="rect">
+            <a:avLst/>
+          </a:prstGeom>
+        </p:spPr>
+      </p:pic>
+      <p:sp>
+        <p:nvSpPr>
+          <p:cNvPr id="38" name="Text 29"/>
+          <p:cNvSpPr txBox="1"/>
+          <p:nvPr/>
+        </p:nvSpPr>
+        <p:spPr>
+          <a:xfrm>
+            <a:off x="1015997" y="4927588"/>
+            <a:ext cx="4825988" cy="228599"/>
+          </a:xfrm>
+          <a:prstGeom prst="rect">
+            <a:avLst/>
+          </a:prstGeom>
+          <a:noFill/>
+          <a:ln/>
+        </p:spPr>
+        <p:txBody>
+          <a:bodyPr wrap="square" lIns="0" tIns="0" rIns="0" bIns="0" rtlCol="0" anchor="ctr"/>
+          <a:lstStyle/>
+          <a:p>
+            <a:pPr indent="0" marL="0">
+              <a:buNone/>
+            </a:pPr>
+            <a:r>
+              <a:rPr lang="en-US" sz="1200" b="1" dirty="0">
+                <a:solidFill>
+                  <a:srgbClr val="1C2230"/>
+                </a:solidFill>
+                <a:latin typeface="Arial" pitchFamily="34" charset="0"/>
+                <a:ea typeface="Arial" pitchFamily="34" charset="-122"/>
+                <a:cs typeface="Arial" pitchFamily="34" charset="-120"/>
+              </a:rPr>
+              <a:t>Evaluatie om de week</a:t>
+            </a:r>
+            <a:endParaRPr lang="en-US" sz="1200" dirty="0"/>
+          </a:p>
+        </p:txBody>
+      </p:sp>
+      <p:sp>
+        <p:nvSpPr>
+          <p:cNvPr id="39" name="Text 30"/>
+          <p:cNvSpPr txBox="1"/>
+          <p:nvPr/>
+        </p:nvSpPr>
+        <p:spPr>
+          <a:xfrm>
+            <a:off x="1015997" y="5168887"/>
+            <a:ext cx="4825988" cy="355599"/>
+          </a:xfrm>
+          <a:prstGeom prst="rect">
+            <a:avLst/>
+          </a:prstGeom>
+          <a:noFill/>
+          <a:ln/>
+        </p:spPr>
+        <p:txBody>
+          <a:bodyPr wrap="square" lIns="0" tIns="0" rIns="0" bIns="0" rtlCol="0" anchor="t"/>
+          <a:lstStyle/>
+          <a:p>
+            <a:pPr indent="0" marL="0">
+              <a:lnSpc>
+                <a:spcPct val="130000"/>
+              </a:lnSpc>
+              <a:buNone/>
+            </a:pPr>
+            <a:r>
+              <a:rPr lang="en-US" sz="950" dirty="0">
+                <a:solidFill>
+                  <a:srgbClr val="6F6A5C"/>
+                </a:solidFill>
+                <a:latin typeface="Arial" pitchFamily="34" charset="0"/>
+                <a:ea typeface="Arial" pitchFamily="34" charset="-122"/>
+                <a:cs typeface="Arial" pitchFamily="34" charset="-120"/>
+              </a:rPr>
+              <a:t>Bij twijfel om tafel en bijsturen.</a:t>
+            </a:r>
+            <a:endParaRPr lang="en-US" sz="950" dirty="0"/>
+          </a:p>
+        </p:txBody>
+      </p:sp>
+      <p:sp>
+        <p:nvSpPr>
+          <p:cNvPr id="40" name="Shape 31"/>
+          <p:cNvSpPr/>
+          <p:nvPr/>
+        </p:nvSpPr>
+        <p:spPr>
+          <a:xfrm>
+            <a:off x="6349984" y="4851388"/>
+            <a:ext cx="5232387" cy="0"/>
+          </a:xfrm>
+          <a:prstGeom prst="line">
+            <a:avLst/>
+          </a:prstGeom>
+          <a:noFill/>
+          <a:ln w="6350">
+            <a:solidFill>
+              <a:srgbClr val="C9C2B2"/>
+            </a:solidFill>
+            <a:prstDash val="solid"/>
+          </a:ln>
+        </p:spPr>
+      </p:sp>
+      <p:sp>
+        <p:nvSpPr>
+          <p:cNvPr id="41" name="Shape 32"/>
+          <p:cNvSpPr/>
+          <p:nvPr/>
+        </p:nvSpPr>
+        <p:spPr>
+          <a:xfrm>
+            <a:off x="6349984" y="4952988"/>
+            <a:ext cx="253999" cy="253999"/>
+          </a:xfrm>
+          <a:prstGeom prst="roundRect">
+            <a:avLst>
+              <a:gd name="adj" fmla="val 25000"/>
+            </a:avLst>
+          </a:prstGeom>
+          <a:solidFill>
+            <a:srgbClr val="DDEBF3"/>
+          </a:solidFill>
+          <a:ln/>
+        </p:spPr>
+      </p:sp>
+      <p:pic>
+        <p:nvPicPr>
+          <p:cNvPr id="42" name="Image 7" descr="preencoded.png">    </p:cNvPr>
+          <p:cNvPicPr>
+            <a:picLocks noChangeAspect="1"/>
+          </p:cNvPicPr>
+          <p:nvPr/>
+        </p:nvPicPr>
+        <p:blipFill>
+          <a:blip r:embed="rId8"/>
+          <a:stretch>
+            <a:fillRect/>
+          </a:stretch>
+        </p:blipFill>
+        <p:spPr>
+          <a:xfrm>
+            <a:off x="6407134" y="5010137"/>
+            <a:ext cx="139700" cy="139700"/>
+          </a:xfrm>
+          <a:prstGeom prst="rect">
+            <a:avLst/>
+          </a:prstGeom>
+        </p:spPr>
+      </p:pic>
+      <p:sp>
+        <p:nvSpPr>
+          <p:cNvPr id="43" name="Text 33"/>
+          <p:cNvSpPr txBox="1"/>
+          <p:nvPr/>
+        </p:nvSpPr>
+        <p:spPr>
+          <a:xfrm>
+            <a:off x="6756383" y="4927588"/>
+            <a:ext cx="4825988" cy="228599"/>
+          </a:xfrm>
+          <a:prstGeom prst="rect">
+            <a:avLst/>
+          </a:prstGeom>
+          <a:noFill/>
+          <a:ln/>
+        </p:spPr>
+        <p:txBody>
+          <a:bodyPr wrap="square" lIns="0" tIns="0" rIns="0" bIns="0" rtlCol="0" anchor="ctr"/>
+          <a:lstStyle/>
+          <a:p>
+            <a:pPr indent="0" marL="0">
+              <a:buNone/>
+            </a:pPr>
+            <a:r>
+              <a:rPr lang="en-US" sz="1200" b="1" dirty="0">
+                <a:solidFill>
+                  <a:srgbClr val="1C2230"/>
+                </a:solidFill>
+                <a:latin typeface="Arial" pitchFamily="34" charset="0"/>
+                <a:ea typeface="Arial" pitchFamily="34" charset="-122"/>
+                <a:cs typeface="Arial" pitchFamily="34" charset="-120"/>
+              </a:rPr>
+              <a:t>Alles op papier</a:t>
+            </a:r>
+            <a:endParaRPr lang="en-US" sz="1200" dirty="0"/>
+          </a:p>
+        </p:txBody>
+      </p:sp>
+      <p:sp>
+        <p:nvSpPr>
+          <p:cNvPr id="44" name="Text 34"/>
+          <p:cNvSpPr txBox="1"/>
+          <p:nvPr/>
+        </p:nvSpPr>
+        <p:spPr>
+          <a:xfrm>
+            <a:off x="6756383" y="5168887"/>
+            <a:ext cx="4825988" cy="355599"/>
+          </a:xfrm>
+          <a:prstGeom prst="rect">
+            <a:avLst/>
+          </a:prstGeom>
+          <a:noFill/>
+          <a:ln/>
+        </p:spPr>
+        <p:txBody>
+          <a:bodyPr wrap="square" lIns="0" tIns="0" rIns="0" bIns="0" rtlCol="0" anchor="t"/>
+          <a:lstStyle/>
+          <a:p>
+            <a:pPr indent="0" marL="0">
+              <a:lnSpc>
+                <a:spcPct val="130000"/>
+              </a:lnSpc>
+              <a:buNone/>
+            </a:pPr>
+            <a:r>
+              <a:rPr lang="en-US" sz="950" dirty="0">
+                <a:solidFill>
+                  <a:srgbClr val="6F6A5C"/>
+                </a:solidFill>
+                <a:latin typeface="Arial" pitchFamily="34" charset="0"/>
+                <a:ea typeface="Arial" pitchFamily="34" charset="-122"/>
+                <a:cs typeface="Arial" pitchFamily="34" charset="-120"/>
+              </a:rPr>
+              <a:t>Vastgelegd in een korte samenwerkingsovereenkomst.</a:t>
+            </a:r>
+            <a:endParaRPr lang="en-US" sz="950" dirty="0"/>
+          </a:p>
+        </p:txBody>
+      </p:sp>
+    </p:spTree>
+  </p:cSld>
+  <p:clrMapOvr>
+    <a:masterClrMapping/>
+  </p:clrMapOvr>
+</p:sld>
+</file>
+
+<file path=ppt/slides/slide11.xml><?xml version="1.0" encoding="utf-8"?>
+<p:sld xmlns:a="http://schemas.openxmlformats.org/drawingml/2006/main" xmlns:r="http://schemas.openxmlformats.org/officeDocument/2006/relationships" xmlns:p="http://schemas.openxmlformats.org/presentationml/2006/main">
+  <p:cSld name="Slide 11">
     <p:bg>
       <p:bgPr>
         <a:solidFill>
@@ -2682,7 +4203,7 @@
                 <a:ea typeface="Arial" pitchFamily="34" charset="-122"/>
                 <a:cs typeface="Arial" pitchFamily="34" charset="-120"/>
               </a:rPr>
-              <a:t>10 / 10</a:t>
+              <a:t>11 / 11</a:t>
             </a:r>
             <a:endParaRPr lang="en-US" sz="750" dirty="0"/>
           </a:p>
@@ -3608,7 +5129,7 @@
                 <a:ea typeface="Arial" pitchFamily="34" charset="-122"/>
                 <a:cs typeface="Arial" pitchFamily="34" charset="-120"/>
               </a:rPr>
-              <a:t>2 / 10</a:t>
+              <a:t>2 / 11</a:t>
             </a:r>
             <a:endParaRPr lang="en-US" sz="750" dirty="0"/>
           </a:p>
@@ -4235,7 +5756,7 @@
                 <a:ea typeface="Arial" pitchFamily="34" charset="-122"/>
                 <a:cs typeface="Arial" pitchFamily="34" charset="-120"/>
               </a:rPr>
-              <a:t>3 / 10</a:t>
+              <a:t>3 / 11</a:t>
             </a:r>
             <a:endParaRPr lang="en-US" sz="750" dirty="0"/>
           </a:p>
@@ -5121,7 +6642,7 @@
                 <a:ea typeface="Arial" pitchFamily="34" charset="-122"/>
                 <a:cs typeface="Arial" pitchFamily="34" charset="-120"/>
               </a:rPr>
-              <a:t>4 / 10</a:t>
+              <a:t>4 / 11</a:t>
             </a:r>
             <a:endParaRPr lang="en-US" sz="750" dirty="0"/>
           </a:p>
@@ -6360,7 +7881,7 @@
                 <a:ea typeface="Arial" pitchFamily="34" charset="-122"/>
                 <a:cs typeface="Arial" pitchFamily="34" charset="-120"/>
               </a:rPr>
-              <a:t>5 / 10</a:t>
+              <a:t>5 / 11</a:t>
             </a:r>
             <a:endParaRPr lang="en-US" sz="750" dirty="0"/>
           </a:p>
@@ -7144,7 +8665,7 @@
                 <a:ea typeface="Arial" pitchFamily="34" charset="-122"/>
                 <a:cs typeface="Arial" pitchFamily="34" charset="-120"/>
               </a:rPr>
-              <a:t>6 / 10</a:t>
+              <a:t>6 / 11</a:t>
             </a:r>
             <a:endParaRPr lang="en-US" sz="750" dirty="0"/>
           </a:p>
@@ -8652,7 +10173,7 @@
                 <a:ea typeface="Arial" pitchFamily="34" charset="-122"/>
                 <a:cs typeface="Arial" pitchFamily="34" charset="-120"/>
               </a:rPr>
-              <a:t>7 / 10</a:t>
+              <a:t>7 / 11</a:t>
             </a:r>
             <a:endParaRPr lang="en-US" sz="750" dirty="0"/>
           </a:p>
@@ -9322,7 +10843,7 @@
     <p:bg>
       <p:bgPr>
         <a:solidFill>
-          <a:srgbClr val="E9E0CD"/>
+          <a:srgbClr val="141821"/>
         </a:solidFill>
       </p:bgPr>
     </p:bg>
@@ -9367,7 +10888,7 @@
             <a:r>
               <a:rPr lang="en-US" sz="1800" b="1" dirty="0">
                 <a:solidFill>
-                  <a:srgbClr val="1C2230"/>
+                  <a:srgbClr val="F2EFE6"/>
                 </a:solidFill>
                 <a:latin typeface="Arial" pitchFamily="34" charset="0"/>
                 <a:ea typeface="Arial" pitchFamily="34" charset="-122"/>
@@ -9420,7 +10941,7 @@
             <a:r>
               <a:rPr lang="en-US" sz="750" b="1" spc="100" kern="0" dirty="0">
                 <a:solidFill>
-                  <a:srgbClr val="6F6A5C"/>
+                  <a:srgbClr val="BDC3CE"/>
                 </a:solidFill>
                 <a:latin typeface="Arial" pitchFamily="34" charset="0"/>
                 <a:ea typeface="Arial" pitchFamily="34" charset="-122"/>
@@ -9459,13 +10980,13 @@
             <a:r>
               <a:rPr lang="en-US" sz="750" b="1" spc="100" kern="0" dirty="0">
                 <a:solidFill>
-                  <a:srgbClr val="6F6A5C"/>
-                </a:solidFill>
-                <a:latin typeface="Arial" pitchFamily="34" charset="0"/>
-                <a:ea typeface="Arial" pitchFamily="34" charset="-122"/>
-                <a:cs typeface="Arial" pitchFamily="34" charset="-120"/>
-              </a:rPr>
-              <a:t>8 / 10</a:t>
+                  <a:srgbClr val="BDC3CE"/>
+                </a:solidFill>
+                <a:latin typeface="Arial" pitchFamily="34" charset="0"/>
+                <a:ea typeface="Arial" pitchFamily="34" charset="-122"/>
+                <a:cs typeface="Arial" pitchFamily="34" charset="-120"/>
+              </a:rPr>
+              <a:t>8 / 11</a:t>
             </a:r>
             <a:endParaRPr lang="en-US" sz="750" dirty="0"/>
           </a:p>
@@ -9504,7 +11025,7 @@
                 <a:ea typeface="Arial" pitchFamily="34" charset="-122"/>
                 <a:cs typeface="Arial" pitchFamily="34" charset="-120"/>
               </a:rPr>
-              <a:t>WAT WE VAN JULLIE NODIG HEBBEN</a:t>
+              <a:t>HOE WE VERDER GAAN</a:t>
             </a:r>
             <a:endParaRPr lang="en-US" sz="950" dirty="0"/>
           </a:p>
@@ -9540,13 +11061,13 @@
             <a:r>
               <a:rPr lang="en-US" sz="3200" b="1" dirty="0">
                 <a:solidFill>
-                  <a:srgbClr val="1C2230"/>
-                </a:solidFill>
-                <a:latin typeface="Arial" pitchFamily="34" charset="0"/>
-                <a:ea typeface="Arial" pitchFamily="34" charset="-122"/>
-                <a:cs typeface="Arial" pitchFamily="34" charset="-120"/>
-              </a:rPr>
-              <a:t>Een halve dag van jullie, dan </a:t>
+                  <a:srgbClr val="F2EFE6"/>
+                </a:solidFill>
+                <a:latin typeface="Arial" pitchFamily="34" charset="0"/>
+                <a:ea typeface="Arial" pitchFamily="34" charset="-122"/>
+                <a:cs typeface="Arial" pitchFamily="34" charset="-120"/>
+              </a:rPr>
+              <a:t>Jullie kopen geen uren, maar </a:t>
             </a:r>
             <a:pPr algn="l" indent="0" marL="0">
               <a:lnSpc>
@@ -9557,13 +11078,13 @@
             <a:r>
               <a:rPr lang="en-US" sz="3000" i="1" dirty="0">
                 <a:solidFill>
-                  <a:srgbClr val="1C2230"/>
+                  <a:srgbClr val="F2EFE6"/>
                 </a:solidFill>
                 <a:latin typeface="Georgia" pitchFamily="34" charset="0"/>
                 <a:ea typeface="Georgia" pitchFamily="34" charset="-122"/>
                 <a:cs typeface="Georgia" pitchFamily="34" charset="-120"/>
               </a:rPr>
-              <a:t>draaien wij</a:t>
+              <a:t>afspraken</a:t>
             </a:r>
             <a:pPr algn="l" indent="0" marL="0">
               <a:lnSpc>
@@ -9574,7 +11095,7 @@
             <a:r>
               <a:rPr lang="en-US" sz="3200" b="1" dirty="0">
                 <a:solidFill>
-                  <a:srgbClr val="1C2230"/>
+                  <a:srgbClr val="F2EFE6"/>
                 </a:solidFill>
                 <a:latin typeface="Arial" pitchFamily="34" charset="0"/>
                 <a:ea typeface="Arial" pitchFamily="34" charset="-122"/>
@@ -9595,17 +11116,22 @@
         <p:spPr>
           <a:xfrm>
             <a:off x="609598" y="2793993"/>
-            <a:ext cx="5397487" cy="1530346"/>
+            <a:ext cx="2628893" cy="2285994"/>
           </a:xfrm>
           <a:prstGeom prst="roundRect">
             <a:avLst>
-              <a:gd name="adj" fmla="val 6639"/>
+              <a:gd name="adj" fmla="val 4444"/>
             </a:avLst>
           </a:prstGeom>
           <a:solidFill>
-            <a:srgbClr val="F8F4EB"/>
+            <a:srgbClr val="1B2130"/>
           </a:solidFill>
-          <a:ln/>
+          <a:ln w="9525">
+            <a:solidFill>
+              <a:srgbClr val="3A4152"/>
+            </a:solidFill>
+            <a:prstDash val="solid"/>
+          </a:ln>
         </p:spPr>
       </p:sp>
       <p:sp>
@@ -9616,54 +11142,202 @@
         </p:nvSpPr>
         <p:spPr>
           <a:xfrm>
-            <a:off x="939798" y="3098792"/>
-            <a:ext cx="380999" cy="380999"/>
+            <a:off x="825498" y="3022592"/>
+            <a:ext cx="292099" cy="292099"/>
+          </a:xfrm>
+          <a:prstGeom prst="ellipse">
+            <a:avLst/>
+          </a:prstGeom>
+          <a:ln w="15240">
+            <a:solidFill>
+              <a:srgbClr val="38B6FF"/>
+            </a:solidFill>
+            <a:prstDash val="solid"/>
+          </a:ln>
+        </p:spPr>
+      </p:sp>
+      <p:sp>
+        <p:nvSpPr>
+          <p:cNvPr id="9" name="Text 7"/>
+          <p:cNvSpPr txBox="1"/>
+          <p:nvPr/>
+        </p:nvSpPr>
+        <p:spPr>
+          <a:xfrm>
+            <a:off x="825498" y="3022592"/>
+            <a:ext cx="292099" cy="292099"/>
+          </a:xfrm>
+          <a:prstGeom prst="rect">
+            <a:avLst/>
+          </a:prstGeom>
+          <a:noFill/>
+          <a:ln/>
+        </p:spPr>
+        <p:txBody>
+          <a:bodyPr wrap="square" lIns="0" tIns="0" rIns="0" bIns="0" rtlCol="0" anchor="ctr"/>
+          <a:lstStyle/>
+          <a:p>
+            <a:pPr algn="ctr" indent="0" marL="0">
+              <a:buNone/>
+            </a:pPr>
+            <a:r>
+              <a:rPr lang="en-US" sz="1000" b="1" dirty="0">
+                <a:solidFill>
+                  <a:srgbClr val="38B6FF"/>
+                </a:solidFill>
+                <a:latin typeface="Arial" pitchFamily="34" charset="0"/>
+                <a:ea typeface="Arial" pitchFamily="34" charset="-122"/>
+                <a:cs typeface="Arial" pitchFamily="34" charset="-120"/>
+              </a:rPr>
+              <a:t>1</a:t>
+            </a:r>
+            <a:endParaRPr lang="en-US" sz="1000" dirty="0"/>
+          </a:p>
+        </p:txBody>
+      </p:sp>
+      <p:sp>
+        <p:nvSpPr>
+          <p:cNvPr id="10" name="Text 8"/>
+          <p:cNvSpPr txBox="1"/>
+          <p:nvPr/>
+        </p:nvSpPr>
+        <p:spPr>
+          <a:xfrm>
+            <a:off x="825498" y="3467091"/>
+            <a:ext cx="2197095" cy="406399"/>
+          </a:xfrm>
+          <a:prstGeom prst="rect">
+            <a:avLst/>
+          </a:prstGeom>
+          <a:noFill/>
+          <a:ln/>
+        </p:spPr>
+        <p:txBody>
+          <a:bodyPr wrap="square" lIns="0" tIns="0" rIns="0" bIns="0" rtlCol="0" anchor="t"/>
+          <a:lstStyle/>
+          <a:p>
+            <a:pPr indent="0" marL="0">
+              <a:lnSpc>
+                <a:spcPct val="115000"/>
+              </a:lnSpc>
+              <a:buNone/>
+            </a:pPr>
+            <a:r>
+              <a:rPr lang="en-US" sz="1150" b="1" dirty="0">
+                <a:solidFill>
+                  <a:srgbClr val="F2EFE6"/>
+                </a:solidFill>
+                <a:latin typeface="Arial" pitchFamily="34" charset="0"/>
+                <a:ea typeface="Arial" pitchFamily="34" charset="-122"/>
+                <a:cs typeface="Arial" pitchFamily="34" charset="-120"/>
+              </a:rPr>
+              <a:t>Vaste bezetting</a:t>
+            </a:r>
+            <a:endParaRPr lang="en-US" sz="1150" dirty="0"/>
+          </a:p>
+        </p:txBody>
+      </p:sp>
+      <p:sp>
+        <p:nvSpPr>
+          <p:cNvPr id="11" name="Text 9"/>
+          <p:cNvSpPr txBox="1"/>
+          <p:nvPr/>
+        </p:nvSpPr>
+        <p:spPr>
+          <a:xfrm>
+            <a:off x="825498" y="3924290"/>
+            <a:ext cx="2197095" cy="1079497"/>
+          </a:xfrm>
+          <a:prstGeom prst="rect">
+            <a:avLst/>
+          </a:prstGeom>
+          <a:noFill/>
+          <a:ln/>
+        </p:spPr>
+        <p:txBody>
+          <a:bodyPr wrap="square" lIns="0" tIns="0" rIns="0" bIns="0" rtlCol="0" anchor="t"/>
+          <a:lstStyle/>
+          <a:p>
+            <a:pPr indent="0" marL="0">
+              <a:lnSpc>
+                <a:spcPct val="130000"/>
+              </a:lnSpc>
+              <a:buNone/>
+            </a:pPr>
+            <a:r>
+              <a:rPr lang="en-US" sz="875" dirty="0">
+                <a:solidFill>
+                  <a:srgbClr val="C2C8D2"/>
+                </a:solidFill>
+                <a:latin typeface="Arial" pitchFamily="34" charset="0"/>
+                <a:ea typeface="Arial" pitchFamily="34" charset="-122"/>
+                <a:cs typeface="Arial" pitchFamily="34" charset="-120"/>
+              </a:rPr>
+              <a:t>Jullie kiezen hoeveel dagdelen per week we voor jullie bellen. Hoe meer bezetting, hoe scherper het tarief, want dan draait een vaste beller vol op jullie verhaal.</a:t>
+            </a:r>
+            <a:endParaRPr lang="en-US" sz="875" dirty="0"/>
+          </a:p>
+        </p:txBody>
+      </p:sp>
+      <p:sp>
+        <p:nvSpPr>
+          <p:cNvPr id="12" name="Shape 10"/>
+          <p:cNvSpPr/>
+          <p:nvPr/>
+        </p:nvSpPr>
+        <p:spPr>
+          <a:xfrm>
+            <a:off x="3390892" y="2793993"/>
+            <a:ext cx="2628893" cy="2285994"/>
           </a:xfrm>
           <a:prstGeom prst="roundRect">
             <a:avLst>
-              <a:gd name="adj" fmla="val 23333"/>
+              <a:gd name="adj" fmla="val 4444"/>
             </a:avLst>
           </a:prstGeom>
           <a:solidFill>
-            <a:srgbClr val="DDEBF3"/>
+            <a:srgbClr val="1B2130"/>
           </a:solidFill>
-          <a:ln/>
-        </p:spPr>
-      </p:sp>
-      <p:pic>
-        <p:nvPicPr>
-          <p:cNvPr id="9" name="Image 0" descr="preencoded.png">    </p:cNvPr>
-          <p:cNvPicPr>
-            <a:picLocks noChangeAspect="1"/>
-          </p:cNvPicPr>
-          <p:nvPr/>
-        </p:nvPicPr>
-        <p:blipFill>
-          <a:blip r:embed="rId1"/>
-          <a:stretch>
-            <a:fillRect/>
-          </a:stretch>
-        </p:blipFill>
-        <p:spPr>
-          <a:xfrm>
-            <a:off x="1035047" y="3194042"/>
-            <a:ext cx="190500" cy="190500"/>
-          </a:xfrm>
-          <a:prstGeom prst="rect">
-            <a:avLst/>
-          </a:prstGeom>
-        </p:spPr>
-      </p:pic>
-      <p:sp>
-        <p:nvSpPr>
-          <p:cNvPr id="10" name="Text 7"/>
-          <p:cNvSpPr txBox="1"/>
-          <p:nvPr/>
-        </p:nvSpPr>
-        <p:spPr>
-          <a:xfrm>
-            <a:off x="1549396" y="3073392"/>
-            <a:ext cx="4127490" cy="279399"/>
+          <a:ln w="9525">
+            <a:solidFill>
+              <a:srgbClr val="3A4152"/>
+            </a:solidFill>
+            <a:prstDash val="solid"/>
+          </a:ln>
+        </p:spPr>
+      </p:sp>
+      <p:sp>
+        <p:nvSpPr>
+          <p:cNvPr id="13" name="Shape 11"/>
+          <p:cNvSpPr/>
+          <p:nvPr/>
+        </p:nvSpPr>
+        <p:spPr>
+          <a:xfrm>
+            <a:off x="3606791" y="3022592"/>
+            <a:ext cx="292099" cy="292099"/>
+          </a:xfrm>
+          <a:prstGeom prst="ellipse">
+            <a:avLst/>
+          </a:prstGeom>
+          <a:ln w="15240">
+            <a:solidFill>
+              <a:srgbClr val="38B6FF"/>
+            </a:solidFill>
+            <a:prstDash val="solid"/>
+          </a:ln>
+        </p:spPr>
+      </p:sp>
+      <p:sp>
+        <p:nvSpPr>
+          <p:cNvPr id="14" name="Text 12"/>
+          <p:cNvSpPr txBox="1"/>
+          <p:nvPr/>
+        </p:nvSpPr>
+        <p:spPr>
+          <a:xfrm>
+            <a:off x="3606791" y="3022592"/>
+            <a:ext cx="292099" cy="292099"/>
           </a:xfrm>
           <a:prstGeom prst="rect">
             <a:avLst/>
@@ -9675,34 +11349,34 @@
           <a:bodyPr wrap="square" lIns="0" tIns="0" rIns="0" bIns="0" rtlCol="0" anchor="ctr"/>
           <a:lstStyle/>
           <a:p>
-            <a:pPr indent="0" marL="0">
-              <a:buNone/>
-            </a:pPr>
-            <a:r>
-              <a:rPr lang="en-US" sz="1450" b="1" dirty="0">
-                <a:solidFill>
-                  <a:srgbClr val="1C2230"/>
-                </a:solidFill>
-                <a:latin typeface="Arial" pitchFamily="34" charset="0"/>
-                <a:ea typeface="Arial" pitchFamily="34" charset="-122"/>
-                <a:cs typeface="Arial" pitchFamily="34" charset="-120"/>
-              </a:rPr>
-              <a:t>Kick-off sessie</a:t>
-            </a:r>
-            <a:endParaRPr lang="en-US" sz="1450" dirty="0"/>
-          </a:p>
-        </p:txBody>
-      </p:sp>
-      <p:sp>
-        <p:nvSpPr>
-          <p:cNvPr id="11" name="Text 8"/>
-          <p:cNvSpPr txBox="1"/>
-          <p:nvPr/>
-        </p:nvSpPr>
-        <p:spPr>
-          <a:xfrm>
-            <a:off x="1549396" y="3403591"/>
-            <a:ext cx="4063990" cy="698498"/>
+            <a:pPr algn="ctr" indent="0" marL="0">
+              <a:buNone/>
+            </a:pPr>
+            <a:r>
+              <a:rPr lang="en-US" sz="1000" b="1" dirty="0">
+                <a:solidFill>
+                  <a:srgbClr val="38B6FF"/>
+                </a:solidFill>
+                <a:latin typeface="Arial" pitchFamily="34" charset="0"/>
+                <a:ea typeface="Arial" pitchFamily="34" charset="-122"/>
+                <a:cs typeface="Arial" pitchFamily="34" charset="-120"/>
+              </a:rPr>
+              <a:t>2</a:t>
+            </a:r>
+            <a:endParaRPr lang="en-US" sz="1000" dirty="0"/>
+          </a:p>
+        </p:txBody>
+      </p:sp>
+      <p:sp>
+        <p:nvSpPr>
+          <p:cNvPr id="15" name="Text 13"/>
+          <p:cNvSpPr txBox="1"/>
+          <p:nvPr/>
+        </p:nvSpPr>
+        <p:spPr>
+          <a:xfrm>
+            <a:off x="3606791" y="3467091"/>
+            <a:ext cx="2197095" cy="406399"/>
           </a:xfrm>
           <a:prstGeom prst="rect">
             <a:avLst/>
@@ -9716,103 +11390,298 @@
           <a:p>
             <a:pPr indent="0" marL="0">
               <a:lnSpc>
-                <a:spcPct val="135000"/>
+                <a:spcPct val="115000"/>
               </a:lnSpc>
               <a:buNone/>
             </a:pPr>
             <a:r>
-              <a:rPr lang="en-US" sz="1050" dirty="0">
-                <a:solidFill>
-                  <a:srgbClr val="6F6A5C"/>
-                </a:solidFill>
-                <a:latin typeface="Arial" pitchFamily="34" charset="0"/>
-                <a:ea typeface="Arial" pitchFamily="34" charset="-122"/>
-                <a:cs typeface="Arial" pitchFamily="34" charset="-120"/>
-              </a:rPr>
-              <a:t>Anderhalf tot twee uur met de beslisser en degene die de afspraken gaat voeren.</a:t>
-            </a:r>
-            <a:endParaRPr lang="en-US" sz="1050" dirty="0"/>
-          </a:p>
-        </p:txBody>
-      </p:sp>
-      <p:sp>
-        <p:nvSpPr>
-          <p:cNvPr id="12" name="Shape 9"/>
+              <a:rPr lang="en-US" sz="1150" b="1" dirty="0">
+                <a:solidFill>
+                  <a:srgbClr val="F2EFE6"/>
+                </a:solidFill>
+                <a:latin typeface="Arial" pitchFamily="34" charset="0"/>
+                <a:ea typeface="Arial" pitchFamily="34" charset="-122"/>
+                <a:cs typeface="Arial" pitchFamily="34" charset="-120"/>
+              </a:rPr>
+              <a:t>Vast target</a:t>
+            </a:r>
+            <a:endParaRPr lang="en-US" sz="1150" dirty="0"/>
+          </a:p>
+        </p:txBody>
+      </p:sp>
+      <p:sp>
+        <p:nvSpPr>
+          <p:cNvPr id="16" name="Text 14"/>
+          <p:cNvSpPr txBox="1"/>
+          <p:nvPr/>
+        </p:nvSpPr>
+        <p:spPr>
+          <a:xfrm>
+            <a:off x="3606791" y="3924290"/>
+            <a:ext cx="2197095" cy="1079497"/>
+          </a:xfrm>
+          <a:prstGeom prst="rect">
+            <a:avLst/>
+          </a:prstGeom>
+          <a:noFill/>
+          <a:ln/>
+        </p:spPr>
+        <p:txBody>
+          <a:bodyPr wrap="square" lIns="0" tIns="0" rIns="0" bIns="0" rtlCol="0" anchor="t"/>
+          <a:lstStyle/>
+          <a:p>
+            <a:pPr indent="0" marL="0">
+              <a:lnSpc>
+                <a:spcPct val="130000"/>
+              </a:lnSpc>
+              <a:buNone/>
+            </a:pPr>
+            <a:r>
+              <a:rPr lang="en-US" sz="875" dirty="0">
+                <a:solidFill>
+                  <a:srgbClr val="C2C8D2"/>
+                </a:solidFill>
+                <a:latin typeface="Arial" pitchFamily="34" charset="0"/>
+                <a:ea typeface="Arial" pitchFamily="34" charset="-122"/>
+                <a:cs typeface="Arial" pitchFamily="34" charset="-120"/>
+              </a:rPr>
+              <a:t>Aan die bezetting hangt een vast aantal gekwalificeerde afspraken per werkperiode. Dat getal komt uit jullie eigen pilot, niet uit een aanname.</a:t>
+            </a:r>
+            <a:endParaRPr lang="en-US" sz="875" dirty="0"/>
+          </a:p>
+        </p:txBody>
+      </p:sp>
+      <p:sp>
+        <p:nvSpPr>
+          <p:cNvPr id="17" name="Shape 15"/>
           <p:cNvSpPr/>
           <p:nvPr/>
         </p:nvSpPr>
         <p:spPr>
           <a:xfrm>
-            <a:off x="6184885" y="2793993"/>
-            <a:ext cx="5397487" cy="1530346"/>
+            <a:off x="6172185" y="2793993"/>
+            <a:ext cx="2628893" cy="2285994"/>
           </a:xfrm>
           <a:prstGeom prst="roundRect">
             <a:avLst>
-              <a:gd name="adj" fmla="val 6639"/>
+              <a:gd name="adj" fmla="val 4444"/>
             </a:avLst>
           </a:prstGeom>
           <a:solidFill>
-            <a:srgbClr val="F8F4EB"/>
+            <a:srgbClr val="1B2130"/>
           </a:solidFill>
-          <a:ln/>
-        </p:spPr>
-      </p:sp>
-      <p:sp>
-        <p:nvSpPr>
-          <p:cNvPr id="13" name="Shape 10"/>
+          <a:ln w="9525">
+            <a:solidFill>
+              <a:srgbClr val="3A4152"/>
+            </a:solidFill>
+            <a:prstDash val="solid"/>
+          </a:ln>
+        </p:spPr>
+      </p:sp>
+      <p:sp>
+        <p:nvSpPr>
+          <p:cNvPr id="18" name="Shape 16"/>
           <p:cNvSpPr/>
           <p:nvPr/>
         </p:nvSpPr>
         <p:spPr>
           <a:xfrm>
-            <a:off x="6515084" y="3098792"/>
-            <a:ext cx="380999" cy="380999"/>
+            <a:off x="6388084" y="3022592"/>
+            <a:ext cx="292099" cy="292099"/>
+          </a:xfrm>
+          <a:prstGeom prst="ellipse">
+            <a:avLst/>
+          </a:prstGeom>
+          <a:ln w="15240">
+            <a:solidFill>
+              <a:srgbClr val="38B6FF"/>
+            </a:solidFill>
+            <a:prstDash val="solid"/>
+          </a:ln>
+        </p:spPr>
+      </p:sp>
+      <p:sp>
+        <p:nvSpPr>
+          <p:cNvPr id="19" name="Text 17"/>
+          <p:cNvSpPr txBox="1"/>
+          <p:nvPr/>
+        </p:nvSpPr>
+        <p:spPr>
+          <a:xfrm>
+            <a:off x="6388084" y="3022592"/>
+            <a:ext cx="292099" cy="292099"/>
+          </a:xfrm>
+          <a:prstGeom prst="rect">
+            <a:avLst/>
+          </a:prstGeom>
+          <a:noFill/>
+          <a:ln/>
+        </p:spPr>
+        <p:txBody>
+          <a:bodyPr wrap="square" lIns="0" tIns="0" rIns="0" bIns="0" rtlCol="0" anchor="ctr"/>
+          <a:lstStyle/>
+          <a:p>
+            <a:pPr algn="ctr" indent="0" marL="0">
+              <a:buNone/>
+            </a:pPr>
+            <a:r>
+              <a:rPr lang="en-US" sz="1000" b="1" dirty="0">
+                <a:solidFill>
+                  <a:srgbClr val="38B6FF"/>
+                </a:solidFill>
+                <a:latin typeface="Arial" pitchFamily="34" charset="0"/>
+                <a:ea typeface="Arial" pitchFamily="34" charset="-122"/>
+                <a:cs typeface="Arial" pitchFamily="34" charset="-120"/>
+              </a:rPr>
+              <a:t>3</a:t>
+            </a:r>
+            <a:endParaRPr lang="en-US" sz="1000" dirty="0"/>
+          </a:p>
+        </p:txBody>
+      </p:sp>
+      <p:sp>
+        <p:nvSpPr>
+          <p:cNvPr id="20" name="Text 18"/>
+          <p:cNvSpPr txBox="1"/>
+          <p:nvPr/>
+        </p:nvSpPr>
+        <p:spPr>
+          <a:xfrm>
+            <a:off x="6388084" y="3467091"/>
+            <a:ext cx="2197095" cy="406399"/>
+          </a:xfrm>
+          <a:prstGeom prst="rect">
+            <a:avLst/>
+          </a:prstGeom>
+          <a:noFill/>
+          <a:ln/>
+        </p:spPr>
+        <p:txBody>
+          <a:bodyPr wrap="square" lIns="0" tIns="0" rIns="0" bIns="0" rtlCol="0" anchor="t"/>
+          <a:lstStyle/>
+          <a:p>
+            <a:pPr indent="0" marL="0">
+              <a:lnSpc>
+                <a:spcPct val="115000"/>
+              </a:lnSpc>
+              <a:buNone/>
+            </a:pPr>
+            <a:r>
+              <a:rPr lang="en-US" sz="1150" b="1" dirty="0">
+                <a:solidFill>
+                  <a:srgbClr val="F2EFE6"/>
+                </a:solidFill>
+                <a:latin typeface="Arial" pitchFamily="34" charset="0"/>
+                <a:ea typeface="Arial" pitchFamily="34" charset="-122"/>
+                <a:cs typeface="Arial" pitchFamily="34" charset="-120"/>
+              </a:rPr>
+              <a:t>Onder target bellen we door</a:t>
+            </a:r>
+            <a:endParaRPr lang="en-US" sz="1150" dirty="0"/>
+          </a:p>
+        </p:txBody>
+      </p:sp>
+      <p:sp>
+        <p:nvSpPr>
+          <p:cNvPr id="21" name="Text 19"/>
+          <p:cNvSpPr txBox="1"/>
+          <p:nvPr/>
+        </p:nvSpPr>
+        <p:spPr>
+          <a:xfrm>
+            <a:off x="6388084" y="3924290"/>
+            <a:ext cx="2197095" cy="1079497"/>
+          </a:xfrm>
+          <a:prstGeom prst="rect">
+            <a:avLst/>
+          </a:prstGeom>
+          <a:noFill/>
+          <a:ln/>
+        </p:spPr>
+        <p:txBody>
+          <a:bodyPr wrap="square" lIns="0" tIns="0" rIns="0" bIns="0" rtlCol="0" anchor="t"/>
+          <a:lstStyle/>
+          <a:p>
+            <a:pPr indent="0" marL="0">
+              <a:lnSpc>
+                <a:spcPct val="130000"/>
+              </a:lnSpc>
+              <a:buNone/>
+            </a:pPr>
+            <a:r>
+              <a:rPr lang="en-US" sz="875" dirty="0">
+                <a:solidFill>
+                  <a:srgbClr val="C2C8D2"/>
+                </a:solidFill>
+                <a:latin typeface="Arial" pitchFamily="34" charset="0"/>
+                <a:ea typeface="Arial" pitchFamily="34" charset="-122"/>
+                <a:cs typeface="Arial" pitchFamily="34" charset="-120"/>
+              </a:rPr>
+              <a:t>Staat het aantal aan het eind van de werkperiode niet, dan bellen we door zonder extra kosten tot het er wel staat.</a:t>
+            </a:r>
+            <a:endParaRPr lang="en-US" sz="875" dirty="0"/>
+          </a:p>
+        </p:txBody>
+      </p:sp>
+      <p:sp>
+        <p:nvSpPr>
+          <p:cNvPr id="22" name="Shape 20"/>
+          <p:cNvSpPr/>
+          <p:nvPr/>
+        </p:nvSpPr>
+        <p:spPr>
+          <a:xfrm>
+            <a:off x="8953478" y="2793993"/>
+            <a:ext cx="2628893" cy="2285994"/>
           </a:xfrm>
           <a:prstGeom prst="roundRect">
             <a:avLst>
-              <a:gd name="adj" fmla="val 23333"/>
+              <a:gd name="adj" fmla="val 4444"/>
             </a:avLst>
           </a:prstGeom>
           <a:solidFill>
-            <a:srgbClr val="DDEBF3"/>
+            <a:srgbClr val="1B2130"/>
           </a:solidFill>
-          <a:ln/>
-        </p:spPr>
-      </p:sp>
-      <p:pic>
-        <p:nvPicPr>
-          <p:cNvPr id="14" name="Image 1" descr="preencoded.png">    </p:cNvPr>
-          <p:cNvPicPr>
-            <a:picLocks noChangeAspect="1"/>
-          </p:cNvPicPr>
-          <p:nvPr/>
-        </p:nvPicPr>
-        <p:blipFill>
-          <a:blip r:embed="rId2"/>
-          <a:stretch>
-            <a:fillRect/>
-          </a:stretch>
-        </p:blipFill>
-        <p:spPr>
-          <a:xfrm>
-            <a:off x="6610333" y="3194042"/>
-            <a:ext cx="190500" cy="190500"/>
-          </a:xfrm>
-          <a:prstGeom prst="rect">
-            <a:avLst/>
-          </a:prstGeom>
-        </p:spPr>
-      </p:pic>
-      <p:sp>
-        <p:nvSpPr>
-          <p:cNvPr id="15" name="Text 11"/>
-          <p:cNvSpPr txBox="1"/>
-          <p:nvPr/>
-        </p:nvSpPr>
-        <p:spPr>
-          <a:xfrm>
-            <a:off x="7124682" y="3073392"/>
-            <a:ext cx="4127490" cy="279399"/>
+          <a:ln w="15240">
+            <a:solidFill>
+              <a:srgbClr val="38B6FF"/>
+            </a:solidFill>
+            <a:prstDash val="solid"/>
+          </a:ln>
+        </p:spPr>
+      </p:sp>
+      <p:sp>
+        <p:nvSpPr>
+          <p:cNvPr id="23" name="Shape 21"/>
+          <p:cNvSpPr/>
+          <p:nvPr/>
+        </p:nvSpPr>
+        <p:spPr>
+          <a:xfrm>
+            <a:off x="9169377" y="3022592"/>
+            <a:ext cx="292099" cy="292099"/>
+          </a:xfrm>
+          <a:prstGeom prst="ellipse">
+            <a:avLst/>
+          </a:prstGeom>
+          <a:ln w="15240">
+            <a:solidFill>
+              <a:srgbClr val="38B6FF"/>
+            </a:solidFill>
+            <a:prstDash val="solid"/>
+          </a:ln>
+        </p:spPr>
+      </p:sp>
+      <p:sp>
+        <p:nvSpPr>
+          <p:cNvPr id="24" name="Text 22"/>
+          <p:cNvSpPr txBox="1"/>
+          <p:nvPr/>
+        </p:nvSpPr>
+        <p:spPr>
+          <a:xfrm>
+            <a:off x="9169377" y="3022592"/>
+            <a:ext cx="292099" cy="292099"/>
           </a:xfrm>
           <a:prstGeom prst="rect">
             <a:avLst/>
@@ -9824,34 +11693,34 @@
           <a:bodyPr wrap="square" lIns="0" tIns="0" rIns="0" bIns="0" rtlCol="0" anchor="ctr"/>
           <a:lstStyle/>
           <a:p>
-            <a:pPr indent="0" marL="0">
-              <a:buNone/>
-            </a:pPr>
-            <a:r>
-              <a:rPr lang="en-US" sz="1450" b="1" dirty="0">
-                <a:solidFill>
-                  <a:srgbClr val="1C2230"/>
-                </a:solidFill>
-                <a:latin typeface="Arial" pitchFamily="34" charset="0"/>
-                <a:ea typeface="Arial" pitchFamily="34" charset="-122"/>
-                <a:cs typeface="Arial" pitchFamily="34" charset="-120"/>
-              </a:rPr>
-              <a:t>Uitsluitlijst</a:t>
-            </a:r>
-            <a:endParaRPr lang="en-US" sz="1450" dirty="0"/>
-          </a:p>
-        </p:txBody>
-      </p:sp>
-      <p:sp>
-        <p:nvSpPr>
-          <p:cNvPr id="16" name="Text 12"/>
-          <p:cNvSpPr txBox="1"/>
-          <p:nvPr/>
-        </p:nvSpPr>
-        <p:spPr>
-          <a:xfrm>
-            <a:off x="7124682" y="3403591"/>
-            <a:ext cx="4063990" cy="698498"/>
+            <a:pPr algn="ctr" indent="0" marL="0">
+              <a:buNone/>
+            </a:pPr>
+            <a:r>
+              <a:rPr lang="en-US" sz="1000" b="1" dirty="0">
+                <a:solidFill>
+                  <a:srgbClr val="38B6FF"/>
+                </a:solidFill>
+                <a:latin typeface="Arial" pitchFamily="34" charset="0"/>
+                <a:ea typeface="Arial" pitchFamily="34" charset="-122"/>
+                <a:cs typeface="Arial" pitchFamily="34" charset="-120"/>
+              </a:rPr>
+              <a:t>4</a:t>
+            </a:r>
+            <a:endParaRPr lang="en-US" sz="1000" dirty="0"/>
+          </a:p>
+        </p:txBody>
+      </p:sp>
+      <p:sp>
+        <p:nvSpPr>
+          <p:cNvPr id="25" name="Text 23"/>
+          <p:cNvSpPr txBox="1"/>
+          <p:nvPr/>
+        </p:nvSpPr>
+        <p:spPr>
+          <a:xfrm>
+            <a:off x="9169377" y="3467091"/>
+            <a:ext cx="2197095" cy="406399"/>
           </a:xfrm>
           <a:prstGeom prst="rect">
             <a:avLst/>
@@ -9865,142 +11734,35 @@
           <a:p>
             <a:pPr indent="0" marL="0">
               <a:lnSpc>
-                <a:spcPct val="135000"/>
+                <a:spcPct val="115000"/>
               </a:lnSpc>
               <a:buNone/>
             </a:pPr>
             <a:r>
-              <a:rPr lang="en-US" sz="1050" dirty="0">
-                <a:solidFill>
-                  <a:srgbClr val="6F6A5C"/>
-                </a:solidFill>
-                <a:latin typeface="Arial" pitchFamily="34" charset="0"/>
-                <a:ea typeface="Arial" pitchFamily="34" charset="-122"/>
-                <a:cs typeface="Arial" pitchFamily="34" charset="-120"/>
-              </a:rPr>
-              <a:t>Bestaande klanten, lopende gesprekken en bedrijven die we niet mogen benaderen.</a:t>
-            </a:r>
-            <a:endParaRPr lang="en-US" sz="1050" dirty="0"/>
-          </a:p>
-        </p:txBody>
-      </p:sp>
-      <p:sp>
-        <p:nvSpPr>
-          <p:cNvPr id="17" name="Shape 13"/>
-          <p:cNvSpPr/>
-          <p:nvPr/>
-        </p:nvSpPr>
-        <p:spPr>
-          <a:xfrm>
-            <a:off x="609598" y="4502139"/>
-            <a:ext cx="5397487" cy="1530346"/>
-          </a:xfrm>
-          <a:prstGeom prst="roundRect">
-            <a:avLst>
-              <a:gd name="adj" fmla="val 6639"/>
-            </a:avLst>
-          </a:prstGeom>
-          <a:solidFill>
-            <a:srgbClr val="F8F4EB"/>
-          </a:solidFill>
-          <a:ln/>
-        </p:spPr>
-      </p:sp>
-      <p:sp>
-        <p:nvSpPr>
-          <p:cNvPr id="18" name="Shape 14"/>
-          <p:cNvSpPr/>
-          <p:nvPr/>
-        </p:nvSpPr>
-        <p:spPr>
-          <a:xfrm>
-            <a:off x="939798" y="4806938"/>
-            <a:ext cx="380999" cy="380999"/>
-          </a:xfrm>
-          <a:prstGeom prst="roundRect">
-            <a:avLst>
-              <a:gd name="adj" fmla="val 23333"/>
-            </a:avLst>
-          </a:prstGeom>
-          <a:solidFill>
-            <a:srgbClr val="DDEBF3"/>
-          </a:solidFill>
-          <a:ln/>
-        </p:spPr>
-      </p:sp>
-      <p:pic>
-        <p:nvPicPr>
-          <p:cNvPr id="19" name="Image 2" descr="preencoded.png">    </p:cNvPr>
-          <p:cNvPicPr>
-            <a:picLocks noChangeAspect="1"/>
-          </p:cNvPicPr>
-          <p:nvPr/>
-        </p:nvPicPr>
-        <p:blipFill>
-          <a:blip r:embed="rId3"/>
-          <a:stretch>
-            <a:fillRect/>
-          </a:stretch>
-        </p:blipFill>
-        <p:spPr>
-          <a:xfrm>
-            <a:off x="1035047" y="4902188"/>
-            <a:ext cx="190500" cy="190500"/>
-          </a:xfrm>
-          <a:prstGeom prst="rect">
-            <a:avLst/>
-          </a:prstGeom>
-        </p:spPr>
-      </p:pic>
-      <p:sp>
-        <p:nvSpPr>
-          <p:cNvPr id="20" name="Text 15"/>
-          <p:cNvSpPr txBox="1"/>
-          <p:nvPr/>
-        </p:nvSpPr>
-        <p:spPr>
-          <a:xfrm>
-            <a:off x="1549396" y="4781538"/>
-            <a:ext cx="4127490" cy="279399"/>
-          </a:xfrm>
-          <a:prstGeom prst="rect">
-            <a:avLst/>
-          </a:prstGeom>
-          <a:noFill/>
-          <a:ln/>
-        </p:spPr>
-        <p:txBody>
-          <a:bodyPr wrap="square" lIns="0" tIns="0" rIns="0" bIns="0" rtlCol="0" anchor="ctr"/>
-          <a:lstStyle/>
-          <a:p>
-            <a:pPr indent="0" marL="0">
-              <a:buNone/>
-            </a:pPr>
-            <a:r>
-              <a:rPr lang="en-US" sz="1450" b="1" dirty="0">
-                <a:solidFill>
-                  <a:srgbClr val="1C2230"/>
-                </a:solidFill>
-                <a:latin typeface="Arial" pitchFamily="34" charset="0"/>
-                <a:ea typeface="Arial" pitchFamily="34" charset="-122"/>
-                <a:cs typeface="Arial" pitchFamily="34" charset="-120"/>
-              </a:rPr>
-              <a:t>Goedkeuring belscript</a:t>
-            </a:r>
-            <a:endParaRPr lang="en-US" sz="1450" dirty="0"/>
-          </a:p>
-        </p:txBody>
-      </p:sp>
-      <p:sp>
-        <p:nvSpPr>
-          <p:cNvPr id="21" name="Text 16"/>
-          <p:cNvSpPr txBox="1"/>
-          <p:nvPr/>
-        </p:nvSpPr>
-        <p:spPr>
-          <a:xfrm>
-            <a:off x="1549396" y="5111737"/>
-            <a:ext cx="4063990" cy="698498"/>
+              <a:rPr lang="en-US" sz="1150" b="1" dirty="0">
+                <a:solidFill>
+                  <a:srgbClr val="38B6FF"/>
+                </a:solidFill>
+                <a:latin typeface="Arial" pitchFamily="34" charset="0"/>
+                <a:ea typeface="Arial" pitchFamily="34" charset="-122"/>
+                <a:cs typeface="Arial" pitchFamily="34" charset="-120"/>
+              </a:rPr>
+              <a:t>Boven target delen we mee</a:t>
+            </a:r>
+            <a:endParaRPr lang="en-US" sz="1150" dirty="0"/>
+          </a:p>
+        </p:txBody>
+      </p:sp>
+      <p:sp>
+        <p:nvSpPr>
+          <p:cNvPr id="26" name="Text 24"/>
+          <p:cNvSpPr txBox="1"/>
+          <p:nvPr/>
+        </p:nvSpPr>
+        <p:spPr>
+          <a:xfrm>
+            <a:off x="9169377" y="3924290"/>
+            <a:ext cx="2197095" cy="1079497"/>
           </a:xfrm>
           <a:prstGeom prst="rect">
             <a:avLst/>
@@ -10014,103 +11776,55 @@
           <a:p>
             <a:pPr indent="0" marL="0">
               <a:lnSpc>
-                <a:spcPct val="135000"/>
+                <a:spcPct val="130000"/>
               </a:lnSpc>
               <a:buNone/>
             </a:pPr>
             <a:r>
-              <a:rPr lang="en-US" sz="1050" dirty="0">
-                <a:solidFill>
-                  <a:srgbClr val="6F6A5C"/>
-                </a:solidFill>
-                <a:latin typeface="Arial" pitchFamily="34" charset="0"/>
-                <a:ea typeface="Arial" pitchFamily="34" charset="-122"/>
-                <a:cs typeface="Arial" pitchFamily="34" charset="-120"/>
-              </a:rPr>
-              <a:t>Wij schrijven, jullie lezen mee en keuren goed.</a:t>
-            </a:r>
-            <a:endParaRPr lang="en-US" sz="1050" dirty="0"/>
-          </a:p>
-        </p:txBody>
-      </p:sp>
-      <p:sp>
-        <p:nvSpPr>
-          <p:cNvPr id="22" name="Shape 17"/>
+              <a:rPr lang="en-US" sz="875" dirty="0">
+                <a:solidFill>
+                  <a:srgbClr val="C2C8D2"/>
+                </a:solidFill>
+                <a:latin typeface="Arial" pitchFamily="34" charset="0"/>
+                <a:ea typeface="Arial" pitchFamily="34" charset="-122"/>
+                <a:cs typeface="Arial" pitchFamily="34" charset="-120"/>
+              </a:rPr>
+              <a:t>Komen er meer afspraken uit dan afgesproken, dan spreken we daar vooraf een bonus voor af. Zo blijft doorpakken voor ons allebei interessant.</a:t>
+            </a:r>
+            <a:endParaRPr lang="en-US" sz="875" dirty="0"/>
+          </a:p>
+        </p:txBody>
+      </p:sp>
+      <p:sp>
+        <p:nvSpPr>
+          <p:cNvPr id="27" name="Shape 25"/>
           <p:cNvSpPr/>
           <p:nvPr/>
         </p:nvSpPr>
         <p:spPr>
           <a:xfrm>
-            <a:off x="6184885" y="4502139"/>
-            <a:ext cx="5397487" cy="1530346"/>
-          </a:xfrm>
-          <a:prstGeom prst="roundRect">
-            <a:avLst>
-              <a:gd name="adj" fmla="val 6639"/>
-            </a:avLst>
+            <a:off x="609598" y="5854685"/>
+            <a:ext cx="76200" cy="76200"/>
+          </a:xfrm>
+          <a:prstGeom prst="ellipse">
+            <a:avLst/>
           </a:prstGeom>
           <a:solidFill>
-            <a:srgbClr val="F8F4EB"/>
+            <a:srgbClr val="38B6FF"/>
           </a:solidFill>
           <a:ln/>
         </p:spPr>
       </p:sp>
       <p:sp>
         <p:nvSpPr>
-          <p:cNvPr id="23" name="Shape 18"/>
-          <p:cNvSpPr/>
-          <p:nvPr/>
-        </p:nvSpPr>
-        <p:spPr>
-          <a:xfrm>
-            <a:off x="6515084" y="4806938"/>
-            <a:ext cx="380999" cy="380999"/>
-          </a:xfrm>
-          <a:prstGeom prst="roundRect">
-            <a:avLst>
-              <a:gd name="adj" fmla="val 23333"/>
-            </a:avLst>
-          </a:prstGeom>
-          <a:solidFill>
-            <a:srgbClr val="DDEBF3"/>
-          </a:solidFill>
-          <a:ln/>
-        </p:spPr>
-      </p:sp>
-      <p:pic>
-        <p:nvPicPr>
-          <p:cNvPr id="24" name="Image 3" descr="preencoded.png">    </p:cNvPr>
-          <p:cNvPicPr>
-            <a:picLocks noChangeAspect="1"/>
-          </p:cNvPicPr>
-          <p:nvPr/>
-        </p:nvPicPr>
-        <p:blipFill>
-          <a:blip r:embed="rId4"/>
-          <a:stretch>
-            <a:fillRect/>
-          </a:stretch>
-        </p:blipFill>
-        <p:spPr>
-          <a:xfrm>
-            <a:off x="6610333" y="4902188"/>
-            <a:ext cx="190500" cy="190500"/>
-          </a:xfrm>
-          <a:prstGeom prst="rect">
-            <a:avLst/>
-          </a:prstGeom>
-        </p:spPr>
-      </p:pic>
-      <p:sp>
-        <p:nvSpPr>
-          <p:cNvPr id="25" name="Text 19"/>
-          <p:cNvSpPr txBox="1"/>
-          <p:nvPr/>
-        </p:nvSpPr>
-        <p:spPr>
-          <a:xfrm>
-            <a:off x="7124682" y="4781538"/>
-            <a:ext cx="4127490" cy="279399"/>
+          <p:cNvPr id="28" name="Text 26"/>
+          <p:cNvSpPr txBox="1"/>
+          <p:nvPr/>
+        </p:nvSpPr>
+        <p:spPr>
+          <a:xfrm>
+            <a:off x="800098" y="5714986"/>
+            <a:ext cx="9905975" cy="355599"/>
           </a:xfrm>
           <a:prstGeom prst="rect">
             <a:avLst/>
@@ -10126,59 +11840,17 @@
               <a:buNone/>
             </a:pPr>
             <a:r>
-              <a:rPr lang="en-US" sz="1450" b="1" dirty="0">
-                <a:solidFill>
-                  <a:srgbClr val="1C2230"/>
-                </a:solidFill>
-                <a:latin typeface="Arial" pitchFamily="34" charset="0"/>
-                <a:ea typeface="Arial" pitchFamily="34" charset="-122"/>
-                <a:cs typeface="Arial" pitchFamily="34" charset="-120"/>
-              </a:rPr>
-              <a:t>Opvolging van afspraken</a:t>
-            </a:r>
-            <a:endParaRPr lang="en-US" sz="1450" dirty="0"/>
-          </a:p>
-        </p:txBody>
-      </p:sp>
-      <p:sp>
-        <p:nvSpPr>
-          <p:cNvPr id="26" name="Text 20"/>
-          <p:cNvSpPr txBox="1"/>
-          <p:nvPr/>
-        </p:nvSpPr>
-        <p:spPr>
-          <a:xfrm>
-            <a:off x="7124682" y="5111737"/>
-            <a:ext cx="4063990" cy="698498"/>
-          </a:xfrm>
-          <a:prstGeom prst="rect">
-            <a:avLst/>
-          </a:prstGeom>
-          <a:noFill/>
-          <a:ln/>
-        </p:spPr>
-        <p:txBody>
-          <a:bodyPr wrap="square" lIns="0" tIns="0" rIns="0" bIns="0" rtlCol="0" anchor="t"/>
-          <a:lstStyle/>
-          <a:p>
-            <a:pPr indent="0" marL="0">
-              <a:lnSpc>
-                <a:spcPct val="135000"/>
-              </a:lnSpc>
-              <a:buNone/>
-            </a:pPr>
-            <a:r>
-              <a:rPr lang="en-US" sz="1050" dirty="0">
-                <a:solidFill>
-                  <a:srgbClr val="6F6A5C"/>
-                </a:solidFill>
-                <a:latin typeface="Arial" pitchFamily="34" charset="0"/>
-                <a:ea typeface="Arial" pitchFamily="34" charset="-122"/>
-                <a:cs typeface="Arial" pitchFamily="34" charset="-120"/>
-              </a:rPr>
-              <a:t>Eén vaste persoon die de afspraken voert en ons kort laat weten hoe ze verliepen.</a:t>
-            </a:r>
-            <a:endParaRPr lang="en-US" sz="1050" dirty="0"/>
+              <a:rPr lang="en-US" sz="1200" b="1" dirty="0">
+                <a:solidFill>
+                  <a:srgbClr val="F2EFE6"/>
+                </a:solidFill>
+                <a:latin typeface="Arial" pitchFamily="34" charset="0"/>
+                <a:ea typeface="Arial" pitchFamily="34" charset="-122"/>
+                <a:cs typeface="Arial" pitchFamily="34" charset="-120"/>
+              </a:rPr>
+              <a:t>Elke drie werkperiodes herijken we het target samen. Verandert de markt of de doelgroep, dan verandert het getal mee.</a:t>
+            </a:r>
+            <a:endParaRPr lang="en-US" sz="1200" dirty="0"/>
           </a:p>
         </p:txBody>
       </p:sp>
@@ -10339,7 +12011,7 @@
                 <a:ea typeface="Arial" pitchFamily="34" charset="-122"/>
                 <a:cs typeface="Arial" pitchFamily="34" charset="-120"/>
               </a:rPr>
-              <a:t>9 / 10</a:t>
+              <a:t>9 / 11</a:t>
             </a:r>
             <a:endParaRPr lang="en-US" sz="750" dirty="0"/>
           </a:p>
@@ -10378,7 +12050,7 @@
                 <a:ea typeface="Arial" pitchFamily="34" charset="-122"/>
                 <a:cs typeface="Arial" pitchFamily="34" charset="-120"/>
               </a:rPr>
-              <a:t>SPELREGELS</a:t>
+              <a:t>WAT WE VAN JULLIE NODIG HEBBEN</a:t>
             </a:r>
             <a:endParaRPr lang="en-US" sz="950" dirty="0"/>
           </a:p>
@@ -10420,7 +12092,7 @@
                 <a:ea typeface="Arial" pitchFamily="34" charset="-122"/>
                 <a:cs typeface="Arial" pitchFamily="34" charset="-120"/>
               </a:rPr>
-              <a:t>Transparant en zonder </a:t>
+              <a:t>Een halve dag van jullie, dan </a:t>
             </a:r>
             <a:pPr algn="l" indent="0" marL="0">
               <a:lnSpc>
@@ -10437,7 +12109,7 @@
                 <a:ea typeface="Georgia" pitchFamily="34" charset="-122"/>
                 <a:cs typeface="Georgia" pitchFamily="34" charset="-120"/>
               </a:rPr>
-              <a:t>kleine lettertjes</a:t>
+              <a:t>draaien wij</a:t>
             </a:r>
             <a:pPr algn="l" indent="0" marL="0">
               <a:lnSpc>
@@ -10468,12 +12140,34 @@
         </p:nvSpPr>
         <p:spPr>
           <a:xfrm>
-            <a:off x="609598" y="2819393"/>
-            <a:ext cx="253999" cy="253999"/>
+            <a:off x="609598" y="2793993"/>
+            <a:ext cx="5397487" cy="1530346"/>
           </a:xfrm>
           <a:prstGeom prst="roundRect">
             <a:avLst>
-              <a:gd name="adj" fmla="val 25000"/>
+              <a:gd name="adj" fmla="val 6639"/>
+            </a:avLst>
+          </a:prstGeom>
+          <a:solidFill>
+            <a:srgbClr val="F8F4EB"/>
+          </a:solidFill>
+          <a:ln/>
+        </p:spPr>
+      </p:sp>
+      <p:sp>
+        <p:nvSpPr>
+          <p:cNvPr id="8" name="Shape 6"/>
+          <p:cNvSpPr/>
+          <p:nvPr/>
+        </p:nvSpPr>
+        <p:spPr>
+          <a:xfrm>
+            <a:off x="939798" y="3098792"/>
+            <a:ext cx="380999" cy="380999"/>
+          </a:xfrm>
+          <a:prstGeom prst="roundRect">
+            <a:avLst>
+              <a:gd name="adj" fmla="val 23333"/>
             </a:avLst>
           </a:prstGeom>
           <a:solidFill>
@@ -10484,7 +12178,7 @@
       </p:sp>
       <p:pic>
         <p:nvPicPr>
-          <p:cNvPr id="8" name="Image 0" descr="preencoded.png">    </p:cNvPr>
+          <p:cNvPr id="9" name="Image 0" descr="preencoded.png">    </p:cNvPr>
           <p:cNvPicPr>
             <a:picLocks noChangeAspect="1"/>
           </p:cNvPicPr>
@@ -10498,8 +12192,8 @@
         </p:blipFill>
         <p:spPr>
           <a:xfrm>
-            <a:off x="666748" y="2876543"/>
-            <a:ext cx="139700" cy="139700"/>
+            <a:off x="1035047" y="3194042"/>
+            <a:ext cx="190500" cy="190500"/>
           </a:xfrm>
           <a:prstGeom prst="rect">
             <a:avLst/>
@@ -10508,14 +12202,14 @@
       </p:pic>
       <p:sp>
         <p:nvSpPr>
-          <p:cNvPr id="9" name="Text 6"/>
-          <p:cNvSpPr txBox="1"/>
-          <p:nvPr/>
-        </p:nvSpPr>
-        <p:spPr>
-          <a:xfrm>
-            <a:off x="1015997" y="2793993"/>
-            <a:ext cx="4825988" cy="228599"/>
+          <p:cNvPr id="10" name="Text 7"/>
+          <p:cNvSpPr txBox="1"/>
+          <p:nvPr/>
+        </p:nvSpPr>
+        <p:spPr>
+          <a:xfrm>
+            <a:off x="1549396" y="3073392"/>
+            <a:ext cx="4127490" cy="279399"/>
           </a:xfrm>
           <a:prstGeom prst="rect">
             <a:avLst/>
@@ -10531,7 +12225,7 @@
               <a:buNone/>
             </a:pPr>
             <a:r>
-              <a:rPr lang="en-US" sz="1200" b="1" dirty="0">
+              <a:rPr lang="en-US" sz="1450" b="1" dirty="0">
                 <a:solidFill>
                   <a:srgbClr val="1C2230"/>
                 </a:solidFill>
@@ -10539,22 +12233,22 @@
                 <a:ea typeface="Arial" pitchFamily="34" charset="-122"/>
                 <a:cs typeface="Arial" pitchFamily="34" charset="-120"/>
               </a:rPr>
-              <a:t>Niet-exclusief</a:t>
-            </a:r>
-            <a:endParaRPr lang="en-US" sz="1200" dirty="0"/>
-          </a:p>
-        </p:txBody>
-      </p:sp>
-      <p:sp>
-        <p:nvSpPr>
-          <p:cNvPr id="10" name="Text 7"/>
-          <p:cNvSpPr txBox="1"/>
-          <p:nvPr/>
-        </p:nvSpPr>
-        <p:spPr>
-          <a:xfrm>
-            <a:off x="1015997" y="3035292"/>
-            <a:ext cx="4825988" cy="355599"/>
+              <a:t>Kick-off sessie</a:t>
+            </a:r>
+            <a:endParaRPr lang="en-US" sz="1450" dirty="0"/>
+          </a:p>
+        </p:txBody>
+      </p:sp>
+      <p:sp>
+        <p:nvSpPr>
+          <p:cNvPr id="11" name="Text 8"/>
+          <p:cNvSpPr txBox="1"/>
+          <p:nvPr/>
+        </p:nvSpPr>
+        <p:spPr>
+          <a:xfrm>
+            <a:off x="1549396" y="3403591"/>
+            <a:ext cx="4063990" cy="698498"/>
           </a:xfrm>
           <a:prstGeom prst="rect">
             <a:avLst/>
@@ -10568,12 +12262,12 @@
           <a:p>
             <a:pPr indent="0" marL="0">
               <a:lnSpc>
-                <a:spcPct val="130000"/>
+                <a:spcPct val="135000"/>
               </a:lnSpc>
               <a:buNone/>
             </a:pPr>
             <a:r>
-              <a:rPr lang="en-US" sz="950" dirty="0">
+              <a:rPr lang="en-US" sz="1050" dirty="0">
                 <a:solidFill>
                   <a:srgbClr val="6F6A5C"/>
                 </a:solidFill>
@@ -10581,26 +12275,48 @@
                 <a:ea typeface="Arial" pitchFamily="34" charset="-122"/>
                 <a:cs typeface="Arial" pitchFamily="34" charset="-120"/>
               </a:rPr>
-              <a:t>Jullie zitten nergens aan vast en houden alle vrijheid.</a:t>
-            </a:r>
-            <a:endParaRPr lang="en-US" sz="950" dirty="0"/>
-          </a:p>
-        </p:txBody>
-      </p:sp>
-      <p:sp>
-        <p:nvSpPr>
-          <p:cNvPr id="11" name="Shape 8"/>
+              <a:t>Anderhalf tot twee uur met de beslisser en degene die de afspraken gaat voeren.</a:t>
+            </a:r>
+            <a:endParaRPr lang="en-US" sz="1050" dirty="0"/>
+          </a:p>
+        </p:txBody>
+      </p:sp>
+      <p:sp>
+        <p:nvSpPr>
+          <p:cNvPr id="12" name="Shape 9"/>
           <p:cNvSpPr/>
           <p:nvPr/>
         </p:nvSpPr>
         <p:spPr>
           <a:xfrm>
-            <a:off x="6349984" y="2819393"/>
-            <a:ext cx="253999" cy="253999"/>
+            <a:off x="6184885" y="2793993"/>
+            <a:ext cx="5397487" cy="1530346"/>
           </a:xfrm>
           <a:prstGeom prst="roundRect">
             <a:avLst>
-              <a:gd name="adj" fmla="val 25000"/>
+              <a:gd name="adj" fmla="val 6639"/>
+            </a:avLst>
+          </a:prstGeom>
+          <a:solidFill>
+            <a:srgbClr val="F8F4EB"/>
+          </a:solidFill>
+          <a:ln/>
+        </p:spPr>
+      </p:sp>
+      <p:sp>
+        <p:nvSpPr>
+          <p:cNvPr id="13" name="Shape 10"/>
+          <p:cNvSpPr/>
+          <p:nvPr/>
+        </p:nvSpPr>
+        <p:spPr>
+          <a:xfrm>
+            <a:off x="6515084" y="3098792"/>
+            <a:ext cx="380999" cy="380999"/>
+          </a:xfrm>
+          <a:prstGeom prst="roundRect">
+            <a:avLst>
+              <a:gd name="adj" fmla="val 23333"/>
             </a:avLst>
           </a:prstGeom>
           <a:solidFill>
@@ -10611,7 +12327,7 @@
       </p:sp>
       <p:pic>
         <p:nvPicPr>
-          <p:cNvPr id="12" name="Image 1" descr="preencoded.png">    </p:cNvPr>
+          <p:cNvPr id="14" name="Image 1" descr="preencoded.png">    </p:cNvPr>
           <p:cNvPicPr>
             <a:picLocks noChangeAspect="1"/>
           </p:cNvPicPr>
@@ -10625,8 +12341,8 @@
         </p:blipFill>
         <p:spPr>
           <a:xfrm>
-            <a:off x="6407134" y="2876543"/>
-            <a:ext cx="139700" cy="139700"/>
+            <a:off x="6610333" y="3194042"/>
+            <a:ext cx="190500" cy="190500"/>
           </a:xfrm>
           <a:prstGeom prst="rect">
             <a:avLst/>
@@ -10635,14 +12351,14 @@
       </p:pic>
       <p:sp>
         <p:nvSpPr>
-          <p:cNvPr id="13" name="Text 9"/>
-          <p:cNvSpPr txBox="1"/>
-          <p:nvPr/>
-        </p:nvSpPr>
-        <p:spPr>
-          <a:xfrm>
-            <a:off x="6756383" y="2793993"/>
-            <a:ext cx="4825988" cy="228599"/>
+          <p:cNvPr id="15" name="Text 11"/>
+          <p:cNvSpPr txBox="1"/>
+          <p:nvPr/>
+        </p:nvSpPr>
+        <p:spPr>
+          <a:xfrm>
+            <a:off x="7124682" y="3073392"/>
+            <a:ext cx="4127490" cy="279399"/>
           </a:xfrm>
           <a:prstGeom prst="rect">
             <a:avLst/>
@@ -10658,7 +12374,7 @@
               <a:buNone/>
             </a:pPr>
             <a:r>
-              <a:rPr lang="en-US" sz="1200" b="1" dirty="0">
+              <a:rPr lang="en-US" sz="1450" b="1" dirty="0">
                 <a:solidFill>
                   <a:srgbClr val="1C2230"/>
                 </a:solidFill>
@@ -10666,22 +12382,22 @@
                 <a:ea typeface="Arial" pitchFamily="34" charset="-122"/>
                 <a:cs typeface="Arial" pitchFamily="34" charset="-120"/>
               </a:rPr>
-              <a:t>Bestaande relaties blijven van jullie</a:t>
-            </a:r>
-            <a:endParaRPr lang="en-US" sz="1200" dirty="0"/>
-          </a:p>
-        </p:txBody>
-      </p:sp>
-      <p:sp>
-        <p:nvSpPr>
-          <p:cNvPr id="14" name="Text 10"/>
-          <p:cNvSpPr txBox="1"/>
-          <p:nvPr/>
-        </p:nvSpPr>
-        <p:spPr>
-          <a:xfrm>
-            <a:off x="6756383" y="3035292"/>
-            <a:ext cx="4825988" cy="355599"/>
+              <a:t>Uitsluitlijst</a:t>
+            </a:r>
+            <a:endParaRPr lang="en-US" sz="1450" dirty="0"/>
+          </a:p>
+        </p:txBody>
+      </p:sp>
+      <p:sp>
+        <p:nvSpPr>
+          <p:cNvPr id="16" name="Text 12"/>
+          <p:cNvSpPr txBox="1"/>
+          <p:nvPr/>
+        </p:nvSpPr>
+        <p:spPr>
+          <a:xfrm>
+            <a:off x="7124682" y="3403591"/>
+            <a:ext cx="4063990" cy="698498"/>
           </a:xfrm>
           <a:prstGeom prst="rect">
             <a:avLst/>
@@ -10695,12 +12411,12 @@
           <a:p>
             <a:pPr indent="0" marL="0">
               <a:lnSpc>
-                <a:spcPct val="130000"/>
+                <a:spcPct val="135000"/>
               </a:lnSpc>
               <a:buNone/>
             </a:pPr>
             <a:r>
-              <a:rPr lang="en-US" sz="950" dirty="0">
+              <a:rPr lang="en-US" sz="1050" dirty="0">
                 <a:solidFill>
                   <a:srgbClr val="6F6A5C"/>
                 </a:solidFill>
@@ -10708,49 +12424,48 @@
                 <a:ea typeface="Arial" pitchFamily="34" charset="-122"/>
                 <a:cs typeface="Arial" pitchFamily="34" charset="-120"/>
               </a:rPr>
-              <a:t>Uitsluitlijst vooraf, die bedrijven benaderen wij niet.</a:t>
-            </a:r>
-            <a:endParaRPr lang="en-US" sz="950" dirty="0"/>
-          </a:p>
-        </p:txBody>
-      </p:sp>
-      <p:sp>
-        <p:nvSpPr>
-          <p:cNvPr id="15" name="Shape 11"/>
+              <a:t>Bestaande klanten, lopende gesprekken en bedrijven die we niet mogen benaderen.</a:t>
+            </a:r>
+            <a:endParaRPr lang="en-US" sz="1050" dirty="0"/>
+          </a:p>
+        </p:txBody>
+      </p:sp>
+      <p:sp>
+        <p:nvSpPr>
+          <p:cNvPr id="17" name="Shape 13"/>
           <p:cNvSpPr/>
           <p:nvPr/>
         </p:nvSpPr>
         <p:spPr>
           <a:xfrm>
-            <a:off x="609598" y="3428991"/>
-            <a:ext cx="5232387" cy="0"/>
-          </a:xfrm>
-          <a:prstGeom prst="line">
-            <a:avLst/>
-          </a:prstGeom>
-          <a:noFill/>
-          <a:ln w="6350">
-            <a:solidFill>
-              <a:srgbClr val="C9C2B2"/>
-            </a:solidFill>
-            <a:prstDash val="solid"/>
-          </a:ln>
-        </p:spPr>
-      </p:sp>
-      <p:sp>
-        <p:nvSpPr>
-          <p:cNvPr id="16" name="Shape 12"/>
-          <p:cNvSpPr/>
-          <p:nvPr/>
-        </p:nvSpPr>
-        <p:spPr>
-          <a:xfrm>
-            <a:off x="609598" y="3530591"/>
-            <a:ext cx="253999" cy="253999"/>
+            <a:off x="609598" y="4502139"/>
+            <a:ext cx="5397487" cy="1530346"/>
           </a:xfrm>
           <a:prstGeom prst="roundRect">
             <a:avLst>
-              <a:gd name="adj" fmla="val 25000"/>
+              <a:gd name="adj" fmla="val 6639"/>
+            </a:avLst>
+          </a:prstGeom>
+          <a:solidFill>
+            <a:srgbClr val="F8F4EB"/>
+          </a:solidFill>
+          <a:ln/>
+        </p:spPr>
+      </p:sp>
+      <p:sp>
+        <p:nvSpPr>
+          <p:cNvPr id="18" name="Shape 14"/>
+          <p:cNvSpPr/>
+          <p:nvPr/>
+        </p:nvSpPr>
+        <p:spPr>
+          <a:xfrm>
+            <a:off x="939798" y="4806938"/>
+            <a:ext cx="380999" cy="380999"/>
+          </a:xfrm>
+          <a:prstGeom prst="roundRect">
+            <a:avLst>
+              <a:gd name="adj" fmla="val 23333"/>
             </a:avLst>
           </a:prstGeom>
           <a:solidFill>
@@ -10761,7 +12476,7 @@
       </p:sp>
       <p:pic>
         <p:nvPicPr>
-          <p:cNvPr id="17" name="Image 2" descr="preencoded.png">    </p:cNvPr>
+          <p:cNvPr id="19" name="Image 2" descr="preencoded.png">    </p:cNvPr>
           <p:cNvPicPr>
             <a:picLocks noChangeAspect="1"/>
           </p:cNvPicPr>
@@ -10775,8 +12490,8 @@
         </p:blipFill>
         <p:spPr>
           <a:xfrm>
-            <a:off x="666748" y="3587741"/>
-            <a:ext cx="139700" cy="139700"/>
+            <a:off x="1035047" y="4902188"/>
+            <a:ext cx="190500" cy="190500"/>
           </a:xfrm>
           <a:prstGeom prst="rect">
             <a:avLst/>
@@ -10785,14 +12500,14 @@
       </p:pic>
       <p:sp>
         <p:nvSpPr>
-          <p:cNvPr id="18" name="Text 13"/>
-          <p:cNvSpPr txBox="1"/>
-          <p:nvPr/>
-        </p:nvSpPr>
-        <p:spPr>
-          <a:xfrm>
-            <a:off x="1015997" y="3505191"/>
-            <a:ext cx="4825988" cy="228599"/>
+          <p:cNvPr id="20" name="Text 15"/>
+          <p:cNvSpPr txBox="1"/>
+          <p:nvPr/>
+        </p:nvSpPr>
+        <p:spPr>
+          <a:xfrm>
+            <a:off x="1549396" y="4781538"/>
+            <a:ext cx="4127490" cy="279399"/>
           </a:xfrm>
           <a:prstGeom prst="rect">
             <a:avLst/>
@@ -10808,7 +12523,7 @@
               <a:buNone/>
             </a:pPr>
             <a:r>
-              <a:rPr lang="en-US" sz="1200" b="1" dirty="0">
+              <a:rPr lang="en-US" sz="1450" b="1" dirty="0">
                 <a:solidFill>
                   <a:srgbClr val="1C2230"/>
                 </a:solidFill>
@@ -10816,22 +12531,22 @@
                 <a:ea typeface="Arial" pitchFamily="34" charset="-122"/>
                 <a:cs typeface="Arial" pitchFamily="34" charset="-120"/>
               </a:rPr>
-              <a:t>Werkperiodes van 4 weken</a:t>
-            </a:r>
-            <a:endParaRPr lang="en-US" sz="1200" dirty="0"/>
-          </a:p>
-        </p:txBody>
-      </p:sp>
-      <p:sp>
-        <p:nvSpPr>
-          <p:cNvPr id="19" name="Text 14"/>
-          <p:cNvSpPr txBox="1"/>
-          <p:nvPr/>
-        </p:nvSpPr>
-        <p:spPr>
-          <a:xfrm>
-            <a:off x="1015997" y="3746491"/>
-            <a:ext cx="4825988" cy="355599"/>
+              <a:t>Goedkeuring belscript</a:t>
+            </a:r>
+            <a:endParaRPr lang="en-US" sz="1450" dirty="0"/>
+          </a:p>
+        </p:txBody>
+      </p:sp>
+      <p:sp>
+        <p:nvSpPr>
+          <p:cNvPr id="21" name="Text 16"/>
+          <p:cNvSpPr txBox="1"/>
+          <p:nvPr/>
+        </p:nvSpPr>
+        <p:spPr>
+          <a:xfrm>
+            <a:off x="1549396" y="5111737"/>
+            <a:ext cx="4063990" cy="698498"/>
           </a:xfrm>
           <a:prstGeom prst="rect">
             <a:avLst/>
@@ -10845,12 +12560,12 @@
           <a:p>
             <a:pPr indent="0" marL="0">
               <a:lnSpc>
-                <a:spcPct val="130000"/>
+                <a:spcPct val="135000"/>
               </a:lnSpc>
               <a:buNone/>
             </a:pPr>
             <a:r>
-              <a:rPr lang="en-US" sz="950" dirty="0">
+              <a:rPr lang="en-US" sz="1050" dirty="0">
                 <a:solidFill>
                   <a:srgbClr val="6F6A5C"/>
                 </a:solidFill>
@@ -10858,49 +12573,48 @@
                 <a:ea typeface="Arial" pitchFamily="34" charset="-122"/>
                 <a:cs typeface="Arial" pitchFamily="34" charset="-120"/>
               </a:rPr>
-              <a:t>Vooraf gefactureerd, per werkperiode.</a:t>
-            </a:r>
-            <a:endParaRPr lang="en-US" sz="950" dirty="0"/>
-          </a:p>
-        </p:txBody>
-      </p:sp>
-      <p:sp>
-        <p:nvSpPr>
-          <p:cNvPr id="20" name="Shape 15"/>
+              <a:t>Wij schrijven, jullie lezen mee en keuren goed.</a:t>
+            </a:r>
+            <a:endParaRPr lang="en-US" sz="1050" dirty="0"/>
+          </a:p>
+        </p:txBody>
+      </p:sp>
+      <p:sp>
+        <p:nvSpPr>
+          <p:cNvPr id="22" name="Shape 17"/>
           <p:cNvSpPr/>
           <p:nvPr/>
         </p:nvSpPr>
         <p:spPr>
           <a:xfrm>
-            <a:off x="6349984" y="3428991"/>
-            <a:ext cx="5232387" cy="0"/>
-          </a:xfrm>
-          <a:prstGeom prst="line">
-            <a:avLst/>
-          </a:prstGeom>
-          <a:noFill/>
-          <a:ln w="6350">
-            <a:solidFill>
-              <a:srgbClr val="C9C2B2"/>
-            </a:solidFill>
-            <a:prstDash val="solid"/>
-          </a:ln>
-        </p:spPr>
-      </p:sp>
-      <p:sp>
-        <p:nvSpPr>
-          <p:cNvPr id="21" name="Shape 16"/>
-          <p:cNvSpPr/>
-          <p:nvPr/>
-        </p:nvSpPr>
-        <p:spPr>
-          <a:xfrm>
-            <a:off x="6349984" y="3530591"/>
-            <a:ext cx="253999" cy="253999"/>
+            <a:off x="6184885" y="4502139"/>
+            <a:ext cx="5397487" cy="1530346"/>
           </a:xfrm>
           <a:prstGeom prst="roundRect">
             <a:avLst>
-              <a:gd name="adj" fmla="val 25000"/>
+              <a:gd name="adj" fmla="val 6639"/>
+            </a:avLst>
+          </a:prstGeom>
+          <a:solidFill>
+            <a:srgbClr val="F8F4EB"/>
+          </a:solidFill>
+          <a:ln/>
+        </p:spPr>
+      </p:sp>
+      <p:sp>
+        <p:nvSpPr>
+          <p:cNvPr id="23" name="Shape 18"/>
+          <p:cNvSpPr/>
+          <p:nvPr/>
+        </p:nvSpPr>
+        <p:spPr>
+          <a:xfrm>
+            <a:off x="6515084" y="4806938"/>
+            <a:ext cx="380999" cy="380999"/>
+          </a:xfrm>
+          <a:prstGeom prst="roundRect">
+            <a:avLst>
+              <a:gd name="adj" fmla="val 23333"/>
             </a:avLst>
           </a:prstGeom>
           <a:solidFill>
@@ -10911,7 +12625,7 @@
       </p:sp>
       <p:pic>
         <p:nvPicPr>
-          <p:cNvPr id="22" name="Image 3" descr="preencoded.png">    </p:cNvPr>
+          <p:cNvPr id="24" name="Image 3" descr="preencoded.png">    </p:cNvPr>
           <p:cNvPicPr>
             <a:picLocks noChangeAspect="1"/>
           </p:cNvPicPr>
@@ -10925,8 +12639,8 @@
         </p:blipFill>
         <p:spPr>
           <a:xfrm>
-            <a:off x="6407134" y="3587741"/>
-            <a:ext cx="139700" cy="139700"/>
+            <a:off x="6610333" y="4902188"/>
+            <a:ext cx="190500" cy="190500"/>
           </a:xfrm>
           <a:prstGeom prst="rect">
             <a:avLst/>
@@ -10935,14 +12649,14 @@
       </p:pic>
       <p:sp>
         <p:nvSpPr>
-          <p:cNvPr id="23" name="Text 17"/>
-          <p:cNvSpPr txBox="1"/>
-          <p:nvPr/>
-        </p:nvSpPr>
-        <p:spPr>
-          <a:xfrm>
-            <a:off x="6756383" y="3505191"/>
-            <a:ext cx="4825988" cy="228599"/>
+          <p:cNvPr id="25" name="Text 19"/>
+          <p:cNvSpPr txBox="1"/>
+          <p:nvPr/>
+        </p:nvSpPr>
+        <p:spPr>
+          <a:xfrm>
+            <a:off x="7124682" y="4781538"/>
+            <a:ext cx="4127490" cy="279399"/>
           </a:xfrm>
           <a:prstGeom prst="rect">
             <a:avLst/>
@@ -10958,7 +12672,7 @@
               <a:buNone/>
             </a:pPr>
             <a:r>
-              <a:rPr lang="en-US" sz="1200" b="1" dirty="0">
+              <a:rPr lang="en-US" sz="1450" b="1" dirty="0">
                 <a:solidFill>
                   <a:srgbClr val="1C2230"/>
                 </a:solidFill>
@@ -10966,22 +12680,22 @@
                 <a:ea typeface="Arial" pitchFamily="34" charset="-122"/>
                 <a:cs typeface="Arial" pitchFamily="34" charset="-120"/>
               </a:rPr>
-              <a:t>Wekelijkse rapportage</a:t>
-            </a:r>
-            <a:endParaRPr lang="en-US" sz="1200" dirty="0"/>
-          </a:p>
-        </p:txBody>
-      </p:sp>
-      <p:sp>
-        <p:nvSpPr>
-          <p:cNvPr id="24" name="Text 18"/>
-          <p:cNvSpPr txBox="1"/>
-          <p:nvPr/>
-        </p:nvSpPr>
-        <p:spPr>
-          <a:xfrm>
-            <a:off x="6756383" y="3746491"/>
-            <a:ext cx="4825988" cy="355599"/>
+              <a:t>Opvolging van afspraken</a:t>
+            </a:r>
+            <a:endParaRPr lang="en-US" sz="1450" dirty="0"/>
+          </a:p>
+        </p:txBody>
+      </p:sp>
+      <p:sp>
+        <p:nvSpPr>
+          <p:cNvPr id="26" name="Text 20"/>
+          <p:cNvSpPr txBox="1"/>
+          <p:nvPr/>
+        </p:nvSpPr>
+        <p:spPr>
+          <a:xfrm>
+            <a:off x="7124682" y="5111737"/>
+            <a:ext cx="4063990" cy="698498"/>
           </a:xfrm>
           <a:prstGeom prst="rect">
             <a:avLst/>
@@ -10995,12 +12709,12 @@
           <a:p>
             <a:pPr indent="0" marL="0">
               <a:lnSpc>
-                <a:spcPct val="130000"/>
+                <a:spcPct val="135000"/>
               </a:lnSpc>
               <a:buNone/>
             </a:pPr>
             <a:r>
-              <a:rPr lang="en-US" sz="950" dirty="0">
+              <a:rPr lang="en-US" sz="1050" dirty="0">
                 <a:solidFill>
                   <a:srgbClr val="6F6A5C"/>
                 </a:solidFill>
@@ -11008,609 +12722,9 @@
                 <a:ea typeface="Arial" pitchFamily="34" charset="-122"/>
                 <a:cs typeface="Arial" pitchFamily="34" charset="-120"/>
               </a:rPr>
-              <a:t>Elke week zicht op wat er gebeurd is en wat het opleverde.</a:t>
-            </a:r>
-            <a:endParaRPr lang="en-US" sz="950" dirty="0"/>
-          </a:p>
-        </p:txBody>
-      </p:sp>
-      <p:sp>
-        <p:nvSpPr>
-          <p:cNvPr id="25" name="Shape 19"/>
-          <p:cNvSpPr/>
-          <p:nvPr/>
-        </p:nvSpPr>
-        <p:spPr>
-          <a:xfrm>
-            <a:off x="609598" y="4140190"/>
-            <a:ext cx="5232387" cy="0"/>
-          </a:xfrm>
-          <a:prstGeom prst="line">
-            <a:avLst/>
-          </a:prstGeom>
-          <a:noFill/>
-          <a:ln w="6350">
-            <a:solidFill>
-              <a:srgbClr val="C9C2B2"/>
-            </a:solidFill>
-            <a:prstDash val="solid"/>
-          </a:ln>
-        </p:spPr>
-      </p:sp>
-      <p:sp>
-        <p:nvSpPr>
-          <p:cNvPr id="26" name="Shape 20"/>
-          <p:cNvSpPr/>
-          <p:nvPr/>
-        </p:nvSpPr>
-        <p:spPr>
-          <a:xfrm>
-            <a:off x="609598" y="4241789"/>
-            <a:ext cx="253999" cy="253999"/>
-          </a:xfrm>
-          <a:prstGeom prst="roundRect">
-            <a:avLst>
-              <a:gd name="adj" fmla="val 25000"/>
-            </a:avLst>
-          </a:prstGeom>
-          <a:solidFill>
-            <a:srgbClr val="DDEBF3"/>
-          </a:solidFill>
-          <a:ln/>
-        </p:spPr>
-      </p:sp>
-      <p:pic>
-        <p:nvPicPr>
-          <p:cNvPr id="27" name="Image 4" descr="preencoded.png">    </p:cNvPr>
-          <p:cNvPicPr>
-            <a:picLocks noChangeAspect="1"/>
-          </p:cNvPicPr>
-          <p:nvPr/>
-        </p:nvPicPr>
-        <p:blipFill>
-          <a:blip r:embed="rId5"/>
-          <a:stretch>
-            <a:fillRect/>
-          </a:stretch>
-        </p:blipFill>
-        <p:spPr>
-          <a:xfrm>
-            <a:off x="666748" y="4298939"/>
-            <a:ext cx="139700" cy="139700"/>
-          </a:xfrm>
-          <a:prstGeom prst="rect">
-            <a:avLst/>
-          </a:prstGeom>
-        </p:spPr>
-      </p:pic>
-      <p:sp>
-        <p:nvSpPr>
-          <p:cNvPr id="28" name="Text 21"/>
-          <p:cNvSpPr txBox="1"/>
-          <p:nvPr/>
-        </p:nvSpPr>
-        <p:spPr>
-          <a:xfrm>
-            <a:off x="1015997" y="4216389"/>
-            <a:ext cx="4825988" cy="228599"/>
-          </a:xfrm>
-          <a:prstGeom prst="rect">
-            <a:avLst/>
-          </a:prstGeom>
-          <a:noFill/>
-          <a:ln/>
-        </p:spPr>
-        <p:txBody>
-          <a:bodyPr wrap="square" lIns="0" tIns="0" rIns="0" bIns="0" rtlCol="0" anchor="ctr"/>
-          <a:lstStyle/>
-          <a:p>
-            <a:pPr indent="0" marL="0">
-              <a:buNone/>
-            </a:pPr>
-            <a:r>
-              <a:rPr lang="en-US" sz="1200" b="1" dirty="0">
-                <a:solidFill>
-                  <a:srgbClr val="1C2230"/>
-                </a:solidFill>
-                <a:latin typeface="Arial" pitchFamily="34" charset="0"/>
-                <a:ea typeface="Arial" pitchFamily="34" charset="-122"/>
-                <a:cs typeface="Arial" pitchFamily="34" charset="-120"/>
-              </a:rPr>
-              <a:t>Jullie naam, onze uitvoering</a:t>
-            </a:r>
-            <a:endParaRPr lang="en-US" sz="1200" dirty="0"/>
-          </a:p>
-        </p:txBody>
-      </p:sp>
-      <p:sp>
-        <p:nvSpPr>
-          <p:cNvPr id="29" name="Text 22"/>
-          <p:cNvSpPr txBox="1"/>
-          <p:nvPr/>
-        </p:nvSpPr>
-        <p:spPr>
-          <a:xfrm>
-            <a:off x="1015997" y="4457689"/>
-            <a:ext cx="4825988" cy="355599"/>
-          </a:xfrm>
-          <a:prstGeom prst="rect">
-            <a:avLst/>
-          </a:prstGeom>
-          <a:noFill/>
-          <a:ln/>
-        </p:spPr>
-        <p:txBody>
-          <a:bodyPr wrap="square" lIns="0" tIns="0" rIns="0" bIns="0" rtlCol="0" anchor="t"/>
-          <a:lstStyle/>
-          <a:p>
-            <a:pPr indent="0" marL="0">
-              <a:lnSpc>
-                <a:spcPct val="130000"/>
-              </a:lnSpc>
-              <a:buNone/>
-            </a:pPr>
-            <a:r>
-              <a:rPr lang="en-US" sz="950" dirty="0">
-                <a:solidFill>
-                  <a:srgbClr val="6F6A5C"/>
-                </a:solidFill>
-                <a:latin typeface="Arial" pitchFamily="34" charset="0"/>
-                <a:ea typeface="Arial" pitchFamily="34" charset="-122"/>
-                <a:cs typeface="Arial" pitchFamily="34" charset="-120"/>
-              </a:rPr>
-              <a:t>Regionaal nummer en jullie stijl, wij voeren uit.</a:t>
-            </a:r>
-            <a:endParaRPr lang="en-US" sz="950" dirty="0"/>
-          </a:p>
-        </p:txBody>
-      </p:sp>
-      <p:sp>
-        <p:nvSpPr>
-          <p:cNvPr id="30" name="Shape 23"/>
-          <p:cNvSpPr/>
-          <p:nvPr/>
-        </p:nvSpPr>
-        <p:spPr>
-          <a:xfrm>
-            <a:off x="6349984" y="4140190"/>
-            <a:ext cx="5232387" cy="0"/>
-          </a:xfrm>
-          <a:prstGeom prst="line">
-            <a:avLst/>
-          </a:prstGeom>
-          <a:noFill/>
-          <a:ln w="6350">
-            <a:solidFill>
-              <a:srgbClr val="C9C2B2"/>
-            </a:solidFill>
-            <a:prstDash val="solid"/>
-          </a:ln>
-        </p:spPr>
-      </p:sp>
-      <p:sp>
-        <p:nvSpPr>
-          <p:cNvPr id="31" name="Shape 24"/>
-          <p:cNvSpPr/>
-          <p:nvPr/>
-        </p:nvSpPr>
-        <p:spPr>
-          <a:xfrm>
-            <a:off x="6349984" y="4241789"/>
-            <a:ext cx="253999" cy="253999"/>
-          </a:xfrm>
-          <a:prstGeom prst="roundRect">
-            <a:avLst>
-              <a:gd name="adj" fmla="val 25000"/>
-            </a:avLst>
-          </a:prstGeom>
-          <a:solidFill>
-            <a:srgbClr val="DDEBF3"/>
-          </a:solidFill>
-          <a:ln/>
-        </p:spPr>
-      </p:sp>
-      <p:pic>
-        <p:nvPicPr>
-          <p:cNvPr id="32" name="Image 5" descr="preencoded.png">    </p:cNvPr>
-          <p:cNvPicPr>
-            <a:picLocks noChangeAspect="1"/>
-          </p:cNvPicPr>
-          <p:nvPr/>
-        </p:nvPicPr>
-        <p:blipFill>
-          <a:blip r:embed="rId6"/>
-          <a:stretch>
-            <a:fillRect/>
-          </a:stretch>
-        </p:blipFill>
-        <p:spPr>
-          <a:xfrm>
-            <a:off x="6407134" y="4298939"/>
-            <a:ext cx="139700" cy="139700"/>
-          </a:xfrm>
-          <a:prstGeom prst="rect">
-            <a:avLst/>
-          </a:prstGeom>
-        </p:spPr>
-      </p:pic>
-      <p:sp>
-        <p:nvSpPr>
-          <p:cNvPr id="33" name="Text 25"/>
-          <p:cNvSpPr txBox="1"/>
-          <p:nvPr/>
-        </p:nvSpPr>
-        <p:spPr>
-          <a:xfrm>
-            <a:off x="6756383" y="4216389"/>
-            <a:ext cx="4825988" cy="228599"/>
-          </a:xfrm>
-          <a:prstGeom prst="rect">
-            <a:avLst/>
-          </a:prstGeom>
-          <a:noFill/>
-          <a:ln/>
-        </p:spPr>
-        <p:txBody>
-          <a:bodyPr wrap="square" lIns="0" tIns="0" rIns="0" bIns="0" rtlCol="0" anchor="ctr"/>
-          <a:lstStyle/>
-          <a:p>
-            <a:pPr indent="0" marL="0">
-              <a:buNone/>
-            </a:pPr>
-            <a:r>
-              <a:rPr lang="en-US" sz="1200" b="1" dirty="0">
-                <a:solidFill>
-                  <a:srgbClr val="1C2230"/>
-                </a:solidFill>
-                <a:latin typeface="Arial" pitchFamily="34" charset="0"/>
-                <a:ea typeface="Arial" pitchFamily="34" charset="-122"/>
-                <a:cs typeface="Arial" pitchFamily="34" charset="-120"/>
-              </a:rPr>
-              <a:t>Gegevens veilig</a:t>
-            </a:r>
-            <a:endParaRPr lang="en-US" sz="1200" dirty="0"/>
-          </a:p>
-        </p:txBody>
-      </p:sp>
-      <p:sp>
-        <p:nvSpPr>
-          <p:cNvPr id="34" name="Text 26"/>
-          <p:cNvSpPr txBox="1"/>
-          <p:nvPr/>
-        </p:nvSpPr>
-        <p:spPr>
-          <a:xfrm>
-            <a:off x="6756383" y="4457689"/>
-            <a:ext cx="4825988" cy="355599"/>
-          </a:xfrm>
-          <a:prstGeom prst="rect">
-            <a:avLst/>
-          </a:prstGeom>
-          <a:noFill/>
-          <a:ln/>
-        </p:spPr>
-        <p:txBody>
-          <a:bodyPr wrap="square" lIns="0" tIns="0" rIns="0" bIns="0" rtlCol="0" anchor="t"/>
-          <a:lstStyle/>
-          <a:p>
-            <a:pPr indent="0" marL="0">
-              <a:lnSpc>
-                <a:spcPct val="130000"/>
-              </a:lnSpc>
-              <a:buNone/>
-            </a:pPr>
-            <a:r>
-              <a:rPr lang="en-US" sz="950" dirty="0">
-                <a:solidFill>
-                  <a:srgbClr val="6F6A5C"/>
-                </a:solidFill>
-                <a:latin typeface="Arial" pitchFamily="34" charset="0"/>
-                <a:ea typeface="Arial" pitchFamily="34" charset="-122"/>
-                <a:cs typeface="Arial" pitchFamily="34" charset="-120"/>
-              </a:rPr>
-              <a:t>Vastgelegd in een verwerkersovereenkomst.</a:t>
-            </a:r>
-            <a:endParaRPr lang="en-US" sz="950" dirty="0"/>
-          </a:p>
-        </p:txBody>
-      </p:sp>
-      <p:sp>
-        <p:nvSpPr>
-          <p:cNvPr id="35" name="Shape 27"/>
-          <p:cNvSpPr/>
-          <p:nvPr/>
-        </p:nvSpPr>
-        <p:spPr>
-          <a:xfrm>
-            <a:off x="609598" y="4851388"/>
-            <a:ext cx="5232387" cy="0"/>
-          </a:xfrm>
-          <a:prstGeom prst="line">
-            <a:avLst/>
-          </a:prstGeom>
-          <a:noFill/>
-          <a:ln w="6350">
-            <a:solidFill>
-              <a:srgbClr val="C9C2B2"/>
-            </a:solidFill>
-            <a:prstDash val="solid"/>
-          </a:ln>
-        </p:spPr>
-      </p:sp>
-      <p:sp>
-        <p:nvSpPr>
-          <p:cNvPr id="36" name="Shape 28"/>
-          <p:cNvSpPr/>
-          <p:nvPr/>
-        </p:nvSpPr>
-        <p:spPr>
-          <a:xfrm>
-            <a:off x="609598" y="4952988"/>
-            <a:ext cx="253999" cy="253999"/>
-          </a:xfrm>
-          <a:prstGeom prst="roundRect">
-            <a:avLst>
-              <a:gd name="adj" fmla="val 25000"/>
-            </a:avLst>
-          </a:prstGeom>
-          <a:solidFill>
-            <a:srgbClr val="DDEBF3"/>
-          </a:solidFill>
-          <a:ln/>
-        </p:spPr>
-      </p:sp>
-      <p:pic>
-        <p:nvPicPr>
-          <p:cNvPr id="37" name="Image 6" descr="preencoded.png">    </p:cNvPr>
-          <p:cNvPicPr>
-            <a:picLocks noChangeAspect="1"/>
-          </p:cNvPicPr>
-          <p:nvPr/>
-        </p:nvPicPr>
-        <p:blipFill>
-          <a:blip r:embed="rId7"/>
-          <a:stretch>
-            <a:fillRect/>
-          </a:stretch>
-        </p:blipFill>
-        <p:spPr>
-          <a:xfrm>
-            <a:off x="666748" y="5010137"/>
-            <a:ext cx="139700" cy="139700"/>
-          </a:xfrm>
-          <a:prstGeom prst="rect">
-            <a:avLst/>
-          </a:prstGeom>
-        </p:spPr>
-      </p:pic>
-      <p:sp>
-        <p:nvSpPr>
-          <p:cNvPr id="38" name="Text 29"/>
-          <p:cNvSpPr txBox="1"/>
-          <p:nvPr/>
-        </p:nvSpPr>
-        <p:spPr>
-          <a:xfrm>
-            <a:off x="1015997" y="4927588"/>
-            <a:ext cx="4825988" cy="228599"/>
-          </a:xfrm>
-          <a:prstGeom prst="rect">
-            <a:avLst/>
-          </a:prstGeom>
-          <a:noFill/>
-          <a:ln/>
-        </p:spPr>
-        <p:txBody>
-          <a:bodyPr wrap="square" lIns="0" tIns="0" rIns="0" bIns="0" rtlCol="0" anchor="ctr"/>
-          <a:lstStyle/>
-          <a:p>
-            <a:pPr indent="0" marL="0">
-              <a:buNone/>
-            </a:pPr>
-            <a:r>
-              <a:rPr lang="en-US" sz="1200" b="1" dirty="0">
-                <a:solidFill>
-                  <a:srgbClr val="1C2230"/>
-                </a:solidFill>
-                <a:latin typeface="Arial" pitchFamily="34" charset="0"/>
-                <a:ea typeface="Arial" pitchFamily="34" charset="-122"/>
-                <a:cs typeface="Arial" pitchFamily="34" charset="-120"/>
-              </a:rPr>
-              <a:t>Evaluatie om de week</a:t>
-            </a:r>
-            <a:endParaRPr lang="en-US" sz="1200" dirty="0"/>
-          </a:p>
-        </p:txBody>
-      </p:sp>
-      <p:sp>
-        <p:nvSpPr>
-          <p:cNvPr id="39" name="Text 30"/>
-          <p:cNvSpPr txBox="1"/>
-          <p:nvPr/>
-        </p:nvSpPr>
-        <p:spPr>
-          <a:xfrm>
-            <a:off x="1015997" y="5168887"/>
-            <a:ext cx="4825988" cy="355599"/>
-          </a:xfrm>
-          <a:prstGeom prst="rect">
-            <a:avLst/>
-          </a:prstGeom>
-          <a:noFill/>
-          <a:ln/>
-        </p:spPr>
-        <p:txBody>
-          <a:bodyPr wrap="square" lIns="0" tIns="0" rIns="0" bIns="0" rtlCol="0" anchor="t"/>
-          <a:lstStyle/>
-          <a:p>
-            <a:pPr indent="0" marL="0">
-              <a:lnSpc>
-                <a:spcPct val="130000"/>
-              </a:lnSpc>
-              <a:buNone/>
-            </a:pPr>
-            <a:r>
-              <a:rPr lang="en-US" sz="950" dirty="0">
-                <a:solidFill>
-                  <a:srgbClr val="6F6A5C"/>
-                </a:solidFill>
-                <a:latin typeface="Arial" pitchFamily="34" charset="0"/>
-                <a:ea typeface="Arial" pitchFamily="34" charset="-122"/>
-                <a:cs typeface="Arial" pitchFamily="34" charset="-120"/>
-              </a:rPr>
-              <a:t>Bij twijfel om tafel en bijsturen.</a:t>
-            </a:r>
-            <a:endParaRPr lang="en-US" sz="950" dirty="0"/>
-          </a:p>
-        </p:txBody>
-      </p:sp>
-      <p:sp>
-        <p:nvSpPr>
-          <p:cNvPr id="40" name="Shape 31"/>
-          <p:cNvSpPr/>
-          <p:nvPr/>
-        </p:nvSpPr>
-        <p:spPr>
-          <a:xfrm>
-            <a:off x="6349984" y="4851388"/>
-            <a:ext cx="5232387" cy="0"/>
-          </a:xfrm>
-          <a:prstGeom prst="line">
-            <a:avLst/>
-          </a:prstGeom>
-          <a:noFill/>
-          <a:ln w="6350">
-            <a:solidFill>
-              <a:srgbClr val="C9C2B2"/>
-            </a:solidFill>
-            <a:prstDash val="solid"/>
-          </a:ln>
-        </p:spPr>
-      </p:sp>
-      <p:sp>
-        <p:nvSpPr>
-          <p:cNvPr id="41" name="Shape 32"/>
-          <p:cNvSpPr/>
-          <p:nvPr/>
-        </p:nvSpPr>
-        <p:spPr>
-          <a:xfrm>
-            <a:off x="6349984" y="4952988"/>
-            <a:ext cx="253999" cy="253999"/>
-          </a:xfrm>
-          <a:prstGeom prst="roundRect">
-            <a:avLst>
-              <a:gd name="adj" fmla="val 25000"/>
-            </a:avLst>
-          </a:prstGeom>
-          <a:solidFill>
-            <a:srgbClr val="DDEBF3"/>
-          </a:solidFill>
-          <a:ln/>
-        </p:spPr>
-      </p:sp>
-      <p:pic>
-        <p:nvPicPr>
-          <p:cNvPr id="42" name="Image 7" descr="preencoded.png">    </p:cNvPr>
-          <p:cNvPicPr>
-            <a:picLocks noChangeAspect="1"/>
-          </p:cNvPicPr>
-          <p:nvPr/>
-        </p:nvPicPr>
-        <p:blipFill>
-          <a:blip r:embed="rId8"/>
-          <a:stretch>
-            <a:fillRect/>
-          </a:stretch>
-        </p:blipFill>
-        <p:spPr>
-          <a:xfrm>
-            <a:off x="6407134" y="5010137"/>
-            <a:ext cx="139700" cy="139700"/>
-          </a:xfrm>
-          <a:prstGeom prst="rect">
-            <a:avLst/>
-          </a:prstGeom>
-        </p:spPr>
-      </p:pic>
-      <p:sp>
-        <p:nvSpPr>
-          <p:cNvPr id="43" name="Text 33"/>
-          <p:cNvSpPr txBox="1"/>
-          <p:nvPr/>
-        </p:nvSpPr>
-        <p:spPr>
-          <a:xfrm>
-            <a:off x="6756383" y="4927588"/>
-            <a:ext cx="4825988" cy="228599"/>
-          </a:xfrm>
-          <a:prstGeom prst="rect">
-            <a:avLst/>
-          </a:prstGeom>
-          <a:noFill/>
-          <a:ln/>
-        </p:spPr>
-        <p:txBody>
-          <a:bodyPr wrap="square" lIns="0" tIns="0" rIns="0" bIns="0" rtlCol="0" anchor="ctr"/>
-          <a:lstStyle/>
-          <a:p>
-            <a:pPr indent="0" marL="0">
-              <a:buNone/>
-            </a:pPr>
-            <a:r>
-              <a:rPr lang="en-US" sz="1200" b="1" dirty="0">
-                <a:solidFill>
-                  <a:srgbClr val="1C2230"/>
-                </a:solidFill>
-                <a:latin typeface="Arial" pitchFamily="34" charset="0"/>
-                <a:ea typeface="Arial" pitchFamily="34" charset="-122"/>
-                <a:cs typeface="Arial" pitchFamily="34" charset="-120"/>
-              </a:rPr>
-              <a:t>Alles op papier</a:t>
-            </a:r>
-            <a:endParaRPr lang="en-US" sz="1200" dirty="0"/>
-          </a:p>
-        </p:txBody>
-      </p:sp>
-      <p:sp>
-        <p:nvSpPr>
-          <p:cNvPr id="44" name="Text 34"/>
-          <p:cNvSpPr txBox="1"/>
-          <p:nvPr/>
-        </p:nvSpPr>
-        <p:spPr>
-          <a:xfrm>
-            <a:off x="6756383" y="5168887"/>
-            <a:ext cx="4825988" cy="355599"/>
-          </a:xfrm>
-          <a:prstGeom prst="rect">
-            <a:avLst/>
-          </a:prstGeom>
-          <a:noFill/>
-          <a:ln/>
-        </p:spPr>
-        <p:txBody>
-          <a:bodyPr wrap="square" lIns="0" tIns="0" rIns="0" bIns="0" rtlCol="0" anchor="t"/>
-          <a:lstStyle/>
-          <a:p>
-            <a:pPr indent="0" marL="0">
-              <a:lnSpc>
-                <a:spcPct val="130000"/>
-              </a:lnSpc>
-              <a:buNone/>
-            </a:pPr>
-            <a:r>
-              <a:rPr lang="en-US" sz="950" dirty="0">
-                <a:solidFill>
-                  <a:srgbClr val="6F6A5C"/>
-                </a:solidFill>
-                <a:latin typeface="Arial" pitchFamily="34" charset="0"/>
-                <a:ea typeface="Arial" pitchFamily="34" charset="-122"/>
-                <a:cs typeface="Arial" pitchFamily="34" charset="-120"/>
-              </a:rPr>
-              <a:t>Vastgelegd in een korte samenwerkingsovereenkomst.</a:t>
-            </a:r>
-            <a:endParaRPr lang="en-US" sz="950" dirty="0"/>
+              <a:t>Eén vaste persoon die de afspraken voert en ons kort laat weten hoe ze verliepen.</a:t>
+            </a:r>
+            <a:endParaRPr lang="en-US" sz="1050" dirty="0"/>
           </a:p>
         </p:txBody>
       </p:sp>

--- a/output/LINK. kennismaking.pptx
+++ b/output/LINK. kennismaking.pptx
@@ -11231,7 +11231,7 @@
                 <a:ea typeface="Arial" pitchFamily="34" charset="-122"/>
                 <a:cs typeface="Arial" pitchFamily="34" charset="-120"/>
               </a:rPr>
-              <a:t>Vaste bezetting</a:t>
+              <a:t>Wat een afspraak kost</a:t>
             </a:r>
             <a:endParaRPr lang="en-US" sz="1150" dirty="0"/>
           </a:p>
@@ -11273,7 +11273,7 @@
                 <a:ea typeface="Arial" pitchFamily="34" charset="-122"/>
                 <a:cs typeface="Arial" pitchFamily="34" charset="-120"/>
               </a:rPr>
-              <a:t>Jullie kiezen hoeveel dagdelen per week we voor jullie bellen. Hoe meer bezetting, hoe scherper het tarief, want dan draait een vaste beller vol op jullie verhaal.</a:t>
+              <a:t>Uit de pilot blijkt hoeveel tijd er in één gekwalificeerde afspraak zit. Daarmee weten we hoeveel afspraken per dagdeel realistisch zijn en wat een afspraak dus kost.</a:t>
             </a:r>
             <a:endParaRPr lang="en-US" sz="875" dirty="0"/>
           </a:p>
@@ -11403,7 +11403,7 @@
                 <a:ea typeface="Arial" pitchFamily="34" charset="-122"/>
                 <a:cs typeface="Arial" pitchFamily="34" charset="-120"/>
               </a:rPr>
-              <a:t>Vast target</a:t>
+              <a:t>Vaste bezetting, vast aantal</a:t>
             </a:r>
             <a:endParaRPr lang="en-US" sz="1150" dirty="0"/>
           </a:p>
@@ -11445,7 +11445,7 @@
                 <a:ea typeface="Arial" pitchFamily="34" charset="-122"/>
                 <a:cs typeface="Arial" pitchFamily="34" charset="-120"/>
               </a:rPr>
-              <a:t>Aan die bezetting hangt een vast aantal gekwalificeerde afspraken per werkperiode. Dat getal komt uit jullie eigen pilot, niet uit een aanname.</a:t>
+              <a:t>Jullie kiezen hoeveel dagdelen per week we bellen. Met de ratio uit de pilot ligt daarmee ook vast hoeveel afspraken er per werkperiode staan.</a:t>
             </a:r>
             <a:endParaRPr lang="en-US" sz="875" dirty="0"/>
           </a:p>
@@ -11747,7 +11747,7 @@
                 <a:ea typeface="Arial" pitchFamily="34" charset="-122"/>
                 <a:cs typeface="Arial" pitchFamily="34" charset="-120"/>
               </a:rPr>
-              <a:t>Boven target delen we mee</a:t>
+              <a:t>Succesfee bij omzet</a:t>
             </a:r>
             <a:endParaRPr lang="en-US" sz="1150" dirty="0"/>
           </a:p>
@@ -11789,7 +11789,7 @@
                 <a:ea typeface="Arial" pitchFamily="34" charset="-122"/>
                 <a:cs typeface="Arial" pitchFamily="34" charset="-120"/>
               </a:rPr>
-              <a:t>Komen er meer afspraken uit dan afgesproken, dan spreken we daar vooraf een bonus voor af. Zo blijft doorpakken voor ons allebei interessant.</a:t>
+              <a:t>Wordt een afspraak een opdracht, dan spreken we daar vooraf een succesfee over af. Wij verdienen pas extra als het jullie ook echt omzet oplevert.</a:t>
             </a:r>
             <a:endParaRPr lang="en-US" sz="875" dirty="0"/>
           </a:p>

--- a/output/LINK. kennismaking.pptx
+++ b/output/LINK. kennismaking.pptx
@@ -11445,7 +11445,7 @@
                 <a:ea typeface="Arial" pitchFamily="34" charset="-122"/>
                 <a:cs typeface="Arial" pitchFamily="34" charset="-120"/>
               </a:rPr>
-              <a:t>Jullie kiezen hoeveel dagdelen per week we bellen. Met de ratio uit de pilot ligt daarmee ook vast hoeveel afspraken er per werkperiode staan.</a:t>
+              <a:t>Jullie kiezen hoeveel dagdelen per week we bellen. Daar hangt een vast aantal afspraken aan en wij trekken de tijd uit die daarvoor nodig is.</a:t>
             </a:r>
             <a:endParaRPr lang="en-US" sz="875" dirty="0"/>
           </a:p>
@@ -11575,7 +11575,7 @@
                 <a:ea typeface="Arial" pitchFamily="34" charset="-122"/>
                 <a:cs typeface="Arial" pitchFamily="34" charset="-120"/>
               </a:rPr>
-              <a:t>Onder target bellen we door</a:t>
+              <a:t>Boven target is voor jullie</a:t>
             </a:r>
             <a:endParaRPr lang="en-US" sz="1150" dirty="0"/>
           </a:p>
@@ -11617,7 +11617,7 @@
                 <a:ea typeface="Arial" pitchFamily="34" charset="-122"/>
                 <a:cs typeface="Arial" pitchFamily="34" charset="-120"/>
               </a:rPr>
-              <a:t>Staat het aantal aan het eind van de werkperiode niet, dan bellen we door zonder extra kosten tot het er wel staat.</a:t>
+              <a:t>Zijn we eerder klaar dan gepland, dan bellen we de tijd gewoon vol. Wat er dan nog bij komt is voor jullie, zonder extra factuur.</a:t>
             </a:r>
             <a:endParaRPr lang="en-US" sz="875" dirty="0"/>
           </a:p>
@@ -11848,7 +11848,7 @@
                 <a:ea typeface="Arial" pitchFamily="34" charset="-122"/>
                 <a:cs typeface="Arial" pitchFamily="34" charset="-120"/>
               </a:rPr>
-              <a:t>Elke drie werkperiodes herijken we het target samen. Verandert de markt of de doelgroep, dan verandert het getal mee.</a:t>
+              <a:t>Het target komt uit jullie eigen cijfers, dus dat halen we. Zo niet, dan halen we het de volgende werkperiode in.</a:t>
             </a:r>
             <a:endParaRPr lang="en-US" sz="1200" dirty="0"/>
           </a:p>

--- a/output/LINK. kennismaking.pptx
+++ b/output/LINK. kennismaking.pptx
@@ -15,10 +15,9 @@
     <p:sldId id="263" r:id="rId9"/>
     <p:sldId id="264" r:id="rId10"/>
     <p:sldId id="265" r:id="rId11"/>
-    <p:sldId id="266" r:id="rId12"/>
   </p:sldIdLst>
   <p:notesMasterIdLst>
-    <p:notesMasterId r:id="rId13"/>
+    <p:notesMasterId r:id="rId12"/>
   </p:notesMasterIdLst>
   <p:sldSz cx="12191970" cy="6858000"/>
   <p:notesSz cx="6858000" cy="12191970"/>
@@ -624,94 +623,6 @@
             <a:fld id="{F7021451-1387-4CA6-816F-3879F97B5CBC}" type="slidenum">
               <a:rPr lang="en-US"/>
               <a:t>10</a:t>
-            </a:fld>
-            <a:endParaRPr lang="en-US"/>
-          </a:p>
-        </p:txBody>
-      </p:sp>
-    </p:spTree>
-    <p:extLst>
-      <p:ext uri="{BB962C8B-B14F-4D97-AF65-F5344CB8AC3E}">
-        <p14:creationId xmlns:p14="http://schemas.microsoft.com/office/powerpoint/2010/main" val="1024086991"/>
-      </p:ext>
-    </p:extLst>
-  </p:cSld>
-  <p:clrMapOvr>
-    <a:masterClrMapping/>
-  </p:clrMapOvr>
-</p:notes>
-</file>
-
-<file path=ppt/notesSlides/notesSlide11.xml><?xml version="1.0" encoding="utf-8"?>
-<p:notes xmlns:a="http://schemas.openxmlformats.org/drawingml/2006/main" xmlns:r="http://schemas.openxmlformats.org/officeDocument/2006/relationships" xmlns:p="http://schemas.openxmlformats.org/presentationml/2006/main">
-  <p:cSld>
-    <p:spTree>
-      <p:nvGrpSpPr>
-        <p:cNvPr id="1" name=""/>
-        <p:cNvGrpSpPr/>
-        <p:nvPr/>
-      </p:nvGrpSpPr>
-      <p:grpSpPr>
-        <a:xfrm>
-          <a:off x="0" y="0"/>
-          <a:ext cx="0" cy="0"/>
-          <a:chOff x="0" y="0"/>
-          <a:chExt cx="0" cy="0"/>
-        </a:xfrm>
-      </p:grpSpPr>
-      <p:sp>
-        <p:nvSpPr>
-          <p:cNvPr id="2" name="Slide Image Placeholder 1"/>
-          <p:cNvSpPr>
-            <a:spLocks noGrp="1" noRot="1" noChangeAspect="1"/>
-          </p:cNvSpPr>
-          <p:nvPr>
-            <p:ph type="sldImg"/>
-          </p:nvPr>
-        </p:nvSpPr>
-        <p:spPr/>
-      </p:sp>
-      <p:sp>
-        <p:nvSpPr>
-          <p:cNvPr id="3" name="Notes Placeholder 2"/>
-          <p:cNvSpPr>
-            <a:spLocks noGrp="1"/>
-          </p:cNvSpPr>
-          <p:nvPr>
-            <p:ph type="body" idx="1"/>
-          </p:nvPr>
-        </p:nvSpPr>
-        <p:spPr/>
-        <p:txBody>
-          <a:bodyPr/>
-          <a:lstStyle/>
-          <a:p>
-            <a:r>
-              <a:rPr lang="en-US" dirty="0"/>
-              <a:t/>
-            </a:r>
-            <a:endParaRPr lang="en-US" dirty="0"/>
-          </a:p>
-        </p:txBody>
-      </p:sp>
-      <p:sp>
-        <p:nvSpPr>
-          <p:cNvPr id="4" name="Slide Number Placeholder 3"/>
-          <p:cNvSpPr>
-            <a:spLocks noGrp="1"/>
-          </p:cNvSpPr>
-          <p:nvPr>
-            <p:ph type="sldNum" sz="quarter" idx="10"/>
-          </p:nvPr>
-        </p:nvSpPr>
-        <p:spPr/>
-        <p:txBody>
-          <a:bodyPr/>
-          <a:lstStyle/>
-          <a:p>
-            <a:fld id="{F7021451-1387-4CA6-816F-3879F97B5CBC}" type="slidenum">
-              <a:rPr lang="en-US"/>
-              <a:t>11</a:t>
             </a:fld>
             <a:endParaRPr lang="en-US"/>
           </a:p>
@@ -2451,7 +2362,7 @@
                 <a:ea typeface="Arial" pitchFamily="34" charset="-122"/>
                 <a:cs typeface="Arial" pitchFamily="34" charset="-120"/>
               </a:rPr>
-              <a:t>1 / 11</a:t>
+              <a:t>1 / 10</a:t>
             </a:r>
             <a:endParaRPr lang="en-US" sz="750" dirty="0"/>
           </a:p>
@@ -2625,1438 +2536,6 @@
 <file path=ppt/slides/slide10.xml><?xml version="1.0" encoding="utf-8"?>
 <p:sld xmlns:a="http://schemas.openxmlformats.org/drawingml/2006/main" xmlns:r="http://schemas.openxmlformats.org/officeDocument/2006/relationships" xmlns:p="http://schemas.openxmlformats.org/presentationml/2006/main">
   <p:cSld name="Slide 10">
-    <p:bg>
-      <p:bgPr>
-        <a:solidFill>
-          <a:srgbClr val="E9E0CD"/>
-        </a:solidFill>
-      </p:bgPr>
-    </p:bg>
-    <p:spTree>
-      <p:nvGrpSpPr>
-        <p:cNvPr id="1" name=""/>
-        <p:cNvGrpSpPr/>
-        <p:nvPr/>
-      </p:nvGrpSpPr>
-      <p:grpSpPr>
-        <a:xfrm>
-          <a:off x="0" y="0"/>
-          <a:ext cx="0" cy="0"/>
-          <a:chOff x="0" y="0"/>
-          <a:chExt cx="0" cy="0"/>
-        </a:xfrm>
-      </p:grpSpPr>
-      <p:sp>
-        <p:nvSpPr>
-          <p:cNvPr id="2" name="Text 0"/>
-          <p:cNvSpPr txBox="1"/>
-          <p:nvPr/>
-        </p:nvSpPr>
-        <p:spPr>
-          <a:xfrm>
-            <a:off x="596899" y="368299"/>
-            <a:ext cx="1904995" cy="330199"/>
-          </a:xfrm>
-          <a:prstGeom prst="rect">
-            <a:avLst/>
-          </a:prstGeom>
-          <a:noFill/>
-          <a:ln/>
-        </p:spPr>
-        <p:txBody>
-          <a:bodyPr wrap="square" lIns="0" tIns="0" rIns="0" bIns="0" rtlCol="0" anchor="ctr"/>
-          <a:lstStyle/>
-          <a:p>
-            <a:pPr algn="l" indent="0" marL="0">
-              <a:buNone/>
-            </a:pPr>
-            <a:r>
-              <a:rPr lang="en-US" sz="1800" b="1" dirty="0">
-                <a:solidFill>
-                  <a:srgbClr val="1C2230"/>
-                </a:solidFill>
-                <a:latin typeface="Arial" pitchFamily="34" charset="0"/>
-                <a:ea typeface="Arial" pitchFamily="34" charset="-122"/>
-                <a:cs typeface="Arial" pitchFamily="34" charset="-120"/>
-              </a:rPr>
-              <a:t>LINK</a:t>
-            </a:r>
-            <a:pPr algn="l" indent="0" marL="0">
-              <a:buNone/>
-            </a:pPr>
-            <a:r>
-              <a:rPr lang="en-US" sz="1800" b="1" dirty="0">
-                <a:solidFill>
-                  <a:srgbClr val="38B6FF"/>
-                </a:solidFill>
-                <a:latin typeface="Arial" pitchFamily="34" charset="0"/>
-                <a:ea typeface="Arial" pitchFamily="34" charset="-122"/>
-                <a:cs typeface="Arial" pitchFamily="34" charset="-120"/>
-              </a:rPr>
-              <a:t>.</a:t>
-            </a:r>
-            <a:endParaRPr lang="en-US" sz="1800" dirty="0"/>
-          </a:p>
-        </p:txBody>
-      </p:sp>
-      <p:sp>
-        <p:nvSpPr>
-          <p:cNvPr id="3" name="Text 1"/>
-          <p:cNvSpPr txBox="1"/>
-          <p:nvPr/>
-        </p:nvSpPr>
-        <p:spPr>
-          <a:xfrm>
-            <a:off x="609598" y="6381734"/>
-            <a:ext cx="5714986" cy="228599"/>
-          </a:xfrm>
-          <a:prstGeom prst="rect">
-            <a:avLst/>
-          </a:prstGeom>
-          <a:noFill/>
-          <a:ln/>
-        </p:spPr>
-        <p:txBody>
-          <a:bodyPr wrap="square" lIns="0" tIns="0" rIns="0" bIns="0" rtlCol="0" anchor="ctr"/>
-          <a:lstStyle/>
-          <a:p>
-            <a:pPr algn="l" indent="0" marL="0">
-              <a:buNone/>
-            </a:pPr>
-            <a:r>
-              <a:rPr lang="en-US" sz="750" b="1" spc="100" kern="0" dirty="0">
-                <a:solidFill>
-                  <a:srgbClr val="6F6A5C"/>
-                </a:solidFill>
-                <a:latin typeface="Arial" pitchFamily="34" charset="0"/>
-                <a:ea typeface="Arial" pitchFamily="34" charset="-122"/>
-                <a:cs typeface="Arial" pitchFamily="34" charset="-120"/>
-              </a:rPr>
-              <a:t>LINK. · Kennismaking</a:t>
-            </a:r>
-            <a:endParaRPr lang="en-US" sz="750" dirty="0"/>
-          </a:p>
-        </p:txBody>
-      </p:sp>
-      <p:sp>
-        <p:nvSpPr>
-          <p:cNvPr id="4" name="Text 2"/>
-          <p:cNvSpPr txBox="1"/>
-          <p:nvPr/>
-        </p:nvSpPr>
-        <p:spPr>
-          <a:xfrm>
-            <a:off x="9677376" y="6381734"/>
-            <a:ext cx="1904995" cy="228599"/>
-          </a:xfrm>
-          <a:prstGeom prst="rect">
-            <a:avLst/>
-          </a:prstGeom>
-          <a:noFill/>
-          <a:ln/>
-        </p:spPr>
-        <p:txBody>
-          <a:bodyPr wrap="square" lIns="0" tIns="0" rIns="0" bIns="0" rtlCol="0" anchor="ctr"/>
-          <a:lstStyle/>
-          <a:p>
-            <a:pPr algn="r" indent="0" marL="0">
-              <a:buNone/>
-            </a:pPr>
-            <a:r>
-              <a:rPr lang="en-US" sz="750" b="1" spc="100" kern="0" dirty="0">
-                <a:solidFill>
-                  <a:srgbClr val="6F6A5C"/>
-                </a:solidFill>
-                <a:latin typeface="Arial" pitchFamily="34" charset="0"/>
-                <a:ea typeface="Arial" pitchFamily="34" charset="-122"/>
-                <a:cs typeface="Arial" pitchFamily="34" charset="-120"/>
-              </a:rPr>
-              <a:t>10 / 11</a:t>
-            </a:r>
-            <a:endParaRPr lang="en-US" sz="750" dirty="0"/>
-          </a:p>
-        </p:txBody>
-      </p:sp>
-      <p:sp>
-        <p:nvSpPr>
-          <p:cNvPr id="5" name="Text 3"/>
-          <p:cNvSpPr txBox="1"/>
-          <p:nvPr/>
-        </p:nvSpPr>
-        <p:spPr>
-          <a:xfrm>
-            <a:off x="609598" y="1206497"/>
-            <a:ext cx="10159975" cy="215899"/>
-          </a:xfrm>
-          <a:prstGeom prst="rect">
-            <a:avLst/>
-          </a:prstGeom>
-          <a:noFill/>
-          <a:ln/>
-        </p:spPr>
-        <p:txBody>
-          <a:bodyPr wrap="square" lIns="0" tIns="0" rIns="0" bIns="0" rtlCol="0" anchor="ctr"/>
-          <a:lstStyle/>
-          <a:p>
-            <a:pPr algn="l" indent="0" marL="0">
-              <a:buNone/>
-            </a:pPr>
-            <a:r>
-              <a:rPr lang="en-US" sz="950" b="1" spc="400" kern="0" dirty="0">
-                <a:solidFill>
-                  <a:srgbClr val="38B6FF"/>
-                </a:solidFill>
-                <a:latin typeface="Arial" pitchFamily="34" charset="0"/>
-                <a:ea typeface="Arial" pitchFamily="34" charset="-122"/>
-                <a:cs typeface="Arial" pitchFamily="34" charset="-120"/>
-              </a:rPr>
-              <a:t>SPELREGELS</a:t>
-            </a:r>
-            <a:endParaRPr lang="en-US" sz="950" dirty="0"/>
-          </a:p>
-        </p:txBody>
-      </p:sp>
-      <p:sp>
-        <p:nvSpPr>
-          <p:cNvPr id="6" name="Text 4"/>
-          <p:cNvSpPr txBox="1"/>
-          <p:nvPr/>
-        </p:nvSpPr>
-        <p:spPr>
-          <a:xfrm>
-            <a:off x="609598" y="1511296"/>
-            <a:ext cx="10972773" cy="1142997"/>
-          </a:xfrm>
-          <a:prstGeom prst="rect">
-            <a:avLst/>
-          </a:prstGeom>
-          <a:noFill/>
-          <a:ln/>
-        </p:spPr>
-        <p:txBody>
-          <a:bodyPr wrap="square" lIns="0" tIns="0" rIns="0" bIns="0" rtlCol="0" anchor="t"/>
-          <a:lstStyle/>
-          <a:p>
-            <a:pPr algn="l" indent="0" marL="0">
-              <a:lnSpc>
-                <a:spcPct val="108000"/>
-              </a:lnSpc>
-              <a:buNone/>
-            </a:pPr>
-            <a:r>
-              <a:rPr lang="en-US" sz="3200" b="1" dirty="0">
-                <a:solidFill>
-                  <a:srgbClr val="1C2230"/>
-                </a:solidFill>
-                <a:latin typeface="Arial" pitchFamily="34" charset="0"/>
-                <a:ea typeface="Arial" pitchFamily="34" charset="-122"/>
-                <a:cs typeface="Arial" pitchFamily="34" charset="-120"/>
-              </a:rPr>
-              <a:t>Transparant en zonder </a:t>
-            </a:r>
-            <a:pPr algn="l" indent="0" marL="0">
-              <a:lnSpc>
-                <a:spcPct val="108000"/>
-              </a:lnSpc>
-              <a:buNone/>
-            </a:pPr>
-            <a:r>
-              <a:rPr lang="en-US" sz="3000" i="1" dirty="0">
-                <a:solidFill>
-                  <a:srgbClr val="1C2230"/>
-                </a:solidFill>
-                <a:latin typeface="Georgia" pitchFamily="34" charset="0"/>
-                <a:ea typeface="Georgia" pitchFamily="34" charset="-122"/>
-                <a:cs typeface="Georgia" pitchFamily="34" charset="-120"/>
-              </a:rPr>
-              <a:t>kleine lettertjes</a:t>
-            </a:r>
-            <a:pPr algn="l" indent="0" marL="0">
-              <a:lnSpc>
-                <a:spcPct val="108000"/>
-              </a:lnSpc>
-              <a:buNone/>
-            </a:pPr>
-            <a:r>
-              <a:rPr lang="en-US" sz="3200" b="1" dirty="0">
-                <a:solidFill>
-                  <a:srgbClr val="1C2230"/>
-                </a:solidFill>
-                <a:latin typeface="Arial" pitchFamily="34" charset="0"/>
-                <a:ea typeface="Arial" pitchFamily="34" charset="-122"/>
-                <a:cs typeface="Arial" pitchFamily="34" charset="-120"/>
-              </a:rPr>
-              <a:t>.</a:t>
-            </a:r>
-            <a:endParaRPr lang="en-US" sz="3200" dirty="0"/>
-          </a:p>
-        </p:txBody>
-      </p:sp>
-      <p:sp>
-        <p:nvSpPr>
-          <p:cNvPr id="7" name="Shape 5"/>
-          <p:cNvSpPr/>
-          <p:nvPr/>
-        </p:nvSpPr>
-        <p:spPr>
-          <a:xfrm>
-            <a:off x="609598" y="2819393"/>
-            <a:ext cx="253999" cy="253999"/>
-          </a:xfrm>
-          <a:prstGeom prst="roundRect">
-            <a:avLst>
-              <a:gd name="adj" fmla="val 25000"/>
-            </a:avLst>
-          </a:prstGeom>
-          <a:solidFill>
-            <a:srgbClr val="DDEBF3"/>
-          </a:solidFill>
-          <a:ln/>
-        </p:spPr>
-      </p:sp>
-      <p:pic>
-        <p:nvPicPr>
-          <p:cNvPr id="8" name="Image 0" descr="preencoded.png">    </p:cNvPr>
-          <p:cNvPicPr>
-            <a:picLocks noChangeAspect="1"/>
-          </p:cNvPicPr>
-          <p:nvPr/>
-        </p:nvPicPr>
-        <p:blipFill>
-          <a:blip r:embed="rId1"/>
-          <a:stretch>
-            <a:fillRect/>
-          </a:stretch>
-        </p:blipFill>
-        <p:spPr>
-          <a:xfrm>
-            <a:off x="666748" y="2876543"/>
-            <a:ext cx="139700" cy="139700"/>
-          </a:xfrm>
-          <a:prstGeom prst="rect">
-            <a:avLst/>
-          </a:prstGeom>
-        </p:spPr>
-      </p:pic>
-      <p:sp>
-        <p:nvSpPr>
-          <p:cNvPr id="9" name="Text 6"/>
-          <p:cNvSpPr txBox="1"/>
-          <p:nvPr/>
-        </p:nvSpPr>
-        <p:spPr>
-          <a:xfrm>
-            <a:off x="1015997" y="2793993"/>
-            <a:ext cx="4825988" cy="228599"/>
-          </a:xfrm>
-          <a:prstGeom prst="rect">
-            <a:avLst/>
-          </a:prstGeom>
-          <a:noFill/>
-          <a:ln/>
-        </p:spPr>
-        <p:txBody>
-          <a:bodyPr wrap="square" lIns="0" tIns="0" rIns="0" bIns="0" rtlCol="0" anchor="ctr"/>
-          <a:lstStyle/>
-          <a:p>
-            <a:pPr indent="0" marL="0">
-              <a:buNone/>
-            </a:pPr>
-            <a:r>
-              <a:rPr lang="en-US" sz="1200" b="1" dirty="0">
-                <a:solidFill>
-                  <a:srgbClr val="1C2230"/>
-                </a:solidFill>
-                <a:latin typeface="Arial" pitchFamily="34" charset="0"/>
-                <a:ea typeface="Arial" pitchFamily="34" charset="-122"/>
-                <a:cs typeface="Arial" pitchFamily="34" charset="-120"/>
-              </a:rPr>
-              <a:t>Niet-exclusief</a:t>
-            </a:r>
-            <a:endParaRPr lang="en-US" sz="1200" dirty="0"/>
-          </a:p>
-        </p:txBody>
-      </p:sp>
-      <p:sp>
-        <p:nvSpPr>
-          <p:cNvPr id="10" name="Text 7"/>
-          <p:cNvSpPr txBox="1"/>
-          <p:nvPr/>
-        </p:nvSpPr>
-        <p:spPr>
-          <a:xfrm>
-            <a:off x="1015997" y="3035292"/>
-            <a:ext cx="4825988" cy="355599"/>
-          </a:xfrm>
-          <a:prstGeom prst="rect">
-            <a:avLst/>
-          </a:prstGeom>
-          <a:noFill/>
-          <a:ln/>
-        </p:spPr>
-        <p:txBody>
-          <a:bodyPr wrap="square" lIns="0" tIns="0" rIns="0" bIns="0" rtlCol="0" anchor="t"/>
-          <a:lstStyle/>
-          <a:p>
-            <a:pPr indent="0" marL="0">
-              <a:lnSpc>
-                <a:spcPct val="130000"/>
-              </a:lnSpc>
-              <a:buNone/>
-            </a:pPr>
-            <a:r>
-              <a:rPr lang="en-US" sz="950" dirty="0">
-                <a:solidFill>
-                  <a:srgbClr val="6F6A5C"/>
-                </a:solidFill>
-                <a:latin typeface="Arial" pitchFamily="34" charset="0"/>
-                <a:ea typeface="Arial" pitchFamily="34" charset="-122"/>
-                <a:cs typeface="Arial" pitchFamily="34" charset="-120"/>
-              </a:rPr>
-              <a:t>Jullie zitten nergens aan vast en houden alle vrijheid.</a:t>
-            </a:r>
-            <a:endParaRPr lang="en-US" sz="950" dirty="0"/>
-          </a:p>
-        </p:txBody>
-      </p:sp>
-      <p:sp>
-        <p:nvSpPr>
-          <p:cNvPr id="11" name="Shape 8"/>
-          <p:cNvSpPr/>
-          <p:nvPr/>
-        </p:nvSpPr>
-        <p:spPr>
-          <a:xfrm>
-            <a:off x="6349984" y="2819393"/>
-            <a:ext cx="253999" cy="253999"/>
-          </a:xfrm>
-          <a:prstGeom prst="roundRect">
-            <a:avLst>
-              <a:gd name="adj" fmla="val 25000"/>
-            </a:avLst>
-          </a:prstGeom>
-          <a:solidFill>
-            <a:srgbClr val="DDEBF3"/>
-          </a:solidFill>
-          <a:ln/>
-        </p:spPr>
-      </p:sp>
-      <p:pic>
-        <p:nvPicPr>
-          <p:cNvPr id="12" name="Image 1" descr="preencoded.png">    </p:cNvPr>
-          <p:cNvPicPr>
-            <a:picLocks noChangeAspect="1"/>
-          </p:cNvPicPr>
-          <p:nvPr/>
-        </p:nvPicPr>
-        <p:blipFill>
-          <a:blip r:embed="rId2"/>
-          <a:stretch>
-            <a:fillRect/>
-          </a:stretch>
-        </p:blipFill>
-        <p:spPr>
-          <a:xfrm>
-            <a:off x="6407134" y="2876543"/>
-            <a:ext cx="139700" cy="139700"/>
-          </a:xfrm>
-          <a:prstGeom prst="rect">
-            <a:avLst/>
-          </a:prstGeom>
-        </p:spPr>
-      </p:pic>
-      <p:sp>
-        <p:nvSpPr>
-          <p:cNvPr id="13" name="Text 9"/>
-          <p:cNvSpPr txBox="1"/>
-          <p:nvPr/>
-        </p:nvSpPr>
-        <p:spPr>
-          <a:xfrm>
-            <a:off x="6756383" y="2793993"/>
-            <a:ext cx="4825988" cy="228599"/>
-          </a:xfrm>
-          <a:prstGeom prst="rect">
-            <a:avLst/>
-          </a:prstGeom>
-          <a:noFill/>
-          <a:ln/>
-        </p:spPr>
-        <p:txBody>
-          <a:bodyPr wrap="square" lIns="0" tIns="0" rIns="0" bIns="0" rtlCol="0" anchor="ctr"/>
-          <a:lstStyle/>
-          <a:p>
-            <a:pPr indent="0" marL="0">
-              <a:buNone/>
-            </a:pPr>
-            <a:r>
-              <a:rPr lang="en-US" sz="1200" b="1" dirty="0">
-                <a:solidFill>
-                  <a:srgbClr val="1C2230"/>
-                </a:solidFill>
-                <a:latin typeface="Arial" pitchFamily="34" charset="0"/>
-                <a:ea typeface="Arial" pitchFamily="34" charset="-122"/>
-                <a:cs typeface="Arial" pitchFamily="34" charset="-120"/>
-              </a:rPr>
-              <a:t>Bestaande relaties blijven van jullie</a:t>
-            </a:r>
-            <a:endParaRPr lang="en-US" sz="1200" dirty="0"/>
-          </a:p>
-        </p:txBody>
-      </p:sp>
-      <p:sp>
-        <p:nvSpPr>
-          <p:cNvPr id="14" name="Text 10"/>
-          <p:cNvSpPr txBox="1"/>
-          <p:nvPr/>
-        </p:nvSpPr>
-        <p:spPr>
-          <a:xfrm>
-            <a:off x="6756383" y="3035292"/>
-            <a:ext cx="4825988" cy="355599"/>
-          </a:xfrm>
-          <a:prstGeom prst="rect">
-            <a:avLst/>
-          </a:prstGeom>
-          <a:noFill/>
-          <a:ln/>
-        </p:spPr>
-        <p:txBody>
-          <a:bodyPr wrap="square" lIns="0" tIns="0" rIns="0" bIns="0" rtlCol="0" anchor="t"/>
-          <a:lstStyle/>
-          <a:p>
-            <a:pPr indent="0" marL="0">
-              <a:lnSpc>
-                <a:spcPct val="130000"/>
-              </a:lnSpc>
-              <a:buNone/>
-            </a:pPr>
-            <a:r>
-              <a:rPr lang="en-US" sz="950" dirty="0">
-                <a:solidFill>
-                  <a:srgbClr val="6F6A5C"/>
-                </a:solidFill>
-                <a:latin typeface="Arial" pitchFamily="34" charset="0"/>
-                <a:ea typeface="Arial" pitchFamily="34" charset="-122"/>
-                <a:cs typeface="Arial" pitchFamily="34" charset="-120"/>
-              </a:rPr>
-              <a:t>Uitsluitlijst vooraf, die bedrijven benaderen wij niet.</a:t>
-            </a:r>
-            <a:endParaRPr lang="en-US" sz="950" dirty="0"/>
-          </a:p>
-        </p:txBody>
-      </p:sp>
-      <p:sp>
-        <p:nvSpPr>
-          <p:cNvPr id="15" name="Shape 11"/>
-          <p:cNvSpPr/>
-          <p:nvPr/>
-        </p:nvSpPr>
-        <p:spPr>
-          <a:xfrm>
-            <a:off x="609598" y="3428991"/>
-            <a:ext cx="5232387" cy="0"/>
-          </a:xfrm>
-          <a:prstGeom prst="line">
-            <a:avLst/>
-          </a:prstGeom>
-          <a:noFill/>
-          <a:ln w="6350">
-            <a:solidFill>
-              <a:srgbClr val="C9C2B2"/>
-            </a:solidFill>
-            <a:prstDash val="solid"/>
-          </a:ln>
-        </p:spPr>
-      </p:sp>
-      <p:sp>
-        <p:nvSpPr>
-          <p:cNvPr id="16" name="Shape 12"/>
-          <p:cNvSpPr/>
-          <p:nvPr/>
-        </p:nvSpPr>
-        <p:spPr>
-          <a:xfrm>
-            <a:off x="609598" y="3530591"/>
-            <a:ext cx="253999" cy="253999"/>
-          </a:xfrm>
-          <a:prstGeom prst="roundRect">
-            <a:avLst>
-              <a:gd name="adj" fmla="val 25000"/>
-            </a:avLst>
-          </a:prstGeom>
-          <a:solidFill>
-            <a:srgbClr val="DDEBF3"/>
-          </a:solidFill>
-          <a:ln/>
-        </p:spPr>
-      </p:sp>
-      <p:pic>
-        <p:nvPicPr>
-          <p:cNvPr id="17" name="Image 2" descr="preencoded.png">    </p:cNvPr>
-          <p:cNvPicPr>
-            <a:picLocks noChangeAspect="1"/>
-          </p:cNvPicPr>
-          <p:nvPr/>
-        </p:nvPicPr>
-        <p:blipFill>
-          <a:blip r:embed="rId3"/>
-          <a:stretch>
-            <a:fillRect/>
-          </a:stretch>
-        </p:blipFill>
-        <p:spPr>
-          <a:xfrm>
-            <a:off x="666748" y="3587741"/>
-            <a:ext cx="139700" cy="139700"/>
-          </a:xfrm>
-          <a:prstGeom prst="rect">
-            <a:avLst/>
-          </a:prstGeom>
-        </p:spPr>
-      </p:pic>
-      <p:sp>
-        <p:nvSpPr>
-          <p:cNvPr id="18" name="Text 13"/>
-          <p:cNvSpPr txBox="1"/>
-          <p:nvPr/>
-        </p:nvSpPr>
-        <p:spPr>
-          <a:xfrm>
-            <a:off x="1015997" y="3505191"/>
-            <a:ext cx="4825988" cy="228599"/>
-          </a:xfrm>
-          <a:prstGeom prst="rect">
-            <a:avLst/>
-          </a:prstGeom>
-          <a:noFill/>
-          <a:ln/>
-        </p:spPr>
-        <p:txBody>
-          <a:bodyPr wrap="square" lIns="0" tIns="0" rIns="0" bIns="0" rtlCol="0" anchor="ctr"/>
-          <a:lstStyle/>
-          <a:p>
-            <a:pPr indent="0" marL="0">
-              <a:buNone/>
-            </a:pPr>
-            <a:r>
-              <a:rPr lang="en-US" sz="1200" b="1" dirty="0">
-                <a:solidFill>
-                  <a:srgbClr val="1C2230"/>
-                </a:solidFill>
-                <a:latin typeface="Arial" pitchFamily="34" charset="0"/>
-                <a:ea typeface="Arial" pitchFamily="34" charset="-122"/>
-                <a:cs typeface="Arial" pitchFamily="34" charset="-120"/>
-              </a:rPr>
-              <a:t>Werkperiodes van 4 weken</a:t>
-            </a:r>
-            <a:endParaRPr lang="en-US" sz="1200" dirty="0"/>
-          </a:p>
-        </p:txBody>
-      </p:sp>
-      <p:sp>
-        <p:nvSpPr>
-          <p:cNvPr id="19" name="Text 14"/>
-          <p:cNvSpPr txBox="1"/>
-          <p:nvPr/>
-        </p:nvSpPr>
-        <p:spPr>
-          <a:xfrm>
-            <a:off x="1015997" y="3746491"/>
-            <a:ext cx="4825988" cy="355599"/>
-          </a:xfrm>
-          <a:prstGeom prst="rect">
-            <a:avLst/>
-          </a:prstGeom>
-          <a:noFill/>
-          <a:ln/>
-        </p:spPr>
-        <p:txBody>
-          <a:bodyPr wrap="square" lIns="0" tIns="0" rIns="0" bIns="0" rtlCol="0" anchor="t"/>
-          <a:lstStyle/>
-          <a:p>
-            <a:pPr indent="0" marL="0">
-              <a:lnSpc>
-                <a:spcPct val="130000"/>
-              </a:lnSpc>
-              <a:buNone/>
-            </a:pPr>
-            <a:r>
-              <a:rPr lang="en-US" sz="950" dirty="0">
-                <a:solidFill>
-                  <a:srgbClr val="6F6A5C"/>
-                </a:solidFill>
-                <a:latin typeface="Arial" pitchFamily="34" charset="0"/>
-                <a:ea typeface="Arial" pitchFamily="34" charset="-122"/>
-                <a:cs typeface="Arial" pitchFamily="34" charset="-120"/>
-              </a:rPr>
-              <a:t>Vooraf gefactureerd, per werkperiode.</a:t>
-            </a:r>
-            <a:endParaRPr lang="en-US" sz="950" dirty="0"/>
-          </a:p>
-        </p:txBody>
-      </p:sp>
-      <p:sp>
-        <p:nvSpPr>
-          <p:cNvPr id="20" name="Shape 15"/>
-          <p:cNvSpPr/>
-          <p:nvPr/>
-        </p:nvSpPr>
-        <p:spPr>
-          <a:xfrm>
-            <a:off x="6349984" y="3428991"/>
-            <a:ext cx="5232387" cy="0"/>
-          </a:xfrm>
-          <a:prstGeom prst="line">
-            <a:avLst/>
-          </a:prstGeom>
-          <a:noFill/>
-          <a:ln w="6350">
-            <a:solidFill>
-              <a:srgbClr val="C9C2B2"/>
-            </a:solidFill>
-            <a:prstDash val="solid"/>
-          </a:ln>
-        </p:spPr>
-      </p:sp>
-      <p:sp>
-        <p:nvSpPr>
-          <p:cNvPr id="21" name="Shape 16"/>
-          <p:cNvSpPr/>
-          <p:nvPr/>
-        </p:nvSpPr>
-        <p:spPr>
-          <a:xfrm>
-            <a:off x="6349984" y="3530591"/>
-            <a:ext cx="253999" cy="253999"/>
-          </a:xfrm>
-          <a:prstGeom prst="roundRect">
-            <a:avLst>
-              <a:gd name="adj" fmla="val 25000"/>
-            </a:avLst>
-          </a:prstGeom>
-          <a:solidFill>
-            <a:srgbClr val="DDEBF3"/>
-          </a:solidFill>
-          <a:ln/>
-        </p:spPr>
-      </p:sp>
-      <p:pic>
-        <p:nvPicPr>
-          <p:cNvPr id="22" name="Image 3" descr="preencoded.png">    </p:cNvPr>
-          <p:cNvPicPr>
-            <a:picLocks noChangeAspect="1"/>
-          </p:cNvPicPr>
-          <p:nvPr/>
-        </p:nvPicPr>
-        <p:blipFill>
-          <a:blip r:embed="rId4"/>
-          <a:stretch>
-            <a:fillRect/>
-          </a:stretch>
-        </p:blipFill>
-        <p:spPr>
-          <a:xfrm>
-            <a:off x="6407134" y="3587741"/>
-            <a:ext cx="139700" cy="139700"/>
-          </a:xfrm>
-          <a:prstGeom prst="rect">
-            <a:avLst/>
-          </a:prstGeom>
-        </p:spPr>
-      </p:pic>
-      <p:sp>
-        <p:nvSpPr>
-          <p:cNvPr id="23" name="Text 17"/>
-          <p:cNvSpPr txBox="1"/>
-          <p:nvPr/>
-        </p:nvSpPr>
-        <p:spPr>
-          <a:xfrm>
-            <a:off x="6756383" y="3505191"/>
-            <a:ext cx="4825988" cy="228599"/>
-          </a:xfrm>
-          <a:prstGeom prst="rect">
-            <a:avLst/>
-          </a:prstGeom>
-          <a:noFill/>
-          <a:ln/>
-        </p:spPr>
-        <p:txBody>
-          <a:bodyPr wrap="square" lIns="0" tIns="0" rIns="0" bIns="0" rtlCol="0" anchor="ctr"/>
-          <a:lstStyle/>
-          <a:p>
-            <a:pPr indent="0" marL="0">
-              <a:buNone/>
-            </a:pPr>
-            <a:r>
-              <a:rPr lang="en-US" sz="1200" b="1" dirty="0">
-                <a:solidFill>
-                  <a:srgbClr val="1C2230"/>
-                </a:solidFill>
-                <a:latin typeface="Arial" pitchFamily="34" charset="0"/>
-                <a:ea typeface="Arial" pitchFamily="34" charset="-122"/>
-                <a:cs typeface="Arial" pitchFamily="34" charset="-120"/>
-              </a:rPr>
-              <a:t>Wekelijkse rapportage</a:t>
-            </a:r>
-            <a:endParaRPr lang="en-US" sz="1200" dirty="0"/>
-          </a:p>
-        </p:txBody>
-      </p:sp>
-      <p:sp>
-        <p:nvSpPr>
-          <p:cNvPr id="24" name="Text 18"/>
-          <p:cNvSpPr txBox="1"/>
-          <p:nvPr/>
-        </p:nvSpPr>
-        <p:spPr>
-          <a:xfrm>
-            <a:off x="6756383" y="3746491"/>
-            <a:ext cx="4825988" cy="355599"/>
-          </a:xfrm>
-          <a:prstGeom prst="rect">
-            <a:avLst/>
-          </a:prstGeom>
-          <a:noFill/>
-          <a:ln/>
-        </p:spPr>
-        <p:txBody>
-          <a:bodyPr wrap="square" lIns="0" tIns="0" rIns="0" bIns="0" rtlCol="0" anchor="t"/>
-          <a:lstStyle/>
-          <a:p>
-            <a:pPr indent="0" marL="0">
-              <a:lnSpc>
-                <a:spcPct val="130000"/>
-              </a:lnSpc>
-              <a:buNone/>
-            </a:pPr>
-            <a:r>
-              <a:rPr lang="en-US" sz="950" dirty="0">
-                <a:solidFill>
-                  <a:srgbClr val="6F6A5C"/>
-                </a:solidFill>
-                <a:latin typeface="Arial" pitchFamily="34" charset="0"/>
-                <a:ea typeface="Arial" pitchFamily="34" charset="-122"/>
-                <a:cs typeface="Arial" pitchFamily="34" charset="-120"/>
-              </a:rPr>
-              <a:t>Elke week zicht op wat er gebeurd is en wat het opleverde.</a:t>
-            </a:r>
-            <a:endParaRPr lang="en-US" sz="950" dirty="0"/>
-          </a:p>
-        </p:txBody>
-      </p:sp>
-      <p:sp>
-        <p:nvSpPr>
-          <p:cNvPr id="25" name="Shape 19"/>
-          <p:cNvSpPr/>
-          <p:nvPr/>
-        </p:nvSpPr>
-        <p:spPr>
-          <a:xfrm>
-            <a:off x="609598" y="4140190"/>
-            <a:ext cx="5232387" cy="0"/>
-          </a:xfrm>
-          <a:prstGeom prst="line">
-            <a:avLst/>
-          </a:prstGeom>
-          <a:noFill/>
-          <a:ln w="6350">
-            <a:solidFill>
-              <a:srgbClr val="C9C2B2"/>
-            </a:solidFill>
-            <a:prstDash val="solid"/>
-          </a:ln>
-        </p:spPr>
-      </p:sp>
-      <p:sp>
-        <p:nvSpPr>
-          <p:cNvPr id="26" name="Shape 20"/>
-          <p:cNvSpPr/>
-          <p:nvPr/>
-        </p:nvSpPr>
-        <p:spPr>
-          <a:xfrm>
-            <a:off x="609598" y="4241789"/>
-            <a:ext cx="253999" cy="253999"/>
-          </a:xfrm>
-          <a:prstGeom prst="roundRect">
-            <a:avLst>
-              <a:gd name="adj" fmla="val 25000"/>
-            </a:avLst>
-          </a:prstGeom>
-          <a:solidFill>
-            <a:srgbClr val="DDEBF3"/>
-          </a:solidFill>
-          <a:ln/>
-        </p:spPr>
-      </p:sp>
-      <p:pic>
-        <p:nvPicPr>
-          <p:cNvPr id="27" name="Image 4" descr="preencoded.png">    </p:cNvPr>
-          <p:cNvPicPr>
-            <a:picLocks noChangeAspect="1"/>
-          </p:cNvPicPr>
-          <p:nvPr/>
-        </p:nvPicPr>
-        <p:blipFill>
-          <a:blip r:embed="rId5"/>
-          <a:stretch>
-            <a:fillRect/>
-          </a:stretch>
-        </p:blipFill>
-        <p:spPr>
-          <a:xfrm>
-            <a:off x="666748" y="4298939"/>
-            <a:ext cx="139700" cy="139700"/>
-          </a:xfrm>
-          <a:prstGeom prst="rect">
-            <a:avLst/>
-          </a:prstGeom>
-        </p:spPr>
-      </p:pic>
-      <p:sp>
-        <p:nvSpPr>
-          <p:cNvPr id="28" name="Text 21"/>
-          <p:cNvSpPr txBox="1"/>
-          <p:nvPr/>
-        </p:nvSpPr>
-        <p:spPr>
-          <a:xfrm>
-            <a:off x="1015997" y="4216389"/>
-            <a:ext cx="4825988" cy="228599"/>
-          </a:xfrm>
-          <a:prstGeom prst="rect">
-            <a:avLst/>
-          </a:prstGeom>
-          <a:noFill/>
-          <a:ln/>
-        </p:spPr>
-        <p:txBody>
-          <a:bodyPr wrap="square" lIns="0" tIns="0" rIns="0" bIns="0" rtlCol="0" anchor="ctr"/>
-          <a:lstStyle/>
-          <a:p>
-            <a:pPr indent="0" marL="0">
-              <a:buNone/>
-            </a:pPr>
-            <a:r>
-              <a:rPr lang="en-US" sz="1200" b="1" dirty="0">
-                <a:solidFill>
-                  <a:srgbClr val="1C2230"/>
-                </a:solidFill>
-                <a:latin typeface="Arial" pitchFamily="34" charset="0"/>
-                <a:ea typeface="Arial" pitchFamily="34" charset="-122"/>
-                <a:cs typeface="Arial" pitchFamily="34" charset="-120"/>
-              </a:rPr>
-              <a:t>Jullie naam, onze uitvoering</a:t>
-            </a:r>
-            <a:endParaRPr lang="en-US" sz="1200" dirty="0"/>
-          </a:p>
-        </p:txBody>
-      </p:sp>
-      <p:sp>
-        <p:nvSpPr>
-          <p:cNvPr id="29" name="Text 22"/>
-          <p:cNvSpPr txBox="1"/>
-          <p:nvPr/>
-        </p:nvSpPr>
-        <p:spPr>
-          <a:xfrm>
-            <a:off x="1015997" y="4457689"/>
-            <a:ext cx="4825988" cy="355599"/>
-          </a:xfrm>
-          <a:prstGeom prst="rect">
-            <a:avLst/>
-          </a:prstGeom>
-          <a:noFill/>
-          <a:ln/>
-        </p:spPr>
-        <p:txBody>
-          <a:bodyPr wrap="square" lIns="0" tIns="0" rIns="0" bIns="0" rtlCol="0" anchor="t"/>
-          <a:lstStyle/>
-          <a:p>
-            <a:pPr indent="0" marL="0">
-              <a:lnSpc>
-                <a:spcPct val="130000"/>
-              </a:lnSpc>
-              <a:buNone/>
-            </a:pPr>
-            <a:r>
-              <a:rPr lang="en-US" sz="950" dirty="0">
-                <a:solidFill>
-                  <a:srgbClr val="6F6A5C"/>
-                </a:solidFill>
-                <a:latin typeface="Arial" pitchFamily="34" charset="0"/>
-                <a:ea typeface="Arial" pitchFamily="34" charset="-122"/>
-                <a:cs typeface="Arial" pitchFamily="34" charset="-120"/>
-              </a:rPr>
-              <a:t>Regionaal nummer en jullie stijl, wij voeren uit.</a:t>
-            </a:r>
-            <a:endParaRPr lang="en-US" sz="950" dirty="0"/>
-          </a:p>
-        </p:txBody>
-      </p:sp>
-      <p:sp>
-        <p:nvSpPr>
-          <p:cNvPr id="30" name="Shape 23"/>
-          <p:cNvSpPr/>
-          <p:nvPr/>
-        </p:nvSpPr>
-        <p:spPr>
-          <a:xfrm>
-            <a:off x="6349984" y="4140190"/>
-            <a:ext cx="5232387" cy="0"/>
-          </a:xfrm>
-          <a:prstGeom prst="line">
-            <a:avLst/>
-          </a:prstGeom>
-          <a:noFill/>
-          <a:ln w="6350">
-            <a:solidFill>
-              <a:srgbClr val="C9C2B2"/>
-            </a:solidFill>
-            <a:prstDash val="solid"/>
-          </a:ln>
-        </p:spPr>
-      </p:sp>
-      <p:sp>
-        <p:nvSpPr>
-          <p:cNvPr id="31" name="Shape 24"/>
-          <p:cNvSpPr/>
-          <p:nvPr/>
-        </p:nvSpPr>
-        <p:spPr>
-          <a:xfrm>
-            <a:off x="6349984" y="4241789"/>
-            <a:ext cx="253999" cy="253999"/>
-          </a:xfrm>
-          <a:prstGeom prst="roundRect">
-            <a:avLst>
-              <a:gd name="adj" fmla="val 25000"/>
-            </a:avLst>
-          </a:prstGeom>
-          <a:solidFill>
-            <a:srgbClr val="DDEBF3"/>
-          </a:solidFill>
-          <a:ln/>
-        </p:spPr>
-      </p:sp>
-      <p:pic>
-        <p:nvPicPr>
-          <p:cNvPr id="32" name="Image 5" descr="preencoded.png">    </p:cNvPr>
-          <p:cNvPicPr>
-            <a:picLocks noChangeAspect="1"/>
-          </p:cNvPicPr>
-          <p:nvPr/>
-        </p:nvPicPr>
-        <p:blipFill>
-          <a:blip r:embed="rId6"/>
-          <a:stretch>
-            <a:fillRect/>
-          </a:stretch>
-        </p:blipFill>
-        <p:spPr>
-          <a:xfrm>
-            <a:off x="6407134" y="4298939"/>
-            <a:ext cx="139700" cy="139700"/>
-          </a:xfrm>
-          <a:prstGeom prst="rect">
-            <a:avLst/>
-          </a:prstGeom>
-        </p:spPr>
-      </p:pic>
-      <p:sp>
-        <p:nvSpPr>
-          <p:cNvPr id="33" name="Text 25"/>
-          <p:cNvSpPr txBox="1"/>
-          <p:nvPr/>
-        </p:nvSpPr>
-        <p:spPr>
-          <a:xfrm>
-            <a:off x="6756383" y="4216389"/>
-            <a:ext cx="4825988" cy="228599"/>
-          </a:xfrm>
-          <a:prstGeom prst="rect">
-            <a:avLst/>
-          </a:prstGeom>
-          <a:noFill/>
-          <a:ln/>
-        </p:spPr>
-        <p:txBody>
-          <a:bodyPr wrap="square" lIns="0" tIns="0" rIns="0" bIns="0" rtlCol="0" anchor="ctr"/>
-          <a:lstStyle/>
-          <a:p>
-            <a:pPr indent="0" marL="0">
-              <a:buNone/>
-            </a:pPr>
-            <a:r>
-              <a:rPr lang="en-US" sz="1200" b="1" dirty="0">
-                <a:solidFill>
-                  <a:srgbClr val="1C2230"/>
-                </a:solidFill>
-                <a:latin typeface="Arial" pitchFamily="34" charset="0"/>
-                <a:ea typeface="Arial" pitchFamily="34" charset="-122"/>
-                <a:cs typeface="Arial" pitchFamily="34" charset="-120"/>
-              </a:rPr>
-              <a:t>Gegevens veilig</a:t>
-            </a:r>
-            <a:endParaRPr lang="en-US" sz="1200" dirty="0"/>
-          </a:p>
-        </p:txBody>
-      </p:sp>
-      <p:sp>
-        <p:nvSpPr>
-          <p:cNvPr id="34" name="Text 26"/>
-          <p:cNvSpPr txBox="1"/>
-          <p:nvPr/>
-        </p:nvSpPr>
-        <p:spPr>
-          <a:xfrm>
-            <a:off x="6756383" y="4457689"/>
-            <a:ext cx="4825988" cy="355599"/>
-          </a:xfrm>
-          <a:prstGeom prst="rect">
-            <a:avLst/>
-          </a:prstGeom>
-          <a:noFill/>
-          <a:ln/>
-        </p:spPr>
-        <p:txBody>
-          <a:bodyPr wrap="square" lIns="0" tIns="0" rIns="0" bIns="0" rtlCol="0" anchor="t"/>
-          <a:lstStyle/>
-          <a:p>
-            <a:pPr indent="0" marL="0">
-              <a:lnSpc>
-                <a:spcPct val="130000"/>
-              </a:lnSpc>
-              <a:buNone/>
-            </a:pPr>
-            <a:r>
-              <a:rPr lang="en-US" sz="950" dirty="0">
-                <a:solidFill>
-                  <a:srgbClr val="6F6A5C"/>
-                </a:solidFill>
-                <a:latin typeface="Arial" pitchFamily="34" charset="0"/>
-                <a:ea typeface="Arial" pitchFamily="34" charset="-122"/>
-                <a:cs typeface="Arial" pitchFamily="34" charset="-120"/>
-              </a:rPr>
-              <a:t>Vastgelegd in een verwerkersovereenkomst.</a:t>
-            </a:r>
-            <a:endParaRPr lang="en-US" sz="950" dirty="0"/>
-          </a:p>
-        </p:txBody>
-      </p:sp>
-      <p:sp>
-        <p:nvSpPr>
-          <p:cNvPr id="35" name="Shape 27"/>
-          <p:cNvSpPr/>
-          <p:nvPr/>
-        </p:nvSpPr>
-        <p:spPr>
-          <a:xfrm>
-            <a:off x="609598" y="4851388"/>
-            <a:ext cx="5232387" cy="0"/>
-          </a:xfrm>
-          <a:prstGeom prst="line">
-            <a:avLst/>
-          </a:prstGeom>
-          <a:noFill/>
-          <a:ln w="6350">
-            <a:solidFill>
-              <a:srgbClr val="C9C2B2"/>
-            </a:solidFill>
-            <a:prstDash val="solid"/>
-          </a:ln>
-        </p:spPr>
-      </p:sp>
-      <p:sp>
-        <p:nvSpPr>
-          <p:cNvPr id="36" name="Shape 28"/>
-          <p:cNvSpPr/>
-          <p:nvPr/>
-        </p:nvSpPr>
-        <p:spPr>
-          <a:xfrm>
-            <a:off x="609598" y="4952988"/>
-            <a:ext cx="253999" cy="253999"/>
-          </a:xfrm>
-          <a:prstGeom prst="roundRect">
-            <a:avLst>
-              <a:gd name="adj" fmla="val 25000"/>
-            </a:avLst>
-          </a:prstGeom>
-          <a:solidFill>
-            <a:srgbClr val="DDEBF3"/>
-          </a:solidFill>
-          <a:ln/>
-        </p:spPr>
-      </p:sp>
-      <p:pic>
-        <p:nvPicPr>
-          <p:cNvPr id="37" name="Image 6" descr="preencoded.png">    </p:cNvPr>
-          <p:cNvPicPr>
-            <a:picLocks noChangeAspect="1"/>
-          </p:cNvPicPr>
-          <p:nvPr/>
-        </p:nvPicPr>
-        <p:blipFill>
-          <a:blip r:embed="rId7"/>
-          <a:stretch>
-            <a:fillRect/>
-          </a:stretch>
-        </p:blipFill>
-        <p:spPr>
-          <a:xfrm>
-            <a:off x="666748" y="5010137"/>
-            <a:ext cx="139700" cy="139700"/>
-          </a:xfrm>
-          <a:prstGeom prst="rect">
-            <a:avLst/>
-          </a:prstGeom>
-        </p:spPr>
-      </p:pic>
-      <p:sp>
-        <p:nvSpPr>
-          <p:cNvPr id="38" name="Text 29"/>
-          <p:cNvSpPr txBox="1"/>
-          <p:nvPr/>
-        </p:nvSpPr>
-        <p:spPr>
-          <a:xfrm>
-            <a:off x="1015997" y="4927588"/>
-            <a:ext cx="4825988" cy="228599"/>
-          </a:xfrm>
-          <a:prstGeom prst="rect">
-            <a:avLst/>
-          </a:prstGeom>
-          <a:noFill/>
-          <a:ln/>
-        </p:spPr>
-        <p:txBody>
-          <a:bodyPr wrap="square" lIns="0" tIns="0" rIns="0" bIns="0" rtlCol="0" anchor="ctr"/>
-          <a:lstStyle/>
-          <a:p>
-            <a:pPr indent="0" marL="0">
-              <a:buNone/>
-            </a:pPr>
-            <a:r>
-              <a:rPr lang="en-US" sz="1200" b="1" dirty="0">
-                <a:solidFill>
-                  <a:srgbClr val="1C2230"/>
-                </a:solidFill>
-                <a:latin typeface="Arial" pitchFamily="34" charset="0"/>
-                <a:ea typeface="Arial" pitchFamily="34" charset="-122"/>
-                <a:cs typeface="Arial" pitchFamily="34" charset="-120"/>
-              </a:rPr>
-              <a:t>Evaluatie om de week</a:t>
-            </a:r>
-            <a:endParaRPr lang="en-US" sz="1200" dirty="0"/>
-          </a:p>
-        </p:txBody>
-      </p:sp>
-      <p:sp>
-        <p:nvSpPr>
-          <p:cNvPr id="39" name="Text 30"/>
-          <p:cNvSpPr txBox="1"/>
-          <p:nvPr/>
-        </p:nvSpPr>
-        <p:spPr>
-          <a:xfrm>
-            <a:off x="1015997" y="5168887"/>
-            <a:ext cx="4825988" cy="355599"/>
-          </a:xfrm>
-          <a:prstGeom prst="rect">
-            <a:avLst/>
-          </a:prstGeom>
-          <a:noFill/>
-          <a:ln/>
-        </p:spPr>
-        <p:txBody>
-          <a:bodyPr wrap="square" lIns="0" tIns="0" rIns="0" bIns="0" rtlCol="0" anchor="t"/>
-          <a:lstStyle/>
-          <a:p>
-            <a:pPr indent="0" marL="0">
-              <a:lnSpc>
-                <a:spcPct val="130000"/>
-              </a:lnSpc>
-              <a:buNone/>
-            </a:pPr>
-            <a:r>
-              <a:rPr lang="en-US" sz="950" dirty="0">
-                <a:solidFill>
-                  <a:srgbClr val="6F6A5C"/>
-                </a:solidFill>
-                <a:latin typeface="Arial" pitchFamily="34" charset="0"/>
-                <a:ea typeface="Arial" pitchFamily="34" charset="-122"/>
-                <a:cs typeface="Arial" pitchFamily="34" charset="-120"/>
-              </a:rPr>
-              <a:t>Bij twijfel om tafel en bijsturen.</a:t>
-            </a:r>
-            <a:endParaRPr lang="en-US" sz="950" dirty="0"/>
-          </a:p>
-        </p:txBody>
-      </p:sp>
-      <p:sp>
-        <p:nvSpPr>
-          <p:cNvPr id="40" name="Shape 31"/>
-          <p:cNvSpPr/>
-          <p:nvPr/>
-        </p:nvSpPr>
-        <p:spPr>
-          <a:xfrm>
-            <a:off x="6349984" y="4851388"/>
-            <a:ext cx="5232387" cy="0"/>
-          </a:xfrm>
-          <a:prstGeom prst="line">
-            <a:avLst/>
-          </a:prstGeom>
-          <a:noFill/>
-          <a:ln w="6350">
-            <a:solidFill>
-              <a:srgbClr val="C9C2B2"/>
-            </a:solidFill>
-            <a:prstDash val="solid"/>
-          </a:ln>
-        </p:spPr>
-      </p:sp>
-      <p:sp>
-        <p:nvSpPr>
-          <p:cNvPr id="41" name="Shape 32"/>
-          <p:cNvSpPr/>
-          <p:nvPr/>
-        </p:nvSpPr>
-        <p:spPr>
-          <a:xfrm>
-            <a:off x="6349984" y="4952988"/>
-            <a:ext cx="253999" cy="253999"/>
-          </a:xfrm>
-          <a:prstGeom prst="roundRect">
-            <a:avLst>
-              <a:gd name="adj" fmla="val 25000"/>
-            </a:avLst>
-          </a:prstGeom>
-          <a:solidFill>
-            <a:srgbClr val="DDEBF3"/>
-          </a:solidFill>
-          <a:ln/>
-        </p:spPr>
-      </p:sp>
-      <p:pic>
-        <p:nvPicPr>
-          <p:cNvPr id="42" name="Image 7" descr="preencoded.png">    </p:cNvPr>
-          <p:cNvPicPr>
-            <a:picLocks noChangeAspect="1"/>
-          </p:cNvPicPr>
-          <p:nvPr/>
-        </p:nvPicPr>
-        <p:blipFill>
-          <a:blip r:embed="rId8"/>
-          <a:stretch>
-            <a:fillRect/>
-          </a:stretch>
-        </p:blipFill>
-        <p:spPr>
-          <a:xfrm>
-            <a:off x="6407134" y="5010137"/>
-            <a:ext cx="139700" cy="139700"/>
-          </a:xfrm>
-          <a:prstGeom prst="rect">
-            <a:avLst/>
-          </a:prstGeom>
-        </p:spPr>
-      </p:pic>
-      <p:sp>
-        <p:nvSpPr>
-          <p:cNvPr id="43" name="Text 33"/>
-          <p:cNvSpPr txBox="1"/>
-          <p:nvPr/>
-        </p:nvSpPr>
-        <p:spPr>
-          <a:xfrm>
-            <a:off x="6756383" y="4927588"/>
-            <a:ext cx="4825988" cy="228599"/>
-          </a:xfrm>
-          <a:prstGeom prst="rect">
-            <a:avLst/>
-          </a:prstGeom>
-          <a:noFill/>
-          <a:ln/>
-        </p:spPr>
-        <p:txBody>
-          <a:bodyPr wrap="square" lIns="0" tIns="0" rIns="0" bIns="0" rtlCol="0" anchor="ctr"/>
-          <a:lstStyle/>
-          <a:p>
-            <a:pPr indent="0" marL="0">
-              <a:buNone/>
-            </a:pPr>
-            <a:r>
-              <a:rPr lang="en-US" sz="1200" b="1" dirty="0">
-                <a:solidFill>
-                  <a:srgbClr val="1C2230"/>
-                </a:solidFill>
-                <a:latin typeface="Arial" pitchFamily="34" charset="0"/>
-                <a:ea typeface="Arial" pitchFamily="34" charset="-122"/>
-                <a:cs typeface="Arial" pitchFamily="34" charset="-120"/>
-              </a:rPr>
-              <a:t>Alles op papier</a:t>
-            </a:r>
-            <a:endParaRPr lang="en-US" sz="1200" dirty="0"/>
-          </a:p>
-        </p:txBody>
-      </p:sp>
-      <p:sp>
-        <p:nvSpPr>
-          <p:cNvPr id="44" name="Text 34"/>
-          <p:cNvSpPr txBox="1"/>
-          <p:nvPr/>
-        </p:nvSpPr>
-        <p:spPr>
-          <a:xfrm>
-            <a:off x="6756383" y="5168887"/>
-            <a:ext cx="4825988" cy="355599"/>
-          </a:xfrm>
-          <a:prstGeom prst="rect">
-            <a:avLst/>
-          </a:prstGeom>
-          <a:noFill/>
-          <a:ln/>
-        </p:spPr>
-        <p:txBody>
-          <a:bodyPr wrap="square" lIns="0" tIns="0" rIns="0" bIns="0" rtlCol="0" anchor="t"/>
-          <a:lstStyle/>
-          <a:p>
-            <a:pPr indent="0" marL="0">
-              <a:lnSpc>
-                <a:spcPct val="130000"/>
-              </a:lnSpc>
-              <a:buNone/>
-            </a:pPr>
-            <a:r>
-              <a:rPr lang="en-US" sz="950" dirty="0">
-                <a:solidFill>
-                  <a:srgbClr val="6F6A5C"/>
-                </a:solidFill>
-                <a:latin typeface="Arial" pitchFamily="34" charset="0"/>
-                <a:ea typeface="Arial" pitchFamily="34" charset="-122"/>
-                <a:cs typeface="Arial" pitchFamily="34" charset="-120"/>
-              </a:rPr>
-              <a:t>Vastgelegd in een korte samenwerkingsovereenkomst.</a:t>
-            </a:r>
-            <a:endParaRPr lang="en-US" sz="950" dirty="0"/>
-          </a:p>
-        </p:txBody>
-      </p:sp>
-    </p:spTree>
-  </p:cSld>
-  <p:clrMapOvr>
-    <a:masterClrMapping/>
-  </p:clrMapOvr>
-</p:sld>
-</file>
-
-<file path=ppt/slides/slide11.xml><?xml version="1.0" encoding="utf-8"?>
-<p:sld xmlns:a="http://schemas.openxmlformats.org/drawingml/2006/main" xmlns:r="http://schemas.openxmlformats.org/officeDocument/2006/relationships" xmlns:p="http://schemas.openxmlformats.org/presentationml/2006/main">
-  <p:cSld name="Slide 11">
     <p:bg>
       <p:bgPr>
         <a:solidFill>
@@ -4203,7 +2682,7 @@
                 <a:ea typeface="Arial" pitchFamily="34" charset="-122"/>
                 <a:cs typeface="Arial" pitchFamily="34" charset="-120"/>
               </a:rPr>
-              <a:t>11 / 11</a:t>
+              <a:t>10 / 10</a:t>
             </a:r>
             <a:endParaRPr lang="en-US" sz="750" dirty="0"/>
           </a:p>
@@ -5129,7 +3608,7 @@
                 <a:ea typeface="Arial" pitchFamily="34" charset="-122"/>
                 <a:cs typeface="Arial" pitchFamily="34" charset="-120"/>
               </a:rPr>
-              <a:t>2 / 11</a:t>
+              <a:t>2 / 10</a:t>
             </a:r>
             <a:endParaRPr lang="en-US" sz="750" dirty="0"/>
           </a:p>
@@ -5756,7 +4235,7 @@
                 <a:ea typeface="Arial" pitchFamily="34" charset="-122"/>
                 <a:cs typeface="Arial" pitchFamily="34" charset="-120"/>
               </a:rPr>
-              <a:t>3 / 11</a:t>
+              <a:t>3 / 10</a:t>
             </a:r>
             <a:endParaRPr lang="en-US" sz="750" dirty="0"/>
           </a:p>
@@ -6642,7 +5121,7 @@
                 <a:ea typeface="Arial" pitchFamily="34" charset="-122"/>
                 <a:cs typeface="Arial" pitchFamily="34" charset="-120"/>
               </a:rPr>
-              <a:t>4 / 11</a:t>
+              <a:t>4 / 10</a:t>
             </a:r>
             <a:endParaRPr lang="en-US" sz="750" dirty="0"/>
           </a:p>
@@ -7881,7 +6360,7 @@
                 <a:ea typeface="Arial" pitchFamily="34" charset="-122"/>
                 <a:cs typeface="Arial" pitchFamily="34" charset="-120"/>
               </a:rPr>
-              <a:t>5 / 11</a:t>
+              <a:t>5 / 10</a:t>
             </a:r>
             <a:endParaRPr lang="en-US" sz="750" dirty="0"/>
           </a:p>
@@ -8665,7 +7144,7 @@
                 <a:ea typeface="Arial" pitchFamily="34" charset="-122"/>
                 <a:cs typeface="Arial" pitchFamily="34" charset="-120"/>
               </a:rPr>
-              <a:t>6 / 11</a:t>
+              <a:t>6 / 10</a:t>
             </a:r>
             <a:endParaRPr lang="en-US" sz="750" dirty="0"/>
           </a:p>
@@ -10027,6 +8506,1031 @@
 <file path=ppt/slides/slide7.xml><?xml version="1.0" encoding="utf-8"?>
 <p:sld xmlns:a="http://schemas.openxmlformats.org/drawingml/2006/main" xmlns:r="http://schemas.openxmlformats.org/officeDocument/2006/relationships" xmlns:p="http://schemas.openxmlformats.org/presentationml/2006/main">
   <p:cSld name="Slide 7">
+    <p:bg>
+      <p:bgPr>
+        <a:solidFill>
+          <a:srgbClr val="141821"/>
+        </a:solidFill>
+      </p:bgPr>
+    </p:bg>
+    <p:spTree>
+      <p:nvGrpSpPr>
+        <p:cNvPr id="1" name=""/>
+        <p:cNvGrpSpPr/>
+        <p:nvPr/>
+      </p:nvGrpSpPr>
+      <p:grpSpPr>
+        <a:xfrm>
+          <a:off x="0" y="0"/>
+          <a:ext cx="0" cy="0"/>
+          <a:chOff x="0" y="0"/>
+          <a:chExt cx="0" cy="0"/>
+        </a:xfrm>
+      </p:grpSpPr>
+      <p:sp>
+        <p:nvSpPr>
+          <p:cNvPr id="2" name="Text 0"/>
+          <p:cNvSpPr txBox="1"/>
+          <p:nvPr/>
+        </p:nvSpPr>
+        <p:spPr>
+          <a:xfrm>
+            <a:off x="596899" y="368299"/>
+            <a:ext cx="1904995" cy="330199"/>
+          </a:xfrm>
+          <a:prstGeom prst="rect">
+            <a:avLst/>
+          </a:prstGeom>
+          <a:noFill/>
+          <a:ln/>
+        </p:spPr>
+        <p:txBody>
+          <a:bodyPr wrap="square" lIns="0" tIns="0" rIns="0" bIns="0" rtlCol="0" anchor="ctr"/>
+          <a:lstStyle/>
+          <a:p>
+            <a:pPr algn="l" indent="0" marL="0">
+              <a:buNone/>
+            </a:pPr>
+            <a:r>
+              <a:rPr lang="en-US" sz="1800" b="1" dirty="0">
+                <a:solidFill>
+                  <a:srgbClr val="F2EFE6"/>
+                </a:solidFill>
+                <a:latin typeface="Arial" pitchFamily="34" charset="0"/>
+                <a:ea typeface="Arial" pitchFamily="34" charset="-122"/>
+                <a:cs typeface="Arial" pitchFamily="34" charset="-120"/>
+              </a:rPr>
+              <a:t>LINK</a:t>
+            </a:r>
+            <a:pPr algn="l" indent="0" marL="0">
+              <a:buNone/>
+            </a:pPr>
+            <a:r>
+              <a:rPr lang="en-US" sz="1800" b="1" dirty="0">
+                <a:solidFill>
+                  <a:srgbClr val="38B6FF"/>
+                </a:solidFill>
+                <a:latin typeface="Arial" pitchFamily="34" charset="0"/>
+                <a:ea typeface="Arial" pitchFamily="34" charset="-122"/>
+                <a:cs typeface="Arial" pitchFamily="34" charset="-120"/>
+              </a:rPr>
+              <a:t>.</a:t>
+            </a:r>
+            <a:endParaRPr lang="en-US" sz="1800" dirty="0"/>
+          </a:p>
+        </p:txBody>
+      </p:sp>
+      <p:sp>
+        <p:nvSpPr>
+          <p:cNvPr id="3" name="Text 1"/>
+          <p:cNvSpPr txBox="1"/>
+          <p:nvPr/>
+        </p:nvSpPr>
+        <p:spPr>
+          <a:xfrm>
+            <a:off x="609598" y="6381734"/>
+            <a:ext cx="5714986" cy="228599"/>
+          </a:xfrm>
+          <a:prstGeom prst="rect">
+            <a:avLst/>
+          </a:prstGeom>
+          <a:noFill/>
+          <a:ln/>
+        </p:spPr>
+        <p:txBody>
+          <a:bodyPr wrap="square" lIns="0" tIns="0" rIns="0" bIns="0" rtlCol="0" anchor="ctr"/>
+          <a:lstStyle/>
+          <a:p>
+            <a:pPr algn="l" indent="0" marL="0">
+              <a:buNone/>
+            </a:pPr>
+            <a:r>
+              <a:rPr lang="en-US" sz="750" b="1" spc="100" kern="0" dirty="0">
+                <a:solidFill>
+                  <a:srgbClr val="BDC3CE"/>
+                </a:solidFill>
+                <a:latin typeface="Arial" pitchFamily="34" charset="0"/>
+                <a:ea typeface="Arial" pitchFamily="34" charset="-122"/>
+                <a:cs typeface="Arial" pitchFamily="34" charset="-120"/>
+              </a:rPr>
+              <a:t>LINK. · Kennismaking</a:t>
+            </a:r>
+            <a:endParaRPr lang="en-US" sz="750" dirty="0"/>
+          </a:p>
+        </p:txBody>
+      </p:sp>
+      <p:sp>
+        <p:nvSpPr>
+          <p:cNvPr id="4" name="Text 2"/>
+          <p:cNvSpPr txBox="1"/>
+          <p:nvPr/>
+        </p:nvSpPr>
+        <p:spPr>
+          <a:xfrm>
+            <a:off x="9677376" y="6381734"/>
+            <a:ext cx="1904995" cy="228599"/>
+          </a:xfrm>
+          <a:prstGeom prst="rect">
+            <a:avLst/>
+          </a:prstGeom>
+          <a:noFill/>
+          <a:ln/>
+        </p:spPr>
+        <p:txBody>
+          <a:bodyPr wrap="square" lIns="0" tIns="0" rIns="0" bIns="0" rtlCol="0" anchor="ctr"/>
+          <a:lstStyle/>
+          <a:p>
+            <a:pPr algn="r" indent="0" marL="0">
+              <a:buNone/>
+            </a:pPr>
+            <a:r>
+              <a:rPr lang="en-US" sz="750" b="1" spc="100" kern="0" dirty="0">
+                <a:solidFill>
+                  <a:srgbClr val="BDC3CE"/>
+                </a:solidFill>
+                <a:latin typeface="Arial" pitchFamily="34" charset="0"/>
+                <a:ea typeface="Arial" pitchFamily="34" charset="-122"/>
+                <a:cs typeface="Arial" pitchFamily="34" charset="-120"/>
+              </a:rPr>
+              <a:t>7 / 10</a:t>
+            </a:r>
+            <a:endParaRPr lang="en-US" sz="750" dirty="0"/>
+          </a:p>
+        </p:txBody>
+      </p:sp>
+      <p:sp>
+        <p:nvSpPr>
+          <p:cNvPr id="5" name="Text 3"/>
+          <p:cNvSpPr txBox="1"/>
+          <p:nvPr/>
+        </p:nvSpPr>
+        <p:spPr>
+          <a:xfrm>
+            <a:off x="609598" y="1206497"/>
+            <a:ext cx="10159975" cy="215899"/>
+          </a:xfrm>
+          <a:prstGeom prst="rect">
+            <a:avLst/>
+          </a:prstGeom>
+          <a:noFill/>
+          <a:ln/>
+        </p:spPr>
+        <p:txBody>
+          <a:bodyPr wrap="square" lIns="0" tIns="0" rIns="0" bIns="0" rtlCol="0" anchor="ctr"/>
+          <a:lstStyle/>
+          <a:p>
+            <a:pPr algn="l" indent="0" marL="0">
+              <a:buNone/>
+            </a:pPr>
+            <a:r>
+              <a:rPr lang="en-US" sz="950" b="1" spc="400" kern="0" dirty="0">
+                <a:solidFill>
+                  <a:srgbClr val="38B6FF"/>
+                </a:solidFill>
+                <a:latin typeface="Arial" pitchFamily="34" charset="0"/>
+                <a:ea typeface="Arial" pitchFamily="34" charset="-122"/>
+                <a:cs typeface="Arial" pitchFamily="34" charset="-120"/>
+              </a:rPr>
+              <a:t>HOE WE VERDER GAAN</a:t>
+            </a:r>
+            <a:endParaRPr lang="en-US" sz="950" dirty="0"/>
+          </a:p>
+        </p:txBody>
+      </p:sp>
+      <p:sp>
+        <p:nvSpPr>
+          <p:cNvPr id="6" name="Text 4"/>
+          <p:cNvSpPr txBox="1"/>
+          <p:nvPr/>
+        </p:nvSpPr>
+        <p:spPr>
+          <a:xfrm>
+            <a:off x="609598" y="1511296"/>
+            <a:ext cx="10972773" cy="1142997"/>
+          </a:xfrm>
+          <a:prstGeom prst="rect">
+            <a:avLst/>
+          </a:prstGeom>
+          <a:noFill/>
+          <a:ln/>
+        </p:spPr>
+        <p:txBody>
+          <a:bodyPr wrap="square" lIns="0" tIns="0" rIns="0" bIns="0" rtlCol="0" anchor="t"/>
+          <a:lstStyle/>
+          <a:p>
+            <a:pPr algn="l" indent="0" marL="0">
+              <a:lnSpc>
+                <a:spcPct val="108000"/>
+              </a:lnSpc>
+              <a:buNone/>
+            </a:pPr>
+            <a:r>
+              <a:rPr lang="en-US" sz="3200" b="1" dirty="0">
+                <a:solidFill>
+                  <a:srgbClr val="F2EFE6"/>
+                </a:solidFill>
+                <a:latin typeface="Arial" pitchFamily="34" charset="0"/>
+                <a:ea typeface="Arial" pitchFamily="34" charset="-122"/>
+                <a:cs typeface="Arial" pitchFamily="34" charset="-120"/>
+              </a:rPr>
+              <a:t>Jullie kopen geen uren, maar </a:t>
+            </a:r>
+            <a:pPr algn="l" indent="0" marL="0">
+              <a:lnSpc>
+                <a:spcPct val="108000"/>
+              </a:lnSpc>
+              <a:buNone/>
+            </a:pPr>
+            <a:r>
+              <a:rPr lang="en-US" sz="3000" i="1" dirty="0">
+                <a:solidFill>
+                  <a:srgbClr val="F2EFE6"/>
+                </a:solidFill>
+                <a:latin typeface="Georgia" pitchFamily="34" charset="0"/>
+                <a:ea typeface="Georgia" pitchFamily="34" charset="-122"/>
+                <a:cs typeface="Georgia" pitchFamily="34" charset="-120"/>
+              </a:rPr>
+              <a:t>afspraken</a:t>
+            </a:r>
+            <a:pPr algn="l" indent="0" marL="0">
+              <a:lnSpc>
+                <a:spcPct val="108000"/>
+              </a:lnSpc>
+              <a:buNone/>
+            </a:pPr>
+            <a:r>
+              <a:rPr lang="en-US" sz="3200" b="1" dirty="0">
+                <a:solidFill>
+                  <a:srgbClr val="F2EFE6"/>
+                </a:solidFill>
+                <a:latin typeface="Arial" pitchFamily="34" charset="0"/>
+                <a:ea typeface="Arial" pitchFamily="34" charset="-122"/>
+                <a:cs typeface="Arial" pitchFamily="34" charset="-120"/>
+              </a:rPr>
+              <a:t>.</a:t>
+            </a:r>
+            <a:endParaRPr lang="en-US" sz="3200" dirty="0"/>
+          </a:p>
+        </p:txBody>
+      </p:sp>
+      <p:sp>
+        <p:nvSpPr>
+          <p:cNvPr id="7" name="Shape 5"/>
+          <p:cNvSpPr/>
+          <p:nvPr/>
+        </p:nvSpPr>
+        <p:spPr>
+          <a:xfrm>
+            <a:off x="609598" y="2793993"/>
+            <a:ext cx="2628893" cy="2285994"/>
+          </a:xfrm>
+          <a:prstGeom prst="roundRect">
+            <a:avLst>
+              <a:gd name="adj" fmla="val 4444"/>
+            </a:avLst>
+          </a:prstGeom>
+          <a:solidFill>
+            <a:srgbClr val="1B2130"/>
+          </a:solidFill>
+          <a:ln w="9525">
+            <a:solidFill>
+              <a:srgbClr val="3A4152"/>
+            </a:solidFill>
+            <a:prstDash val="solid"/>
+          </a:ln>
+        </p:spPr>
+      </p:sp>
+      <p:sp>
+        <p:nvSpPr>
+          <p:cNvPr id="8" name="Shape 6"/>
+          <p:cNvSpPr/>
+          <p:nvPr/>
+        </p:nvSpPr>
+        <p:spPr>
+          <a:xfrm>
+            <a:off x="825498" y="3022592"/>
+            <a:ext cx="292099" cy="292099"/>
+          </a:xfrm>
+          <a:prstGeom prst="ellipse">
+            <a:avLst/>
+          </a:prstGeom>
+          <a:ln w="15240">
+            <a:solidFill>
+              <a:srgbClr val="38B6FF"/>
+            </a:solidFill>
+            <a:prstDash val="solid"/>
+          </a:ln>
+        </p:spPr>
+      </p:sp>
+      <p:sp>
+        <p:nvSpPr>
+          <p:cNvPr id="9" name="Text 7"/>
+          <p:cNvSpPr txBox="1"/>
+          <p:nvPr/>
+        </p:nvSpPr>
+        <p:spPr>
+          <a:xfrm>
+            <a:off x="825498" y="3022592"/>
+            <a:ext cx="292099" cy="292099"/>
+          </a:xfrm>
+          <a:prstGeom prst="rect">
+            <a:avLst/>
+          </a:prstGeom>
+          <a:noFill/>
+          <a:ln/>
+        </p:spPr>
+        <p:txBody>
+          <a:bodyPr wrap="square" lIns="0" tIns="0" rIns="0" bIns="0" rtlCol="0" anchor="ctr"/>
+          <a:lstStyle/>
+          <a:p>
+            <a:pPr algn="ctr" indent="0" marL="0">
+              <a:buNone/>
+            </a:pPr>
+            <a:r>
+              <a:rPr lang="en-US" sz="1000" b="1" dirty="0">
+                <a:solidFill>
+                  <a:srgbClr val="38B6FF"/>
+                </a:solidFill>
+                <a:latin typeface="Arial" pitchFamily="34" charset="0"/>
+                <a:ea typeface="Arial" pitchFamily="34" charset="-122"/>
+                <a:cs typeface="Arial" pitchFamily="34" charset="-120"/>
+              </a:rPr>
+              <a:t>1</a:t>
+            </a:r>
+            <a:endParaRPr lang="en-US" sz="1000" dirty="0"/>
+          </a:p>
+        </p:txBody>
+      </p:sp>
+      <p:sp>
+        <p:nvSpPr>
+          <p:cNvPr id="10" name="Text 8"/>
+          <p:cNvSpPr txBox="1"/>
+          <p:nvPr/>
+        </p:nvSpPr>
+        <p:spPr>
+          <a:xfrm>
+            <a:off x="825498" y="3467091"/>
+            <a:ext cx="2197095" cy="406399"/>
+          </a:xfrm>
+          <a:prstGeom prst="rect">
+            <a:avLst/>
+          </a:prstGeom>
+          <a:noFill/>
+          <a:ln/>
+        </p:spPr>
+        <p:txBody>
+          <a:bodyPr wrap="square" lIns="0" tIns="0" rIns="0" bIns="0" rtlCol="0" anchor="t"/>
+          <a:lstStyle/>
+          <a:p>
+            <a:pPr indent="0" marL="0">
+              <a:lnSpc>
+                <a:spcPct val="115000"/>
+              </a:lnSpc>
+              <a:buNone/>
+            </a:pPr>
+            <a:r>
+              <a:rPr lang="en-US" sz="1150" b="1" dirty="0">
+                <a:solidFill>
+                  <a:srgbClr val="F2EFE6"/>
+                </a:solidFill>
+                <a:latin typeface="Arial" pitchFamily="34" charset="0"/>
+                <a:ea typeface="Arial" pitchFamily="34" charset="-122"/>
+                <a:cs typeface="Arial" pitchFamily="34" charset="-120"/>
+              </a:rPr>
+              <a:t>Wat we dan weten</a:t>
+            </a:r>
+            <a:endParaRPr lang="en-US" sz="1150" dirty="0"/>
+          </a:p>
+        </p:txBody>
+      </p:sp>
+      <p:sp>
+        <p:nvSpPr>
+          <p:cNvPr id="11" name="Text 9"/>
+          <p:cNvSpPr txBox="1"/>
+          <p:nvPr/>
+        </p:nvSpPr>
+        <p:spPr>
+          <a:xfrm>
+            <a:off x="825498" y="3924290"/>
+            <a:ext cx="2197095" cy="1079497"/>
+          </a:xfrm>
+          <a:prstGeom prst="rect">
+            <a:avLst/>
+          </a:prstGeom>
+          <a:noFill/>
+          <a:ln/>
+        </p:spPr>
+        <p:txBody>
+          <a:bodyPr wrap="square" lIns="0" tIns="0" rIns="0" bIns="0" rtlCol="0" anchor="t"/>
+          <a:lstStyle/>
+          <a:p>
+            <a:pPr indent="0" marL="0">
+              <a:lnSpc>
+                <a:spcPct val="130000"/>
+              </a:lnSpc>
+              <a:buNone/>
+            </a:pPr>
+            <a:r>
+              <a:rPr lang="en-US" sz="875" dirty="0">
+                <a:solidFill>
+                  <a:srgbClr val="C2C8D2"/>
+                </a:solidFill>
+                <a:latin typeface="Arial" pitchFamily="34" charset="0"/>
+                <a:ea typeface="Arial" pitchFamily="34" charset="-122"/>
+                <a:cs typeface="Arial" pitchFamily="34" charset="-120"/>
+              </a:rPr>
+              <a:t>Uit de pilot blijkt hoeveel tijd er in één gekwalificeerde afspraak zit en hoeveel afspraken er nodig zijn voor één nieuwe klant. Niet geschat, gewoon geteld.</a:t>
+            </a:r>
+            <a:endParaRPr lang="en-US" sz="875" dirty="0"/>
+          </a:p>
+        </p:txBody>
+      </p:sp>
+      <p:sp>
+        <p:nvSpPr>
+          <p:cNvPr id="12" name="Shape 10"/>
+          <p:cNvSpPr/>
+          <p:nvPr/>
+        </p:nvSpPr>
+        <p:spPr>
+          <a:xfrm>
+            <a:off x="3390892" y="2793993"/>
+            <a:ext cx="2628893" cy="2285994"/>
+          </a:xfrm>
+          <a:prstGeom prst="roundRect">
+            <a:avLst>
+              <a:gd name="adj" fmla="val 4444"/>
+            </a:avLst>
+          </a:prstGeom>
+          <a:solidFill>
+            <a:srgbClr val="1B2130"/>
+          </a:solidFill>
+          <a:ln w="9525">
+            <a:solidFill>
+              <a:srgbClr val="3A4152"/>
+            </a:solidFill>
+            <a:prstDash val="solid"/>
+          </a:ln>
+        </p:spPr>
+      </p:sp>
+      <p:sp>
+        <p:nvSpPr>
+          <p:cNvPr id="13" name="Shape 11"/>
+          <p:cNvSpPr/>
+          <p:nvPr/>
+        </p:nvSpPr>
+        <p:spPr>
+          <a:xfrm>
+            <a:off x="3606791" y="3022592"/>
+            <a:ext cx="292099" cy="292099"/>
+          </a:xfrm>
+          <a:prstGeom prst="ellipse">
+            <a:avLst/>
+          </a:prstGeom>
+          <a:ln w="15240">
+            <a:solidFill>
+              <a:srgbClr val="38B6FF"/>
+            </a:solidFill>
+            <a:prstDash val="solid"/>
+          </a:ln>
+        </p:spPr>
+      </p:sp>
+      <p:sp>
+        <p:nvSpPr>
+          <p:cNvPr id="14" name="Text 12"/>
+          <p:cNvSpPr txBox="1"/>
+          <p:nvPr/>
+        </p:nvSpPr>
+        <p:spPr>
+          <a:xfrm>
+            <a:off x="3606791" y="3022592"/>
+            <a:ext cx="292099" cy="292099"/>
+          </a:xfrm>
+          <a:prstGeom prst="rect">
+            <a:avLst/>
+          </a:prstGeom>
+          <a:noFill/>
+          <a:ln/>
+        </p:spPr>
+        <p:txBody>
+          <a:bodyPr wrap="square" lIns="0" tIns="0" rIns="0" bIns="0" rtlCol="0" anchor="ctr"/>
+          <a:lstStyle/>
+          <a:p>
+            <a:pPr algn="ctr" indent="0" marL="0">
+              <a:buNone/>
+            </a:pPr>
+            <a:r>
+              <a:rPr lang="en-US" sz="1000" b="1" dirty="0">
+                <a:solidFill>
+                  <a:srgbClr val="38B6FF"/>
+                </a:solidFill>
+                <a:latin typeface="Arial" pitchFamily="34" charset="0"/>
+                <a:ea typeface="Arial" pitchFamily="34" charset="-122"/>
+                <a:cs typeface="Arial" pitchFamily="34" charset="-120"/>
+              </a:rPr>
+              <a:t>2</a:t>
+            </a:r>
+            <a:endParaRPr lang="en-US" sz="1000" dirty="0"/>
+          </a:p>
+        </p:txBody>
+      </p:sp>
+      <p:sp>
+        <p:nvSpPr>
+          <p:cNvPr id="15" name="Text 13"/>
+          <p:cNvSpPr txBox="1"/>
+          <p:nvPr/>
+        </p:nvSpPr>
+        <p:spPr>
+          <a:xfrm>
+            <a:off x="3606791" y="3467091"/>
+            <a:ext cx="2197095" cy="406399"/>
+          </a:xfrm>
+          <a:prstGeom prst="rect">
+            <a:avLst/>
+          </a:prstGeom>
+          <a:noFill/>
+          <a:ln/>
+        </p:spPr>
+        <p:txBody>
+          <a:bodyPr wrap="square" lIns="0" tIns="0" rIns="0" bIns="0" rtlCol="0" anchor="t"/>
+          <a:lstStyle/>
+          <a:p>
+            <a:pPr indent="0" marL="0">
+              <a:lnSpc>
+                <a:spcPct val="115000"/>
+              </a:lnSpc>
+              <a:buNone/>
+            </a:pPr>
+            <a:r>
+              <a:rPr lang="en-US" sz="1150" b="1" dirty="0">
+                <a:solidFill>
+                  <a:srgbClr val="F2EFE6"/>
+                </a:solidFill>
+                <a:latin typeface="Arial" pitchFamily="34" charset="0"/>
+                <a:ea typeface="Arial" pitchFamily="34" charset="-122"/>
+                <a:cs typeface="Arial" pitchFamily="34" charset="-120"/>
+              </a:rPr>
+              <a:t>Van doel naar bezetting</a:t>
+            </a:r>
+            <a:endParaRPr lang="en-US" sz="1150" dirty="0"/>
+          </a:p>
+        </p:txBody>
+      </p:sp>
+      <p:sp>
+        <p:nvSpPr>
+          <p:cNvPr id="16" name="Text 14"/>
+          <p:cNvSpPr txBox="1"/>
+          <p:nvPr/>
+        </p:nvSpPr>
+        <p:spPr>
+          <a:xfrm>
+            <a:off x="3606791" y="3924290"/>
+            <a:ext cx="2197095" cy="1079497"/>
+          </a:xfrm>
+          <a:prstGeom prst="rect">
+            <a:avLst/>
+          </a:prstGeom>
+          <a:noFill/>
+          <a:ln/>
+        </p:spPr>
+        <p:txBody>
+          <a:bodyPr wrap="square" lIns="0" tIns="0" rIns="0" bIns="0" rtlCol="0" anchor="t"/>
+          <a:lstStyle/>
+          <a:p>
+            <a:pPr indent="0" marL="0">
+              <a:lnSpc>
+                <a:spcPct val="130000"/>
+              </a:lnSpc>
+              <a:buNone/>
+            </a:pPr>
+            <a:r>
+              <a:rPr lang="en-US" sz="875" dirty="0">
+                <a:solidFill>
+                  <a:srgbClr val="C2C8D2"/>
+                </a:solidFill>
+                <a:latin typeface="Arial" pitchFamily="34" charset="0"/>
+                <a:ea typeface="Arial" pitchFamily="34" charset="-122"/>
+                <a:cs typeface="Arial" pitchFamily="34" charset="-120"/>
+              </a:rPr>
+              <a:t>Jullie zeggen hoeveel nieuwe klanten je per periode wilt. Wij rekenen terug hoeveel afspraken daarvoor nodig zijn en trekken daar de tijd voor uit.</a:t>
+            </a:r>
+            <a:endParaRPr lang="en-US" sz="875" dirty="0"/>
+          </a:p>
+        </p:txBody>
+      </p:sp>
+      <p:sp>
+        <p:nvSpPr>
+          <p:cNvPr id="17" name="Shape 15"/>
+          <p:cNvSpPr/>
+          <p:nvPr/>
+        </p:nvSpPr>
+        <p:spPr>
+          <a:xfrm>
+            <a:off x="6172185" y="2793993"/>
+            <a:ext cx="2628893" cy="2285994"/>
+          </a:xfrm>
+          <a:prstGeom prst="roundRect">
+            <a:avLst>
+              <a:gd name="adj" fmla="val 4444"/>
+            </a:avLst>
+          </a:prstGeom>
+          <a:solidFill>
+            <a:srgbClr val="1B2130"/>
+          </a:solidFill>
+          <a:ln w="9525">
+            <a:solidFill>
+              <a:srgbClr val="3A4152"/>
+            </a:solidFill>
+            <a:prstDash val="solid"/>
+          </a:ln>
+        </p:spPr>
+      </p:sp>
+      <p:sp>
+        <p:nvSpPr>
+          <p:cNvPr id="18" name="Shape 16"/>
+          <p:cNvSpPr/>
+          <p:nvPr/>
+        </p:nvSpPr>
+        <p:spPr>
+          <a:xfrm>
+            <a:off x="6388084" y="3022592"/>
+            <a:ext cx="292099" cy="292099"/>
+          </a:xfrm>
+          <a:prstGeom prst="ellipse">
+            <a:avLst/>
+          </a:prstGeom>
+          <a:ln w="15240">
+            <a:solidFill>
+              <a:srgbClr val="38B6FF"/>
+            </a:solidFill>
+            <a:prstDash val="solid"/>
+          </a:ln>
+        </p:spPr>
+      </p:sp>
+      <p:sp>
+        <p:nvSpPr>
+          <p:cNvPr id="19" name="Text 17"/>
+          <p:cNvSpPr txBox="1"/>
+          <p:nvPr/>
+        </p:nvSpPr>
+        <p:spPr>
+          <a:xfrm>
+            <a:off x="6388084" y="3022592"/>
+            <a:ext cx="292099" cy="292099"/>
+          </a:xfrm>
+          <a:prstGeom prst="rect">
+            <a:avLst/>
+          </a:prstGeom>
+          <a:noFill/>
+          <a:ln/>
+        </p:spPr>
+        <p:txBody>
+          <a:bodyPr wrap="square" lIns="0" tIns="0" rIns="0" bIns="0" rtlCol="0" anchor="ctr"/>
+          <a:lstStyle/>
+          <a:p>
+            <a:pPr algn="ctr" indent="0" marL="0">
+              <a:buNone/>
+            </a:pPr>
+            <a:r>
+              <a:rPr lang="en-US" sz="1000" b="1" dirty="0">
+                <a:solidFill>
+                  <a:srgbClr val="38B6FF"/>
+                </a:solidFill>
+                <a:latin typeface="Arial" pitchFamily="34" charset="0"/>
+                <a:ea typeface="Arial" pitchFamily="34" charset="-122"/>
+                <a:cs typeface="Arial" pitchFamily="34" charset="-120"/>
+              </a:rPr>
+              <a:t>3</a:t>
+            </a:r>
+            <a:endParaRPr lang="en-US" sz="1000" dirty="0"/>
+          </a:p>
+        </p:txBody>
+      </p:sp>
+      <p:sp>
+        <p:nvSpPr>
+          <p:cNvPr id="20" name="Text 18"/>
+          <p:cNvSpPr txBox="1"/>
+          <p:nvPr/>
+        </p:nvSpPr>
+        <p:spPr>
+          <a:xfrm>
+            <a:off x="6388084" y="3467091"/>
+            <a:ext cx="2197095" cy="406399"/>
+          </a:xfrm>
+          <a:prstGeom prst="rect">
+            <a:avLst/>
+          </a:prstGeom>
+          <a:noFill/>
+          <a:ln/>
+        </p:spPr>
+        <p:txBody>
+          <a:bodyPr wrap="square" lIns="0" tIns="0" rIns="0" bIns="0" rtlCol="0" anchor="t"/>
+          <a:lstStyle/>
+          <a:p>
+            <a:pPr indent="0" marL="0">
+              <a:lnSpc>
+                <a:spcPct val="115000"/>
+              </a:lnSpc>
+              <a:buNone/>
+            </a:pPr>
+            <a:r>
+              <a:rPr lang="en-US" sz="1150" b="1" dirty="0">
+                <a:solidFill>
+                  <a:srgbClr val="F2EFE6"/>
+                </a:solidFill>
+                <a:latin typeface="Arial" pitchFamily="34" charset="0"/>
+                <a:ea typeface="Arial" pitchFamily="34" charset="-122"/>
+                <a:cs typeface="Arial" pitchFamily="34" charset="-120"/>
+              </a:rPr>
+              <a:t>Boven target is voor jullie</a:t>
+            </a:r>
+            <a:endParaRPr lang="en-US" sz="1150" dirty="0"/>
+          </a:p>
+        </p:txBody>
+      </p:sp>
+      <p:sp>
+        <p:nvSpPr>
+          <p:cNvPr id="21" name="Text 19"/>
+          <p:cNvSpPr txBox="1"/>
+          <p:nvPr/>
+        </p:nvSpPr>
+        <p:spPr>
+          <a:xfrm>
+            <a:off x="6388084" y="3924290"/>
+            <a:ext cx="2197095" cy="1079497"/>
+          </a:xfrm>
+          <a:prstGeom prst="rect">
+            <a:avLst/>
+          </a:prstGeom>
+          <a:noFill/>
+          <a:ln/>
+        </p:spPr>
+        <p:txBody>
+          <a:bodyPr wrap="square" lIns="0" tIns="0" rIns="0" bIns="0" rtlCol="0" anchor="t"/>
+          <a:lstStyle/>
+          <a:p>
+            <a:pPr indent="0" marL="0">
+              <a:lnSpc>
+                <a:spcPct val="130000"/>
+              </a:lnSpc>
+              <a:buNone/>
+            </a:pPr>
+            <a:r>
+              <a:rPr lang="en-US" sz="875" dirty="0">
+                <a:solidFill>
+                  <a:srgbClr val="C2C8D2"/>
+                </a:solidFill>
+                <a:latin typeface="Arial" pitchFamily="34" charset="0"/>
+                <a:ea typeface="Arial" pitchFamily="34" charset="-122"/>
+                <a:cs typeface="Arial" pitchFamily="34" charset="-120"/>
+              </a:rPr>
+              <a:t>Zijn we eerder klaar dan gepland, dan bellen we de tijd gewoon vol. Wat er dan nog bij komt is voor jullie, zonder extra factuur.</a:t>
+            </a:r>
+            <a:endParaRPr lang="en-US" sz="875" dirty="0"/>
+          </a:p>
+        </p:txBody>
+      </p:sp>
+      <p:sp>
+        <p:nvSpPr>
+          <p:cNvPr id="22" name="Shape 20"/>
+          <p:cNvSpPr/>
+          <p:nvPr/>
+        </p:nvSpPr>
+        <p:spPr>
+          <a:xfrm>
+            <a:off x="8953478" y="2793993"/>
+            <a:ext cx="2628893" cy="2285994"/>
+          </a:xfrm>
+          <a:prstGeom prst="roundRect">
+            <a:avLst>
+              <a:gd name="adj" fmla="val 4444"/>
+            </a:avLst>
+          </a:prstGeom>
+          <a:solidFill>
+            <a:srgbClr val="1B2130"/>
+          </a:solidFill>
+          <a:ln w="15240">
+            <a:solidFill>
+              <a:srgbClr val="38B6FF"/>
+            </a:solidFill>
+            <a:prstDash val="solid"/>
+          </a:ln>
+        </p:spPr>
+      </p:sp>
+      <p:sp>
+        <p:nvSpPr>
+          <p:cNvPr id="23" name="Shape 21"/>
+          <p:cNvSpPr/>
+          <p:nvPr/>
+        </p:nvSpPr>
+        <p:spPr>
+          <a:xfrm>
+            <a:off x="9169377" y="3022592"/>
+            <a:ext cx="292099" cy="292099"/>
+          </a:xfrm>
+          <a:prstGeom prst="ellipse">
+            <a:avLst/>
+          </a:prstGeom>
+          <a:ln w="15240">
+            <a:solidFill>
+              <a:srgbClr val="38B6FF"/>
+            </a:solidFill>
+            <a:prstDash val="solid"/>
+          </a:ln>
+        </p:spPr>
+      </p:sp>
+      <p:sp>
+        <p:nvSpPr>
+          <p:cNvPr id="24" name="Text 22"/>
+          <p:cNvSpPr txBox="1"/>
+          <p:nvPr/>
+        </p:nvSpPr>
+        <p:spPr>
+          <a:xfrm>
+            <a:off x="9169377" y="3022592"/>
+            <a:ext cx="292099" cy="292099"/>
+          </a:xfrm>
+          <a:prstGeom prst="rect">
+            <a:avLst/>
+          </a:prstGeom>
+          <a:noFill/>
+          <a:ln/>
+        </p:spPr>
+        <p:txBody>
+          <a:bodyPr wrap="square" lIns="0" tIns="0" rIns="0" bIns="0" rtlCol="0" anchor="ctr"/>
+          <a:lstStyle/>
+          <a:p>
+            <a:pPr algn="ctr" indent="0" marL="0">
+              <a:buNone/>
+            </a:pPr>
+            <a:r>
+              <a:rPr lang="en-US" sz="1000" b="1" dirty="0">
+                <a:solidFill>
+                  <a:srgbClr val="38B6FF"/>
+                </a:solidFill>
+                <a:latin typeface="Arial" pitchFamily="34" charset="0"/>
+                <a:ea typeface="Arial" pitchFamily="34" charset="-122"/>
+                <a:cs typeface="Arial" pitchFamily="34" charset="-120"/>
+              </a:rPr>
+              <a:t>4</a:t>
+            </a:r>
+            <a:endParaRPr lang="en-US" sz="1000" dirty="0"/>
+          </a:p>
+        </p:txBody>
+      </p:sp>
+      <p:sp>
+        <p:nvSpPr>
+          <p:cNvPr id="25" name="Text 23"/>
+          <p:cNvSpPr txBox="1"/>
+          <p:nvPr/>
+        </p:nvSpPr>
+        <p:spPr>
+          <a:xfrm>
+            <a:off x="9169377" y="3467091"/>
+            <a:ext cx="2197095" cy="406399"/>
+          </a:xfrm>
+          <a:prstGeom prst="rect">
+            <a:avLst/>
+          </a:prstGeom>
+          <a:noFill/>
+          <a:ln/>
+        </p:spPr>
+        <p:txBody>
+          <a:bodyPr wrap="square" lIns="0" tIns="0" rIns="0" bIns="0" rtlCol="0" anchor="t"/>
+          <a:lstStyle/>
+          <a:p>
+            <a:pPr indent="0" marL="0">
+              <a:lnSpc>
+                <a:spcPct val="115000"/>
+              </a:lnSpc>
+              <a:buNone/>
+            </a:pPr>
+            <a:r>
+              <a:rPr lang="en-US" sz="1150" b="1" dirty="0">
+                <a:solidFill>
+                  <a:srgbClr val="38B6FF"/>
+                </a:solidFill>
+                <a:latin typeface="Arial" pitchFamily="34" charset="0"/>
+                <a:ea typeface="Arial" pitchFamily="34" charset="-122"/>
+                <a:cs typeface="Arial" pitchFamily="34" charset="-120"/>
+              </a:rPr>
+              <a:t>Succesfee bij omzet</a:t>
+            </a:r>
+            <a:endParaRPr lang="en-US" sz="1150" dirty="0"/>
+          </a:p>
+        </p:txBody>
+      </p:sp>
+      <p:sp>
+        <p:nvSpPr>
+          <p:cNvPr id="26" name="Text 24"/>
+          <p:cNvSpPr txBox="1"/>
+          <p:nvPr/>
+        </p:nvSpPr>
+        <p:spPr>
+          <a:xfrm>
+            <a:off x="9169377" y="3924290"/>
+            <a:ext cx="2197095" cy="1079497"/>
+          </a:xfrm>
+          <a:prstGeom prst="rect">
+            <a:avLst/>
+          </a:prstGeom>
+          <a:noFill/>
+          <a:ln/>
+        </p:spPr>
+        <p:txBody>
+          <a:bodyPr wrap="square" lIns="0" tIns="0" rIns="0" bIns="0" rtlCol="0" anchor="t"/>
+          <a:lstStyle/>
+          <a:p>
+            <a:pPr indent="0" marL="0">
+              <a:lnSpc>
+                <a:spcPct val="130000"/>
+              </a:lnSpc>
+              <a:buNone/>
+            </a:pPr>
+            <a:r>
+              <a:rPr lang="en-US" sz="875" dirty="0">
+                <a:solidFill>
+                  <a:srgbClr val="C2C8D2"/>
+                </a:solidFill>
+                <a:latin typeface="Arial" pitchFamily="34" charset="0"/>
+                <a:ea typeface="Arial" pitchFamily="34" charset="-122"/>
+                <a:cs typeface="Arial" pitchFamily="34" charset="-120"/>
+              </a:rPr>
+              <a:t>Wordt een afspraak een opdracht, dan spreken we daar vooraf een succesfee over af. Wij verdienen pas extra als het jullie ook echt omzet oplevert.</a:t>
+            </a:r>
+            <a:endParaRPr lang="en-US" sz="875" dirty="0"/>
+          </a:p>
+        </p:txBody>
+      </p:sp>
+      <p:sp>
+        <p:nvSpPr>
+          <p:cNvPr id="27" name="Shape 25"/>
+          <p:cNvSpPr/>
+          <p:nvPr/>
+        </p:nvSpPr>
+        <p:spPr>
+          <a:xfrm>
+            <a:off x="609598" y="5854685"/>
+            <a:ext cx="76200" cy="76200"/>
+          </a:xfrm>
+          <a:prstGeom prst="ellipse">
+            <a:avLst/>
+          </a:prstGeom>
+          <a:solidFill>
+            <a:srgbClr val="38B6FF"/>
+          </a:solidFill>
+          <a:ln/>
+        </p:spPr>
+      </p:sp>
+      <p:sp>
+        <p:nvSpPr>
+          <p:cNvPr id="28" name="Text 26"/>
+          <p:cNvSpPr txBox="1"/>
+          <p:nvPr/>
+        </p:nvSpPr>
+        <p:spPr>
+          <a:xfrm>
+            <a:off x="800098" y="5714986"/>
+            <a:ext cx="9905975" cy="355599"/>
+          </a:xfrm>
+          <a:prstGeom prst="rect">
+            <a:avLst/>
+          </a:prstGeom>
+          <a:noFill/>
+          <a:ln/>
+        </p:spPr>
+        <p:txBody>
+          <a:bodyPr wrap="square" lIns="0" tIns="0" rIns="0" bIns="0" rtlCol="0" anchor="ctr"/>
+          <a:lstStyle/>
+          <a:p>
+            <a:pPr indent="0" marL="0">
+              <a:buNone/>
+            </a:pPr>
+            <a:r>
+              <a:rPr lang="en-US" sz="1200" b="1" dirty="0">
+                <a:solidFill>
+                  <a:srgbClr val="F2EFE6"/>
+                </a:solidFill>
+                <a:latin typeface="Arial" pitchFamily="34" charset="0"/>
+                <a:ea typeface="Arial" pitchFamily="34" charset="-122"/>
+                <a:cs typeface="Arial" pitchFamily="34" charset="-120"/>
+              </a:rPr>
+              <a:t>Het target komt uit jullie eigen cijfers, dus dat halen we. Zo niet, dan halen we het de volgende werkperiode in.</a:t>
+            </a:r>
+            <a:endParaRPr lang="en-US" sz="1200" dirty="0"/>
+          </a:p>
+        </p:txBody>
+      </p:sp>
+    </p:spTree>
+  </p:cSld>
+  <p:clrMapOvr>
+    <a:masterClrMapping/>
+  </p:clrMapOvr>
+</p:sld>
+</file>
+
+<file path=ppt/slides/slide8.xml><?xml version="1.0" encoding="utf-8"?>
+<p:sld xmlns:a="http://schemas.openxmlformats.org/drawingml/2006/main" xmlns:r="http://schemas.openxmlformats.org/officeDocument/2006/relationships" xmlns:p="http://schemas.openxmlformats.org/presentationml/2006/main">
+  <p:cSld name="Slide 8">
     <p:bg>
       <p:bgPr>
         <a:solidFill>
@@ -10173,7 +9677,7 @@
                 <a:ea typeface="Arial" pitchFamily="34" charset="-122"/>
                 <a:cs typeface="Arial" pitchFamily="34" charset="-120"/>
               </a:rPr>
-              <a:t>7 / 11</a:t>
+              <a:t>8 / 10</a:t>
             </a:r>
             <a:endParaRPr lang="en-US" sz="750" dirty="0"/>
           </a:p>
@@ -10212,7 +9716,7 @@
                 <a:ea typeface="Arial" pitchFamily="34" charset="-122"/>
                 <a:cs typeface="Arial" pitchFamily="34" charset="-120"/>
               </a:rPr>
-              <a:t>NA DE PILOT</a:t>
+              <a:t>WAT WE VAN JULLIE NODIG HEBBEN</a:t>
             </a:r>
             <a:endParaRPr lang="en-US" sz="950" dirty="0"/>
           </a:p>
@@ -10254,7 +9758,7 @@
                 <a:ea typeface="Arial" pitchFamily="34" charset="-122"/>
                 <a:cs typeface="Arial" pitchFamily="34" charset="-120"/>
               </a:rPr>
-              <a:t>Daarna weet je precies wat </a:t>
+              <a:t>Een halve dag van jullie, dan </a:t>
             </a:r>
             <a:pPr algn="l" indent="0" marL="0">
               <a:lnSpc>
@@ -10271,7 +9775,7 @@
                 <a:ea typeface="Georgia" pitchFamily="34" charset="-122"/>
                 <a:cs typeface="Georgia" pitchFamily="34" charset="-120"/>
               </a:rPr>
-              <a:t>werkt</a:t>
+              <a:t>draaien wij</a:t>
             </a:r>
             <a:pPr algn="l" indent="0" marL="0">
               <a:lnSpc>
@@ -10302,30 +9806,76 @@
         </p:nvSpPr>
         <p:spPr>
           <a:xfrm>
-            <a:off x="609598" y="2920993"/>
-            <a:ext cx="304799" cy="304799"/>
-          </a:xfrm>
-          <a:prstGeom prst="ellipse">
-            <a:avLst/>
-          </a:prstGeom>
-          <a:ln w="15240">
-            <a:solidFill>
-              <a:srgbClr val="38B6FF"/>
-            </a:solidFill>
-            <a:prstDash val="solid"/>
-          </a:ln>
-        </p:spPr>
-      </p:sp>
-      <p:sp>
-        <p:nvSpPr>
-          <p:cNvPr id="8" name="Text 6"/>
-          <p:cNvSpPr txBox="1"/>
-          <p:nvPr/>
-        </p:nvSpPr>
-        <p:spPr>
-          <a:xfrm>
-            <a:off x="609598" y="2920993"/>
-            <a:ext cx="304799" cy="304799"/>
+            <a:off x="609598" y="2793993"/>
+            <a:ext cx="5397487" cy="1530346"/>
+          </a:xfrm>
+          <a:prstGeom prst="roundRect">
+            <a:avLst>
+              <a:gd name="adj" fmla="val 6639"/>
+            </a:avLst>
+          </a:prstGeom>
+          <a:solidFill>
+            <a:srgbClr val="F8F4EB"/>
+          </a:solidFill>
+          <a:ln/>
+        </p:spPr>
+      </p:sp>
+      <p:sp>
+        <p:nvSpPr>
+          <p:cNvPr id="8" name="Shape 6"/>
+          <p:cNvSpPr/>
+          <p:nvPr/>
+        </p:nvSpPr>
+        <p:spPr>
+          <a:xfrm>
+            <a:off x="939798" y="3098792"/>
+            <a:ext cx="380999" cy="380999"/>
+          </a:xfrm>
+          <a:prstGeom prst="roundRect">
+            <a:avLst>
+              <a:gd name="adj" fmla="val 23333"/>
+            </a:avLst>
+          </a:prstGeom>
+          <a:solidFill>
+            <a:srgbClr val="DDEBF3"/>
+          </a:solidFill>
+          <a:ln/>
+        </p:spPr>
+      </p:sp>
+      <p:pic>
+        <p:nvPicPr>
+          <p:cNvPr id="9" name="Image 0" descr="preencoded.png">    </p:cNvPr>
+          <p:cNvPicPr>
+            <a:picLocks noChangeAspect="1"/>
+          </p:cNvPicPr>
+          <p:nvPr/>
+        </p:nvPicPr>
+        <p:blipFill>
+          <a:blip r:embed="rId1"/>
+          <a:stretch>
+            <a:fillRect/>
+          </a:stretch>
+        </p:blipFill>
+        <p:spPr>
+          <a:xfrm>
+            <a:off x="1035047" y="3194042"/>
+            <a:ext cx="190500" cy="190500"/>
+          </a:xfrm>
+          <a:prstGeom prst="rect">
+            <a:avLst/>
+          </a:prstGeom>
+        </p:spPr>
+      </p:pic>
+      <p:sp>
+        <p:nvSpPr>
+          <p:cNvPr id="10" name="Text 7"/>
+          <p:cNvSpPr txBox="1"/>
+          <p:nvPr/>
+        </p:nvSpPr>
+        <p:spPr>
+          <a:xfrm>
+            <a:off x="1549396" y="3073392"/>
+            <a:ext cx="4127490" cy="279399"/>
           </a:xfrm>
           <a:prstGeom prst="rect">
             <a:avLst/>
@@ -10337,75 +9887,11 @@
           <a:bodyPr wrap="square" lIns="0" tIns="0" rIns="0" bIns="0" rtlCol="0" anchor="ctr"/>
           <a:lstStyle/>
           <a:p>
-            <a:pPr algn="ctr" indent="0" marL="0">
-              <a:buNone/>
-            </a:pPr>
-            <a:r>
-              <a:rPr lang="en-US" sz="1050" b="1" dirty="0">
-                <a:solidFill>
-                  <a:srgbClr val="38B6FF"/>
-                </a:solidFill>
-                <a:latin typeface="Arial" pitchFamily="34" charset="0"/>
-                <a:ea typeface="Arial" pitchFamily="34" charset="-122"/>
-                <a:cs typeface="Arial" pitchFamily="34" charset="-120"/>
-              </a:rPr>
-              <a:t>1</a:t>
-            </a:r>
-            <a:endParaRPr lang="en-US" sz="1050" dirty="0"/>
-          </a:p>
-        </p:txBody>
-      </p:sp>
-      <p:sp>
-        <p:nvSpPr>
-          <p:cNvPr id="9" name="Shape 7"/>
-          <p:cNvSpPr/>
-          <p:nvPr/>
-        </p:nvSpPr>
-        <p:spPr>
-          <a:xfrm>
-            <a:off x="1015997" y="3073392"/>
-            <a:ext cx="3359142" cy="0"/>
-          </a:xfrm>
-          <a:prstGeom prst="line">
-            <a:avLst/>
-          </a:prstGeom>
-          <a:noFill/>
-          <a:ln w="9525">
-            <a:solidFill>
-              <a:srgbClr val="38B6FF">
-                <a:alpha val="55000"/>
-              </a:srgbClr>
-            </a:solidFill>
-            <a:prstDash val="solid"/>
-          </a:ln>
-        </p:spPr>
-      </p:sp>
-      <p:sp>
-        <p:nvSpPr>
-          <p:cNvPr id="10" name="Text 8"/>
-          <p:cNvSpPr txBox="1"/>
-          <p:nvPr/>
-        </p:nvSpPr>
-        <p:spPr>
-          <a:xfrm>
-            <a:off x="609598" y="3390892"/>
-            <a:ext cx="3079742" cy="279399"/>
-          </a:xfrm>
-          <a:prstGeom prst="rect">
-            <a:avLst/>
-          </a:prstGeom>
-          <a:noFill/>
-          <a:ln/>
-        </p:spPr>
-        <p:txBody>
-          <a:bodyPr wrap="square" lIns="0" tIns="0" rIns="0" bIns="0" rtlCol="0" anchor="ctr"/>
-          <a:lstStyle/>
-          <a:p>
             <a:pPr indent="0" marL="0">
               <a:buNone/>
             </a:pPr>
             <a:r>
-              <a:rPr lang="en-US" sz="1500" b="1" dirty="0">
+              <a:rPr lang="en-US" sz="1450" b="1" dirty="0">
                 <a:solidFill>
                   <a:srgbClr val="1C2230"/>
                 </a:solidFill>
@@ -10413,22 +9899,22 @@
                 <a:ea typeface="Arial" pitchFamily="34" charset="-122"/>
                 <a:cs typeface="Arial" pitchFamily="34" charset="-120"/>
               </a:rPr>
-              <a:t>Meten</a:t>
-            </a:r>
-            <a:endParaRPr lang="en-US" sz="1500" dirty="0"/>
-          </a:p>
-        </p:txBody>
-      </p:sp>
-      <p:sp>
-        <p:nvSpPr>
-          <p:cNvPr id="11" name="Text 9"/>
-          <p:cNvSpPr txBox="1"/>
-          <p:nvPr/>
-        </p:nvSpPr>
-        <p:spPr>
-          <a:xfrm>
-            <a:off x="609598" y="3733791"/>
-            <a:ext cx="3079742" cy="1396997"/>
+              <a:t>Kick-off sessie</a:t>
+            </a:r>
+            <a:endParaRPr lang="en-US" sz="1450" dirty="0"/>
+          </a:p>
+        </p:txBody>
+      </p:sp>
+      <p:sp>
+        <p:nvSpPr>
+          <p:cNvPr id="11" name="Text 8"/>
+          <p:cNvSpPr txBox="1"/>
+          <p:nvPr/>
+        </p:nvSpPr>
+        <p:spPr>
+          <a:xfrm>
+            <a:off x="1549396" y="3403591"/>
+            <a:ext cx="4063990" cy="698498"/>
           </a:xfrm>
           <a:prstGeom prst="rect">
             <a:avLst/>
@@ -10455,7 +9941,7 @@
                 <a:ea typeface="Arial" pitchFamily="34" charset="-122"/>
                 <a:cs typeface="Arial" pitchFamily="34" charset="-120"/>
               </a:rPr>
-              <a:t>Na de pilot weet je wat tien afspraken opleveren: hoe de gesprekken gingen, wat eruit kwam en hoeveel klanten je eruit haalt.</a:t>
+              <a:t>Anderhalf tot twee uur met de beslisser en degene die de afspraken gaat voeren.</a:t>
             </a:r>
             <a:endParaRPr lang="en-US" sz="1050" dirty="0"/>
           </a:p>
@@ -10463,36 +9949,82 @@
       </p:sp>
       <p:sp>
         <p:nvSpPr>
-          <p:cNvPr id="12" name="Shape 10"/>
+          <p:cNvPr id="12" name="Shape 9"/>
           <p:cNvSpPr/>
           <p:nvPr/>
         </p:nvSpPr>
         <p:spPr>
           <a:xfrm>
-            <a:off x="4425939" y="2920993"/>
-            <a:ext cx="304799" cy="304799"/>
-          </a:xfrm>
-          <a:prstGeom prst="ellipse">
-            <a:avLst/>
-          </a:prstGeom>
-          <a:ln w="15240">
-            <a:solidFill>
-              <a:srgbClr val="38B6FF"/>
-            </a:solidFill>
-            <a:prstDash val="solid"/>
-          </a:ln>
-        </p:spPr>
-      </p:sp>
-      <p:sp>
-        <p:nvSpPr>
-          <p:cNvPr id="13" name="Text 11"/>
-          <p:cNvSpPr txBox="1"/>
-          <p:nvPr/>
-        </p:nvSpPr>
-        <p:spPr>
-          <a:xfrm>
-            <a:off x="4425939" y="2920993"/>
-            <a:ext cx="304799" cy="304799"/>
+            <a:off x="6184885" y="2793993"/>
+            <a:ext cx="5397487" cy="1530346"/>
+          </a:xfrm>
+          <a:prstGeom prst="roundRect">
+            <a:avLst>
+              <a:gd name="adj" fmla="val 6639"/>
+            </a:avLst>
+          </a:prstGeom>
+          <a:solidFill>
+            <a:srgbClr val="F8F4EB"/>
+          </a:solidFill>
+          <a:ln/>
+        </p:spPr>
+      </p:sp>
+      <p:sp>
+        <p:nvSpPr>
+          <p:cNvPr id="13" name="Shape 10"/>
+          <p:cNvSpPr/>
+          <p:nvPr/>
+        </p:nvSpPr>
+        <p:spPr>
+          <a:xfrm>
+            <a:off x="6515084" y="3098792"/>
+            <a:ext cx="380999" cy="380999"/>
+          </a:xfrm>
+          <a:prstGeom prst="roundRect">
+            <a:avLst>
+              <a:gd name="adj" fmla="val 23333"/>
+            </a:avLst>
+          </a:prstGeom>
+          <a:solidFill>
+            <a:srgbClr val="DDEBF3"/>
+          </a:solidFill>
+          <a:ln/>
+        </p:spPr>
+      </p:sp>
+      <p:pic>
+        <p:nvPicPr>
+          <p:cNvPr id="14" name="Image 1" descr="preencoded.png">    </p:cNvPr>
+          <p:cNvPicPr>
+            <a:picLocks noChangeAspect="1"/>
+          </p:cNvPicPr>
+          <p:nvPr/>
+        </p:nvPicPr>
+        <p:blipFill>
+          <a:blip r:embed="rId2"/>
+          <a:stretch>
+            <a:fillRect/>
+          </a:stretch>
+        </p:blipFill>
+        <p:spPr>
+          <a:xfrm>
+            <a:off x="6610333" y="3194042"/>
+            <a:ext cx="190500" cy="190500"/>
+          </a:xfrm>
+          <a:prstGeom prst="rect">
+            <a:avLst/>
+          </a:prstGeom>
+        </p:spPr>
+      </p:pic>
+      <p:sp>
+        <p:nvSpPr>
+          <p:cNvPr id="15" name="Text 11"/>
+          <p:cNvSpPr txBox="1"/>
+          <p:nvPr/>
+        </p:nvSpPr>
+        <p:spPr>
+          <a:xfrm>
+            <a:off x="7124682" y="3073392"/>
+            <a:ext cx="4127490" cy="279399"/>
           </a:xfrm>
           <a:prstGeom prst="rect">
             <a:avLst/>
@@ -10504,75 +10036,11 @@
           <a:bodyPr wrap="square" lIns="0" tIns="0" rIns="0" bIns="0" rtlCol="0" anchor="ctr"/>
           <a:lstStyle/>
           <a:p>
-            <a:pPr algn="ctr" indent="0" marL="0">
-              <a:buNone/>
-            </a:pPr>
-            <a:r>
-              <a:rPr lang="en-US" sz="1050" b="1" dirty="0">
-                <a:solidFill>
-                  <a:srgbClr val="38B6FF"/>
-                </a:solidFill>
-                <a:latin typeface="Arial" pitchFamily="34" charset="0"/>
-                <a:ea typeface="Arial" pitchFamily="34" charset="-122"/>
-                <a:cs typeface="Arial" pitchFamily="34" charset="-120"/>
-              </a:rPr>
-              <a:t>2</a:t>
-            </a:r>
-            <a:endParaRPr lang="en-US" sz="1050" dirty="0"/>
-          </a:p>
-        </p:txBody>
-      </p:sp>
-      <p:sp>
-        <p:nvSpPr>
-          <p:cNvPr id="14" name="Shape 12"/>
-          <p:cNvSpPr/>
-          <p:nvPr/>
-        </p:nvSpPr>
-        <p:spPr>
-          <a:xfrm>
-            <a:off x="4832338" y="3073392"/>
-            <a:ext cx="3359142" cy="0"/>
-          </a:xfrm>
-          <a:prstGeom prst="line">
-            <a:avLst/>
-          </a:prstGeom>
-          <a:noFill/>
-          <a:ln w="9525">
-            <a:solidFill>
-              <a:srgbClr val="38B6FF">
-                <a:alpha val="55000"/>
-              </a:srgbClr>
-            </a:solidFill>
-            <a:prstDash val="solid"/>
-          </a:ln>
-        </p:spPr>
-      </p:sp>
-      <p:sp>
-        <p:nvSpPr>
-          <p:cNvPr id="15" name="Text 13"/>
-          <p:cNvSpPr txBox="1"/>
-          <p:nvPr/>
-        </p:nvSpPr>
-        <p:spPr>
-          <a:xfrm>
-            <a:off x="4425939" y="3390892"/>
-            <a:ext cx="3079742" cy="279399"/>
-          </a:xfrm>
-          <a:prstGeom prst="rect">
-            <a:avLst/>
-          </a:prstGeom>
-          <a:noFill/>
-          <a:ln/>
-        </p:spPr>
-        <p:txBody>
-          <a:bodyPr wrap="square" lIns="0" tIns="0" rIns="0" bIns="0" rtlCol="0" anchor="ctr"/>
-          <a:lstStyle/>
-          <a:p>
             <a:pPr indent="0" marL="0">
               <a:buNone/>
             </a:pPr>
             <a:r>
-              <a:rPr lang="en-US" sz="1500" b="1" dirty="0">
+              <a:rPr lang="en-US" sz="1450" b="1" dirty="0">
                 <a:solidFill>
                   <a:srgbClr val="1C2230"/>
                 </a:solidFill>
@@ -10580,22 +10048,22 @@
                 <a:ea typeface="Arial" pitchFamily="34" charset="-122"/>
                 <a:cs typeface="Arial" pitchFamily="34" charset="-120"/>
               </a:rPr>
-              <a:t>Rekenen</a:t>
-            </a:r>
-            <a:endParaRPr lang="en-US" sz="1500" dirty="0"/>
-          </a:p>
-        </p:txBody>
-      </p:sp>
-      <p:sp>
-        <p:nvSpPr>
-          <p:cNvPr id="16" name="Text 14"/>
-          <p:cNvSpPr txBox="1"/>
-          <p:nvPr/>
-        </p:nvSpPr>
-        <p:spPr>
-          <a:xfrm>
-            <a:off x="4425939" y="3733791"/>
-            <a:ext cx="3079742" cy="1396997"/>
+              <a:t>Uitsluitlijst</a:t>
+            </a:r>
+            <a:endParaRPr lang="en-US" sz="1450" dirty="0"/>
+          </a:p>
+        </p:txBody>
+      </p:sp>
+      <p:sp>
+        <p:nvSpPr>
+          <p:cNvPr id="16" name="Text 12"/>
+          <p:cNvSpPr txBox="1"/>
+          <p:nvPr/>
+        </p:nvSpPr>
+        <p:spPr>
+          <a:xfrm>
+            <a:off x="7124682" y="3403591"/>
+            <a:ext cx="4063990" cy="698498"/>
           </a:xfrm>
           <a:prstGeom prst="rect">
             <a:avLst/>
@@ -10622,7 +10090,7 @@
                 <a:ea typeface="Arial" pitchFamily="34" charset="-122"/>
                 <a:cs typeface="Arial" pitchFamily="34" charset="-120"/>
               </a:rPr>
-              <a:t>Dan weet je ook hoeveel afspraken je nodig hebt voor één nieuwe klant. Niet geschat, maar gewoon geteld.</a:t>
+              <a:t>Bestaande klanten, lopende gesprekken en bedrijven die we niet mogen benaderen.</a:t>
             </a:r>
             <a:endParaRPr lang="en-US" sz="1050" dirty="0"/>
           </a:p>
@@ -10630,36 +10098,82 @@
       </p:sp>
       <p:sp>
         <p:nvSpPr>
-          <p:cNvPr id="17" name="Shape 15"/>
+          <p:cNvPr id="17" name="Shape 13"/>
           <p:cNvSpPr/>
           <p:nvPr/>
         </p:nvSpPr>
         <p:spPr>
           <a:xfrm>
-            <a:off x="8242279" y="2920993"/>
-            <a:ext cx="304799" cy="304799"/>
-          </a:xfrm>
-          <a:prstGeom prst="ellipse">
-            <a:avLst/>
-          </a:prstGeom>
-          <a:ln w="15240">
-            <a:solidFill>
-              <a:srgbClr val="38B6FF"/>
-            </a:solidFill>
-            <a:prstDash val="solid"/>
-          </a:ln>
-        </p:spPr>
-      </p:sp>
-      <p:sp>
-        <p:nvSpPr>
-          <p:cNvPr id="18" name="Text 16"/>
-          <p:cNvSpPr txBox="1"/>
-          <p:nvPr/>
-        </p:nvSpPr>
-        <p:spPr>
-          <a:xfrm>
-            <a:off x="8242279" y="2920993"/>
-            <a:ext cx="304799" cy="304799"/>
+            <a:off x="609598" y="4502139"/>
+            <a:ext cx="5397487" cy="1530346"/>
+          </a:xfrm>
+          <a:prstGeom prst="roundRect">
+            <a:avLst>
+              <a:gd name="adj" fmla="val 6639"/>
+            </a:avLst>
+          </a:prstGeom>
+          <a:solidFill>
+            <a:srgbClr val="F8F4EB"/>
+          </a:solidFill>
+          <a:ln/>
+        </p:spPr>
+      </p:sp>
+      <p:sp>
+        <p:nvSpPr>
+          <p:cNvPr id="18" name="Shape 14"/>
+          <p:cNvSpPr/>
+          <p:nvPr/>
+        </p:nvSpPr>
+        <p:spPr>
+          <a:xfrm>
+            <a:off x="939798" y="4806938"/>
+            <a:ext cx="380999" cy="380999"/>
+          </a:xfrm>
+          <a:prstGeom prst="roundRect">
+            <a:avLst>
+              <a:gd name="adj" fmla="val 23333"/>
+            </a:avLst>
+          </a:prstGeom>
+          <a:solidFill>
+            <a:srgbClr val="DDEBF3"/>
+          </a:solidFill>
+          <a:ln/>
+        </p:spPr>
+      </p:sp>
+      <p:pic>
+        <p:nvPicPr>
+          <p:cNvPr id="19" name="Image 2" descr="preencoded.png">    </p:cNvPr>
+          <p:cNvPicPr>
+            <a:picLocks noChangeAspect="1"/>
+          </p:cNvPicPr>
+          <p:nvPr/>
+        </p:nvPicPr>
+        <p:blipFill>
+          <a:blip r:embed="rId3"/>
+          <a:stretch>
+            <a:fillRect/>
+          </a:stretch>
+        </p:blipFill>
+        <p:spPr>
+          <a:xfrm>
+            <a:off x="1035047" y="4902188"/>
+            <a:ext cx="190500" cy="190500"/>
+          </a:xfrm>
+          <a:prstGeom prst="rect">
+            <a:avLst/>
+          </a:prstGeom>
+        </p:spPr>
+      </p:pic>
+      <p:sp>
+        <p:nvSpPr>
+          <p:cNvPr id="20" name="Text 15"/>
+          <p:cNvSpPr txBox="1"/>
+          <p:nvPr/>
+        </p:nvSpPr>
+        <p:spPr>
+          <a:xfrm>
+            <a:off x="1549396" y="4781538"/>
+            <a:ext cx="4127490" cy="279399"/>
           </a:xfrm>
           <a:prstGeom prst="rect">
             <a:avLst/>
@@ -10671,50 +10185,11 @@
           <a:bodyPr wrap="square" lIns="0" tIns="0" rIns="0" bIns="0" rtlCol="0" anchor="ctr"/>
           <a:lstStyle/>
           <a:p>
-            <a:pPr algn="ctr" indent="0" marL="0">
-              <a:buNone/>
-            </a:pPr>
-            <a:r>
-              <a:rPr lang="en-US" sz="1050" b="1" dirty="0">
-                <a:solidFill>
-                  <a:srgbClr val="38B6FF"/>
-                </a:solidFill>
-                <a:latin typeface="Arial" pitchFamily="34" charset="0"/>
-                <a:ea typeface="Arial" pitchFamily="34" charset="-122"/>
-                <a:cs typeface="Arial" pitchFamily="34" charset="-120"/>
-              </a:rPr>
-              <a:t>3</a:t>
-            </a:r>
-            <a:endParaRPr lang="en-US" sz="1050" dirty="0"/>
-          </a:p>
-        </p:txBody>
-      </p:sp>
-      <p:sp>
-        <p:nvSpPr>
-          <p:cNvPr id="19" name="Text 17"/>
-          <p:cNvSpPr txBox="1"/>
-          <p:nvPr/>
-        </p:nvSpPr>
-        <p:spPr>
-          <a:xfrm>
-            <a:off x="8242279" y="3390892"/>
-            <a:ext cx="3079742" cy="279399"/>
-          </a:xfrm>
-          <a:prstGeom prst="rect">
-            <a:avLst/>
-          </a:prstGeom>
-          <a:noFill/>
-          <a:ln/>
-        </p:spPr>
-        <p:txBody>
-          <a:bodyPr wrap="square" lIns="0" tIns="0" rIns="0" bIns="0" rtlCol="0" anchor="ctr"/>
-          <a:lstStyle/>
-          <a:p>
             <a:pPr indent="0" marL="0">
               <a:buNone/>
             </a:pPr>
             <a:r>
-              <a:rPr lang="en-US" sz="1500" b="1" dirty="0">
+              <a:rPr lang="en-US" sz="1450" b="1" dirty="0">
                 <a:solidFill>
                   <a:srgbClr val="1C2230"/>
                 </a:solidFill>
@@ -10722,22 +10197,22 @@
                 <a:ea typeface="Arial" pitchFamily="34" charset="-122"/>
                 <a:cs typeface="Arial" pitchFamily="34" charset="-120"/>
               </a:rPr>
-              <a:t>Plannen</a:t>
-            </a:r>
-            <a:endParaRPr lang="en-US" sz="1500" dirty="0"/>
-          </a:p>
-        </p:txBody>
-      </p:sp>
-      <p:sp>
-        <p:nvSpPr>
-          <p:cNvPr id="20" name="Text 18"/>
-          <p:cNvSpPr txBox="1"/>
-          <p:nvPr/>
-        </p:nvSpPr>
-        <p:spPr>
-          <a:xfrm>
-            <a:off x="8242279" y="3733791"/>
-            <a:ext cx="3079742" cy="1396997"/>
+              <a:t>Goedkeuring belscript</a:t>
+            </a:r>
+            <a:endParaRPr lang="en-US" sz="1450" dirty="0"/>
+          </a:p>
+        </p:txBody>
+      </p:sp>
+      <p:sp>
+        <p:nvSpPr>
+          <p:cNvPr id="21" name="Text 16"/>
+          <p:cNvSpPr txBox="1"/>
+          <p:nvPr/>
+        </p:nvSpPr>
+        <p:spPr>
+          <a:xfrm>
+            <a:off x="1549396" y="5111737"/>
+            <a:ext cx="4063990" cy="698498"/>
           </a:xfrm>
           <a:prstGeom prst="rect">
             <a:avLst/>
@@ -10764,7 +10239,7 @@
                 <a:ea typeface="Arial" pitchFamily="34" charset="-122"/>
                 <a:cs typeface="Arial" pitchFamily="34" charset="-120"/>
               </a:rPr>
-              <a:t>Jij zegt hoeveel nieuwe klanten je per vier weken wilt. Wij rekenen terug hoeveel afspraken daarvoor nodig zijn en richten de samenwerking daarop in.</a:t>
+              <a:t>Wij schrijven, jullie lezen mee en keuren goed.</a:t>
             </a:r>
             <a:endParaRPr lang="en-US" sz="1050" dirty="0"/>
           </a:p>
@@ -10772,400 +10247,82 @@
       </p:sp>
       <p:sp>
         <p:nvSpPr>
-          <p:cNvPr id="21" name="Shape 19"/>
+          <p:cNvPr id="22" name="Shape 17"/>
           <p:cNvSpPr/>
           <p:nvPr/>
         </p:nvSpPr>
         <p:spPr>
           <a:xfrm>
-            <a:off x="609598" y="5854685"/>
-            <a:ext cx="76200" cy="76200"/>
-          </a:xfrm>
-          <a:prstGeom prst="ellipse">
-            <a:avLst/>
-          </a:prstGeom>
-          <a:solidFill>
-            <a:srgbClr val="38B6FF"/>
-          </a:solidFill>
-          <a:ln/>
-        </p:spPr>
-      </p:sp>
-      <p:sp>
-        <p:nvSpPr>
-          <p:cNvPr id="22" name="Text 20"/>
-          <p:cNvSpPr txBox="1"/>
-          <p:nvPr/>
-        </p:nvSpPr>
-        <p:spPr>
-          <a:xfrm>
-            <a:off x="800098" y="5714986"/>
-            <a:ext cx="9905975" cy="355599"/>
-          </a:xfrm>
-          <a:prstGeom prst="rect">
-            <a:avLst/>
-          </a:prstGeom>
-          <a:noFill/>
-          <a:ln/>
-        </p:spPr>
-        <p:txBody>
-          <a:bodyPr wrap="square" lIns="0" tIns="0" rIns="0" bIns="0" rtlCol="0" anchor="ctr"/>
-          <a:lstStyle/>
-          <a:p>
-            <a:pPr indent="0" marL="0">
-              <a:buNone/>
-            </a:pPr>
-            <a:r>
-              <a:rPr lang="en-US" sz="1200" b="1" dirty="0">
-                <a:solidFill>
-                  <a:srgbClr val="1C2230"/>
-                </a:solidFill>
-                <a:latin typeface="Arial" pitchFamily="34" charset="0"/>
-                <a:ea typeface="Arial" pitchFamily="34" charset="-122"/>
-                <a:cs typeface="Arial" pitchFamily="34" charset="-120"/>
-              </a:rPr>
-              <a:t>Zo beslis je over het vervolg met je eigen cijfers in de hand.</a:t>
-            </a:r>
-            <a:endParaRPr lang="en-US" sz="1200" dirty="0"/>
-          </a:p>
-        </p:txBody>
-      </p:sp>
-    </p:spTree>
-  </p:cSld>
-  <p:clrMapOvr>
-    <a:masterClrMapping/>
-  </p:clrMapOvr>
-</p:sld>
-</file>
-
-<file path=ppt/slides/slide8.xml><?xml version="1.0" encoding="utf-8"?>
-<p:sld xmlns:a="http://schemas.openxmlformats.org/drawingml/2006/main" xmlns:r="http://schemas.openxmlformats.org/officeDocument/2006/relationships" xmlns:p="http://schemas.openxmlformats.org/presentationml/2006/main">
-  <p:cSld name="Slide 8">
-    <p:bg>
-      <p:bgPr>
-        <a:solidFill>
-          <a:srgbClr val="141821"/>
-        </a:solidFill>
-      </p:bgPr>
-    </p:bg>
-    <p:spTree>
-      <p:nvGrpSpPr>
-        <p:cNvPr id="1" name=""/>
-        <p:cNvGrpSpPr/>
-        <p:nvPr/>
-      </p:nvGrpSpPr>
-      <p:grpSpPr>
-        <a:xfrm>
-          <a:off x="0" y="0"/>
-          <a:ext cx="0" cy="0"/>
-          <a:chOff x="0" y="0"/>
-          <a:chExt cx="0" cy="0"/>
-        </a:xfrm>
-      </p:grpSpPr>
-      <p:sp>
-        <p:nvSpPr>
-          <p:cNvPr id="2" name="Text 0"/>
-          <p:cNvSpPr txBox="1"/>
-          <p:nvPr/>
-        </p:nvSpPr>
-        <p:spPr>
-          <a:xfrm>
-            <a:off x="596899" y="368299"/>
-            <a:ext cx="1904995" cy="330199"/>
-          </a:xfrm>
-          <a:prstGeom prst="rect">
-            <a:avLst/>
-          </a:prstGeom>
-          <a:noFill/>
-          <a:ln/>
-        </p:spPr>
-        <p:txBody>
-          <a:bodyPr wrap="square" lIns="0" tIns="0" rIns="0" bIns="0" rtlCol="0" anchor="ctr"/>
-          <a:lstStyle/>
-          <a:p>
-            <a:pPr algn="l" indent="0" marL="0">
-              <a:buNone/>
-            </a:pPr>
-            <a:r>
-              <a:rPr lang="en-US" sz="1800" b="1" dirty="0">
-                <a:solidFill>
-                  <a:srgbClr val="F2EFE6"/>
-                </a:solidFill>
-                <a:latin typeface="Arial" pitchFamily="34" charset="0"/>
-                <a:ea typeface="Arial" pitchFamily="34" charset="-122"/>
-                <a:cs typeface="Arial" pitchFamily="34" charset="-120"/>
-              </a:rPr>
-              <a:t>LINK</a:t>
-            </a:r>
-            <a:pPr algn="l" indent="0" marL="0">
-              <a:buNone/>
-            </a:pPr>
-            <a:r>
-              <a:rPr lang="en-US" sz="1800" b="1" dirty="0">
-                <a:solidFill>
-                  <a:srgbClr val="38B6FF"/>
-                </a:solidFill>
-                <a:latin typeface="Arial" pitchFamily="34" charset="0"/>
-                <a:ea typeface="Arial" pitchFamily="34" charset="-122"/>
-                <a:cs typeface="Arial" pitchFamily="34" charset="-120"/>
-              </a:rPr>
-              <a:t>.</a:t>
-            </a:r>
-            <a:endParaRPr lang="en-US" sz="1800" dirty="0"/>
-          </a:p>
-        </p:txBody>
-      </p:sp>
-      <p:sp>
-        <p:nvSpPr>
-          <p:cNvPr id="3" name="Text 1"/>
-          <p:cNvSpPr txBox="1"/>
-          <p:nvPr/>
-        </p:nvSpPr>
-        <p:spPr>
-          <a:xfrm>
-            <a:off x="609598" y="6381734"/>
-            <a:ext cx="5714986" cy="228599"/>
-          </a:xfrm>
-          <a:prstGeom prst="rect">
-            <a:avLst/>
-          </a:prstGeom>
-          <a:noFill/>
-          <a:ln/>
-        </p:spPr>
-        <p:txBody>
-          <a:bodyPr wrap="square" lIns="0" tIns="0" rIns="0" bIns="0" rtlCol="0" anchor="ctr"/>
-          <a:lstStyle/>
-          <a:p>
-            <a:pPr algn="l" indent="0" marL="0">
-              <a:buNone/>
-            </a:pPr>
-            <a:r>
-              <a:rPr lang="en-US" sz="750" b="1" spc="100" kern="0" dirty="0">
-                <a:solidFill>
-                  <a:srgbClr val="BDC3CE"/>
-                </a:solidFill>
-                <a:latin typeface="Arial" pitchFamily="34" charset="0"/>
-                <a:ea typeface="Arial" pitchFamily="34" charset="-122"/>
-                <a:cs typeface="Arial" pitchFamily="34" charset="-120"/>
-              </a:rPr>
-              <a:t>LINK. · Kennismaking</a:t>
-            </a:r>
-            <a:endParaRPr lang="en-US" sz="750" dirty="0"/>
-          </a:p>
-        </p:txBody>
-      </p:sp>
-      <p:sp>
-        <p:nvSpPr>
-          <p:cNvPr id="4" name="Text 2"/>
-          <p:cNvSpPr txBox="1"/>
-          <p:nvPr/>
-        </p:nvSpPr>
-        <p:spPr>
-          <a:xfrm>
-            <a:off x="9677376" y="6381734"/>
-            <a:ext cx="1904995" cy="228599"/>
-          </a:xfrm>
-          <a:prstGeom prst="rect">
-            <a:avLst/>
-          </a:prstGeom>
-          <a:noFill/>
-          <a:ln/>
-        </p:spPr>
-        <p:txBody>
-          <a:bodyPr wrap="square" lIns="0" tIns="0" rIns="0" bIns="0" rtlCol="0" anchor="ctr"/>
-          <a:lstStyle/>
-          <a:p>
-            <a:pPr algn="r" indent="0" marL="0">
-              <a:buNone/>
-            </a:pPr>
-            <a:r>
-              <a:rPr lang="en-US" sz="750" b="1" spc="100" kern="0" dirty="0">
-                <a:solidFill>
-                  <a:srgbClr val="BDC3CE"/>
-                </a:solidFill>
-                <a:latin typeface="Arial" pitchFamily="34" charset="0"/>
-                <a:ea typeface="Arial" pitchFamily="34" charset="-122"/>
-                <a:cs typeface="Arial" pitchFamily="34" charset="-120"/>
-              </a:rPr>
-              <a:t>8 / 11</a:t>
-            </a:r>
-            <a:endParaRPr lang="en-US" sz="750" dirty="0"/>
-          </a:p>
-        </p:txBody>
-      </p:sp>
-      <p:sp>
-        <p:nvSpPr>
-          <p:cNvPr id="5" name="Text 3"/>
-          <p:cNvSpPr txBox="1"/>
-          <p:nvPr/>
-        </p:nvSpPr>
-        <p:spPr>
-          <a:xfrm>
-            <a:off x="609598" y="1206497"/>
-            <a:ext cx="10159975" cy="215899"/>
-          </a:xfrm>
-          <a:prstGeom prst="rect">
-            <a:avLst/>
-          </a:prstGeom>
-          <a:noFill/>
-          <a:ln/>
-        </p:spPr>
-        <p:txBody>
-          <a:bodyPr wrap="square" lIns="0" tIns="0" rIns="0" bIns="0" rtlCol="0" anchor="ctr"/>
-          <a:lstStyle/>
-          <a:p>
-            <a:pPr algn="l" indent="0" marL="0">
-              <a:buNone/>
-            </a:pPr>
-            <a:r>
-              <a:rPr lang="en-US" sz="950" b="1" spc="400" kern="0" dirty="0">
-                <a:solidFill>
-                  <a:srgbClr val="38B6FF"/>
-                </a:solidFill>
-                <a:latin typeface="Arial" pitchFamily="34" charset="0"/>
-                <a:ea typeface="Arial" pitchFamily="34" charset="-122"/>
-                <a:cs typeface="Arial" pitchFamily="34" charset="-120"/>
-              </a:rPr>
-              <a:t>HOE WE VERDER GAAN</a:t>
-            </a:r>
-            <a:endParaRPr lang="en-US" sz="950" dirty="0"/>
-          </a:p>
-        </p:txBody>
-      </p:sp>
-      <p:sp>
-        <p:nvSpPr>
-          <p:cNvPr id="6" name="Text 4"/>
-          <p:cNvSpPr txBox="1"/>
-          <p:nvPr/>
-        </p:nvSpPr>
-        <p:spPr>
-          <a:xfrm>
-            <a:off x="609598" y="1511296"/>
-            <a:ext cx="10972773" cy="1142997"/>
-          </a:xfrm>
-          <a:prstGeom prst="rect">
-            <a:avLst/>
-          </a:prstGeom>
-          <a:noFill/>
-          <a:ln/>
-        </p:spPr>
-        <p:txBody>
-          <a:bodyPr wrap="square" lIns="0" tIns="0" rIns="0" bIns="0" rtlCol="0" anchor="t"/>
-          <a:lstStyle/>
-          <a:p>
-            <a:pPr algn="l" indent="0" marL="0">
-              <a:lnSpc>
-                <a:spcPct val="108000"/>
-              </a:lnSpc>
-              <a:buNone/>
-            </a:pPr>
-            <a:r>
-              <a:rPr lang="en-US" sz="3200" b="1" dirty="0">
-                <a:solidFill>
-                  <a:srgbClr val="F2EFE6"/>
-                </a:solidFill>
-                <a:latin typeface="Arial" pitchFamily="34" charset="0"/>
-                <a:ea typeface="Arial" pitchFamily="34" charset="-122"/>
-                <a:cs typeface="Arial" pitchFamily="34" charset="-120"/>
-              </a:rPr>
-              <a:t>Jullie kopen geen uren, maar </a:t>
-            </a:r>
-            <a:pPr algn="l" indent="0" marL="0">
-              <a:lnSpc>
-                <a:spcPct val="108000"/>
-              </a:lnSpc>
-              <a:buNone/>
-            </a:pPr>
-            <a:r>
-              <a:rPr lang="en-US" sz="3000" i="1" dirty="0">
-                <a:solidFill>
-                  <a:srgbClr val="F2EFE6"/>
-                </a:solidFill>
-                <a:latin typeface="Georgia" pitchFamily="34" charset="0"/>
-                <a:ea typeface="Georgia" pitchFamily="34" charset="-122"/>
-                <a:cs typeface="Georgia" pitchFamily="34" charset="-120"/>
-              </a:rPr>
-              <a:t>afspraken</a:t>
-            </a:r>
-            <a:pPr algn="l" indent="0" marL="0">
-              <a:lnSpc>
-                <a:spcPct val="108000"/>
-              </a:lnSpc>
-              <a:buNone/>
-            </a:pPr>
-            <a:r>
-              <a:rPr lang="en-US" sz="3200" b="1" dirty="0">
-                <a:solidFill>
-                  <a:srgbClr val="F2EFE6"/>
-                </a:solidFill>
-                <a:latin typeface="Arial" pitchFamily="34" charset="0"/>
-                <a:ea typeface="Arial" pitchFamily="34" charset="-122"/>
-                <a:cs typeface="Arial" pitchFamily="34" charset="-120"/>
-              </a:rPr>
-              <a:t>.</a:t>
-            </a:r>
-            <a:endParaRPr lang="en-US" sz="3200" dirty="0"/>
-          </a:p>
-        </p:txBody>
-      </p:sp>
-      <p:sp>
-        <p:nvSpPr>
-          <p:cNvPr id="7" name="Shape 5"/>
-          <p:cNvSpPr/>
-          <p:nvPr/>
-        </p:nvSpPr>
-        <p:spPr>
-          <a:xfrm>
-            <a:off x="609598" y="2793993"/>
-            <a:ext cx="2628893" cy="2285994"/>
+            <a:off x="6184885" y="4502139"/>
+            <a:ext cx="5397487" cy="1530346"/>
           </a:xfrm>
           <a:prstGeom prst="roundRect">
             <a:avLst>
-              <a:gd name="adj" fmla="val 4444"/>
+              <a:gd name="adj" fmla="val 6639"/>
             </a:avLst>
           </a:prstGeom>
           <a:solidFill>
-            <a:srgbClr val="1B2130"/>
+            <a:srgbClr val="F8F4EB"/>
           </a:solidFill>
-          <a:ln w="9525">
-            <a:solidFill>
-              <a:srgbClr val="3A4152"/>
-            </a:solidFill>
-            <a:prstDash val="solid"/>
-          </a:ln>
-        </p:spPr>
-      </p:sp>
-      <p:sp>
-        <p:nvSpPr>
-          <p:cNvPr id="8" name="Shape 6"/>
+          <a:ln/>
+        </p:spPr>
+      </p:sp>
+      <p:sp>
+        <p:nvSpPr>
+          <p:cNvPr id="23" name="Shape 18"/>
           <p:cNvSpPr/>
           <p:nvPr/>
         </p:nvSpPr>
         <p:spPr>
           <a:xfrm>
-            <a:off x="825498" y="3022592"/>
-            <a:ext cx="292099" cy="292099"/>
-          </a:xfrm>
-          <a:prstGeom prst="ellipse">
-            <a:avLst/>
-          </a:prstGeom>
-          <a:ln w="15240">
-            <a:solidFill>
-              <a:srgbClr val="38B6FF"/>
-            </a:solidFill>
-            <a:prstDash val="solid"/>
-          </a:ln>
-        </p:spPr>
-      </p:sp>
-      <p:sp>
-        <p:nvSpPr>
-          <p:cNvPr id="9" name="Text 7"/>
-          <p:cNvSpPr txBox="1"/>
-          <p:nvPr/>
-        </p:nvSpPr>
-        <p:spPr>
-          <a:xfrm>
-            <a:off x="825498" y="3022592"/>
-            <a:ext cx="292099" cy="292099"/>
+            <a:off x="6515084" y="4806938"/>
+            <a:ext cx="380999" cy="380999"/>
+          </a:xfrm>
+          <a:prstGeom prst="roundRect">
+            <a:avLst>
+              <a:gd name="adj" fmla="val 23333"/>
+            </a:avLst>
+          </a:prstGeom>
+          <a:solidFill>
+            <a:srgbClr val="DDEBF3"/>
+          </a:solidFill>
+          <a:ln/>
+        </p:spPr>
+      </p:sp>
+      <p:pic>
+        <p:nvPicPr>
+          <p:cNvPr id="24" name="Image 3" descr="preencoded.png">    </p:cNvPr>
+          <p:cNvPicPr>
+            <a:picLocks noChangeAspect="1"/>
+          </p:cNvPicPr>
+          <p:nvPr/>
+        </p:nvPicPr>
+        <p:blipFill>
+          <a:blip r:embed="rId4"/>
+          <a:stretch>
+            <a:fillRect/>
+          </a:stretch>
+        </p:blipFill>
+        <p:spPr>
+          <a:xfrm>
+            <a:off x="6610333" y="4902188"/>
+            <a:ext cx="190500" cy="190500"/>
+          </a:xfrm>
+          <a:prstGeom prst="rect">
+            <a:avLst/>
+          </a:prstGeom>
+        </p:spPr>
+      </p:pic>
+      <p:sp>
+        <p:nvSpPr>
+          <p:cNvPr id="25" name="Text 19"/>
+          <p:cNvSpPr txBox="1"/>
+          <p:nvPr/>
+        </p:nvSpPr>
+        <p:spPr>
+          <a:xfrm>
+            <a:off x="7124682" y="4781538"/>
+            <a:ext cx="4127490" cy="279399"/>
           </a:xfrm>
           <a:prstGeom prst="rect">
             <a:avLst/>
@@ -11177,34 +10334,34 @@
           <a:bodyPr wrap="square" lIns="0" tIns="0" rIns="0" bIns="0" rtlCol="0" anchor="ctr"/>
           <a:lstStyle/>
           <a:p>
-            <a:pPr algn="ctr" indent="0" marL="0">
-              <a:buNone/>
-            </a:pPr>
-            <a:r>
-              <a:rPr lang="en-US" sz="1000" b="1" dirty="0">
-                <a:solidFill>
-                  <a:srgbClr val="38B6FF"/>
-                </a:solidFill>
-                <a:latin typeface="Arial" pitchFamily="34" charset="0"/>
-                <a:ea typeface="Arial" pitchFamily="34" charset="-122"/>
-                <a:cs typeface="Arial" pitchFamily="34" charset="-120"/>
-              </a:rPr>
-              <a:t>1</a:t>
-            </a:r>
-            <a:endParaRPr lang="en-US" sz="1000" dirty="0"/>
-          </a:p>
-        </p:txBody>
-      </p:sp>
-      <p:sp>
-        <p:nvSpPr>
-          <p:cNvPr id="10" name="Text 8"/>
-          <p:cNvSpPr txBox="1"/>
-          <p:nvPr/>
-        </p:nvSpPr>
-        <p:spPr>
-          <a:xfrm>
-            <a:off x="825498" y="3467091"/>
-            <a:ext cx="2197095" cy="406399"/>
+            <a:pPr indent="0" marL="0">
+              <a:buNone/>
+            </a:pPr>
+            <a:r>
+              <a:rPr lang="en-US" sz="1450" b="1" dirty="0">
+                <a:solidFill>
+                  <a:srgbClr val="1C2230"/>
+                </a:solidFill>
+                <a:latin typeface="Arial" pitchFamily="34" charset="0"/>
+                <a:ea typeface="Arial" pitchFamily="34" charset="-122"/>
+                <a:cs typeface="Arial" pitchFamily="34" charset="-120"/>
+              </a:rPr>
+              <a:t>Opvolging van afspraken</a:t>
+            </a:r>
+            <a:endParaRPr lang="en-US" sz="1450" dirty="0"/>
+          </a:p>
+        </p:txBody>
+      </p:sp>
+      <p:sp>
+        <p:nvSpPr>
+          <p:cNvPr id="26" name="Text 20"/>
+          <p:cNvSpPr txBox="1"/>
+          <p:nvPr/>
+        </p:nvSpPr>
+        <p:spPr>
+          <a:xfrm>
+            <a:off x="7124682" y="5111737"/>
+            <a:ext cx="4063990" cy="698498"/>
           </a:xfrm>
           <a:prstGeom prst="rect">
             <a:avLst/>
@@ -11218,639 +10375,22 @@
           <a:p>
             <a:pPr indent="0" marL="0">
               <a:lnSpc>
-                <a:spcPct val="115000"/>
+                <a:spcPct val="135000"/>
               </a:lnSpc>
               <a:buNone/>
             </a:pPr>
             <a:r>
-              <a:rPr lang="en-US" sz="1150" b="1" dirty="0">
-                <a:solidFill>
-                  <a:srgbClr val="F2EFE6"/>
-                </a:solidFill>
-                <a:latin typeface="Arial" pitchFamily="34" charset="0"/>
-                <a:ea typeface="Arial" pitchFamily="34" charset="-122"/>
-                <a:cs typeface="Arial" pitchFamily="34" charset="-120"/>
-              </a:rPr>
-              <a:t>Wat een afspraak kost</a:t>
-            </a:r>
-            <a:endParaRPr lang="en-US" sz="1150" dirty="0"/>
-          </a:p>
-        </p:txBody>
-      </p:sp>
-      <p:sp>
-        <p:nvSpPr>
-          <p:cNvPr id="11" name="Text 9"/>
-          <p:cNvSpPr txBox="1"/>
-          <p:nvPr/>
-        </p:nvSpPr>
-        <p:spPr>
-          <a:xfrm>
-            <a:off x="825498" y="3924290"/>
-            <a:ext cx="2197095" cy="1079497"/>
-          </a:xfrm>
-          <a:prstGeom prst="rect">
-            <a:avLst/>
-          </a:prstGeom>
-          <a:noFill/>
-          <a:ln/>
-        </p:spPr>
-        <p:txBody>
-          <a:bodyPr wrap="square" lIns="0" tIns="0" rIns="0" bIns="0" rtlCol="0" anchor="t"/>
-          <a:lstStyle/>
-          <a:p>
-            <a:pPr indent="0" marL="0">
-              <a:lnSpc>
-                <a:spcPct val="130000"/>
-              </a:lnSpc>
-              <a:buNone/>
-            </a:pPr>
-            <a:r>
-              <a:rPr lang="en-US" sz="875" dirty="0">
-                <a:solidFill>
-                  <a:srgbClr val="C2C8D2"/>
-                </a:solidFill>
-                <a:latin typeface="Arial" pitchFamily="34" charset="0"/>
-                <a:ea typeface="Arial" pitchFamily="34" charset="-122"/>
-                <a:cs typeface="Arial" pitchFamily="34" charset="-120"/>
-              </a:rPr>
-              <a:t>Uit de pilot blijkt hoeveel tijd er in één gekwalificeerde afspraak zit. Daarmee weten we hoeveel afspraken per dagdeel realistisch zijn en wat een afspraak dus kost.</a:t>
-            </a:r>
-            <a:endParaRPr lang="en-US" sz="875" dirty="0"/>
-          </a:p>
-        </p:txBody>
-      </p:sp>
-      <p:sp>
-        <p:nvSpPr>
-          <p:cNvPr id="12" name="Shape 10"/>
-          <p:cNvSpPr/>
-          <p:nvPr/>
-        </p:nvSpPr>
-        <p:spPr>
-          <a:xfrm>
-            <a:off x="3390892" y="2793993"/>
-            <a:ext cx="2628893" cy="2285994"/>
-          </a:xfrm>
-          <a:prstGeom prst="roundRect">
-            <a:avLst>
-              <a:gd name="adj" fmla="val 4444"/>
-            </a:avLst>
-          </a:prstGeom>
-          <a:solidFill>
-            <a:srgbClr val="1B2130"/>
-          </a:solidFill>
-          <a:ln w="9525">
-            <a:solidFill>
-              <a:srgbClr val="3A4152"/>
-            </a:solidFill>
-            <a:prstDash val="solid"/>
-          </a:ln>
-        </p:spPr>
-      </p:sp>
-      <p:sp>
-        <p:nvSpPr>
-          <p:cNvPr id="13" name="Shape 11"/>
-          <p:cNvSpPr/>
-          <p:nvPr/>
-        </p:nvSpPr>
-        <p:spPr>
-          <a:xfrm>
-            <a:off x="3606791" y="3022592"/>
-            <a:ext cx="292099" cy="292099"/>
-          </a:xfrm>
-          <a:prstGeom prst="ellipse">
-            <a:avLst/>
-          </a:prstGeom>
-          <a:ln w="15240">
-            <a:solidFill>
-              <a:srgbClr val="38B6FF"/>
-            </a:solidFill>
-            <a:prstDash val="solid"/>
-          </a:ln>
-        </p:spPr>
-      </p:sp>
-      <p:sp>
-        <p:nvSpPr>
-          <p:cNvPr id="14" name="Text 12"/>
-          <p:cNvSpPr txBox="1"/>
-          <p:nvPr/>
-        </p:nvSpPr>
-        <p:spPr>
-          <a:xfrm>
-            <a:off x="3606791" y="3022592"/>
-            <a:ext cx="292099" cy="292099"/>
-          </a:xfrm>
-          <a:prstGeom prst="rect">
-            <a:avLst/>
-          </a:prstGeom>
-          <a:noFill/>
-          <a:ln/>
-        </p:spPr>
-        <p:txBody>
-          <a:bodyPr wrap="square" lIns="0" tIns="0" rIns="0" bIns="0" rtlCol="0" anchor="ctr"/>
-          <a:lstStyle/>
-          <a:p>
-            <a:pPr algn="ctr" indent="0" marL="0">
-              <a:buNone/>
-            </a:pPr>
-            <a:r>
-              <a:rPr lang="en-US" sz="1000" b="1" dirty="0">
-                <a:solidFill>
-                  <a:srgbClr val="38B6FF"/>
-                </a:solidFill>
-                <a:latin typeface="Arial" pitchFamily="34" charset="0"/>
-                <a:ea typeface="Arial" pitchFamily="34" charset="-122"/>
-                <a:cs typeface="Arial" pitchFamily="34" charset="-120"/>
-              </a:rPr>
-              <a:t>2</a:t>
-            </a:r>
-            <a:endParaRPr lang="en-US" sz="1000" dirty="0"/>
-          </a:p>
-        </p:txBody>
-      </p:sp>
-      <p:sp>
-        <p:nvSpPr>
-          <p:cNvPr id="15" name="Text 13"/>
-          <p:cNvSpPr txBox="1"/>
-          <p:nvPr/>
-        </p:nvSpPr>
-        <p:spPr>
-          <a:xfrm>
-            <a:off x="3606791" y="3467091"/>
-            <a:ext cx="2197095" cy="406399"/>
-          </a:xfrm>
-          <a:prstGeom prst="rect">
-            <a:avLst/>
-          </a:prstGeom>
-          <a:noFill/>
-          <a:ln/>
-        </p:spPr>
-        <p:txBody>
-          <a:bodyPr wrap="square" lIns="0" tIns="0" rIns="0" bIns="0" rtlCol="0" anchor="t"/>
-          <a:lstStyle/>
-          <a:p>
-            <a:pPr indent="0" marL="0">
-              <a:lnSpc>
-                <a:spcPct val="115000"/>
-              </a:lnSpc>
-              <a:buNone/>
-            </a:pPr>
-            <a:r>
-              <a:rPr lang="en-US" sz="1150" b="1" dirty="0">
-                <a:solidFill>
-                  <a:srgbClr val="F2EFE6"/>
-                </a:solidFill>
-                <a:latin typeface="Arial" pitchFamily="34" charset="0"/>
-                <a:ea typeface="Arial" pitchFamily="34" charset="-122"/>
-                <a:cs typeface="Arial" pitchFamily="34" charset="-120"/>
-              </a:rPr>
-              <a:t>Vaste bezetting, vast aantal</a:t>
-            </a:r>
-            <a:endParaRPr lang="en-US" sz="1150" dirty="0"/>
-          </a:p>
-        </p:txBody>
-      </p:sp>
-      <p:sp>
-        <p:nvSpPr>
-          <p:cNvPr id="16" name="Text 14"/>
-          <p:cNvSpPr txBox="1"/>
-          <p:nvPr/>
-        </p:nvSpPr>
-        <p:spPr>
-          <a:xfrm>
-            <a:off x="3606791" y="3924290"/>
-            <a:ext cx="2197095" cy="1079497"/>
-          </a:xfrm>
-          <a:prstGeom prst="rect">
-            <a:avLst/>
-          </a:prstGeom>
-          <a:noFill/>
-          <a:ln/>
-        </p:spPr>
-        <p:txBody>
-          <a:bodyPr wrap="square" lIns="0" tIns="0" rIns="0" bIns="0" rtlCol="0" anchor="t"/>
-          <a:lstStyle/>
-          <a:p>
-            <a:pPr indent="0" marL="0">
-              <a:lnSpc>
-                <a:spcPct val="130000"/>
-              </a:lnSpc>
-              <a:buNone/>
-            </a:pPr>
-            <a:r>
-              <a:rPr lang="en-US" sz="875" dirty="0">
-                <a:solidFill>
-                  <a:srgbClr val="C2C8D2"/>
-                </a:solidFill>
-                <a:latin typeface="Arial" pitchFamily="34" charset="0"/>
-                <a:ea typeface="Arial" pitchFamily="34" charset="-122"/>
-                <a:cs typeface="Arial" pitchFamily="34" charset="-120"/>
-              </a:rPr>
-              <a:t>Jullie kiezen hoeveel dagdelen per week we bellen. Daar hangt een vast aantal afspraken aan en wij trekken de tijd uit die daarvoor nodig is.</a:t>
-            </a:r>
-            <a:endParaRPr lang="en-US" sz="875" dirty="0"/>
-          </a:p>
-        </p:txBody>
-      </p:sp>
-      <p:sp>
-        <p:nvSpPr>
-          <p:cNvPr id="17" name="Shape 15"/>
-          <p:cNvSpPr/>
-          <p:nvPr/>
-        </p:nvSpPr>
-        <p:spPr>
-          <a:xfrm>
-            <a:off x="6172185" y="2793993"/>
-            <a:ext cx="2628893" cy="2285994"/>
-          </a:xfrm>
-          <a:prstGeom prst="roundRect">
-            <a:avLst>
-              <a:gd name="adj" fmla="val 4444"/>
-            </a:avLst>
-          </a:prstGeom>
-          <a:solidFill>
-            <a:srgbClr val="1B2130"/>
-          </a:solidFill>
-          <a:ln w="9525">
-            <a:solidFill>
-              <a:srgbClr val="3A4152"/>
-            </a:solidFill>
-            <a:prstDash val="solid"/>
-          </a:ln>
-        </p:spPr>
-      </p:sp>
-      <p:sp>
-        <p:nvSpPr>
-          <p:cNvPr id="18" name="Shape 16"/>
-          <p:cNvSpPr/>
-          <p:nvPr/>
-        </p:nvSpPr>
-        <p:spPr>
-          <a:xfrm>
-            <a:off x="6388084" y="3022592"/>
-            <a:ext cx="292099" cy="292099"/>
-          </a:xfrm>
-          <a:prstGeom prst="ellipse">
-            <a:avLst/>
-          </a:prstGeom>
-          <a:ln w="15240">
-            <a:solidFill>
-              <a:srgbClr val="38B6FF"/>
-            </a:solidFill>
-            <a:prstDash val="solid"/>
-          </a:ln>
-        </p:spPr>
-      </p:sp>
-      <p:sp>
-        <p:nvSpPr>
-          <p:cNvPr id="19" name="Text 17"/>
-          <p:cNvSpPr txBox="1"/>
-          <p:nvPr/>
-        </p:nvSpPr>
-        <p:spPr>
-          <a:xfrm>
-            <a:off x="6388084" y="3022592"/>
-            <a:ext cx="292099" cy="292099"/>
-          </a:xfrm>
-          <a:prstGeom prst="rect">
-            <a:avLst/>
-          </a:prstGeom>
-          <a:noFill/>
-          <a:ln/>
-        </p:spPr>
-        <p:txBody>
-          <a:bodyPr wrap="square" lIns="0" tIns="0" rIns="0" bIns="0" rtlCol="0" anchor="ctr"/>
-          <a:lstStyle/>
-          <a:p>
-            <a:pPr algn="ctr" indent="0" marL="0">
-              <a:buNone/>
-            </a:pPr>
-            <a:r>
-              <a:rPr lang="en-US" sz="1000" b="1" dirty="0">
-                <a:solidFill>
-                  <a:srgbClr val="38B6FF"/>
-                </a:solidFill>
-                <a:latin typeface="Arial" pitchFamily="34" charset="0"/>
-                <a:ea typeface="Arial" pitchFamily="34" charset="-122"/>
-                <a:cs typeface="Arial" pitchFamily="34" charset="-120"/>
-              </a:rPr>
-              <a:t>3</a:t>
-            </a:r>
-            <a:endParaRPr lang="en-US" sz="1000" dirty="0"/>
-          </a:p>
-        </p:txBody>
-      </p:sp>
-      <p:sp>
-        <p:nvSpPr>
-          <p:cNvPr id="20" name="Text 18"/>
-          <p:cNvSpPr txBox="1"/>
-          <p:nvPr/>
-        </p:nvSpPr>
-        <p:spPr>
-          <a:xfrm>
-            <a:off x="6388084" y="3467091"/>
-            <a:ext cx="2197095" cy="406399"/>
-          </a:xfrm>
-          <a:prstGeom prst="rect">
-            <a:avLst/>
-          </a:prstGeom>
-          <a:noFill/>
-          <a:ln/>
-        </p:spPr>
-        <p:txBody>
-          <a:bodyPr wrap="square" lIns="0" tIns="0" rIns="0" bIns="0" rtlCol="0" anchor="t"/>
-          <a:lstStyle/>
-          <a:p>
-            <a:pPr indent="0" marL="0">
-              <a:lnSpc>
-                <a:spcPct val="115000"/>
-              </a:lnSpc>
-              <a:buNone/>
-            </a:pPr>
-            <a:r>
-              <a:rPr lang="en-US" sz="1150" b="1" dirty="0">
-                <a:solidFill>
-                  <a:srgbClr val="F2EFE6"/>
-                </a:solidFill>
-                <a:latin typeface="Arial" pitchFamily="34" charset="0"/>
-                <a:ea typeface="Arial" pitchFamily="34" charset="-122"/>
-                <a:cs typeface="Arial" pitchFamily="34" charset="-120"/>
-              </a:rPr>
-              <a:t>Boven target is voor jullie</a:t>
-            </a:r>
-            <a:endParaRPr lang="en-US" sz="1150" dirty="0"/>
-          </a:p>
-        </p:txBody>
-      </p:sp>
-      <p:sp>
-        <p:nvSpPr>
-          <p:cNvPr id="21" name="Text 19"/>
-          <p:cNvSpPr txBox="1"/>
-          <p:nvPr/>
-        </p:nvSpPr>
-        <p:spPr>
-          <a:xfrm>
-            <a:off x="6388084" y="3924290"/>
-            <a:ext cx="2197095" cy="1079497"/>
-          </a:xfrm>
-          <a:prstGeom prst="rect">
-            <a:avLst/>
-          </a:prstGeom>
-          <a:noFill/>
-          <a:ln/>
-        </p:spPr>
-        <p:txBody>
-          <a:bodyPr wrap="square" lIns="0" tIns="0" rIns="0" bIns="0" rtlCol="0" anchor="t"/>
-          <a:lstStyle/>
-          <a:p>
-            <a:pPr indent="0" marL="0">
-              <a:lnSpc>
-                <a:spcPct val="130000"/>
-              </a:lnSpc>
-              <a:buNone/>
-            </a:pPr>
-            <a:r>
-              <a:rPr lang="en-US" sz="875" dirty="0">
-                <a:solidFill>
-                  <a:srgbClr val="C2C8D2"/>
-                </a:solidFill>
-                <a:latin typeface="Arial" pitchFamily="34" charset="0"/>
-                <a:ea typeface="Arial" pitchFamily="34" charset="-122"/>
-                <a:cs typeface="Arial" pitchFamily="34" charset="-120"/>
-              </a:rPr>
-              <a:t>Zijn we eerder klaar dan gepland, dan bellen we de tijd gewoon vol. Wat er dan nog bij komt is voor jullie, zonder extra factuur.</a:t>
-            </a:r>
-            <a:endParaRPr lang="en-US" sz="875" dirty="0"/>
-          </a:p>
-        </p:txBody>
-      </p:sp>
-      <p:sp>
-        <p:nvSpPr>
-          <p:cNvPr id="22" name="Shape 20"/>
-          <p:cNvSpPr/>
-          <p:nvPr/>
-        </p:nvSpPr>
-        <p:spPr>
-          <a:xfrm>
-            <a:off x="8953478" y="2793993"/>
-            <a:ext cx="2628893" cy="2285994"/>
-          </a:xfrm>
-          <a:prstGeom prst="roundRect">
-            <a:avLst>
-              <a:gd name="adj" fmla="val 4444"/>
-            </a:avLst>
-          </a:prstGeom>
-          <a:solidFill>
-            <a:srgbClr val="1B2130"/>
-          </a:solidFill>
-          <a:ln w="15240">
-            <a:solidFill>
-              <a:srgbClr val="38B6FF"/>
-            </a:solidFill>
-            <a:prstDash val="solid"/>
-          </a:ln>
-        </p:spPr>
-      </p:sp>
-      <p:sp>
-        <p:nvSpPr>
-          <p:cNvPr id="23" name="Shape 21"/>
-          <p:cNvSpPr/>
-          <p:nvPr/>
-        </p:nvSpPr>
-        <p:spPr>
-          <a:xfrm>
-            <a:off x="9169377" y="3022592"/>
-            <a:ext cx="292099" cy="292099"/>
-          </a:xfrm>
-          <a:prstGeom prst="ellipse">
-            <a:avLst/>
-          </a:prstGeom>
-          <a:ln w="15240">
-            <a:solidFill>
-              <a:srgbClr val="38B6FF"/>
-            </a:solidFill>
-            <a:prstDash val="solid"/>
-          </a:ln>
-        </p:spPr>
-      </p:sp>
-      <p:sp>
-        <p:nvSpPr>
-          <p:cNvPr id="24" name="Text 22"/>
-          <p:cNvSpPr txBox="1"/>
-          <p:nvPr/>
-        </p:nvSpPr>
-        <p:spPr>
-          <a:xfrm>
-            <a:off x="9169377" y="3022592"/>
-            <a:ext cx="292099" cy="292099"/>
-          </a:xfrm>
-          <a:prstGeom prst="rect">
-            <a:avLst/>
-          </a:prstGeom>
-          <a:noFill/>
-          <a:ln/>
-        </p:spPr>
-        <p:txBody>
-          <a:bodyPr wrap="square" lIns="0" tIns="0" rIns="0" bIns="0" rtlCol="0" anchor="ctr"/>
-          <a:lstStyle/>
-          <a:p>
-            <a:pPr algn="ctr" indent="0" marL="0">
-              <a:buNone/>
-            </a:pPr>
-            <a:r>
-              <a:rPr lang="en-US" sz="1000" b="1" dirty="0">
-                <a:solidFill>
-                  <a:srgbClr val="38B6FF"/>
-                </a:solidFill>
-                <a:latin typeface="Arial" pitchFamily="34" charset="0"/>
-                <a:ea typeface="Arial" pitchFamily="34" charset="-122"/>
-                <a:cs typeface="Arial" pitchFamily="34" charset="-120"/>
-              </a:rPr>
-              <a:t>4</a:t>
-            </a:r>
-            <a:endParaRPr lang="en-US" sz="1000" dirty="0"/>
-          </a:p>
-        </p:txBody>
-      </p:sp>
-      <p:sp>
-        <p:nvSpPr>
-          <p:cNvPr id="25" name="Text 23"/>
-          <p:cNvSpPr txBox="1"/>
-          <p:nvPr/>
-        </p:nvSpPr>
-        <p:spPr>
-          <a:xfrm>
-            <a:off x="9169377" y="3467091"/>
-            <a:ext cx="2197095" cy="406399"/>
-          </a:xfrm>
-          <a:prstGeom prst="rect">
-            <a:avLst/>
-          </a:prstGeom>
-          <a:noFill/>
-          <a:ln/>
-        </p:spPr>
-        <p:txBody>
-          <a:bodyPr wrap="square" lIns="0" tIns="0" rIns="0" bIns="0" rtlCol="0" anchor="t"/>
-          <a:lstStyle/>
-          <a:p>
-            <a:pPr indent="0" marL="0">
-              <a:lnSpc>
-                <a:spcPct val="115000"/>
-              </a:lnSpc>
-              <a:buNone/>
-            </a:pPr>
-            <a:r>
-              <a:rPr lang="en-US" sz="1150" b="1" dirty="0">
-                <a:solidFill>
-                  <a:srgbClr val="38B6FF"/>
-                </a:solidFill>
-                <a:latin typeface="Arial" pitchFamily="34" charset="0"/>
-                <a:ea typeface="Arial" pitchFamily="34" charset="-122"/>
-                <a:cs typeface="Arial" pitchFamily="34" charset="-120"/>
-              </a:rPr>
-              <a:t>Succesfee bij omzet</a:t>
-            </a:r>
-            <a:endParaRPr lang="en-US" sz="1150" dirty="0"/>
-          </a:p>
-        </p:txBody>
-      </p:sp>
-      <p:sp>
-        <p:nvSpPr>
-          <p:cNvPr id="26" name="Text 24"/>
-          <p:cNvSpPr txBox="1"/>
-          <p:nvPr/>
-        </p:nvSpPr>
-        <p:spPr>
-          <a:xfrm>
-            <a:off x="9169377" y="3924290"/>
-            <a:ext cx="2197095" cy="1079497"/>
-          </a:xfrm>
-          <a:prstGeom prst="rect">
-            <a:avLst/>
-          </a:prstGeom>
-          <a:noFill/>
-          <a:ln/>
-        </p:spPr>
-        <p:txBody>
-          <a:bodyPr wrap="square" lIns="0" tIns="0" rIns="0" bIns="0" rtlCol="0" anchor="t"/>
-          <a:lstStyle/>
-          <a:p>
-            <a:pPr indent="0" marL="0">
-              <a:lnSpc>
-                <a:spcPct val="130000"/>
-              </a:lnSpc>
-              <a:buNone/>
-            </a:pPr>
-            <a:r>
-              <a:rPr lang="en-US" sz="875" dirty="0">
-                <a:solidFill>
-                  <a:srgbClr val="C2C8D2"/>
-                </a:solidFill>
-                <a:latin typeface="Arial" pitchFamily="34" charset="0"/>
-                <a:ea typeface="Arial" pitchFamily="34" charset="-122"/>
-                <a:cs typeface="Arial" pitchFamily="34" charset="-120"/>
-              </a:rPr>
-              <a:t>Wordt een afspraak een opdracht, dan spreken we daar vooraf een succesfee over af. Wij verdienen pas extra als het jullie ook echt omzet oplevert.</a:t>
-            </a:r>
-            <a:endParaRPr lang="en-US" sz="875" dirty="0"/>
-          </a:p>
-        </p:txBody>
-      </p:sp>
-      <p:sp>
-        <p:nvSpPr>
-          <p:cNvPr id="27" name="Shape 25"/>
-          <p:cNvSpPr/>
-          <p:nvPr/>
-        </p:nvSpPr>
-        <p:spPr>
-          <a:xfrm>
-            <a:off x="609598" y="5854685"/>
-            <a:ext cx="76200" cy="76200"/>
-          </a:xfrm>
-          <a:prstGeom prst="ellipse">
-            <a:avLst/>
-          </a:prstGeom>
-          <a:solidFill>
-            <a:srgbClr val="38B6FF"/>
-          </a:solidFill>
-          <a:ln/>
-        </p:spPr>
-      </p:sp>
-      <p:sp>
-        <p:nvSpPr>
-          <p:cNvPr id="28" name="Text 26"/>
-          <p:cNvSpPr txBox="1"/>
-          <p:nvPr/>
-        </p:nvSpPr>
-        <p:spPr>
-          <a:xfrm>
-            <a:off x="800098" y="5714986"/>
-            <a:ext cx="9905975" cy="355599"/>
-          </a:xfrm>
-          <a:prstGeom prst="rect">
-            <a:avLst/>
-          </a:prstGeom>
-          <a:noFill/>
-          <a:ln/>
-        </p:spPr>
-        <p:txBody>
-          <a:bodyPr wrap="square" lIns="0" tIns="0" rIns="0" bIns="0" rtlCol="0" anchor="ctr"/>
-          <a:lstStyle/>
-          <a:p>
-            <a:pPr indent="0" marL="0">
-              <a:buNone/>
-            </a:pPr>
-            <a:r>
-              <a:rPr lang="en-US" sz="1200" b="1" dirty="0">
-                <a:solidFill>
-                  <a:srgbClr val="F2EFE6"/>
-                </a:solidFill>
-                <a:latin typeface="Arial" pitchFamily="34" charset="0"/>
-                <a:ea typeface="Arial" pitchFamily="34" charset="-122"/>
-                <a:cs typeface="Arial" pitchFamily="34" charset="-120"/>
-              </a:rPr>
-              <a:t>Het target komt uit jullie eigen cijfers, dus dat halen we. Zo niet, dan halen we het de volgende werkperiode in.</a:t>
-            </a:r>
-            <a:endParaRPr lang="en-US" sz="1200" dirty="0"/>
+              <a:rPr lang="en-US" sz="1050" dirty="0">
+                <a:solidFill>
+                  <a:srgbClr val="6F6A5C"/>
+                </a:solidFill>
+                <a:latin typeface="Arial" pitchFamily="34" charset="0"/>
+                <a:ea typeface="Arial" pitchFamily="34" charset="-122"/>
+                <a:cs typeface="Arial" pitchFamily="34" charset="-120"/>
+              </a:rPr>
+              <a:t>Eén vaste persoon die de afspraken voert en ons kort laat weten hoe ze verliepen.</a:t>
+            </a:r>
+            <a:endParaRPr lang="en-US" sz="1050" dirty="0"/>
           </a:p>
         </p:txBody>
       </p:sp>
@@ -12011,7 +10551,7 @@
                 <a:ea typeface="Arial" pitchFamily="34" charset="-122"/>
                 <a:cs typeface="Arial" pitchFamily="34" charset="-120"/>
               </a:rPr>
-              <a:t>9 / 11</a:t>
+              <a:t>9 / 10</a:t>
             </a:r>
             <a:endParaRPr lang="en-US" sz="750" dirty="0"/>
           </a:p>
@@ -12050,7 +10590,7 @@
                 <a:ea typeface="Arial" pitchFamily="34" charset="-122"/>
                 <a:cs typeface="Arial" pitchFamily="34" charset="-120"/>
               </a:rPr>
-              <a:t>WAT WE VAN JULLIE NODIG HEBBEN</a:t>
+              <a:t>SPELREGELS</a:t>
             </a:r>
             <a:endParaRPr lang="en-US" sz="950" dirty="0"/>
           </a:p>
@@ -12092,7 +10632,7 @@
                 <a:ea typeface="Arial" pitchFamily="34" charset="-122"/>
                 <a:cs typeface="Arial" pitchFamily="34" charset="-120"/>
               </a:rPr>
-              <a:t>Een halve dag van jullie, dan </a:t>
+              <a:t>Transparant en zonder </a:t>
             </a:r>
             <a:pPr algn="l" indent="0" marL="0">
               <a:lnSpc>
@@ -12109,7 +10649,7 @@
                 <a:ea typeface="Georgia" pitchFamily="34" charset="-122"/>
                 <a:cs typeface="Georgia" pitchFamily="34" charset="-120"/>
               </a:rPr>
-              <a:t>draaien wij</a:t>
+              <a:t>kleine lettertjes</a:t>
             </a:r>
             <a:pPr algn="l" indent="0" marL="0">
               <a:lnSpc>
@@ -12140,34 +10680,12 @@
         </p:nvSpPr>
         <p:spPr>
           <a:xfrm>
-            <a:off x="609598" y="2793993"/>
-            <a:ext cx="5397487" cy="1530346"/>
+            <a:off x="609598" y="2819393"/>
+            <a:ext cx="253999" cy="253999"/>
           </a:xfrm>
           <a:prstGeom prst="roundRect">
             <a:avLst>
-              <a:gd name="adj" fmla="val 6639"/>
-            </a:avLst>
-          </a:prstGeom>
-          <a:solidFill>
-            <a:srgbClr val="F8F4EB"/>
-          </a:solidFill>
-          <a:ln/>
-        </p:spPr>
-      </p:sp>
-      <p:sp>
-        <p:nvSpPr>
-          <p:cNvPr id="8" name="Shape 6"/>
-          <p:cNvSpPr/>
-          <p:nvPr/>
-        </p:nvSpPr>
-        <p:spPr>
-          <a:xfrm>
-            <a:off x="939798" y="3098792"/>
-            <a:ext cx="380999" cy="380999"/>
-          </a:xfrm>
-          <a:prstGeom prst="roundRect">
-            <a:avLst>
-              <a:gd name="adj" fmla="val 23333"/>
+              <a:gd name="adj" fmla="val 25000"/>
             </a:avLst>
           </a:prstGeom>
           <a:solidFill>
@@ -12178,7 +10696,7 @@
       </p:sp>
       <p:pic>
         <p:nvPicPr>
-          <p:cNvPr id="9" name="Image 0" descr="preencoded.png">    </p:cNvPr>
+          <p:cNvPr id="8" name="Image 0" descr="preencoded.png">    </p:cNvPr>
           <p:cNvPicPr>
             <a:picLocks noChangeAspect="1"/>
           </p:cNvPicPr>
@@ -12192,8 +10710,8 @@
         </p:blipFill>
         <p:spPr>
           <a:xfrm>
-            <a:off x="1035047" y="3194042"/>
-            <a:ext cx="190500" cy="190500"/>
+            <a:off x="666748" y="2876543"/>
+            <a:ext cx="139700" cy="139700"/>
           </a:xfrm>
           <a:prstGeom prst="rect">
             <a:avLst/>
@@ -12202,53 +10720,53 @@
       </p:pic>
       <p:sp>
         <p:nvSpPr>
+          <p:cNvPr id="9" name="Text 6"/>
+          <p:cNvSpPr txBox="1"/>
+          <p:nvPr/>
+        </p:nvSpPr>
+        <p:spPr>
+          <a:xfrm>
+            <a:off x="1015997" y="2793993"/>
+            <a:ext cx="4825988" cy="228599"/>
+          </a:xfrm>
+          <a:prstGeom prst="rect">
+            <a:avLst/>
+          </a:prstGeom>
+          <a:noFill/>
+          <a:ln/>
+        </p:spPr>
+        <p:txBody>
+          <a:bodyPr wrap="square" lIns="0" tIns="0" rIns="0" bIns="0" rtlCol="0" anchor="ctr"/>
+          <a:lstStyle/>
+          <a:p>
+            <a:pPr indent="0" marL="0">
+              <a:buNone/>
+            </a:pPr>
+            <a:r>
+              <a:rPr lang="en-US" sz="1200" b="1" dirty="0">
+                <a:solidFill>
+                  <a:srgbClr val="1C2230"/>
+                </a:solidFill>
+                <a:latin typeface="Arial" pitchFamily="34" charset="0"/>
+                <a:ea typeface="Arial" pitchFamily="34" charset="-122"/>
+                <a:cs typeface="Arial" pitchFamily="34" charset="-120"/>
+              </a:rPr>
+              <a:t>Niet-exclusief</a:t>
+            </a:r>
+            <a:endParaRPr lang="en-US" sz="1200" dirty="0"/>
+          </a:p>
+        </p:txBody>
+      </p:sp>
+      <p:sp>
+        <p:nvSpPr>
           <p:cNvPr id="10" name="Text 7"/>
           <p:cNvSpPr txBox="1"/>
           <p:nvPr/>
         </p:nvSpPr>
         <p:spPr>
           <a:xfrm>
-            <a:off x="1549396" y="3073392"/>
-            <a:ext cx="4127490" cy="279399"/>
-          </a:xfrm>
-          <a:prstGeom prst="rect">
-            <a:avLst/>
-          </a:prstGeom>
-          <a:noFill/>
-          <a:ln/>
-        </p:spPr>
-        <p:txBody>
-          <a:bodyPr wrap="square" lIns="0" tIns="0" rIns="0" bIns="0" rtlCol="0" anchor="ctr"/>
-          <a:lstStyle/>
-          <a:p>
-            <a:pPr indent="0" marL="0">
-              <a:buNone/>
-            </a:pPr>
-            <a:r>
-              <a:rPr lang="en-US" sz="1450" b="1" dirty="0">
-                <a:solidFill>
-                  <a:srgbClr val="1C2230"/>
-                </a:solidFill>
-                <a:latin typeface="Arial" pitchFamily="34" charset="0"/>
-                <a:ea typeface="Arial" pitchFamily="34" charset="-122"/>
-                <a:cs typeface="Arial" pitchFamily="34" charset="-120"/>
-              </a:rPr>
-              <a:t>Kick-off sessie</a:t>
-            </a:r>
-            <a:endParaRPr lang="en-US" sz="1450" dirty="0"/>
-          </a:p>
-        </p:txBody>
-      </p:sp>
-      <p:sp>
-        <p:nvSpPr>
-          <p:cNvPr id="11" name="Text 8"/>
-          <p:cNvSpPr txBox="1"/>
-          <p:nvPr/>
-        </p:nvSpPr>
-        <p:spPr>
-          <a:xfrm>
-            <a:off x="1549396" y="3403591"/>
-            <a:ext cx="4063990" cy="698498"/>
+            <a:off x="1015997" y="3035292"/>
+            <a:ext cx="4825988" cy="355599"/>
           </a:xfrm>
           <a:prstGeom prst="rect">
             <a:avLst/>
@@ -12262,12 +10780,12 @@
           <a:p>
             <a:pPr indent="0" marL="0">
               <a:lnSpc>
-                <a:spcPct val="135000"/>
+                <a:spcPct val="130000"/>
               </a:lnSpc>
               <a:buNone/>
             </a:pPr>
             <a:r>
-              <a:rPr lang="en-US" sz="1050" dirty="0">
+              <a:rPr lang="en-US" sz="950" dirty="0">
                 <a:solidFill>
                   <a:srgbClr val="6F6A5C"/>
                 </a:solidFill>
@@ -12275,48 +10793,26 @@
                 <a:ea typeface="Arial" pitchFamily="34" charset="-122"/>
                 <a:cs typeface="Arial" pitchFamily="34" charset="-120"/>
               </a:rPr>
-              <a:t>Anderhalf tot twee uur met de beslisser en degene die de afspraken gaat voeren.</a:t>
-            </a:r>
-            <a:endParaRPr lang="en-US" sz="1050" dirty="0"/>
-          </a:p>
-        </p:txBody>
-      </p:sp>
-      <p:sp>
-        <p:nvSpPr>
-          <p:cNvPr id="12" name="Shape 9"/>
+              <a:t>Jullie zitten nergens aan vast en houden alle vrijheid.</a:t>
+            </a:r>
+            <a:endParaRPr lang="en-US" sz="950" dirty="0"/>
+          </a:p>
+        </p:txBody>
+      </p:sp>
+      <p:sp>
+        <p:nvSpPr>
+          <p:cNvPr id="11" name="Shape 8"/>
           <p:cNvSpPr/>
           <p:nvPr/>
         </p:nvSpPr>
         <p:spPr>
           <a:xfrm>
-            <a:off x="6184885" y="2793993"/>
-            <a:ext cx="5397487" cy="1530346"/>
+            <a:off x="6349984" y="2819393"/>
+            <a:ext cx="253999" cy="253999"/>
           </a:xfrm>
           <a:prstGeom prst="roundRect">
             <a:avLst>
-              <a:gd name="adj" fmla="val 6639"/>
-            </a:avLst>
-          </a:prstGeom>
-          <a:solidFill>
-            <a:srgbClr val="F8F4EB"/>
-          </a:solidFill>
-          <a:ln/>
-        </p:spPr>
-      </p:sp>
-      <p:sp>
-        <p:nvSpPr>
-          <p:cNvPr id="13" name="Shape 10"/>
-          <p:cNvSpPr/>
-          <p:nvPr/>
-        </p:nvSpPr>
-        <p:spPr>
-          <a:xfrm>
-            <a:off x="6515084" y="3098792"/>
-            <a:ext cx="380999" cy="380999"/>
-          </a:xfrm>
-          <a:prstGeom prst="roundRect">
-            <a:avLst>
-              <a:gd name="adj" fmla="val 23333"/>
+              <a:gd name="adj" fmla="val 25000"/>
             </a:avLst>
           </a:prstGeom>
           <a:solidFill>
@@ -12327,7 +10823,7 @@
       </p:sp>
       <p:pic>
         <p:nvPicPr>
-          <p:cNvPr id="14" name="Image 1" descr="preencoded.png">    </p:cNvPr>
+          <p:cNvPr id="12" name="Image 1" descr="preencoded.png">    </p:cNvPr>
           <p:cNvPicPr>
             <a:picLocks noChangeAspect="1"/>
           </p:cNvPicPr>
@@ -12341,8 +10837,8 @@
         </p:blipFill>
         <p:spPr>
           <a:xfrm>
-            <a:off x="6610333" y="3194042"/>
-            <a:ext cx="190500" cy="190500"/>
+            <a:off x="6407134" y="2876543"/>
+            <a:ext cx="139700" cy="139700"/>
           </a:xfrm>
           <a:prstGeom prst="rect">
             <a:avLst/>
@@ -12351,14 +10847,14 @@
       </p:pic>
       <p:sp>
         <p:nvSpPr>
-          <p:cNvPr id="15" name="Text 11"/>
-          <p:cNvSpPr txBox="1"/>
-          <p:nvPr/>
-        </p:nvSpPr>
-        <p:spPr>
-          <a:xfrm>
-            <a:off x="7124682" y="3073392"/>
-            <a:ext cx="4127490" cy="279399"/>
+          <p:cNvPr id="13" name="Text 9"/>
+          <p:cNvSpPr txBox="1"/>
+          <p:nvPr/>
+        </p:nvSpPr>
+        <p:spPr>
+          <a:xfrm>
+            <a:off x="6756383" y="2793993"/>
+            <a:ext cx="4825988" cy="228599"/>
           </a:xfrm>
           <a:prstGeom prst="rect">
             <a:avLst/>
@@ -12374,7 +10870,7 @@
               <a:buNone/>
             </a:pPr>
             <a:r>
-              <a:rPr lang="en-US" sz="1450" b="1" dirty="0">
+              <a:rPr lang="en-US" sz="1200" b="1" dirty="0">
                 <a:solidFill>
                   <a:srgbClr val="1C2230"/>
                 </a:solidFill>
@@ -12382,22 +10878,22 @@
                 <a:ea typeface="Arial" pitchFamily="34" charset="-122"/>
                 <a:cs typeface="Arial" pitchFamily="34" charset="-120"/>
               </a:rPr>
-              <a:t>Uitsluitlijst</a:t>
-            </a:r>
-            <a:endParaRPr lang="en-US" sz="1450" dirty="0"/>
-          </a:p>
-        </p:txBody>
-      </p:sp>
-      <p:sp>
-        <p:nvSpPr>
-          <p:cNvPr id="16" name="Text 12"/>
-          <p:cNvSpPr txBox="1"/>
-          <p:nvPr/>
-        </p:nvSpPr>
-        <p:spPr>
-          <a:xfrm>
-            <a:off x="7124682" y="3403591"/>
-            <a:ext cx="4063990" cy="698498"/>
+              <a:t>Bestaande relaties blijven van jullie</a:t>
+            </a:r>
+            <a:endParaRPr lang="en-US" sz="1200" dirty="0"/>
+          </a:p>
+        </p:txBody>
+      </p:sp>
+      <p:sp>
+        <p:nvSpPr>
+          <p:cNvPr id="14" name="Text 10"/>
+          <p:cNvSpPr txBox="1"/>
+          <p:nvPr/>
+        </p:nvSpPr>
+        <p:spPr>
+          <a:xfrm>
+            <a:off x="6756383" y="3035292"/>
+            <a:ext cx="4825988" cy="355599"/>
           </a:xfrm>
           <a:prstGeom prst="rect">
             <a:avLst/>
@@ -12411,12 +10907,12 @@
           <a:p>
             <a:pPr indent="0" marL="0">
               <a:lnSpc>
-                <a:spcPct val="135000"/>
+                <a:spcPct val="130000"/>
               </a:lnSpc>
               <a:buNone/>
             </a:pPr>
             <a:r>
-              <a:rPr lang="en-US" sz="1050" dirty="0">
+              <a:rPr lang="en-US" sz="950" dirty="0">
                 <a:solidFill>
                   <a:srgbClr val="6F6A5C"/>
                 </a:solidFill>
@@ -12424,48 +10920,49 @@
                 <a:ea typeface="Arial" pitchFamily="34" charset="-122"/>
                 <a:cs typeface="Arial" pitchFamily="34" charset="-120"/>
               </a:rPr>
-              <a:t>Bestaande klanten, lopende gesprekken en bedrijven die we niet mogen benaderen.</a:t>
-            </a:r>
-            <a:endParaRPr lang="en-US" sz="1050" dirty="0"/>
-          </a:p>
-        </p:txBody>
-      </p:sp>
-      <p:sp>
-        <p:nvSpPr>
-          <p:cNvPr id="17" name="Shape 13"/>
+              <a:t>Uitsluitlijst vooraf, die bedrijven benaderen wij niet.</a:t>
+            </a:r>
+            <a:endParaRPr lang="en-US" sz="950" dirty="0"/>
+          </a:p>
+        </p:txBody>
+      </p:sp>
+      <p:sp>
+        <p:nvSpPr>
+          <p:cNvPr id="15" name="Shape 11"/>
           <p:cNvSpPr/>
           <p:nvPr/>
         </p:nvSpPr>
         <p:spPr>
           <a:xfrm>
-            <a:off x="609598" y="4502139"/>
-            <a:ext cx="5397487" cy="1530346"/>
+            <a:off x="609598" y="3428991"/>
+            <a:ext cx="5232387" cy="0"/>
+          </a:xfrm>
+          <a:prstGeom prst="line">
+            <a:avLst/>
+          </a:prstGeom>
+          <a:noFill/>
+          <a:ln w="6350">
+            <a:solidFill>
+              <a:srgbClr val="C9C2B2"/>
+            </a:solidFill>
+            <a:prstDash val="solid"/>
+          </a:ln>
+        </p:spPr>
+      </p:sp>
+      <p:sp>
+        <p:nvSpPr>
+          <p:cNvPr id="16" name="Shape 12"/>
+          <p:cNvSpPr/>
+          <p:nvPr/>
+        </p:nvSpPr>
+        <p:spPr>
+          <a:xfrm>
+            <a:off x="609598" y="3530591"/>
+            <a:ext cx="253999" cy="253999"/>
           </a:xfrm>
           <a:prstGeom prst="roundRect">
             <a:avLst>
-              <a:gd name="adj" fmla="val 6639"/>
-            </a:avLst>
-          </a:prstGeom>
-          <a:solidFill>
-            <a:srgbClr val="F8F4EB"/>
-          </a:solidFill>
-          <a:ln/>
-        </p:spPr>
-      </p:sp>
-      <p:sp>
-        <p:nvSpPr>
-          <p:cNvPr id="18" name="Shape 14"/>
-          <p:cNvSpPr/>
-          <p:nvPr/>
-        </p:nvSpPr>
-        <p:spPr>
-          <a:xfrm>
-            <a:off x="939798" y="4806938"/>
-            <a:ext cx="380999" cy="380999"/>
-          </a:xfrm>
-          <a:prstGeom prst="roundRect">
-            <a:avLst>
-              <a:gd name="adj" fmla="val 23333"/>
+              <a:gd name="adj" fmla="val 25000"/>
             </a:avLst>
           </a:prstGeom>
           <a:solidFill>
@@ -12476,7 +10973,7 @@
       </p:sp>
       <p:pic>
         <p:nvPicPr>
-          <p:cNvPr id="19" name="Image 2" descr="preencoded.png">    </p:cNvPr>
+          <p:cNvPr id="17" name="Image 2" descr="preencoded.png">    </p:cNvPr>
           <p:cNvPicPr>
             <a:picLocks noChangeAspect="1"/>
           </p:cNvPicPr>
@@ -12490,8 +10987,8 @@
         </p:blipFill>
         <p:spPr>
           <a:xfrm>
-            <a:off x="1035047" y="4902188"/>
-            <a:ext cx="190500" cy="190500"/>
+            <a:off x="666748" y="3587741"/>
+            <a:ext cx="139700" cy="139700"/>
           </a:xfrm>
           <a:prstGeom prst="rect">
             <a:avLst/>
@@ -12500,14 +10997,14 @@
       </p:pic>
       <p:sp>
         <p:nvSpPr>
-          <p:cNvPr id="20" name="Text 15"/>
-          <p:cNvSpPr txBox="1"/>
-          <p:nvPr/>
-        </p:nvSpPr>
-        <p:spPr>
-          <a:xfrm>
-            <a:off x="1549396" y="4781538"/>
-            <a:ext cx="4127490" cy="279399"/>
+          <p:cNvPr id="18" name="Text 13"/>
+          <p:cNvSpPr txBox="1"/>
+          <p:nvPr/>
+        </p:nvSpPr>
+        <p:spPr>
+          <a:xfrm>
+            <a:off x="1015997" y="3505191"/>
+            <a:ext cx="4825988" cy="228599"/>
           </a:xfrm>
           <a:prstGeom prst="rect">
             <a:avLst/>
@@ -12523,7 +11020,7 @@
               <a:buNone/>
             </a:pPr>
             <a:r>
-              <a:rPr lang="en-US" sz="1450" b="1" dirty="0">
+              <a:rPr lang="en-US" sz="1200" b="1" dirty="0">
                 <a:solidFill>
                   <a:srgbClr val="1C2230"/>
                 </a:solidFill>
@@ -12531,22 +11028,22 @@
                 <a:ea typeface="Arial" pitchFamily="34" charset="-122"/>
                 <a:cs typeface="Arial" pitchFamily="34" charset="-120"/>
               </a:rPr>
-              <a:t>Goedkeuring belscript</a:t>
-            </a:r>
-            <a:endParaRPr lang="en-US" sz="1450" dirty="0"/>
-          </a:p>
-        </p:txBody>
-      </p:sp>
-      <p:sp>
-        <p:nvSpPr>
-          <p:cNvPr id="21" name="Text 16"/>
-          <p:cNvSpPr txBox="1"/>
-          <p:nvPr/>
-        </p:nvSpPr>
-        <p:spPr>
-          <a:xfrm>
-            <a:off x="1549396" y="5111737"/>
-            <a:ext cx="4063990" cy="698498"/>
+              <a:t>Werkperiodes van 4 weken</a:t>
+            </a:r>
+            <a:endParaRPr lang="en-US" sz="1200" dirty="0"/>
+          </a:p>
+        </p:txBody>
+      </p:sp>
+      <p:sp>
+        <p:nvSpPr>
+          <p:cNvPr id="19" name="Text 14"/>
+          <p:cNvSpPr txBox="1"/>
+          <p:nvPr/>
+        </p:nvSpPr>
+        <p:spPr>
+          <a:xfrm>
+            <a:off x="1015997" y="3746491"/>
+            <a:ext cx="4825988" cy="355599"/>
           </a:xfrm>
           <a:prstGeom prst="rect">
             <a:avLst/>
@@ -12560,12 +11057,12 @@
           <a:p>
             <a:pPr indent="0" marL="0">
               <a:lnSpc>
-                <a:spcPct val="135000"/>
+                <a:spcPct val="130000"/>
               </a:lnSpc>
               <a:buNone/>
             </a:pPr>
             <a:r>
-              <a:rPr lang="en-US" sz="1050" dirty="0">
+              <a:rPr lang="en-US" sz="950" dirty="0">
                 <a:solidFill>
                   <a:srgbClr val="6F6A5C"/>
                 </a:solidFill>
@@ -12573,48 +11070,49 @@
                 <a:ea typeface="Arial" pitchFamily="34" charset="-122"/>
                 <a:cs typeface="Arial" pitchFamily="34" charset="-120"/>
               </a:rPr>
-              <a:t>Wij schrijven, jullie lezen mee en keuren goed.</a:t>
-            </a:r>
-            <a:endParaRPr lang="en-US" sz="1050" dirty="0"/>
-          </a:p>
-        </p:txBody>
-      </p:sp>
-      <p:sp>
-        <p:nvSpPr>
-          <p:cNvPr id="22" name="Shape 17"/>
+              <a:t>Vooraf gefactureerd, per werkperiode.</a:t>
+            </a:r>
+            <a:endParaRPr lang="en-US" sz="950" dirty="0"/>
+          </a:p>
+        </p:txBody>
+      </p:sp>
+      <p:sp>
+        <p:nvSpPr>
+          <p:cNvPr id="20" name="Shape 15"/>
           <p:cNvSpPr/>
           <p:nvPr/>
         </p:nvSpPr>
         <p:spPr>
           <a:xfrm>
-            <a:off x="6184885" y="4502139"/>
-            <a:ext cx="5397487" cy="1530346"/>
+            <a:off x="6349984" y="3428991"/>
+            <a:ext cx="5232387" cy="0"/>
+          </a:xfrm>
+          <a:prstGeom prst="line">
+            <a:avLst/>
+          </a:prstGeom>
+          <a:noFill/>
+          <a:ln w="6350">
+            <a:solidFill>
+              <a:srgbClr val="C9C2B2"/>
+            </a:solidFill>
+            <a:prstDash val="solid"/>
+          </a:ln>
+        </p:spPr>
+      </p:sp>
+      <p:sp>
+        <p:nvSpPr>
+          <p:cNvPr id="21" name="Shape 16"/>
+          <p:cNvSpPr/>
+          <p:nvPr/>
+        </p:nvSpPr>
+        <p:spPr>
+          <a:xfrm>
+            <a:off x="6349984" y="3530591"/>
+            <a:ext cx="253999" cy="253999"/>
           </a:xfrm>
           <a:prstGeom prst="roundRect">
             <a:avLst>
-              <a:gd name="adj" fmla="val 6639"/>
-            </a:avLst>
-          </a:prstGeom>
-          <a:solidFill>
-            <a:srgbClr val="F8F4EB"/>
-          </a:solidFill>
-          <a:ln/>
-        </p:spPr>
-      </p:sp>
-      <p:sp>
-        <p:nvSpPr>
-          <p:cNvPr id="23" name="Shape 18"/>
-          <p:cNvSpPr/>
-          <p:nvPr/>
-        </p:nvSpPr>
-        <p:spPr>
-          <a:xfrm>
-            <a:off x="6515084" y="4806938"/>
-            <a:ext cx="380999" cy="380999"/>
-          </a:xfrm>
-          <a:prstGeom prst="roundRect">
-            <a:avLst>
-              <a:gd name="adj" fmla="val 23333"/>
+              <a:gd name="adj" fmla="val 25000"/>
             </a:avLst>
           </a:prstGeom>
           <a:solidFill>
@@ -12625,7 +11123,7 @@
       </p:sp>
       <p:pic>
         <p:nvPicPr>
-          <p:cNvPr id="24" name="Image 3" descr="preencoded.png">    </p:cNvPr>
+          <p:cNvPr id="22" name="Image 3" descr="preencoded.png">    </p:cNvPr>
           <p:cNvPicPr>
             <a:picLocks noChangeAspect="1"/>
           </p:cNvPicPr>
@@ -12639,8 +11137,8 @@
         </p:blipFill>
         <p:spPr>
           <a:xfrm>
-            <a:off x="6610333" y="4902188"/>
-            <a:ext cx="190500" cy="190500"/>
+            <a:off x="6407134" y="3587741"/>
+            <a:ext cx="139700" cy="139700"/>
           </a:xfrm>
           <a:prstGeom prst="rect">
             <a:avLst/>
@@ -12649,14 +11147,14 @@
       </p:pic>
       <p:sp>
         <p:nvSpPr>
-          <p:cNvPr id="25" name="Text 19"/>
-          <p:cNvSpPr txBox="1"/>
-          <p:nvPr/>
-        </p:nvSpPr>
-        <p:spPr>
-          <a:xfrm>
-            <a:off x="7124682" y="4781538"/>
-            <a:ext cx="4127490" cy="279399"/>
+          <p:cNvPr id="23" name="Text 17"/>
+          <p:cNvSpPr txBox="1"/>
+          <p:nvPr/>
+        </p:nvSpPr>
+        <p:spPr>
+          <a:xfrm>
+            <a:off x="6756383" y="3505191"/>
+            <a:ext cx="4825988" cy="228599"/>
           </a:xfrm>
           <a:prstGeom prst="rect">
             <a:avLst/>
@@ -12672,7 +11170,7 @@
               <a:buNone/>
             </a:pPr>
             <a:r>
-              <a:rPr lang="en-US" sz="1450" b="1" dirty="0">
+              <a:rPr lang="en-US" sz="1200" b="1" dirty="0">
                 <a:solidFill>
                   <a:srgbClr val="1C2230"/>
                 </a:solidFill>
@@ -12680,22 +11178,22 @@
                 <a:ea typeface="Arial" pitchFamily="34" charset="-122"/>
                 <a:cs typeface="Arial" pitchFamily="34" charset="-120"/>
               </a:rPr>
-              <a:t>Opvolging van afspraken</a:t>
-            </a:r>
-            <a:endParaRPr lang="en-US" sz="1450" dirty="0"/>
-          </a:p>
-        </p:txBody>
-      </p:sp>
-      <p:sp>
-        <p:nvSpPr>
-          <p:cNvPr id="26" name="Text 20"/>
-          <p:cNvSpPr txBox="1"/>
-          <p:nvPr/>
-        </p:nvSpPr>
-        <p:spPr>
-          <a:xfrm>
-            <a:off x="7124682" y="5111737"/>
-            <a:ext cx="4063990" cy="698498"/>
+              <a:t>Wekelijkse rapportage</a:t>
+            </a:r>
+            <a:endParaRPr lang="en-US" sz="1200" dirty="0"/>
+          </a:p>
+        </p:txBody>
+      </p:sp>
+      <p:sp>
+        <p:nvSpPr>
+          <p:cNvPr id="24" name="Text 18"/>
+          <p:cNvSpPr txBox="1"/>
+          <p:nvPr/>
+        </p:nvSpPr>
+        <p:spPr>
+          <a:xfrm>
+            <a:off x="6756383" y="3746491"/>
+            <a:ext cx="4825988" cy="355599"/>
           </a:xfrm>
           <a:prstGeom prst="rect">
             <a:avLst/>
@@ -12709,12 +11207,12 @@
           <a:p>
             <a:pPr indent="0" marL="0">
               <a:lnSpc>
-                <a:spcPct val="135000"/>
+                <a:spcPct val="130000"/>
               </a:lnSpc>
               <a:buNone/>
             </a:pPr>
             <a:r>
-              <a:rPr lang="en-US" sz="1050" dirty="0">
+              <a:rPr lang="en-US" sz="950" dirty="0">
                 <a:solidFill>
                   <a:srgbClr val="6F6A5C"/>
                 </a:solidFill>
@@ -12722,9 +11220,609 @@
                 <a:ea typeface="Arial" pitchFamily="34" charset="-122"/>
                 <a:cs typeface="Arial" pitchFamily="34" charset="-120"/>
               </a:rPr>
-              <a:t>Eén vaste persoon die de afspraken voert en ons kort laat weten hoe ze verliepen.</a:t>
-            </a:r>
-            <a:endParaRPr lang="en-US" sz="1050" dirty="0"/>
+              <a:t>Elke week zicht op wat er gebeurd is en wat het opleverde.</a:t>
+            </a:r>
+            <a:endParaRPr lang="en-US" sz="950" dirty="0"/>
+          </a:p>
+        </p:txBody>
+      </p:sp>
+      <p:sp>
+        <p:nvSpPr>
+          <p:cNvPr id="25" name="Shape 19"/>
+          <p:cNvSpPr/>
+          <p:nvPr/>
+        </p:nvSpPr>
+        <p:spPr>
+          <a:xfrm>
+            <a:off x="609598" y="4140190"/>
+            <a:ext cx="5232387" cy="0"/>
+          </a:xfrm>
+          <a:prstGeom prst="line">
+            <a:avLst/>
+          </a:prstGeom>
+          <a:noFill/>
+          <a:ln w="6350">
+            <a:solidFill>
+              <a:srgbClr val="C9C2B2"/>
+            </a:solidFill>
+            <a:prstDash val="solid"/>
+          </a:ln>
+        </p:spPr>
+      </p:sp>
+      <p:sp>
+        <p:nvSpPr>
+          <p:cNvPr id="26" name="Shape 20"/>
+          <p:cNvSpPr/>
+          <p:nvPr/>
+        </p:nvSpPr>
+        <p:spPr>
+          <a:xfrm>
+            <a:off x="609598" y="4241789"/>
+            <a:ext cx="253999" cy="253999"/>
+          </a:xfrm>
+          <a:prstGeom prst="roundRect">
+            <a:avLst>
+              <a:gd name="adj" fmla="val 25000"/>
+            </a:avLst>
+          </a:prstGeom>
+          <a:solidFill>
+            <a:srgbClr val="DDEBF3"/>
+          </a:solidFill>
+          <a:ln/>
+        </p:spPr>
+      </p:sp>
+      <p:pic>
+        <p:nvPicPr>
+          <p:cNvPr id="27" name="Image 4" descr="preencoded.png">    </p:cNvPr>
+          <p:cNvPicPr>
+            <a:picLocks noChangeAspect="1"/>
+          </p:cNvPicPr>
+          <p:nvPr/>
+        </p:nvPicPr>
+        <p:blipFill>
+          <a:blip r:embed="rId5"/>
+          <a:stretch>
+            <a:fillRect/>
+          </a:stretch>
+        </p:blipFill>
+        <p:spPr>
+          <a:xfrm>
+            <a:off x="666748" y="4298939"/>
+            <a:ext cx="139700" cy="139700"/>
+          </a:xfrm>
+          <a:prstGeom prst="rect">
+            <a:avLst/>
+          </a:prstGeom>
+        </p:spPr>
+      </p:pic>
+      <p:sp>
+        <p:nvSpPr>
+          <p:cNvPr id="28" name="Text 21"/>
+          <p:cNvSpPr txBox="1"/>
+          <p:nvPr/>
+        </p:nvSpPr>
+        <p:spPr>
+          <a:xfrm>
+            <a:off x="1015997" y="4216389"/>
+            <a:ext cx="4825988" cy="228599"/>
+          </a:xfrm>
+          <a:prstGeom prst="rect">
+            <a:avLst/>
+          </a:prstGeom>
+          <a:noFill/>
+          <a:ln/>
+        </p:spPr>
+        <p:txBody>
+          <a:bodyPr wrap="square" lIns="0" tIns="0" rIns="0" bIns="0" rtlCol="0" anchor="ctr"/>
+          <a:lstStyle/>
+          <a:p>
+            <a:pPr indent="0" marL="0">
+              <a:buNone/>
+            </a:pPr>
+            <a:r>
+              <a:rPr lang="en-US" sz="1200" b="1" dirty="0">
+                <a:solidFill>
+                  <a:srgbClr val="1C2230"/>
+                </a:solidFill>
+                <a:latin typeface="Arial" pitchFamily="34" charset="0"/>
+                <a:ea typeface="Arial" pitchFamily="34" charset="-122"/>
+                <a:cs typeface="Arial" pitchFamily="34" charset="-120"/>
+              </a:rPr>
+              <a:t>Jullie naam, onze uitvoering</a:t>
+            </a:r>
+            <a:endParaRPr lang="en-US" sz="1200" dirty="0"/>
+          </a:p>
+        </p:txBody>
+      </p:sp>
+      <p:sp>
+        <p:nvSpPr>
+          <p:cNvPr id="29" name="Text 22"/>
+          <p:cNvSpPr txBox="1"/>
+          <p:nvPr/>
+        </p:nvSpPr>
+        <p:spPr>
+          <a:xfrm>
+            <a:off x="1015997" y="4457689"/>
+            <a:ext cx="4825988" cy="355599"/>
+          </a:xfrm>
+          <a:prstGeom prst="rect">
+            <a:avLst/>
+          </a:prstGeom>
+          <a:noFill/>
+          <a:ln/>
+        </p:spPr>
+        <p:txBody>
+          <a:bodyPr wrap="square" lIns="0" tIns="0" rIns="0" bIns="0" rtlCol="0" anchor="t"/>
+          <a:lstStyle/>
+          <a:p>
+            <a:pPr indent="0" marL="0">
+              <a:lnSpc>
+                <a:spcPct val="130000"/>
+              </a:lnSpc>
+              <a:buNone/>
+            </a:pPr>
+            <a:r>
+              <a:rPr lang="en-US" sz="950" dirty="0">
+                <a:solidFill>
+                  <a:srgbClr val="6F6A5C"/>
+                </a:solidFill>
+                <a:latin typeface="Arial" pitchFamily="34" charset="0"/>
+                <a:ea typeface="Arial" pitchFamily="34" charset="-122"/>
+                <a:cs typeface="Arial" pitchFamily="34" charset="-120"/>
+              </a:rPr>
+              <a:t>Regionaal nummer en jullie stijl, wij voeren uit.</a:t>
+            </a:r>
+            <a:endParaRPr lang="en-US" sz="950" dirty="0"/>
+          </a:p>
+        </p:txBody>
+      </p:sp>
+      <p:sp>
+        <p:nvSpPr>
+          <p:cNvPr id="30" name="Shape 23"/>
+          <p:cNvSpPr/>
+          <p:nvPr/>
+        </p:nvSpPr>
+        <p:spPr>
+          <a:xfrm>
+            <a:off x="6349984" y="4140190"/>
+            <a:ext cx="5232387" cy="0"/>
+          </a:xfrm>
+          <a:prstGeom prst="line">
+            <a:avLst/>
+          </a:prstGeom>
+          <a:noFill/>
+          <a:ln w="6350">
+            <a:solidFill>
+              <a:srgbClr val="C9C2B2"/>
+            </a:solidFill>
+            <a:prstDash val="solid"/>
+          </a:ln>
+        </p:spPr>
+      </p:sp>
+      <p:sp>
+        <p:nvSpPr>
+          <p:cNvPr id="31" name="Shape 24"/>
+          <p:cNvSpPr/>
+          <p:nvPr/>
+        </p:nvSpPr>
+        <p:spPr>
+          <a:xfrm>
+            <a:off x="6349984" y="4241789"/>
+            <a:ext cx="253999" cy="253999"/>
+          </a:xfrm>
+          <a:prstGeom prst="roundRect">
+            <a:avLst>
+              <a:gd name="adj" fmla="val 25000"/>
+            </a:avLst>
+          </a:prstGeom>
+          <a:solidFill>
+            <a:srgbClr val="DDEBF3"/>
+          </a:solidFill>
+          <a:ln/>
+        </p:spPr>
+      </p:sp>
+      <p:pic>
+        <p:nvPicPr>
+          <p:cNvPr id="32" name="Image 5" descr="preencoded.png">    </p:cNvPr>
+          <p:cNvPicPr>
+            <a:picLocks noChangeAspect="1"/>
+          </p:cNvPicPr>
+          <p:nvPr/>
+        </p:nvPicPr>
+        <p:blipFill>
+          <a:blip r:embed="rId6"/>
+          <a:stretch>
+            <a:fillRect/>
+          </a:stretch>
+        </p:blipFill>
+        <p:spPr>
+          <a:xfrm>
+            <a:off x="6407134" y="4298939"/>
+            <a:ext cx="139700" cy="139700"/>
+          </a:xfrm>
+          <a:prstGeom prst="rect">
+            <a:avLst/>
+          </a:prstGeom>
+        </p:spPr>
+      </p:pic>
+      <p:sp>
+        <p:nvSpPr>
+          <p:cNvPr id="33" name="Text 25"/>
+          <p:cNvSpPr txBox="1"/>
+          <p:nvPr/>
+        </p:nvSpPr>
+        <p:spPr>
+          <a:xfrm>
+            <a:off x="6756383" y="4216389"/>
+            <a:ext cx="4825988" cy="228599"/>
+          </a:xfrm>
+          <a:prstGeom prst="rect">
+            <a:avLst/>
+          </a:prstGeom>
+          <a:noFill/>
+          <a:ln/>
+        </p:spPr>
+        <p:txBody>
+          <a:bodyPr wrap="square" lIns="0" tIns="0" rIns="0" bIns="0" rtlCol="0" anchor="ctr"/>
+          <a:lstStyle/>
+          <a:p>
+            <a:pPr indent="0" marL="0">
+              <a:buNone/>
+            </a:pPr>
+            <a:r>
+              <a:rPr lang="en-US" sz="1200" b="1" dirty="0">
+                <a:solidFill>
+                  <a:srgbClr val="1C2230"/>
+                </a:solidFill>
+                <a:latin typeface="Arial" pitchFamily="34" charset="0"/>
+                <a:ea typeface="Arial" pitchFamily="34" charset="-122"/>
+                <a:cs typeface="Arial" pitchFamily="34" charset="-120"/>
+              </a:rPr>
+              <a:t>Gegevens veilig</a:t>
+            </a:r>
+            <a:endParaRPr lang="en-US" sz="1200" dirty="0"/>
+          </a:p>
+        </p:txBody>
+      </p:sp>
+      <p:sp>
+        <p:nvSpPr>
+          <p:cNvPr id="34" name="Text 26"/>
+          <p:cNvSpPr txBox="1"/>
+          <p:nvPr/>
+        </p:nvSpPr>
+        <p:spPr>
+          <a:xfrm>
+            <a:off x="6756383" y="4457689"/>
+            <a:ext cx="4825988" cy="355599"/>
+          </a:xfrm>
+          <a:prstGeom prst="rect">
+            <a:avLst/>
+          </a:prstGeom>
+          <a:noFill/>
+          <a:ln/>
+        </p:spPr>
+        <p:txBody>
+          <a:bodyPr wrap="square" lIns="0" tIns="0" rIns="0" bIns="0" rtlCol="0" anchor="t"/>
+          <a:lstStyle/>
+          <a:p>
+            <a:pPr indent="0" marL="0">
+              <a:lnSpc>
+                <a:spcPct val="130000"/>
+              </a:lnSpc>
+              <a:buNone/>
+            </a:pPr>
+            <a:r>
+              <a:rPr lang="en-US" sz="950" dirty="0">
+                <a:solidFill>
+                  <a:srgbClr val="6F6A5C"/>
+                </a:solidFill>
+                <a:latin typeface="Arial" pitchFamily="34" charset="0"/>
+                <a:ea typeface="Arial" pitchFamily="34" charset="-122"/>
+                <a:cs typeface="Arial" pitchFamily="34" charset="-120"/>
+              </a:rPr>
+              <a:t>Vastgelegd in een verwerkersovereenkomst.</a:t>
+            </a:r>
+            <a:endParaRPr lang="en-US" sz="950" dirty="0"/>
+          </a:p>
+        </p:txBody>
+      </p:sp>
+      <p:sp>
+        <p:nvSpPr>
+          <p:cNvPr id="35" name="Shape 27"/>
+          <p:cNvSpPr/>
+          <p:nvPr/>
+        </p:nvSpPr>
+        <p:spPr>
+          <a:xfrm>
+            <a:off x="609598" y="4851388"/>
+            <a:ext cx="5232387" cy="0"/>
+          </a:xfrm>
+          <a:prstGeom prst="line">
+            <a:avLst/>
+          </a:prstGeom>
+          <a:noFill/>
+          <a:ln w="6350">
+            <a:solidFill>
+              <a:srgbClr val="C9C2B2"/>
+            </a:solidFill>
+            <a:prstDash val="solid"/>
+          </a:ln>
+        </p:spPr>
+      </p:sp>
+      <p:sp>
+        <p:nvSpPr>
+          <p:cNvPr id="36" name="Shape 28"/>
+          <p:cNvSpPr/>
+          <p:nvPr/>
+        </p:nvSpPr>
+        <p:spPr>
+          <a:xfrm>
+            <a:off x="609598" y="4952988"/>
+            <a:ext cx="253999" cy="253999"/>
+          </a:xfrm>
+          <a:prstGeom prst="roundRect">
+            <a:avLst>
+              <a:gd name="adj" fmla="val 25000"/>
+            </a:avLst>
+          </a:prstGeom>
+          <a:solidFill>
+            <a:srgbClr val="DDEBF3"/>
+          </a:solidFill>
+          <a:ln/>
+        </p:spPr>
+      </p:sp>
+      <p:pic>
+        <p:nvPicPr>
+          <p:cNvPr id="37" name="Image 6" descr="preencoded.png">    </p:cNvPr>
+          <p:cNvPicPr>
+            <a:picLocks noChangeAspect="1"/>
+          </p:cNvPicPr>
+          <p:nvPr/>
+        </p:nvPicPr>
+        <p:blipFill>
+          <a:blip r:embed="rId7"/>
+          <a:stretch>
+            <a:fillRect/>
+          </a:stretch>
+        </p:blipFill>
+        <p:spPr>
+          <a:xfrm>
+            <a:off x="666748" y="5010137"/>
+            <a:ext cx="139700" cy="139700"/>
+          </a:xfrm>
+          <a:prstGeom prst="rect">
+            <a:avLst/>
+          </a:prstGeom>
+        </p:spPr>
+      </p:pic>
+      <p:sp>
+        <p:nvSpPr>
+          <p:cNvPr id="38" name="Text 29"/>
+          <p:cNvSpPr txBox="1"/>
+          <p:nvPr/>
+        </p:nvSpPr>
+        <p:spPr>
+          <a:xfrm>
+            <a:off x="1015997" y="4927588"/>
+            <a:ext cx="4825988" cy="228599"/>
+          </a:xfrm>
+          <a:prstGeom prst="rect">
+            <a:avLst/>
+          </a:prstGeom>
+          <a:noFill/>
+          <a:ln/>
+        </p:spPr>
+        <p:txBody>
+          <a:bodyPr wrap="square" lIns="0" tIns="0" rIns="0" bIns="0" rtlCol="0" anchor="ctr"/>
+          <a:lstStyle/>
+          <a:p>
+            <a:pPr indent="0" marL="0">
+              <a:buNone/>
+            </a:pPr>
+            <a:r>
+              <a:rPr lang="en-US" sz="1200" b="1" dirty="0">
+                <a:solidFill>
+                  <a:srgbClr val="1C2230"/>
+                </a:solidFill>
+                <a:latin typeface="Arial" pitchFamily="34" charset="0"/>
+                <a:ea typeface="Arial" pitchFamily="34" charset="-122"/>
+                <a:cs typeface="Arial" pitchFamily="34" charset="-120"/>
+              </a:rPr>
+              <a:t>Evaluatie om de week</a:t>
+            </a:r>
+            <a:endParaRPr lang="en-US" sz="1200" dirty="0"/>
+          </a:p>
+        </p:txBody>
+      </p:sp>
+      <p:sp>
+        <p:nvSpPr>
+          <p:cNvPr id="39" name="Text 30"/>
+          <p:cNvSpPr txBox="1"/>
+          <p:nvPr/>
+        </p:nvSpPr>
+        <p:spPr>
+          <a:xfrm>
+            <a:off x="1015997" y="5168887"/>
+            <a:ext cx="4825988" cy="355599"/>
+          </a:xfrm>
+          <a:prstGeom prst="rect">
+            <a:avLst/>
+          </a:prstGeom>
+          <a:noFill/>
+          <a:ln/>
+        </p:spPr>
+        <p:txBody>
+          <a:bodyPr wrap="square" lIns="0" tIns="0" rIns="0" bIns="0" rtlCol="0" anchor="t"/>
+          <a:lstStyle/>
+          <a:p>
+            <a:pPr indent="0" marL="0">
+              <a:lnSpc>
+                <a:spcPct val="130000"/>
+              </a:lnSpc>
+              <a:buNone/>
+            </a:pPr>
+            <a:r>
+              <a:rPr lang="en-US" sz="950" dirty="0">
+                <a:solidFill>
+                  <a:srgbClr val="6F6A5C"/>
+                </a:solidFill>
+                <a:latin typeface="Arial" pitchFamily="34" charset="0"/>
+                <a:ea typeface="Arial" pitchFamily="34" charset="-122"/>
+                <a:cs typeface="Arial" pitchFamily="34" charset="-120"/>
+              </a:rPr>
+              <a:t>Bij twijfel om tafel en bijsturen.</a:t>
+            </a:r>
+            <a:endParaRPr lang="en-US" sz="950" dirty="0"/>
+          </a:p>
+        </p:txBody>
+      </p:sp>
+      <p:sp>
+        <p:nvSpPr>
+          <p:cNvPr id="40" name="Shape 31"/>
+          <p:cNvSpPr/>
+          <p:nvPr/>
+        </p:nvSpPr>
+        <p:spPr>
+          <a:xfrm>
+            <a:off x="6349984" y="4851388"/>
+            <a:ext cx="5232387" cy="0"/>
+          </a:xfrm>
+          <a:prstGeom prst="line">
+            <a:avLst/>
+          </a:prstGeom>
+          <a:noFill/>
+          <a:ln w="6350">
+            <a:solidFill>
+              <a:srgbClr val="C9C2B2"/>
+            </a:solidFill>
+            <a:prstDash val="solid"/>
+          </a:ln>
+        </p:spPr>
+      </p:sp>
+      <p:sp>
+        <p:nvSpPr>
+          <p:cNvPr id="41" name="Shape 32"/>
+          <p:cNvSpPr/>
+          <p:nvPr/>
+        </p:nvSpPr>
+        <p:spPr>
+          <a:xfrm>
+            <a:off x="6349984" y="4952988"/>
+            <a:ext cx="253999" cy="253999"/>
+          </a:xfrm>
+          <a:prstGeom prst="roundRect">
+            <a:avLst>
+              <a:gd name="adj" fmla="val 25000"/>
+            </a:avLst>
+          </a:prstGeom>
+          <a:solidFill>
+            <a:srgbClr val="DDEBF3"/>
+          </a:solidFill>
+          <a:ln/>
+        </p:spPr>
+      </p:sp>
+      <p:pic>
+        <p:nvPicPr>
+          <p:cNvPr id="42" name="Image 7" descr="preencoded.png">    </p:cNvPr>
+          <p:cNvPicPr>
+            <a:picLocks noChangeAspect="1"/>
+          </p:cNvPicPr>
+          <p:nvPr/>
+        </p:nvPicPr>
+        <p:blipFill>
+          <a:blip r:embed="rId8"/>
+          <a:stretch>
+            <a:fillRect/>
+          </a:stretch>
+        </p:blipFill>
+        <p:spPr>
+          <a:xfrm>
+            <a:off x="6407134" y="5010137"/>
+            <a:ext cx="139700" cy="139700"/>
+          </a:xfrm>
+          <a:prstGeom prst="rect">
+            <a:avLst/>
+          </a:prstGeom>
+        </p:spPr>
+      </p:pic>
+      <p:sp>
+        <p:nvSpPr>
+          <p:cNvPr id="43" name="Text 33"/>
+          <p:cNvSpPr txBox="1"/>
+          <p:nvPr/>
+        </p:nvSpPr>
+        <p:spPr>
+          <a:xfrm>
+            <a:off x="6756383" y="4927588"/>
+            <a:ext cx="4825988" cy="228599"/>
+          </a:xfrm>
+          <a:prstGeom prst="rect">
+            <a:avLst/>
+          </a:prstGeom>
+          <a:noFill/>
+          <a:ln/>
+        </p:spPr>
+        <p:txBody>
+          <a:bodyPr wrap="square" lIns="0" tIns="0" rIns="0" bIns="0" rtlCol="0" anchor="ctr"/>
+          <a:lstStyle/>
+          <a:p>
+            <a:pPr indent="0" marL="0">
+              <a:buNone/>
+            </a:pPr>
+            <a:r>
+              <a:rPr lang="en-US" sz="1200" b="1" dirty="0">
+                <a:solidFill>
+                  <a:srgbClr val="1C2230"/>
+                </a:solidFill>
+                <a:latin typeface="Arial" pitchFamily="34" charset="0"/>
+                <a:ea typeface="Arial" pitchFamily="34" charset="-122"/>
+                <a:cs typeface="Arial" pitchFamily="34" charset="-120"/>
+              </a:rPr>
+              <a:t>Alles op papier</a:t>
+            </a:r>
+            <a:endParaRPr lang="en-US" sz="1200" dirty="0"/>
+          </a:p>
+        </p:txBody>
+      </p:sp>
+      <p:sp>
+        <p:nvSpPr>
+          <p:cNvPr id="44" name="Text 34"/>
+          <p:cNvSpPr txBox="1"/>
+          <p:nvPr/>
+        </p:nvSpPr>
+        <p:spPr>
+          <a:xfrm>
+            <a:off x="6756383" y="5168887"/>
+            <a:ext cx="4825988" cy="355599"/>
+          </a:xfrm>
+          <a:prstGeom prst="rect">
+            <a:avLst/>
+          </a:prstGeom>
+          <a:noFill/>
+          <a:ln/>
+        </p:spPr>
+        <p:txBody>
+          <a:bodyPr wrap="square" lIns="0" tIns="0" rIns="0" bIns="0" rtlCol="0" anchor="t"/>
+          <a:lstStyle/>
+          <a:p>
+            <a:pPr indent="0" marL="0">
+              <a:lnSpc>
+                <a:spcPct val="130000"/>
+              </a:lnSpc>
+              <a:buNone/>
+            </a:pPr>
+            <a:r>
+              <a:rPr lang="en-US" sz="950" dirty="0">
+                <a:solidFill>
+                  <a:srgbClr val="6F6A5C"/>
+                </a:solidFill>
+                <a:latin typeface="Arial" pitchFamily="34" charset="0"/>
+                <a:ea typeface="Arial" pitchFamily="34" charset="-122"/>
+                <a:cs typeface="Arial" pitchFamily="34" charset="-120"/>
+              </a:rPr>
+              <a:t>Vastgelegd in een korte samenwerkingsovereenkomst.</a:t>
+            </a:r>
+            <a:endParaRPr lang="en-US" sz="950" dirty="0"/>
           </a:p>
         </p:txBody>
       </p:sp>

--- a/output/LINK. kennismaking.pptx
+++ b/output/LINK. kennismaking.pptx
@@ -8733,7 +8733,7 @@
                 <a:ea typeface="Arial" pitchFamily="34" charset="-122"/>
                 <a:cs typeface="Arial" pitchFamily="34" charset="-120"/>
               </a:rPr>
-              <a:t>Jullie kopen geen uren, maar </a:t>
+              <a:t>Je koopt geen uren. Je </a:t>
             </a:r>
             <a:pPr algn="l" indent="0" marL="0">
               <a:lnSpc>
@@ -8750,7 +8750,7 @@
                 <a:ea typeface="Georgia" pitchFamily="34" charset="-122"/>
                 <a:cs typeface="Georgia" pitchFamily="34" charset="-120"/>
               </a:rPr>
-              <a:t>afspraken</a:t>
+              <a:t>investeert</a:t>
             </a:r>
             <a:pPr algn="l" indent="0" marL="0">
               <a:lnSpc>
@@ -8767,7 +8767,7 @@
                 <a:ea typeface="Arial" pitchFamily="34" charset="-122"/>
                 <a:cs typeface="Arial" pitchFamily="34" charset="-120"/>
               </a:rPr>
-              <a:t>.</a:t>
+              <a:t> in afspraken in de agenda.</a:t>
             </a:r>
             <a:endParaRPr lang="en-US" sz="3200" dirty="0"/>
           </a:p>

--- a/output/LINK. kennismaking.pptx
+++ b/output/LINK. kennismaking.pptx
@@ -5570,7 +5570,7 @@
                 <a:ea typeface="Arial" pitchFamily="34" charset="-122"/>
                 <a:cs typeface="Arial" pitchFamily="34" charset="-120"/>
               </a:rPr>
-              <a:t>Vanaf de eerste maandag na de kick-off bellen we dagelijks. Elke afspraak krijgt een bevestigingsmail naar de prospect en een overdracht met context naar jullie.</a:t>
+              <a:t>Vanaf de eerste maandag na de kick-off gaan we bellen, op de dagen en dagdelen die in onze data het beste werken voor jullie branche. Elke afspraak krijgt een bevestigingsmail naar de prospect en een overdracht met context naar jullie.</a:t>
             </a:r>
             <a:endParaRPr lang="en-US" sz="900" dirty="0"/>
           </a:p>
@@ -7775,7 +7775,7 @@
                 <a:ea typeface="Arial" pitchFamily="34" charset="-122"/>
                 <a:cs typeface="Arial" pitchFamily="34" charset="-120"/>
               </a:rPr>
-              <a:t>Elke werkdag bellen met een regionaal nummer op jullie naam. Elke week een rapportage, om de week evaluatie. Gaat het makkelijker of juist moeizamer, dan zitten we eerder om tafel en schakelen we direct.</a:t>
+              <a:t>We bellen op de dagen en dagdelen die in onze data het beste werken voor jullie branche, met een regionaal nummer op jullie naam. Elke week een rapportage, om de week evaluatie. Gaat het makkelijker of juist moeizamer, dan zitten we eerder om tafel en schakelen we direct.</a:t>
             </a:r>
             <a:endParaRPr lang="en-US" sz="875" dirty="0"/>
           </a:p>
@@ -8363,7 +8363,7 @@
                 <a:ea typeface="Arial" pitchFamily="34" charset="-122"/>
                 <a:cs typeface="Arial" pitchFamily="34" charset="-120"/>
               </a:rPr>
-              <a:t>Twaalf weken elke werkdag bellen</a:t>
+              <a:t>Twaalf weken bellen op de beste momenten</a:t>
             </a:r>
             <a:endParaRPr lang="en-US" sz="900" dirty="0"/>
           </a:p>

--- a/output/LINK. kennismaking.pptx
+++ b/output/LINK. kennismaking.pptx
@@ -7733,7 +7733,7 @@
                 <a:ea typeface="Arial" pitchFamily="34" charset="-122"/>
                 <a:cs typeface="Arial" pitchFamily="34" charset="-120"/>
               </a:rPr>
-              <a:t>Twaalf weken bellen</a:t>
+              <a:t>Looptijd van twaalf weken</a:t>
             </a:r>
             <a:endParaRPr lang="en-US" sz="1150" dirty="0"/>
           </a:p>
@@ -7775,7 +7775,7 @@
                 <a:ea typeface="Arial" pitchFamily="34" charset="-122"/>
                 <a:cs typeface="Arial" pitchFamily="34" charset="-120"/>
               </a:rPr>
-              <a:t>We bellen op de dagen en dagdelen die in onze data het beste werken voor jullie branche, met een regionaal nummer op jullie naam. Elke week een rapportage, om de week evaluatie. Gaat het makkelijker of juist moeizamer, dan zitten we eerder om tafel en schakelen we direct.</a:t>
+              <a:t>De pilot loopt twaalf weken. We bellen daarin op de dagen en dagdelen die in onze data het beste werken voor jullie branche, met een regionaal nummer op jullie naam. Elke week een rapportage, om de week evaluatie.</a:t>
             </a:r>
             <a:endParaRPr lang="en-US" sz="875" dirty="0"/>
           </a:p>
@@ -8363,7 +8363,7 @@
                 <a:ea typeface="Arial" pitchFamily="34" charset="-122"/>
                 <a:cs typeface="Arial" pitchFamily="34" charset="-120"/>
               </a:rPr>
-              <a:t>Twaalf weken bellen op de beste momenten</a:t>
+              <a:t>Beldagen binnen een looptijd van 12 weken</a:t>
             </a:r>
             <a:endParaRPr lang="en-US" sz="900" dirty="0"/>
           </a:p>

--- a/output/LINK. kennismaking.pptx
+++ b/output/LINK. kennismaking.pptx
@@ -3930,7 +3930,7 @@
                 <a:ea typeface="Arial" pitchFamily="34" charset="-122"/>
                 <a:cs typeface="Arial" pitchFamily="34" charset="-120"/>
               </a:rPr>
-              <a:t>Eén persoon die jullie campagne kent, van script tot rapportage.</a:t>
+              <a:t>Eén persoon die jullie campagne kent, van kick-off tot rapportage.</a:t>
             </a:r>
             <a:endParaRPr lang="en-US" sz="950" dirty="0"/>
           </a:p>
@@ -5403,7 +5403,7 @@
                 <a:ea typeface="Arial" pitchFamily="34" charset="-122"/>
                 <a:cs typeface="Arial" pitchFamily="34" charset="-120"/>
               </a:rPr>
-              <a:t>Samen scherp: doelgroep, beslisser, propositie, bezwaren en wat een goede afspraak voor jullie is. Wij schrijven het belscript, jullie keuren goed.</a:t>
+              <a:t>Samen scherp: doelgroep, beslisser, propositie, bezwaren en wat een goede afspraak voor jullie is. Wij leggen de USP's en de opbouw van het gesprek vast, jullie keuren goed.</a:t>
             </a:r>
             <a:endParaRPr lang="en-US" sz="900" dirty="0"/>
           </a:p>
@@ -7389,7 +7389,7 @@
                 <a:ea typeface="Arial" pitchFamily="34" charset="-122"/>
                 <a:cs typeface="Arial" pitchFamily="34" charset="-120"/>
               </a:rPr>
-              <a:t>Kick-off en belscript</a:t>
+              <a:t>Kick-off en USP's</a:t>
             </a:r>
             <a:endParaRPr lang="en-US" sz="1150" dirty="0"/>
           </a:p>
@@ -7431,7 +7431,7 @@
                 <a:ea typeface="Arial" pitchFamily="34" charset="-122"/>
                 <a:cs typeface="Arial" pitchFamily="34" charset="-120"/>
               </a:rPr>
-              <a:t>Samen scherp wat we gaan vertellen en bij wie. Wij schrijven het belscript, jullie keuren het goed.</a:t>
+              <a:t>Samen scherp wat we gaan vertellen en bij wie. Wij leggen de USP's vast, jullie keuren ze goed.</a:t>
             </a:r>
             <a:endParaRPr lang="en-US" sz="875" dirty="0"/>
           </a:p>
@@ -8150,7 +8150,7 @@
         <p:spPr>
           <a:xfrm>
             <a:off x="3733791" y="5245087"/>
-            <a:ext cx="3555991" cy="215899"/>
+            <a:ext cx="3746491" cy="215899"/>
           </a:xfrm>
           <a:prstGeom prst="rect">
             <a:avLst/>
@@ -8174,7 +8174,7 @@
                 <a:ea typeface="Arial" pitchFamily="34" charset="-122"/>
                 <a:cs typeface="Arial" pitchFamily="34" charset="-120"/>
               </a:rPr>
-              <a:t>Kick-off en belscript</a:t>
+              <a:t>Kick-off en USP's</a:t>
             </a:r>
             <a:endParaRPr lang="en-US" sz="900" dirty="0"/>
           </a:p>
@@ -8196,7 +8196,7 @@
         </p:blipFill>
         <p:spPr>
           <a:xfrm>
-            <a:off x="7340582" y="5276837"/>
+            <a:off x="7556481" y="5276837"/>
             <a:ext cx="127000" cy="127000"/>
           </a:xfrm>
           <a:prstGeom prst="rect">
@@ -8212,8 +8212,8 @@
         </p:nvSpPr>
         <p:spPr>
           <a:xfrm>
-            <a:off x="7543781" y="5245087"/>
-            <a:ext cx="3555991" cy="215899"/>
+            <a:off x="7759681" y="5245087"/>
+            <a:ext cx="3746491" cy="215899"/>
           </a:xfrm>
           <a:prstGeom prst="rect">
             <a:avLst/>
@@ -8276,7 +8276,7 @@
         <p:spPr>
           <a:xfrm>
             <a:off x="3733791" y="5499086"/>
-            <a:ext cx="3555991" cy="215899"/>
+            <a:ext cx="3746491" cy="215899"/>
           </a:xfrm>
           <a:prstGeom prst="rect">
             <a:avLst/>
@@ -8322,7 +8322,7 @@
         </p:blipFill>
         <p:spPr>
           <a:xfrm>
-            <a:off x="7340582" y="5530836"/>
+            <a:off x="7556481" y="5530836"/>
             <a:ext cx="127000" cy="127000"/>
           </a:xfrm>
           <a:prstGeom prst="rect">
@@ -8338,8 +8338,8 @@
         </p:nvSpPr>
         <p:spPr>
           <a:xfrm>
-            <a:off x="7543781" y="5499086"/>
-            <a:ext cx="3555991" cy="215899"/>
+            <a:off x="7759681" y="5499086"/>
+            <a:ext cx="3746491" cy="215899"/>
           </a:xfrm>
           <a:prstGeom prst="rect">
             <a:avLst/>
@@ -8402,7 +8402,7 @@
         <p:spPr>
           <a:xfrm>
             <a:off x="3733791" y="5753086"/>
-            <a:ext cx="3555991" cy="215899"/>
+            <a:ext cx="3746491" cy="215899"/>
           </a:xfrm>
           <a:prstGeom prst="rect">
             <a:avLst/>
@@ -8448,7 +8448,7 @@
         </p:blipFill>
         <p:spPr>
           <a:xfrm>
-            <a:off x="7340582" y="5784836"/>
+            <a:off x="7556481" y="5784836"/>
             <a:ext cx="127000" cy="127000"/>
           </a:xfrm>
           <a:prstGeom prst="rect">
@@ -8464,8 +8464,8 @@
         </p:nvSpPr>
         <p:spPr>
           <a:xfrm>
-            <a:off x="7543781" y="5753086"/>
-            <a:ext cx="3555991" cy="215899"/>
+            <a:off x="7759681" y="5753086"/>
+            <a:ext cx="3746491" cy="215899"/>
           </a:xfrm>
           <a:prstGeom prst="rect">
             <a:avLst/>
@@ -10197,7 +10197,7 @@
                 <a:ea typeface="Arial" pitchFamily="34" charset="-122"/>
                 <a:cs typeface="Arial" pitchFamily="34" charset="-120"/>
               </a:rPr>
-              <a:t>Goedkeuring belscript</a:t>
+              <a:t>Goedkeuring op de USP's</a:t>
             </a:r>
             <a:endParaRPr lang="en-US" sz="1450" dirty="0"/>
           </a:p>
